--- a/Docs/Workload Report User Guide.pptx
+++ b/Docs/Workload Report User Guide.pptx
@@ -5,14 +5,22 @@
     <p:sldMasterId id="2147483720" r:id="rId4"/>
   </p:sldMasterIdLst>
   <p:notesMasterIdLst>
-    <p:notesMasterId r:id="rId10"/>
+    <p:notesMasterId r:id="rId18"/>
   </p:notesMasterIdLst>
   <p:sldIdLst>
     <p:sldId id="304" r:id="rId5"/>
     <p:sldId id="306" r:id="rId6"/>
-    <p:sldId id="315" r:id="rId7"/>
-    <p:sldId id="342" r:id="rId8"/>
-    <p:sldId id="333" r:id="rId9"/>
+    <p:sldId id="343" r:id="rId7"/>
+    <p:sldId id="346" r:id="rId8"/>
+    <p:sldId id="344" r:id="rId9"/>
+    <p:sldId id="345" r:id="rId10"/>
+    <p:sldId id="349" r:id="rId11"/>
+    <p:sldId id="350" r:id="rId12"/>
+    <p:sldId id="342" r:id="rId13"/>
+    <p:sldId id="347" r:id="rId14"/>
+    <p:sldId id="315" r:id="rId15"/>
+    <p:sldId id="348" r:id="rId16"/>
+    <p:sldId id="333" r:id="rId17"/>
   </p:sldIdLst>
   <p:sldSz cx="9144000" cy="5143500" type="screen16x9"/>
   <p:notesSz cx="6858000" cy="9144000"/>
@@ -6577,21 +6585,38 @@
             <p:ph type="ctrTitle"/>
           </p:nvPr>
         </p:nvSpPr>
-        <p:spPr/>
+        <p:spPr>
+          <a:xfrm>
+            <a:off x="172557" y="869818"/>
+            <a:ext cx="8430423" cy="1313530"/>
+          </a:xfrm>
+        </p:spPr>
         <p:txBody>
           <a:bodyPr/>
           <a:lstStyle/>
           <a:p>
             <a:r>
-              <a:rPr lang="en-US"/>
-              <a:t>2026 </a:t>
+              <a:rPr lang="en-US" sz="6000">
+                <a:latin typeface="Calibri" panose="020F0502020204030204" pitchFamily="34" charset="0"/>
+                <a:ea typeface="Calibri" panose="020F0502020204030204" pitchFamily="34" charset="0"/>
+                <a:cs typeface="Calibri" panose="020F0502020204030204" pitchFamily="34" charset="0"/>
+              </a:rPr>
+              <a:t>GCMC</a:t>
             </a:r>
             <a:br>
-              <a:rPr lang="en-US"/>
+              <a:rPr lang="en-US" sz="4400">
+                <a:latin typeface="Calibri" panose="020F0502020204030204" pitchFamily="34" charset="0"/>
+                <a:ea typeface="Calibri" panose="020F0502020204030204" pitchFamily="34" charset="0"/>
+                <a:cs typeface="Calibri" panose="020F0502020204030204" pitchFamily="34" charset="0"/>
+              </a:rPr>
             </a:br>
             <a:r>
-              <a:rPr lang="en-US"/>
-              <a:t>VTAC campaign</a:t>
+              <a:rPr lang="en-US" sz="4400">
+                <a:latin typeface="Calibri" panose="020F0502020204030204" pitchFamily="34" charset="0"/>
+                <a:ea typeface="Calibri" panose="020F0502020204030204" pitchFamily="34" charset="0"/>
+                <a:cs typeface="Calibri" panose="020F0502020204030204" pitchFamily="34" charset="0"/>
+              </a:rPr>
+              <a:t>Workload report</a:t>
             </a:r>
           </a:p>
         </p:txBody>
@@ -6612,20 +6637,25 @@
             <p:ph type="subTitle" idx="1"/>
           </p:nvPr>
         </p:nvSpPr>
-        <p:spPr/>
+        <p:spPr>
+          <a:xfrm>
+            <a:off x="172557" y="2351241"/>
+            <a:ext cx="8430423" cy="1056952"/>
+          </a:xfrm>
+        </p:spPr>
         <p:txBody>
           <a:bodyPr/>
           <a:lstStyle/>
           <a:p>
             <a:r>
               <a:rPr lang="en-US"/>
-              <a:t>Global Content Marketing and Creative</a:t>
-            </a:r>
-          </a:p>
-          <a:p>
-            <a:r>
-              <a:rPr lang="en-US"/>
-              <a:t>Version 2 (R2) storyboarding</a:t>
+              <a:t>Usage and migration guide</a:t>
+            </a:r>
+          </a:p>
+          <a:p>
+            <a:r>
+              <a:rPr lang="en-US" sz="1000" b="0"/>
+              <a:t>For GCMC’s manager + functions teams (design, production and contents)</a:t>
             </a:r>
           </a:p>
         </p:txBody>
@@ -6634,6 +6664,836 @@
     <p:extLst>
       <p:ext uri="{BB962C8B-B14F-4D97-AF65-F5344CB8AC3E}">
         <p14:creationId xmlns:p14="http://schemas.microsoft.com/office/powerpoint/2010/main" val="2838075680"/>
+      </p:ext>
+    </p:extLst>
+  </p:cSld>
+  <p:clrMapOvr>
+    <a:masterClrMapping/>
+  </p:clrMapOvr>
+</p:sld>
+</file>
+
+<file path=ppt/slides/slide10.xml><?xml version="1.0" encoding="utf-8"?>
+<p:sld xmlns:a="http://schemas.openxmlformats.org/drawingml/2006/main" xmlns:r="http://schemas.openxmlformats.org/officeDocument/2006/relationships" xmlns:p="http://schemas.openxmlformats.org/presentationml/2006/main">
+  <p:cSld>
+    <p:spTree>
+      <p:nvGrpSpPr>
+        <p:cNvPr id="1" name="">
+          <a:extLst>
+            <a:ext uri="{FF2B5EF4-FFF2-40B4-BE49-F238E27FC236}">
+              <a16:creationId xmlns:a16="http://schemas.microsoft.com/office/drawing/2014/main" id="{DD34E61B-ACB8-A5D5-A5EB-2205A8B1F209}"/>
+            </a:ext>
+          </a:extLst>
+        </p:cNvPr>
+        <p:cNvGrpSpPr/>
+        <p:nvPr/>
+      </p:nvGrpSpPr>
+      <p:grpSpPr>
+        <a:xfrm>
+          <a:off x="0" y="0"/>
+          <a:ext cx="0" cy="0"/>
+          <a:chOff x="0" y="0"/>
+          <a:chExt cx="0" cy="0"/>
+        </a:xfrm>
+      </p:grpSpPr>
+      <p:sp>
+        <p:nvSpPr>
+          <p:cNvPr id="2" name="Title 1">
+            <a:extLst>
+              <a:ext uri="{FF2B5EF4-FFF2-40B4-BE49-F238E27FC236}">
+                <a16:creationId xmlns:a16="http://schemas.microsoft.com/office/drawing/2014/main" id="{9E686F15-86BD-9EF4-4270-D2E49F50F0F7}"/>
+              </a:ext>
+            </a:extLst>
+          </p:cNvPr>
+          <p:cNvSpPr>
+            <a:spLocks noGrp="1"/>
+          </p:cNvSpPr>
+          <p:nvPr>
+            <p:ph type="ctrTitle"/>
+          </p:nvPr>
+        </p:nvSpPr>
+        <p:spPr>
+          <a:xfrm>
+            <a:off x="172557" y="869818"/>
+            <a:ext cx="8430423" cy="1313530"/>
+          </a:xfrm>
+        </p:spPr>
+        <p:txBody>
+          <a:bodyPr/>
+          <a:lstStyle/>
+          <a:p>
+            <a:r>
+              <a:rPr lang="en-US" sz="6000">
+                <a:latin typeface="Calibri" panose="020F0502020204030204" pitchFamily="34" charset="0"/>
+                <a:ea typeface="Calibri" panose="020F0502020204030204" pitchFamily="34" charset="0"/>
+                <a:cs typeface="Calibri" panose="020F0502020204030204" pitchFamily="34" charset="0"/>
+              </a:rPr>
+              <a:t>GCMC</a:t>
+            </a:r>
+            <a:br>
+              <a:rPr lang="en-US" sz="4400">
+                <a:latin typeface="Calibri" panose="020F0502020204030204" pitchFamily="34" charset="0"/>
+                <a:ea typeface="Calibri" panose="020F0502020204030204" pitchFamily="34" charset="0"/>
+                <a:cs typeface="Calibri" panose="020F0502020204030204" pitchFamily="34" charset="0"/>
+              </a:rPr>
+            </a:br>
+            <a:r>
+              <a:rPr lang="en-US" sz="4400">
+                <a:latin typeface="Calibri" panose="020F0502020204030204" pitchFamily="34" charset="0"/>
+                <a:ea typeface="Calibri" panose="020F0502020204030204" pitchFamily="34" charset="0"/>
+                <a:cs typeface="Calibri" panose="020F0502020204030204" pitchFamily="34" charset="0"/>
+              </a:rPr>
+              <a:t>Workload report</a:t>
+            </a:r>
+          </a:p>
+        </p:txBody>
+      </p:sp>
+      <p:sp>
+        <p:nvSpPr>
+          <p:cNvPr id="3" name="Subtitle 2">
+            <a:extLst>
+              <a:ext uri="{FF2B5EF4-FFF2-40B4-BE49-F238E27FC236}">
+                <a16:creationId xmlns:a16="http://schemas.microsoft.com/office/drawing/2014/main" id="{45BBFB78-2D46-DC9F-A78D-7D6373421AF1}"/>
+              </a:ext>
+            </a:extLst>
+          </p:cNvPr>
+          <p:cNvSpPr>
+            <a:spLocks noGrp="1"/>
+          </p:cNvSpPr>
+          <p:nvPr>
+            <p:ph type="subTitle" idx="1"/>
+          </p:nvPr>
+        </p:nvSpPr>
+        <p:spPr>
+          <a:xfrm>
+            <a:off x="172557" y="2351241"/>
+            <a:ext cx="8430423" cy="1056952"/>
+          </a:xfrm>
+        </p:spPr>
+        <p:txBody>
+          <a:bodyPr/>
+          <a:lstStyle/>
+          <a:p>
+            <a:r>
+              <a:rPr lang="en-US"/>
+              <a:t>Usage and migration guide</a:t>
+            </a:r>
+          </a:p>
+          <a:p>
+            <a:r>
+              <a:rPr lang="en-US" sz="1000" b="0"/>
+              <a:t>For GCMC’s manager + functions teams (design, production and contents)</a:t>
+            </a:r>
+          </a:p>
+        </p:txBody>
+      </p:sp>
+    </p:spTree>
+    <p:extLst>
+      <p:ext uri="{BB962C8B-B14F-4D97-AF65-F5344CB8AC3E}">
+        <p14:creationId xmlns:p14="http://schemas.microsoft.com/office/powerpoint/2010/main" val="2917102335"/>
+      </p:ext>
+    </p:extLst>
+  </p:cSld>
+  <p:clrMapOvr>
+    <a:masterClrMapping/>
+  </p:clrMapOvr>
+</p:sld>
+</file>
+
+<file path=ppt/slides/slide11.xml><?xml version="1.0" encoding="utf-8"?>
+<p:sld xmlns:a="http://schemas.openxmlformats.org/drawingml/2006/main" xmlns:r="http://schemas.openxmlformats.org/officeDocument/2006/relationships" xmlns:p="http://schemas.openxmlformats.org/presentationml/2006/main">
+  <p:cSld>
+    <p:spTree>
+      <p:nvGrpSpPr>
+        <p:cNvPr id="1" name=""/>
+        <p:cNvGrpSpPr/>
+        <p:nvPr/>
+      </p:nvGrpSpPr>
+      <p:grpSpPr>
+        <a:xfrm>
+          <a:off x="0" y="0"/>
+          <a:ext cx="0" cy="0"/>
+          <a:chOff x="0" y="0"/>
+          <a:chExt cx="0" cy="0"/>
+        </a:xfrm>
+      </p:grpSpPr>
+      <p:sp>
+        <p:nvSpPr>
+          <p:cNvPr id="5" name="Title 1">
+            <a:extLst>
+              <a:ext uri="{FF2B5EF4-FFF2-40B4-BE49-F238E27FC236}">
+                <a16:creationId xmlns:a16="http://schemas.microsoft.com/office/drawing/2014/main" id="{53C8DA78-30DA-0B1B-58F4-03825933247D}"/>
+              </a:ext>
+            </a:extLst>
+          </p:cNvPr>
+          <p:cNvSpPr>
+            <a:spLocks noGrp="1"/>
+          </p:cNvSpPr>
+          <p:nvPr>
+            <p:ph type="title"/>
+          </p:nvPr>
+        </p:nvSpPr>
+        <p:spPr>
+          <a:xfrm>
+            <a:off x="245329" y="299902"/>
+            <a:ext cx="1930436" cy="1694259"/>
+          </a:xfrm>
+        </p:spPr>
+        <p:txBody>
+          <a:bodyPr/>
+          <a:lstStyle/>
+          <a:p>
+            <a:r>
+              <a:rPr lang="en-US"/>
+              <a:t>VTAC campaign</a:t>
+            </a:r>
+            <a:br>
+              <a:rPr lang="en-US"/>
+            </a:br>
+            <a:r>
+              <a:rPr lang="en-US"/>
+              <a:t>scripts</a:t>
+            </a:r>
+            <a:br>
+              <a:rPr lang="en-US">
+                <a:cs typeface="Arial"/>
+              </a:rPr>
+            </a:br>
+            <a:r>
+              <a:rPr lang="en-US">
+                <a:cs typeface="Arial"/>
+              </a:rPr>
+              <a:t>30 second</a:t>
+            </a:r>
+            <a:br>
+              <a:rPr lang="en-US">
+                <a:cs typeface="Arial"/>
+              </a:rPr>
+            </a:br>
+            <a:br>
+              <a:rPr lang="en-US">
+                <a:cs typeface="Arial"/>
+              </a:rPr>
+            </a:br>
+            <a:endParaRPr lang="en-AU" sz="1800" b="0">
+              <a:cs typeface="Arial"/>
+            </a:endParaRPr>
+          </a:p>
+        </p:txBody>
+      </p:sp>
+      <p:sp>
+        <p:nvSpPr>
+          <p:cNvPr id="7" name="Text Placeholder 2">
+            <a:extLst>
+              <a:ext uri="{FF2B5EF4-FFF2-40B4-BE49-F238E27FC236}">
+                <a16:creationId xmlns:a16="http://schemas.microsoft.com/office/drawing/2014/main" id="{0A8887F3-DC54-74AB-9F3B-F783AA61A6D9}"/>
+              </a:ext>
+            </a:extLst>
+          </p:cNvPr>
+          <p:cNvSpPr>
+            <a:spLocks noGrp="1"/>
+          </p:cNvSpPr>
+          <p:nvPr>
+            <p:ph type="body" sz="quarter" idx="10"/>
+          </p:nvPr>
+        </p:nvSpPr>
+        <p:spPr>
+          <a:xfrm>
+            <a:off x="2762250" y="1257300"/>
+            <a:ext cx="6165056" cy="3323035"/>
+          </a:xfrm>
+        </p:spPr>
+        <p:txBody>
+          <a:bodyPr/>
+          <a:lstStyle/>
+          <a:p>
+            <a:endParaRPr lang="en-AU" b="0">
+              <a:cs typeface="Arial"/>
+            </a:endParaRPr>
+          </a:p>
+          <a:p>
+            <a:endParaRPr lang="en-AU" b="0"/>
+          </a:p>
+          <a:p>
+            <a:endParaRPr lang="en-AU" b="0"/>
+          </a:p>
+          <a:p>
+            <a:endParaRPr lang="en-AU"/>
+          </a:p>
+        </p:txBody>
+      </p:sp>
+    </p:spTree>
+    <p:extLst>
+      <p:ext uri="{BB962C8B-B14F-4D97-AF65-F5344CB8AC3E}">
+        <p14:creationId xmlns:p14="http://schemas.microsoft.com/office/powerpoint/2010/main" val="41677334"/>
+      </p:ext>
+    </p:extLst>
+  </p:cSld>
+  <p:clrMapOvr>
+    <a:masterClrMapping/>
+  </p:clrMapOvr>
+</p:sld>
+</file>
+
+<file path=ppt/slides/slide12.xml><?xml version="1.0" encoding="utf-8"?>
+<p:sld xmlns:a="http://schemas.openxmlformats.org/drawingml/2006/main" xmlns:r="http://schemas.openxmlformats.org/officeDocument/2006/relationships" xmlns:p="http://schemas.openxmlformats.org/presentationml/2006/main">
+  <p:cSld>
+    <p:spTree>
+      <p:nvGrpSpPr>
+        <p:cNvPr id="1" name="">
+          <a:extLst>
+            <a:ext uri="{FF2B5EF4-FFF2-40B4-BE49-F238E27FC236}">
+              <a16:creationId xmlns:a16="http://schemas.microsoft.com/office/drawing/2014/main" id="{FFB6DACD-12FB-E58D-3DA5-948E6E51559D}"/>
+            </a:ext>
+          </a:extLst>
+        </p:cNvPr>
+        <p:cNvGrpSpPr/>
+        <p:nvPr/>
+      </p:nvGrpSpPr>
+      <p:grpSpPr>
+        <a:xfrm>
+          <a:off x="0" y="0"/>
+          <a:ext cx="0" cy="0"/>
+          <a:chOff x="0" y="0"/>
+          <a:chExt cx="0" cy="0"/>
+        </a:xfrm>
+      </p:grpSpPr>
+      <p:sp>
+        <p:nvSpPr>
+          <p:cNvPr id="2" name="Title 1">
+            <a:extLst>
+              <a:ext uri="{FF2B5EF4-FFF2-40B4-BE49-F238E27FC236}">
+                <a16:creationId xmlns:a16="http://schemas.microsoft.com/office/drawing/2014/main" id="{E05D786B-25C0-288E-7A66-9D00B657B68A}"/>
+              </a:ext>
+            </a:extLst>
+          </p:cNvPr>
+          <p:cNvSpPr>
+            <a:spLocks noGrp="1"/>
+          </p:cNvSpPr>
+          <p:nvPr>
+            <p:ph type="title"/>
+          </p:nvPr>
+        </p:nvSpPr>
+        <p:spPr/>
+        <p:txBody>
+          <a:bodyPr/>
+          <a:lstStyle/>
+          <a:p>
+            <a:r>
+              <a:rPr lang="en-US">
+                <a:cs typeface="Arial"/>
+              </a:rPr>
+              <a:t>Feedback recap from 15 July </a:t>
+            </a:r>
+            <a:endParaRPr lang="en-US"/>
+          </a:p>
+        </p:txBody>
+      </p:sp>
+      <p:sp>
+        <p:nvSpPr>
+          <p:cNvPr id="3" name="Text Placeholder 2">
+            <a:extLst>
+              <a:ext uri="{FF2B5EF4-FFF2-40B4-BE49-F238E27FC236}">
+                <a16:creationId xmlns:a16="http://schemas.microsoft.com/office/drawing/2014/main" id="{50DB5857-4550-273C-5DD7-835E11038B5C}"/>
+              </a:ext>
+            </a:extLst>
+          </p:cNvPr>
+          <p:cNvSpPr>
+            <a:spLocks noGrp="1"/>
+          </p:cNvSpPr>
+          <p:nvPr>
+            <p:ph type="body" sz="quarter" idx="10"/>
+          </p:nvPr>
+        </p:nvSpPr>
+        <p:spPr/>
+        <p:txBody>
+          <a:bodyPr/>
+          <a:lstStyle/>
+          <a:p>
+            <a:pPr marL="285750" indent="-285750">
+              <a:buFont typeface="Arial"/>
+              <a:buChar char="•"/>
+            </a:pPr>
+            <a:r>
+              <a:rPr lang="en-US" b="1">
+                <a:ea typeface="+mn-lt"/>
+                <a:cs typeface="+mn-lt"/>
+              </a:rPr>
+              <a:t>Filter gradient: </a:t>
+            </a:r>
+            <a:r>
+              <a:rPr lang="en-US">
+                <a:ea typeface="+mn-lt"/>
+                <a:cs typeface="+mn-lt"/>
+              </a:rPr>
+              <a:t>shifted to prioritize RMIT red more. </a:t>
+            </a:r>
+            <a:endParaRPr lang="en-US"/>
+          </a:p>
+          <a:p>
+            <a:pPr marL="285750" indent="-285750">
+              <a:buFont typeface="Arial"/>
+              <a:buChar char="•"/>
+            </a:pPr>
+            <a:r>
+              <a:rPr lang="en-US" b="1">
+                <a:ea typeface="+mn-lt"/>
+                <a:cs typeface="+mn-lt"/>
+              </a:rPr>
+              <a:t>Pref. Lockup: </a:t>
+            </a:r>
+            <a:r>
+              <a:rPr lang="en-US">
+                <a:ea typeface="+mn-lt"/>
+                <a:cs typeface="+mn-lt"/>
+              </a:rPr>
+              <a:t>offset added, it should now look more aligned with Only at...lockup.</a:t>
+            </a:r>
+            <a:endParaRPr lang="en-US"/>
+          </a:p>
+          <a:p>
+            <a:pPr marL="285750" indent="-285750">
+              <a:buFont typeface="Arial"/>
+              <a:buChar char="•"/>
+            </a:pPr>
+            <a:r>
+              <a:rPr lang="en-US" b="1">
+                <a:ea typeface="+mn-lt"/>
+                <a:cs typeface="+mn-lt"/>
+              </a:rPr>
+              <a:t>Text and copy:</a:t>
+            </a:r>
+            <a:r>
+              <a:rPr lang="en-US">
+                <a:ea typeface="+mn-lt"/>
+                <a:cs typeface="+mn-lt"/>
+              </a:rPr>
+              <a:t> </a:t>
+            </a:r>
+            <a:r>
+              <a:rPr lang="en-US" sz="1600">
+                <a:ea typeface="+mn-lt"/>
+                <a:cs typeface="+mn-lt"/>
+              </a:rPr>
+              <a:t>"Only at Open Day" approach, using offset text, varied font sizes and a bit more hierarchy to give it greater impact.</a:t>
+            </a:r>
+          </a:p>
+          <a:p>
+            <a:pPr marL="285750" indent="-285750">
+              <a:buFont typeface="Arial"/>
+              <a:buChar char="•"/>
+            </a:pPr>
+            <a:r>
+              <a:rPr lang="en-US" b="1">
+                <a:ea typeface="+mn-lt"/>
+                <a:cs typeface="+mn-lt"/>
+              </a:rPr>
+              <a:t>Video storyboard: </a:t>
+            </a:r>
+            <a:r>
+              <a:rPr lang="en-US">
+                <a:ea typeface="+mn-lt"/>
+                <a:cs typeface="+mn-lt"/>
+              </a:rPr>
+              <a:t>since Jane did have a few comments on swapping some of the footage, those have been updated to reflect our latest selection (along with the adjusted filter, of course)</a:t>
+            </a:r>
+            <a:endParaRPr lang="en-US"/>
+          </a:p>
+          <a:p>
+            <a:pPr marL="285750" indent="-285750">
+              <a:buFont typeface="Arial"/>
+              <a:buChar char="•"/>
+            </a:pPr>
+            <a:r>
+              <a:rPr lang="en-US" b="1">
+                <a:ea typeface="+mn-lt"/>
+                <a:cs typeface="+mn-lt"/>
+              </a:rPr>
+              <a:t>Digital display:</a:t>
+            </a:r>
+            <a:r>
+              <a:rPr lang="en-US">
+                <a:ea typeface="+mn-lt"/>
+                <a:cs typeface="+mn-lt"/>
+              </a:rPr>
+              <a:t> Filter and layout adjusted, for no-image sets (size constrains), we're proposing 2 options: pure red and a red-dominant gradient with a touch of navy so they are still somewhat visually connected to other assets</a:t>
+            </a:r>
+            <a:endParaRPr lang="en-US"/>
+          </a:p>
+          <a:p>
+            <a:endParaRPr lang="en-US">
+              <a:cs typeface="Arial"/>
+            </a:endParaRPr>
+          </a:p>
+        </p:txBody>
+      </p:sp>
+    </p:spTree>
+    <p:extLst>
+      <p:ext uri="{BB962C8B-B14F-4D97-AF65-F5344CB8AC3E}">
+        <p14:creationId xmlns:p14="http://schemas.microsoft.com/office/powerpoint/2010/main" val="3214829184"/>
+      </p:ext>
+    </p:extLst>
+  </p:cSld>
+  <p:clrMapOvr>
+    <a:masterClrMapping/>
+  </p:clrMapOvr>
+</p:sld>
+</file>
+
+<file path=ppt/slides/slide13.xml><?xml version="1.0" encoding="utf-8"?>
+<p:sld xmlns:a="http://schemas.openxmlformats.org/drawingml/2006/main" xmlns:r="http://schemas.openxmlformats.org/officeDocument/2006/relationships" xmlns:p="http://schemas.openxmlformats.org/presentationml/2006/main">
+  <p:cSld>
+    <p:spTree>
+      <p:nvGrpSpPr>
+        <p:cNvPr id="1" name="">
+          <a:extLst>
+            <a:ext uri="{FF2B5EF4-FFF2-40B4-BE49-F238E27FC236}">
+              <a16:creationId xmlns:a16="http://schemas.microsoft.com/office/drawing/2014/main" id="{6602E6EB-CC7F-FA5C-BD1C-F0F9C14A0A0E}"/>
+            </a:ext>
+          </a:extLst>
+        </p:cNvPr>
+        <p:cNvGrpSpPr/>
+        <p:nvPr/>
+      </p:nvGrpSpPr>
+      <p:grpSpPr>
+        <a:xfrm>
+          <a:off x="0" y="0"/>
+          <a:ext cx="0" cy="0"/>
+          <a:chOff x="0" y="0"/>
+          <a:chExt cx="0" cy="0"/>
+        </a:xfrm>
+      </p:grpSpPr>
+      <p:sp>
+        <p:nvSpPr>
+          <p:cNvPr id="2" name="Title 1">
+            <a:extLst>
+              <a:ext uri="{FF2B5EF4-FFF2-40B4-BE49-F238E27FC236}">
+                <a16:creationId xmlns:a16="http://schemas.microsoft.com/office/drawing/2014/main" id="{F27911A7-0A3A-B3A9-F67F-EF7AFAA4A997}"/>
+              </a:ext>
+            </a:extLst>
+          </p:cNvPr>
+          <p:cNvSpPr>
+            <a:spLocks noGrp="1"/>
+          </p:cNvSpPr>
+          <p:nvPr>
+            <p:ph type="title"/>
+          </p:nvPr>
+        </p:nvSpPr>
+        <p:spPr>
+          <a:xfrm>
+            <a:off x="245330" y="299902"/>
+            <a:ext cx="2999760" cy="271379"/>
+          </a:xfrm>
+        </p:spPr>
+        <p:txBody>
+          <a:bodyPr/>
+          <a:lstStyle/>
+          <a:p>
+            <a:r>
+              <a:rPr lang="en-US" sz="1600">
+                <a:cs typeface="Arial"/>
+              </a:rPr>
+              <a:t>Preference RMIT lockup</a:t>
+            </a:r>
+          </a:p>
+        </p:txBody>
+      </p:sp>
+      <p:sp>
+        <p:nvSpPr>
+          <p:cNvPr id="18" name="TextBox 17">
+            <a:extLst>
+              <a:ext uri="{FF2B5EF4-FFF2-40B4-BE49-F238E27FC236}">
+                <a16:creationId xmlns:a16="http://schemas.microsoft.com/office/drawing/2014/main" id="{96A224C3-D33C-21F8-7846-B954DBFE0B6C}"/>
+              </a:ext>
+            </a:extLst>
+          </p:cNvPr>
+          <p:cNvSpPr txBox="1"/>
+          <p:nvPr/>
+        </p:nvSpPr>
+        <p:spPr>
+          <a:xfrm>
+            <a:off x="4975251" y="2604106"/>
+            <a:ext cx="2894893" cy="230832"/>
+          </a:xfrm>
+          <a:prstGeom prst="rect">
+            <a:avLst/>
+          </a:prstGeom>
+          <a:solidFill>
+            <a:schemeClr val="tx2"/>
+          </a:solidFill>
+        </p:spPr>
+        <p:txBody>
+          <a:bodyPr vert="horz" wrap="square" lIns="91440" tIns="45720" rIns="91440" bIns="45720" rtlCol="0" anchor="t" anchorCtr="0">
+            <a:spAutoFit/>
+          </a:bodyPr>
+          <a:lstStyle/>
+          <a:p>
+            <a:r>
+              <a:rPr lang="en-US" sz="900">
+                <a:solidFill>
+                  <a:srgbClr val="000054"/>
+                </a:solidFill>
+                <a:latin typeface="Calibri" panose="020F0502020204030204" pitchFamily="34" charset="0"/>
+                <a:ea typeface="Calibri" panose="020F0502020204030204" pitchFamily="34" charset="0"/>
+                <a:cs typeface="Calibri" panose="020F0502020204030204" pitchFamily="34" charset="0"/>
+              </a:rPr>
+              <a:t>“Only at RMIT can you…” lockup for reference</a:t>
+            </a:r>
+          </a:p>
+        </p:txBody>
+      </p:sp>
+      <p:pic>
+        <p:nvPicPr>
+          <p:cNvPr id="24" name="Picture 23">
+            <a:extLst>
+              <a:ext uri="{FF2B5EF4-FFF2-40B4-BE49-F238E27FC236}">
+                <a16:creationId xmlns:a16="http://schemas.microsoft.com/office/drawing/2014/main" id="{A7594C53-D930-066A-AF0A-8AF28B6A76A1}"/>
+              </a:ext>
+            </a:extLst>
+          </p:cNvPr>
+          <p:cNvPicPr>
+            <a:picLocks noChangeAspect="1"/>
+          </p:cNvPicPr>
+          <p:nvPr/>
+        </p:nvPicPr>
+        <p:blipFill>
+          <a:blip r:embed="rId2" cstate="print">
+            <a:extLst>
+              <a:ext uri="{28A0092B-C50C-407E-A947-70E740481C1C}">
+                <a14:useLocalDpi xmlns:a14="http://schemas.microsoft.com/office/drawing/2010/main" val="0"/>
+              </a:ext>
+            </a:extLst>
+          </a:blip>
+          <a:stretch>
+            <a:fillRect/>
+          </a:stretch>
+        </p:blipFill>
+        <p:spPr>
+          <a:xfrm>
+            <a:off x="1121055" y="949720"/>
+            <a:ext cx="2462080" cy="2053153"/>
+          </a:xfrm>
+          <a:prstGeom prst="rect">
+            <a:avLst/>
+          </a:prstGeom>
+        </p:spPr>
+      </p:pic>
+      <p:pic>
+        <p:nvPicPr>
+          <p:cNvPr id="28" name="Picture 27">
+            <a:extLst>
+              <a:ext uri="{FF2B5EF4-FFF2-40B4-BE49-F238E27FC236}">
+                <a16:creationId xmlns:a16="http://schemas.microsoft.com/office/drawing/2014/main" id="{423DA413-0841-695A-5820-94AE12372DF3}"/>
+              </a:ext>
+            </a:extLst>
+          </p:cNvPr>
+          <p:cNvPicPr>
+            <a:picLocks noChangeAspect="1"/>
+          </p:cNvPicPr>
+          <p:nvPr/>
+        </p:nvPicPr>
+        <p:blipFill>
+          <a:blip r:embed="rId3" cstate="print">
+            <a:extLst>
+              <a:ext uri="{28A0092B-C50C-407E-A947-70E740481C1C}">
+                <a14:useLocalDpi xmlns:a14="http://schemas.microsoft.com/office/drawing/2010/main" val="0"/>
+              </a:ext>
+            </a:extLst>
+          </a:blip>
+          <a:srcRect l="51307"/>
+          <a:stretch>
+            <a:fillRect/>
+          </a:stretch>
+        </p:blipFill>
+        <p:spPr>
+          <a:xfrm>
+            <a:off x="1121055" y="3095334"/>
+            <a:ext cx="2462080" cy="1285914"/>
+          </a:xfrm>
+          <a:prstGeom prst="rect">
+            <a:avLst/>
+          </a:prstGeom>
+        </p:spPr>
+      </p:pic>
+      <p:sp>
+        <p:nvSpPr>
+          <p:cNvPr id="31" name="TextBox 30">
+            <a:extLst>
+              <a:ext uri="{FF2B5EF4-FFF2-40B4-BE49-F238E27FC236}">
+                <a16:creationId xmlns:a16="http://schemas.microsoft.com/office/drawing/2014/main" id="{F56F98BD-8D14-4052-5006-0879A2A34393}"/>
+              </a:ext>
+            </a:extLst>
+          </p:cNvPr>
+          <p:cNvSpPr txBox="1"/>
+          <p:nvPr/>
+        </p:nvSpPr>
+        <p:spPr>
+          <a:xfrm>
+            <a:off x="4975252" y="3931220"/>
+            <a:ext cx="1644210" cy="507831"/>
+          </a:xfrm>
+          <a:prstGeom prst="rect">
+            <a:avLst/>
+          </a:prstGeom>
+          <a:solidFill>
+            <a:schemeClr val="tx2"/>
+          </a:solidFill>
+        </p:spPr>
+        <p:txBody>
+          <a:bodyPr vert="horz" wrap="square" lIns="91440" tIns="45720" rIns="91440" bIns="45720" rtlCol="0" anchor="t" anchorCtr="0">
+            <a:spAutoFit/>
+          </a:bodyPr>
+          <a:lstStyle/>
+          <a:p>
+            <a:r>
+              <a:rPr lang="en-US" sz="900">
+                <a:solidFill>
+                  <a:srgbClr val="000054"/>
+                </a:solidFill>
+                <a:latin typeface="Calibri" panose="020F0502020204030204" pitchFamily="34" charset="0"/>
+                <a:ea typeface="Calibri" panose="020F0502020204030204" pitchFamily="34" charset="0"/>
+                <a:cs typeface="Calibri" panose="020F0502020204030204" pitchFamily="34" charset="0"/>
+              </a:rPr>
+              <a:t>Dedicated option to </a:t>
+            </a:r>
+            <a:r>
+              <a:rPr lang="en-US" sz="900" err="1">
+                <a:solidFill>
+                  <a:srgbClr val="000054"/>
+                </a:solidFill>
+                <a:latin typeface="Calibri" panose="020F0502020204030204" pitchFamily="34" charset="0"/>
+                <a:ea typeface="Calibri" panose="020F0502020204030204" pitchFamily="34" charset="0"/>
+                <a:cs typeface="Calibri" panose="020F0502020204030204" pitchFamily="34" charset="0"/>
+              </a:rPr>
+              <a:t>prioritise</a:t>
+            </a:r>
+            <a:r>
+              <a:rPr lang="en-US" sz="900">
+                <a:solidFill>
+                  <a:srgbClr val="000054"/>
+                </a:solidFill>
+                <a:latin typeface="Calibri" panose="020F0502020204030204" pitchFamily="34" charset="0"/>
+                <a:ea typeface="Calibri" panose="020F0502020204030204" pitchFamily="34" charset="0"/>
+                <a:cs typeface="Calibri" panose="020F0502020204030204" pitchFamily="34" charset="0"/>
+              </a:rPr>
+              <a:t> readability for small sizes (728x90 and 320x50)</a:t>
+            </a:r>
+          </a:p>
+        </p:txBody>
+      </p:sp>
+      <p:pic>
+        <p:nvPicPr>
+          <p:cNvPr id="34" name="Picture 33">
+            <a:extLst>
+              <a:ext uri="{FF2B5EF4-FFF2-40B4-BE49-F238E27FC236}">
+                <a16:creationId xmlns:a16="http://schemas.microsoft.com/office/drawing/2014/main" id="{6E36379B-2C1B-604F-9DA5-27CFC274933B}"/>
+              </a:ext>
+            </a:extLst>
+          </p:cNvPr>
+          <p:cNvPicPr>
+            <a:picLocks noChangeAspect="1"/>
+          </p:cNvPicPr>
+          <p:nvPr/>
+        </p:nvPicPr>
+        <p:blipFill>
+          <a:blip r:embed="rId4" cstate="print">
+            <a:extLst>
+              <a:ext uri="{28A0092B-C50C-407E-A947-70E740481C1C}">
+                <a14:useLocalDpi xmlns:a14="http://schemas.microsoft.com/office/drawing/2010/main" val="0"/>
+              </a:ext>
+            </a:extLst>
+          </a:blip>
+          <a:srcRect b="52385"/>
+          <a:stretch>
+            <a:fillRect/>
+          </a:stretch>
+        </p:blipFill>
+        <p:spPr>
+          <a:xfrm>
+            <a:off x="5062893" y="3125612"/>
+            <a:ext cx="1865212" cy="740093"/>
+          </a:xfrm>
+          <a:prstGeom prst="rect">
+            <a:avLst/>
+          </a:prstGeom>
+        </p:spPr>
+      </p:pic>
+      <p:pic>
+        <p:nvPicPr>
+          <p:cNvPr id="36" name="Picture 35">
+            <a:extLst>
+              <a:ext uri="{FF2B5EF4-FFF2-40B4-BE49-F238E27FC236}">
+                <a16:creationId xmlns:a16="http://schemas.microsoft.com/office/drawing/2014/main" id="{10724E9E-810A-1148-AC2D-5D3901A21852}"/>
+              </a:ext>
+            </a:extLst>
+          </p:cNvPr>
+          <p:cNvPicPr>
+            <a:picLocks noChangeAspect="1"/>
+          </p:cNvPicPr>
+          <p:nvPr/>
+        </p:nvPicPr>
+        <p:blipFill>
+          <a:blip r:embed="rId5" cstate="print">
+            <a:extLst>
+              <a:ext uri="{28A0092B-C50C-407E-A947-70E740481C1C}">
+                <a14:useLocalDpi xmlns:a14="http://schemas.microsoft.com/office/drawing/2010/main" val="0"/>
+              </a:ext>
+            </a:extLst>
+          </a:blip>
+          <a:stretch>
+            <a:fillRect/>
+          </a:stretch>
+        </p:blipFill>
+        <p:spPr>
+          <a:xfrm>
+            <a:off x="5058315" y="989957"/>
+            <a:ext cx="1897578" cy="1581793"/>
+          </a:xfrm>
+          <a:prstGeom prst="rect">
+            <a:avLst/>
+          </a:prstGeom>
+        </p:spPr>
+      </p:pic>
+      <p:cxnSp>
+        <p:nvCxnSpPr>
+          <p:cNvPr id="4" name="Straight Connector 3">
+            <a:extLst>
+              <a:ext uri="{FF2B5EF4-FFF2-40B4-BE49-F238E27FC236}">
+                <a16:creationId xmlns:a16="http://schemas.microsoft.com/office/drawing/2014/main" id="{1843BEAC-BB8E-0E6F-1E0B-FDEA382A6E6F}"/>
+              </a:ext>
+            </a:extLst>
+          </p:cNvPr>
+          <p:cNvCxnSpPr/>
+          <p:nvPr/>
+        </p:nvCxnSpPr>
+        <p:spPr>
+          <a:xfrm>
+            <a:off x="4521550" y="643233"/>
+            <a:ext cx="0" cy="3941379"/>
+          </a:xfrm>
+          <a:prstGeom prst="line">
+            <a:avLst/>
+          </a:prstGeom>
+        </p:spPr>
+        <p:style>
+          <a:lnRef idx="1">
+            <a:schemeClr val="accent1"/>
+          </a:lnRef>
+          <a:fillRef idx="0">
+            <a:schemeClr val="accent1"/>
+          </a:fillRef>
+          <a:effectRef idx="0">
+            <a:schemeClr val="accent1"/>
+          </a:effectRef>
+          <a:fontRef idx="minor">
+            <a:schemeClr val="tx1"/>
+          </a:fontRef>
+        </p:style>
+      </p:cxnSp>
+    </p:spTree>
+    <p:extLst>
+      <p:ext uri="{BB962C8B-B14F-4D97-AF65-F5344CB8AC3E}">
+        <p14:creationId xmlns:p14="http://schemas.microsoft.com/office/powerpoint/2010/main" val="4154937665"/>
       </p:ext>
     </p:extLst>
   </p:cSld>
@@ -6662,35 +7522,6 @@
       </p:grpSpPr>
       <p:sp>
         <p:nvSpPr>
-          <p:cNvPr id="2" name="Title 1">
-            <a:extLst>
-              <a:ext uri="{FF2B5EF4-FFF2-40B4-BE49-F238E27FC236}">
-                <a16:creationId xmlns:a16="http://schemas.microsoft.com/office/drawing/2014/main" id="{53FD64B5-CEE1-9357-E7F0-E4DFACA679BC}"/>
-              </a:ext>
-            </a:extLst>
-          </p:cNvPr>
-          <p:cNvSpPr>
-            <a:spLocks noGrp="1"/>
-          </p:cNvSpPr>
-          <p:nvPr>
-            <p:ph type="ctrTitle"/>
-          </p:nvPr>
-        </p:nvSpPr>
-        <p:spPr/>
-        <p:txBody>
-          <a:bodyPr/>
-          <a:lstStyle/>
-          <a:p>
-            <a:r>
-              <a:rPr lang="en-US"/>
-              <a:t>Key messaging</a:t>
-            </a:r>
-            <a:endParaRPr lang="en-AU"/>
-          </a:p>
-        </p:txBody>
-      </p:sp>
-      <p:sp>
-        <p:nvSpPr>
           <p:cNvPr id="3" name="Subtitle 2">
             <a:extLst>
               <a:ext uri="{FF2B5EF4-FFF2-40B4-BE49-F238E27FC236}">
@@ -6705,29 +7536,344 @@
             <p:ph type="subTitle" idx="1"/>
           </p:nvPr>
         </p:nvSpPr>
-        <p:spPr/>
+        <p:spPr>
+          <a:xfrm>
+            <a:off x="419708" y="791821"/>
+            <a:ext cx="2174846" cy="613562"/>
+          </a:xfrm>
+        </p:spPr>
         <p:txBody>
           <a:bodyPr/>
           <a:lstStyle/>
           <a:p>
             <a:r>
-              <a:rPr lang="en-US"/>
-              <a:t>Script and Digital Display</a:t>
-            </a:r>
+              <a:rPr lang="en-US">
+                <a:highlight>
+                  <a:srgbClr val="000054"/>
+                </a:highlight>
+              </a:rPr>
+              <a:t>What is it</a:t>
+            </a:r>
+          </a:p>
+          <a:p>
+            <a:endParaRPr lang="en-US">
+              <a:cs typeface="Arial" panose="020B0604020202020204"/>
+            </a:endParaRPr>
+          </a:p>
+          <a:p>
             <a:endParaRPr lang="en-AU">
               <a:cs typeface="Arial" panose="020B0604020202020204"/>
             </a:endParaRPr>
           </a:p>
-          <a:p>
-            <a:r>
-              <a:rPr lang="en-US">
-                <a:highlight>
-                  <a:srgbClr val="00FF00"/>
-                </a:highlight>
-                <a:cs typeface="Arial"/>
+        </p:txBody>
+      </p:sp>
+      <p:pic>
+        <p:nvPicPr>
+          <p:cNvPr id="9" name="Picture 8">
+            <a:extLst>
+              <a:ext uri="{FF2B5EF4-FFF2-40B4-BE49-F238E27FC236}">
+                <a16:creationId xmlns:a16="http://schemas.microsoft.com/office/drawing/2014/main" id="{554C36A3-9AB7-8416-D5A8-0A6F9AA68DFA}"/>
+              </a:ext>
+            </a:extLst>
+          </p:cNvPr>
+          <p:cNvPicPr>
+            <a:picLocks noChangeAspect="1"/>
+          </p:cNvPicPr>
+          <p:nvPr/>
+        </p:nvPicPr>
+        <p:blipFill>
+          <a:blip r:embed="rId2"/>
+          <a:stretch>
+            <a:fillRect/>
+          </a:stretch>
+        </p:blipFill>
+        <p:spPr>
+          <a:xfrm>
+            <a:off x="2936298" y="547234"/>
+            <a:ext cx="6410402" cy="3749432"/>
+          </a:xfrm>
+          <a:prstGeom prst="rect">
+            <a:avLst/>
+          </a:prstGeom>
+        </p:spPr>
+      </p:pic>
+      <p:sp>
+        <p:nvSpPr>
+          <p:cNvPr id="10" name="Subtitle 2">
+            <a:extLst>
+              <a:ext uri="{FF2B5EF4-FFF2-40B4-BE49-F238E27FC236}">
+                <a16:creationId xmlns:a16="http://schemas.microsoft.com/office/drawing/2014/main" id="{D75CD8AF-3137-ADE8-CCEF-7D9257135833}"/>
+              </a:ext>
+            </a:extLst>
+          </p:cNvPr>
+          <p:cNvSpPr txBox="1">
+            <a:spLocks/>
+          </p:cNvSpPr>
+          <p:nvPr/>
+        </p:nvSpPr>
+        <p:spPr>
+          <a:xfrm>
+            <a:off x="288285" y="1480248"/>
+            <a:ext cx="2432394" cy="2600204"/>
+          </a:xfrm>
+          <a:prstGeom prst="rect">
+            <a:avLst/>
+          </a:prstGeom>
+        </p:spPr>
+        <p:txBody>
+          <a:bodyPr vert="horz" lIns="91440" tIns="45720" rIns="91440" bIns="45720" rtlCol="0" anchor="t" anchorCtr="0">
+            <a:noAutofit/>
+          </a:bodyPr>
+          <a:lstStyle>
+            <a:lvl1pPr marL="0" indent="0" algn="l" defTabSz="685783" rtl="0" eaLnBrk="1" latinLnBrk="0" hangingPunct="1">
+              <a:lnSpc>
+                <a:spcPct val="100000"/>
+              </a:lnSpc>
+              <a:spcBef>
+                <a:spcPts val="300"/>
+              </a:spcBef>
+              <a:spcAft>
+                <a:spcPts val="300"/>
+              </a:spcAft>
+              <a:buFont typeface="Arial" panose="020B0604020202020204" pitchFamily="34" charset="0"/>
+              <a:buNone/>
+              <a:defRPr sz="2700" b="1" kern="1200" baseline="0">
+                <a:solidFill>
+                  <a:schemeClr val="bg1"/>
+                </a:solidFill>
+                <a:latin typeface="+mn-lt"/>
+                <a:ea typeface="+mn-ea"/>
+                <a:cs typeface="+mn-cs"/>
+              </a:defRPr>
+            </a:lvl1pPr>
+            <a:lvl2pPr marL="342892" indent="0" algn="ctr" defTabSz="685783" rtl="0" eaLnBrk="1" latinLnBrk="0" hangingPunct="1">
+              <a:lnSpc>
+                <a:spcPct val="100000"/>
+              </a:lnSpc>
+              <a:spcBef>
+                <a:spcPts val="300"/>
+              </a:spcBef>
+              <a:spcAft>
+                <a:spcPts val="300"/>
+              </a:spcAft>
+              <a:buClr>
+                <a:schemeClr val="accent2"/>
+              </a:buClr>
+              <a:buFont typeface="Wingdings" pitchFamily="2" charset="2"/>
+              <a:buNone/>
+              <a:tabLst/>
+              <a:defRPr sz="1500" kern="1200">
+                <a:solidFill>
+                  <a:schemeClr val="tx1"/>
+                </a:solidFill>
+                <a:latin typeface="+mn-lt"/>
+                <a:ea typeface="+mn-ea"/>
+                <a:cs typeface="+mn-cs"/>
+              </a:defRPr>
+            </a:lvl2pPr>
+            <a:lvl3pPr marL="685783" indent="0" algn="ctr" defTabSz="685783" rtl="0" eaLnBrk="1" latinLnBrk="0" hangingPunct="1">
+              <a:lnSpc>
+                <a:spcPct val="90000"/>
+              </a:lnSpc>
+              <a:spcBef>
+                <a:spcPts val="300"/>
+              </a:spcBef>
+              <a:spcAft>
+                <a:spcPts val="300"/>
+              </a:spcAft>
+              <a:buClr>
+                <a:schemeClr val="accent2"/>
+              </a:buClr>
+              <a:buFont typeface="Wingdings" pitchFamily="2" charset="2"/>
+              <a:buNone/>
+              <a:tabLst/>
+              <a:defRPr lang="en-US" sz="1350" kern="1200" baseline="0">
+                <a:solidFill>
+                  <a:schemeClr val="tx1"/>
+                </a:solidFill>
+                <a:latin typeface="+mn-lt"/>
+                <a:ea typeface="+mn-ea"/>
+                <a:cs typeface="+mn-cs"/>
+              </a:defRPr>
+            </a:lvl3pPr>
+            <a:lvl4pPr marL="1028675" indent="0" algn="ctr" defTabSz="685783" rtl="0" eaLnBrk="1" latinLnBrk="0" hangingPunct="1">
+              <a:lnSpc>
+                <a:spcPct val="90000"/>
+              </a:lnSpc>
+              <a:spcBef>
+                <a:spcPts val="375"/>
+              </a:spcBef>
+              <a:buClr>
+                <a:schemeClr val="accent4"/>
+              </a:buClr>
+              <a:buFont typeface="Wingdings" pitchFamily="2" charset="2"/>
+              <a:buNone/>
+              <a:defRPr sz="1200" kern="1200">
+                <a:solidFill>
+                  <a:schemeClr val="tx1"/>
+                </a:solidFill>
+                <a:latin typeface="+mn-lt"/>
+                <a:ea typeface="+mn-ea"/>
+                <a:cs typeface="+mn-cs"/>
+              </a:defRPr>
+            </a:lvl4pPr>
+            <a:lvl5pPr marL="1371566" indent="0" algn="ctr" defTabSz="685783" rtl="0" eaLnBrk="1" latinLnBrk="0" hangingPunct="1">
+              <a:lnSpc>
+                <a:spcPct val="90000"/>
+              </a:lnSpc>
+              <a:spcBef>
+                <a:spcPts val="375"/>
+              </a:spcBef>
+              <a:buFont typeface="Arial" panose="020B0604020202020204" pitchFamily="34" charset="0"/>
+              <a:buNone/>
+              <a:defRPr sz="1200" kern="1200">
+                <a:solidFill>
+                  <a:schemeClr val="tx1"/>
+                </a:solidFill>
+                <a:latin typeface="+mn-lt"/>
+                <a:ea typeface="+mn-ea"/>
+                <a:cs typeface="+mn-cs"/>
+              </a:defRPr>
+            </a:lvl5pPr>
+            <a:lvl6pPr marL="1714457" indent="0" algn="ctr" defTabSz="685783" rtl="0" eaLnBrk="1" latinLnBrk="0" hangingPunct="1">
+              <a:lnSpc>
+                <a:spcPct val="90000"/>
+              </a:lnSpc>
+              <a:spcBef>
+                <a:spcPts val="375"/>
+              </a:spcBef>
+              <a:buFont typeface="Arial" panose="020B0604020202020204" pitchFamily="34" charset="0"/>
+              <a:buNone/>
+              <a:defRPr sz="1200" kern="1200">
+                <a:solidFill>
+                  <a:schemeClr val="tx1"/>
+                </a:solidFill>
+                <a:latin typeface="+mn-lt"/>
+                <a:ea typeface="+mn-ea"/>
+                <a:cs typeface="+mn-cs"/>
+              </a:defRPr>
+            </a:lvl6pPr>
+            <a:lvl7pPr marL="2057348" indent="0" algn="ctr" defTabSz="685783" rtl="0" eaLnBrk="1" latinLnBrk="0" hangingPunct="1">
+              <a:lnSpc>
+                <a:spcPct val="90000"/>
+              </a:lnSpc>
+              <a:spcBef>
+                <a:spcPts val="375"/>
+              </a:spcBef>
+              <a:buFont typeface="Arial" panose="020B0604020202020204" pitchFamily="34" charset="0"/>
+              <a:buNone/>
+              <a:defRPr sz="1200" kern="1200">
+                <a:solidFill>
+                  <a:schemeClr val="tx1"/>
+                </a:solidFill>
+                <a:latin typeface="+mn-lt"/>
+                <a:ea typeface="+mn-ea"/>
+                <a:cs typeface="+mn-cs"/>
+              </a:defRPr>
+            </a:lvl7pPr>
+            <a:lvl8pPr marL="2400240" indent="0" algn="ctr" defTabSz="685783" rtl="0" eaLnBrk="1" latinLnBrk="0" hangingPunct="1">
+              <a:lnSpc>
+                <a:spcPct val="90000"/>
+              </a:lnSpc>
+              <a:spcBef>
+                <a:spcPts val="375"/>
+              </a:spcBef>
+              <a:buFont typeface="Arial" panose="020B0604020202020204" pitchFamily="34" charset="0"/>
+              <a:buNone/>
+              <a:defRPr sz="1200" kern="1200">
+                <a:solidFill>
+                  <a:schemeClr val="tx1"/>
+                </a:solidFill>
+                <a:latin typeface="+mn-lt"/>
+                <a:ea typeface="+mn-ea"/>
+                <a:cs typeface="+mn-cs"/>
+              </a:defRPr>
+            </a:lvl8pPr>
+            <a:lvl9pPr marL="2743132" indent="0" algn="ctr" defTabSz="685783" rtl="0" eaLnBrk="1" latinLnBrk="0" hangingPunct="1">
+              <a:lnSpc>
+                <a:spcPct val="90000"/>
+              </a:lnSpc>
+              <a:spcBef>
+                <a:spcPts val="375"/>
+              </a:spcBef>
+              <a:buFont typeface="Arial" panose="020B0604020202020204" pitchFamily="34" charset="0"/>
+              <a:buNone/>
+              <a:defRPr sz="1200" kern="1200">
+                <a:solidFill>
+                  <a:schemeClr val="tx1"/>
+                </a:solidFill>
+                <a:latin typeface="+mn-lt"/>
+                <a:ea typeface="+mn-ea"/>
+                <a:cs typeface="+mn-cs"/>
+              </a:defRPr>
+            </a:lvl9pPr>
+          </a:lstStyle>
+          <a:p>
+            <a:pPr marL="171450" indent="-171450">
+              <a:buFont typeface="Arial" panose="020B0604020202020204" pitchFamily="34" charset="0"/>
+              <a:buChar char="•"/>
+            </a:pPr>
+            <a:r>
+              <a:rPr lang="en-US" sz="1000" b="0">
+                <a:latin typeface="Calibri" panose="020F0502020204030204" pitchFamily="34" charset="0"/>
+                <a:ea typeface="Calibri" panose="020F0502020204030204" pitchFamily="34" charset="0"/>
+                <a:cs typeface="Calibri" panose="020F0502020204030204" pitchFamily="34" charset="0"/>
               </a:rPr>
-              <a:t>Approved 18 June</a:t>
-            </a:r>
+              <a:t>A shared system of record for GCMC's workload — Vietnam Design, Melbourne Design, Production and Content all log into it.</a:t>
+            </a:r>
+          </a:p>
+          <a:p>
+            <a:pPr marL="171450" indent="-171450">
+              <a:buFont typeface="Arial" panose="020B0604020202020204" pitchFamily="34" charset="0"/>
+              <a:buChar char="•"/>
+            </a:pPr>
+            <a:r>
+              <a:rPr lang="en-US" sz="1000" b="0">
+                <a:latin typeface="Calibri" panose="020F0502020204030204" pitchFamily="34" charset="0"/>
+                <a:ea typeface="Calibri" panose="020F0502020204030204" pitchFamily="34" charset="0"/>
+                <a:cs typeface="Calibri" panose="020F0502020204030204" pitchFamily="34" charset="0"/>
+              </a:rPr>
+              <a:t>Every task captures its work types, asset counts and timeline.</a:t>
+            </a:r>
+          </a:p>
+          <a:p>
+            <a:pPr marL="171450" indent="-171450">
+              <a:buFont typeface="Arial" panose="020B0604020202020204" pitchFamily="34" charset="0"/>
+              <a:buChar char="•"/>
+            </a:pPr>
+            <a:r>
+              <a:rPr lang="en-US" sz="1000" b="0">
+                <a:latin typeface="Calibri" panose="020F0502020204030204" pitchFamily="34" charset="0"/>
+                <a:ea typeface="Calibri" panose="020F0502020204030204" pitchFamily="34" charset="0"/>
+                <a:cs typeface="Calibri" panose="020F0502020204030204" pitchFamily="34" charset="0"/>
+              </a:rPr>
+              <a:t>The dashboard turns that into live charts — by squad, campaign, asset type, and time of year.</a:t>
+            </a:r>
+          </a:p>
+          <a:p>
+            <a:pPr marL="171450" indent="-171450">
+              <a:buFont typeface="Arial" panose="020B0604020202020204" pitchFamily="34" charset="0"/>
+              <a:buChar char="•"/>
+            </a:pPr>
+            <a:r>
+              <a:rPr lang="en-US" sz="1000" b="0">
+                <a:latin typeface="Calibri" panose="020F0502020204030204" pitchFamily="34" charset="0"/>
+                <a:ea typeface="Calibri" panose="020F0502020204030204" pitchFamily="34" charset="0"/>
+                <a:cs typeface="Calibri" panose="020F0502020204030204" pitchFamily="34" charset="0"/>
+              </a:rPr>
+              <a:t>Built so stakeholders can see what's being delivered without asking.</a:t>
+            </a:r>
+          </a:p>
+          <a:p>
+            <a:pPr marL="171450" indent="-171450">
+              <a:buFont typeface="Arial" panose="020B0604020202020204" pitchFamily="34" charset="0"/>
+              <a:buChar char="•"/>
+            </a:pPr>
+            <a:endParaRPr lang="en-AU" sz="1000" b="0">
+              <a:latin typeface="Calibri" panose="020F0502020204030204" pitchFamily="34" charset="0"/>
+              <a:ea typeface="Calibri" panose="020F0502020204030204" pitchFamily="34" charset="0"/>
+              <a:cs typeface="Calibri" panose="020F0502020204030204" pitchFamily="34" charset="0"/>
+            </a:endParaRPr>
           </a:p>
         </p:txBody>
       </p:sp>
@@ -6749,7 +7895,13 @@
   <p:cSld>
     <p:spTree>
       <p:nvGrpSpPr>
-        <p:cNvPr id="1" name=""/>
+        <p:cNvPr id="1" name="">
+          <a:extLst>
+            <a:ext uri="{FF2B5EF4-FFF2-40B4-BE49-F238E27FC236}">
+              <a16:creationId xmlns:a16="http://schemas.microsoft.com/office/drawing/2014/main" id="{C4229039-5A5E-6D96-C192-F01F06189443}"/>
+            </a:ext>
+          </a:extLst>
+        </p:cNvPr>
         <p:cNvGrpSpPr/>
         <p:nvPr/>
       </p:nvGrpSpPr>
@@ -6763,10 +7915,10 @@
       </p:grpSpPr>
       <p:sp>
         <p:nvSpPr>
-          <p:cNvPr id="5" name="Title 1">
-            <a:extLst>
-              <a:ext uri="{FF2B5EF4-FFF2-40B4-BE49-F238E27FC236}">
-                <a16:creationId xmlns:a16="http://schemas.microsoft.com/office/drawing/2014/main" id="{53C8DA78-30DA-0B1B-58F4-03825933247D}"/>
+          <p:cNvPr id="3" name="Subtitle 2">
+            <a:extLst>
+              <a:ext uri="{FF2B5EF4-FFF2-40B4-BE49-F238E27FC236}">
+                <a16:creationId xmlns:a16="http://schemas.microsoft.com/office/drawing/2014/main" id="{3252560D-D627-FF9F-8DB8-411A583E409A}"/>
               </a:ext>
             </a:extLst>
           </p:cNvPr>
@@ -6774,13 +7926,13 @@
             <a:spLocks noGrp="1"/>
           </p:cNvSpPr>
           <p:nvPr>
-            <p:ph type="title"/>
+            <p:ph type="subTitle" idx="1"/>
           </p:nvPr>
         </p:nvSpPr>
         <p:spPr>
           <a:xfrm>
-            <a:off x="245329" y="299902"/>
-            <a:ext cx="1930436" cy="1694259"/>
+            <a:off x="419708" y="372429"/>
+            <a:ext cx="2174846" cy="613562"/>
           </a:xfrm>
         </p:spPr>
         <p:txBody>
@@ -6788,449 +7940,377 @@
           <a:lstStyle/>
           <a:p>
             <a:r>
-              <a:rPr lang="en-US"/>
-              <a:t>VTAC campaign</a:t>
-            </a:r>
-            <a:br>
-              <a:rPr lang="en-US"/>
-            </a:br>
-            <a:r>
-              <a:rPr lang="en-US"/>
-              <a:t>scripts</a:t>
-            </a:r>
-            <a:br>
               <a:rPr lang="en-US">
-                <a:cs typeface="Arial"/>
+                <a:highlight>
+                  <a:srgbClr val="000054"/>
+                </a:highlight>
               </a:rPr>
-            </a:br>
+              <a:t>Dashboard</a:t>
+            </a:r>
+          </a:p>
+          <a:p>
             <a:r>
               <a:rPr lang="en-US">
-                <a:cs typeface="Arial"/>
+                <a:highlight>
+                  <a:srgbClr val="000054"/>
+                </a:highlight>
               </a:rPr>
-              <a:t>30 second</a:t>
-            </a:r>
-            <a:br>
-              <a:rPr lang="en-US">
-                <a:cs typeface="Arial"/>
-              </a:rPr>
-            </a:br>
-            <a:br>
-              <a:rPr lang="en-US">
-                <a:cs typeface="Arial"/>
-              </a:rPr>
-            </a:br>
-            <a:endParaRPr lang="en-AU" sz="1800" b="0">
-              <a:cs typeface="Arial"/>
+              <a:t>breakdown</a:t>
+            </a:r>
+          </a:p>
+          <a:p>
+            <a:endParaRPr lang="en-US">
+              <a:cs typeface="Arial" panose="020B0604020202020204"/>
+            </a:endParaRPr>
+          </a:p>
+          <a:p>
+            <a:endParaRPr lang="en-AU">
+              <a:cs typeface="Arial" panose="020B0604020202020204"/>
             </a:endParaRPr>
           </a:p>
         </p:txBody>
       </p:sp>
       <p:sp>
         <p:nvSpPr>
-          <p:cNvPr id="7" name="Text Placeholder 2">
-            <a:extLst>
-              <a:ext uri="{FF2B5EF4-FFF2-40B4-BE49-F238E27FC236}">
-                <a16:creationId xmlns:a16="http://schemas.microsoft.com/office/drawing/2014/main" id="{0A8887F3-DC54-74AB-9F3B-F783AA61A6D9}"/>
-              </a:ext>
-            </a:extLst>
-          </p:cNvPr>
-          <p:cNvSpPr>
-            <a:spLocks noGrp="1"/>
+          <p:cNvPr id="10" name="Subtitle 2">
+            <a:extLst>
+              <a:ext uri="{FF2B5EF4-FFF2-40B4-BE49-F238E27FC236}">
+                <a16:creationId xmlns:a16="http://schemas.microsoft.com/office/drawing/2014/main" id="{F76B5C9C-37D3-5C02-6DD8-D2D18F857CC8}"/>
+              </a:ext>
+            </a:extLst>
+          </p:cNvPr>
+          <p:cNvSpPr txBox="1">
+            <a:spLocks/>
           </p:cNvSpPr>
-          <p:nvPr>
-            <p:ph type="body" sz="quarter" idx="10"/>
-          </p:nvPr>
+          <p:nvPr/>
         </p:nvSpPr>
         <p:spPr>
           <a:xfrm>
-            <a:off x="2762250" y="1257300"/>
-            <a:ext cx="6165056" cy="3323035"/>
-          </a:xfrm>
+            <a:off x="387382" y="1764241"/>
+            <a:ext cx="3094546" cy="2600204"/>
+          </a:xfrm>
+          <a:prstGeom prst="rect">
+            <a:avLst/>
+          </a:prstGeom>
         </p:spPr>
         <p:txBody>
-          <a:bodyPr/>
-          <a:lstStyle/>
-          <a:p>
-            <a:endParaRPr lang="en-AU" b="0">
-              <a:cs typeface="Arial"/>
-            </a:endParaRPr>
-          </a:p>
-          <a:p>
-            <a:endParaRPr lang="en-AU" b="0"/>
-          </a:p>
-          <a:p>
-            <a:endParaRPr lang="en-AU" b="0"/>
-          </a:p>
-          <a:p>
-            <a:endParaRPr lang="en-AU"/>
+          <a:bodyPr vert="horz" lIns="91440" tIns="45720" rIns="91440" bIns="45720" rtlCol="0" anchor="t" anchorCtr="0">
+            <a:noAutofit/>
+          </a:bodyPr>
+          <a:lstStyle>
+            <a:lvl1pPr marL="0" indent="0" algn="l" defTabSz="685783" rtl="0" eaLnBrk="1" latinLnBrk="0" hangingPunct="1">
+              <a:lnSpc>
+                <a:spcPct val="100000"/>
+              </a:lnSpc>
+              <a:spcBef>
+                <a:spcPts val="300"/>
+              </a:spcBef>
+              <a:spcAft>
+                <a:spcPts val="300"/>
+              </a:spcAft>
+              <a:buFont typeface="Arial" panose="020B0604020202020204" pitchFamily="34" charset="0"/>
+              <a:buNone/>
+              <a:defRPr sz="2700" b="1" kern="1200" baseline="0">
+                <a:solidFill>
+                  <a:schemeClr val="bg1"/>
+                </a:solidFill>
+                <a:latin typeface="+mn-lt"/>
+                <a:ea typeface="+mn-ea"/>
+                <a:cs typeface="+mn-cs"/>
+              </a:defRPr>
+            </a:lvl1pPr>
+            <a:lvl2pPr marL="342892" indent="0" algn="ctr" defTabSz="685783" rtl="0" eaLnBrk="1" latinLnBrk="0" hangingPunct="1">
+              <a:lnSpc>
+                <a:spcPct val="100000"/>
+              </a:lnSpc>
+              <a:spcBef>
+                <a:spcPts val="300"/>
+              </a:spcBef>
+              <a:spcAft>
+                <a:spcPts val="300"/>
+              </a:spcAft>
+              <a:buClr>
+                <a:schemeClr val="accent2"/>
+              </a:buClr>
+              <a:buFont typeface="Wingdings" pitchFamily="2" charset="2"/>
+              <a:buNone/>
+              <a:tabLst/>
+              <a:defRPr sz="1500" kern="1200">
+                <a:solidFill>
+                  <a:schemeClr val="tx1"/>
+                </a:solidFill>
+                <a:latin typeface="+mn-lt"/>
+                <a:ea typeface="+mn-ea"/>
+                <a:cs typeface="+mn-cs"/>
+              </a:defRPr>
+            </a:lvl2pPr>
+            <a:lvl3pPr marL="685783" indent="0" algn="ctr" defTabSz="685783" rtl="0" eaLnBrk="1" latinLnBrk="0" hangingPunct="1">
+              <a:lnSpc>
+                <a:spcPct val="90000"/>
+              </a:lnSpc>
+              <a:spcBef>
+                <a:spcPts val="300"/>
+              </a:spcBef>
+              <a:spcAft>
+                <a:spcPts val="300"/>
+              </a:spcAft>
+              <a:buClr>
+                <a:schemeClr val="accent2"/>
+              </a:buClr>
+              <a:buFont typeface="Wingdings" pitchFamily="2" charset="2"/>
+              <a:buNone/>
+              <a:tabLst/>
+              <a:defRPr lang="en-US" sz="1350" kern="1200" baseline="0">
+                <a:solidFill>
+                  <a:schemeClr val="tx1"/>
+                </a:solidFill>
+                <a:latin typeface="+mn-lt"/>
+                <a:ea typeface="+mn-ea"/>
+                <a:cs typeface="+mn-cs"/>
+              </a:defRPr>
+            </a:lvl3pPr>
+            <a:lvl4pPr marL="1028675" indent="0" algn="ctr" defTabSz="685783" rtl="0" eaLnBrk="1" latinLnBrk="0" hangingPunct="1">
+              <a:lnSpc>
+                <a:spcPct val="90000"/>
+              </a:lnSpc>
+              <a:spcBef>
+                <a:spcPts val="375"/>
+              </a:spcBef>
+              <a:buClr>
+                <a:schemeClr val="accent4"/>
+              </a:buClr>
+              <a:buFont typeface="Wingdings" pitchFamily="2" charset="2"/>
+              <a:buNone/>
+              <a:defRPr sz="1200" kern="1200">
+                <a:solidFill>
+                  <a:schemeClr val="tx1"/>
+                </a:solidFill>
+                <a:latin typeface="+mn-lt"/>
+                <a:ea typeface="+mn-ea"/>
+                <a:cs typeface="+mn-cs"/>
+              </a:defRPr>
+            </a:lvl4pPr>
+            <a:lvl5pPr marL="1371566" indent="0" algn="ctr" defTabSz="685783" rtl="0" eaLnBrk="1" latinLnBrk="0" hangingPunct="1">
+              <a:lnSpc>
+                <a:spcPct val="90000"/>
+              </a:lnSpc>
+              <a:spcBef>
+                <a:spcPts val="375"/>
+              </a:spcBef>
+              <a:buFont typeface="Arial" panose="020B0604020202020204" pitchFamily="34" charset="0"/>
+              <a:buNone/>
+              <a:defRPr sz="1200" kern="1200">
+                <a:solidFill>
+                  <a:schemeClr val="tx1"/>
+                </a:solidFill>
+                <a:latin typeface="+mn-lt"/>
+                <a:ea typeface="+mn-ea"/>
+                <a:cs typeface="+mn-cs"/>
+              </a:defRPr>
+            </a:lvl5pPr>
+            <a:lvl6pPr marL="1714457" indent="0" algn="ctr" defTabSz="685783" rtl="0" eaLnBrk="1" latinLnBrk="0" hangingPunct="1">
+              <a:lnSpc>
+                <a:spcPct val="90000"/>
+              </a:lnSpc>
+              <a:spcBef>
+                <a:spcPts val="375"/>
+              </a:spcBef>
+              <a:buFont typeface="Arial" panose="020B0604020202020204" pitchFamily="34" charset="0"/>
+              <a:buNone/>
+              <a:defRPr sz="1200" kern="1200">
+                <a:solidFill>
+                  <a:schemeClr val="tx1"/>
+                </a:solidFill>
+                <a:latin typeface="+mn-lt"/>
+                <a:ea typeface="+mn-ea"/>
+                <a:cs typeface="+mn-cs"/>
+              </a:defRPr>
+            </a:lvl6pPr>
+            <a:lvl7pPr marL="2057348" indent="0" algn="ctr" defTabSz="685783" rtl="0" eaLnBrk="1" latinLnBrk="0" hangingPunct="1">
+              <a:lnSpc>
+                <a:spcPct val="90000"/>
+              </a:lnSpc>
+              <a:spcBef>
+                <a:spcPts val="375"/>
+              </a:spcBef>
+              <a:buFont typeface="Arial" panose="020B0604020202020204" pitchFamily="34" charset="0"/>
+              <a:buNone/>
+              <a:defRPr sz="1200" kern="1200">
+                <a:solidFill>
+                  <a:schemeClr val="tx1"/>
+                </a:solidFill>
+                <a:latin typeface="+mn-lt"/>
+                <a:ea typeface="+mn-ea"/>
+                <a:cs typeface="+mn-cs"/>
+              </a:defRPr>
+            </a:lvl7pPr>
+            <a:lvl8pPr marL="2400240" indent="0" algn="ctr" defTabSz="685783" rtl="0" eaLnBrk="1" latinLnBrk="0" hangingPunct="1">
+              <a:lnSpc>
+                <a:spcPct val="90000"/>
+              </a:lnSpc>
+              <a:spcBef>
+                <a:spcPts val="375"/>
+              </a:spcBef>
+              <a:buFont typeface="Arial" panose="020B0604020202020204" pitchFamily="34" charset="0"/>
+              <a:buNone/>
+              <a:defRPr sz="1200" kern="1200">
+                <a:solidFill>
+                  <a:schemeClr val="tx1"/>
+                </a:solidFill>
+                <a:latin typeface="+mn-lt"/>
+                <a:ea typeface="+mn-ea"/>
+                <a:cs typeface="+mn-cs"/>
+              </a:defRPr>
+            </a:lvl8pPr>
+            <a:lvl9pPr marL="2743132" indent="0" algn="ctr" defTabSz="685783" rtl="0" eaLnBrk="1" latinLnBrk="0" hangingPunct="1">
+              <a:lnSpc>
+                <a:spcPct val="90000"/>
+              </a:lnSpc>
+              <a:spcBef>
+                <a:spcPts val="375"/>
+              </a:spcBef>
+              <a:buFont typeface="Arial" panose="020B0604020202020204" pitchFamily="34" charset="0"/>
+              <a:buNone/>
+              <a:defRPr sz="1200" kern="1200">
+                <a:solidFill>
+                  <a:schemeClr val="tx1"/>
+                </a:solidFill>
+                <a:latin typeface="+mn-lt"/>
+                <a:ea typeface="+mn-ea"/>
+                <a:cs typeface="+mn-cs"/>
+              </a:defRPr>
+            </a:lvl9pPr>
+          </a:lstStyle>
+          <a:p>
+            <a:r>
+              <a:rPr lang="en-US" sz="1000">
+                <a:highlight>
+                  <a:srgbClr val="000054"/>
+                </a:highlight>
+              </a:rPr>
+              <a:t>Asset count</a:t>
+            </a:r>
+          </a:p>
+          <a:p>
+            <a:r>
+              <a:rPr lang="en-US" sz="800" b="0"/>
+              <a:t>Total deliverables produced — every asset, across every task, in the selected period.</a:t>
+            </a:r>
+          </a:p>
+          <a:p>
+            <a:r>
+              <a:rPr lang="en-US" sz="1000">
+                <a:highlight>
+                  <a:srgbClr val="000054"/>
+                </a:highlight>
+              </a:rPr>
+              <a:t>Task count</a:t>
+            </a:r>
+          </a:p>
+          <a:p>
+            <a:r>
+              <a:rPr lang="en-US" sz="800" b="0"/>
+              <a:t>How many tasks that workload came from, and how many campaigns they span.</a:t>
+            </a:r>
+          </a:p>
+          <a:p>
+            <a:r>
+              <a:rPr lang="en-US" sz="1000">
+                <a:highlight>
+                  <a:srgbClr val="000054"/>
+                </a:highlight>
+              </a:rPr>
+              <a:t>Tasks by squad</a:t>
+            </a:r>
+          </a:p>
+          <a:p>
+            <a:r>
+              <a:rPr lang="en-US" sz="800" b="0"/>
+              <a:t>Which stakeholder teams are asking for work — request volume per squad.</a:t>
+            </a:r>
+          </a:p>
+          <a:p>
+            <a:r>
+              <a:rPr lang="en-US" sz="1000">
+                <a:highlight>
+                  <a:srgbClr val="000054"/>
+                </a:highlight>
+              </a:rPr>
+              <a:t>Assets by squad</a:t>
+            </a:r>
+          </a:p>
+          <a:p>
+            <a:r>
+              <a:rPr lang="en-US" sz="800" b="0"/>
+              <a:t>What each squad actually received — deliverable volume, not just request count.</a:t>
+            </a:r>
           </a:p>
         </p:txBody>
       </p:sp>
-      <p:graphicFrame>
-        <p:nvGraphicFramePr>
-          <p:cNvPr id="9" name="Table 8">
-            <a:extLst>
-              <a:ext uri="{FF2B5EF4-FFF2-40B4-BE49-F238E27FC236}">
-                <a16:creationId xmlns:a16="http://schemas.microsoft.com/office/drawing/2014/main" id="{7E78A8CF-DD9F-4C61-62FF-D0DAA9247784}"/>
-              </a:ext>
-            </a:extLst>
-          </p:cNvPr>
-          <p:cNvGraphicFramePr>
-            <a:graphicFrameLocks noGrp="1"/>
-          </p:cNvGraphicFramePr>
-          <p:nvPr>
-            <p:extLst>
-              <p:ext uri="{D42A27DB-BD31-4B8C-83A1-F6EECF244321}">
-                <p14:modId xmlns:p14="http://schemas.microsoft.com/office/powerpoint/2010/main" val="297117879"/>
-              </p:ext>
-            </p:extLst>
-          </p:nvPr>
-        </p:nvGraphicFramePr>
-        <p:xfrm>
-          <a:off x="2590700" y="406548"/>
-          <a:ext cx="6342258" cy="4023816"/>
-        </p:xfrm>
-        <a:graphic>
-          <a:graphicData uri="http://schemas.openxmlformats.org/drawingml/2006/table">
-            <a:tbl>
-              <a:tblPr firstRow="1" bandRow="1">
-                <a:tableStyleId>{5C22544A-7EE6-4342-B048-85BDC9FD1C3A}</a:tableStyleId>
-              </a:tblPr>
-              <a:tblGrid>
-                <a:gridCol w="1167492">
-                  <a:extLst>
-                    <a:ext uri="{9D8B030D-6E8A-4147-A177-3AD203B41FA5}">
-                      <a16:colId xmlns:a16="http://schemas.microsoft.com/office/drawing/2014/main" val="3847652623"/>
-                    </a:ext>
-                  </a:extLst>
-                </a:gridCol>
-                <a:gridCol w="5174766">
-                  <a:extLst>
-                    <a:ext uri="{9D8B030D-6E8A-4147-A177-3AD203B41FA5}">
-                      <a16:colId xmlns:a16="http://schemas.microsoft.com/office/drawing/2014/main" val="2160491202"/>
-                    </a:ext>
-                  </a:extLst>
-                </a:gridCol>
-              </a:tblGrid>
-              <a:tr h="788828">
-                <a:tc gridSpan="2">
-                  <a:txBody>
-                    <a:bodyPr/>
-                    <a:lstStyle/>
-                    <a:p>
-                      <a:pPr lvl="0">
-                        <a:buNone/>
-                      </a:pPr>
-                      <a:r>
-                        <a:rPr lang="en-US"/>
-                        <a:t>VTAC campaign headline </a:t>
-                      </a:r>
-                      <a:endParaRPr lang="en-US" sz="1400"/>
-                    </a:p>
-                    <a:p>
-                      <a:pPr lvl="0">
-                        <a:buNone/>
-                      </a:pPr>
-                      <a:r>
-                        <a:rPr lang="en-AU" sz="1400" b="0" i="0" u="none" strike="noStrike" noProof="0">
-                          <a:solidFill>
-                            <a:srgbClr val="FFFFFF"/>
-                          </a:solidFill>
-                          <a:latin typeface="Arial"/>
-                          <a:cs typeface="Arial"/>
-                        </a:rPr>
-                        <a:t>Only at RMIT can you... get real-world experience from day one. </a:t>
-                      </a:r>
-                      <a:endParaRPr lang="en-US" sz="1400"/>
-                    </a:p>
-                    <a:p>
-                      <a:pPr lvl="0">
-                        <a:buNone/>
-                      </a:pPr>
-                      <a:r>
-                        <a:rPr lang="en-AU" sz="1400" b="0" i="0" u="none" strike="noStrike" noProof="0">
-                          <a:solidFill>
-                            <a:srgbClr val="FFFFFF"/>
-                          </a:solidFill>
-                          <a:latin typeface="Arial"/>
-                          <a:cs typeface="Arial"/>
-                        </a:rPr>
-                        <a:t>Preference RMIT.</a:t>
-                      </a:r>
-                      <a:endParaRPr lang="en-US" sz="1400"/>
-                    </a:p>
-                  </a:txBody>
-                  <a:tcPr/>
-                </a:tc>
-                <a:tc hMerge="1">
-                  <a:txBody>
-                    <a:bodyPr/>
-                    <a:lstStyle/>
-                    <a:p>
-                      <a:endParaRPr lang="en-US"/>
-                    </a:p>
-                  </a:txBody>
-                  <a:tcPr/>
-                </a:tc>
-                <a:extLst>
-                  <a:ext uri="{0D108BD9-81ED-4DB2-BD59-A6C34878D82A}">
-                    <a16:rowId xmlns:a16="http://schemas.microsoft.com/office/drawing/2014/main" val="255047398"/>
-                  </a:ext>
-                </a:extLst>
-              </a:tr>
-              <a:tr h="3234988">
-                <a:tc>
-                  <a:txBody>
-                    <a:bodyPr/>
-                    <a:lstStyle/>
-                    <a:p>
-                      <a:r>
-                        <a:rPr lang="en-US"/>
-                        <a:t>30 sec script</a:t>
-                      </a:r>
-                    </a:p>
-                  </a:txBody>
-                  <a:tcPr/>
-                </a:tc>
-                <a:tc>
-                  <a:txBody>
-                    <a:bodyPr/>
-                    <a:lstStyle/>
-                    <a:p>
-                      <a:pPr marL="0" lvl="0">
-                        <a:buNone/>
-                      </a:pPr>
-                      <a:r>
-                        <a:rPr lang="en-US" sz="1400" b="1" i="0" u="none" strike="noStrike" noProof="0">
-                          <a:solidFill>
-                            <a:srgbClr val="000054"/>
-                          </a:solidFill>
-                          <a:latin typeface="Arial"/>
-                          <a:cs typeface="Arial"/>
-                        </a:rPr>
-                        <a:t>Only at RMIT can you…</a:t>
-                      </a:r>
-                      <a:endParaRPr lang="en-US" sz="1400" b="0" i="0" u="none" strike="noStrike" noProof="0">
-                        <a:solidFill>
-                          <a:srgbClr val="000054"/>
-                        </a:solidFill>
-                        <a:latin typeface="Arial"/>
-                        <a:cs typeface="Arial"/>
-                      </a:endParaRPr>
-                    </a:p>
-                    <a:p>
-                      <a:pPr marL="0" lvl="0">
-                        <a:buNone/>
-                      </a:pPr>
-                      <a:r>
-                        <a:rPr lang="en-US" sz="1400" b="0" i="0" u="none" strike="noStrike" noProof="0">
-                          <a:solidFill>
-                            <a:srgbClr val="000054"/>
-                          </a:solidFill>
-                          <a:latin typeface="Arial"/>
-                          <a:cs typeface="Arial"/>
-                        </a:rPr>
-                        <a:t>put theory into practice,</a:t>
-                      </a:r>
-                    </a:p>
-                    <a:p>
-                      <a:pPr marL="0" lvl="0">
-                        <a:buNone/>
-                      </a:pPr>
-                      <a:r>
-                        <a:rPr lang="en-US" sz="1400" b="0" i="0" u="none" strike="noStrike" noProof="0">
-                          <a:solidFill>
-                            <a:srgbClr val="000054"/>
-                          </a:solidFill>
-                          <a:latin typeface="Arial"/>
-                          <a:cs typeface="Arial"/>
-                        </a:rPr>
-                        <a:t>prepare for the work of tomorrow,</a:t>
-                      </a:r>
-                    </a:p>
-                    <a:p>
-                      <a:pPr marL="0" lvl="0">
-                        <a:buNone/>
-                      </a:pPr>
-                      <a:r>
-                        <a:rPr lang="en-US" sz="1400" b="0" i="0" u="none" strike="noStrike" noProof="0">
-                          <a:solidFill>
-                            <a:srgbClr val="000054"/>
-                          </a:solidFill>
-                          <a:latin typeface="Arial"/>
-                          <a:cs typeface="Arial"/>
-                        </a:rPr>
-                        <a:t>{wind or whooshing sound effect}</a:t>
-                      </a:r>
-                    </a:p>
-                    <a:p>
-                      <a:pPr marL="0" lvl="0">
-                        <a:buNone/>
-                      </a:pPr>
-                      <a:r>
-                        <a:rPr lang="en-US" sz="1400" b="0" i="0" u="none" strike="noStrike" noProof="0">
-                          <a:solidFill>
-                            <a:srgbClr val="000054"/>
-                          </a:solidFill>
-                          <a:latin typeface="Arial"/>
-                          <a:cs typeface="Arial"/>
-                        </a:rPr>
-                        <a:t>join a community that you vibe with,</a:t>
-                      </a:r>
-                    </a:p>
-                    <a:p>
-                      <a:pPr marL="0" lvl="0">
-                        <a:buNone/>
-                      </a:pPr>
-                      <a:r>
-                        <a:rPr lang="en-US" sz="1400" b="0" i="0" u="none" strike="noStrike" noProof="0">
-                          <a:solidFill>
-                            <a:srgbClr val="000054"/>
-                          </a:solidFill>
-                          <a:latin typeface="Arial"/>
-                          <a:cs typeface="Arial"/>
-                        </a:rPr>
-                        <a:t>{crowd chatter}</a:t>
-                      </a:r>
-                    </a:p>
-                    <a:p>
-                      <a:pPr marL="0" lvl="0">
-                        <a:buNone/>
-                      </a:pPr>
-                      <a:r>
-                        <a:rPr lang="en-US" sz="1400" b="0" i="0" u="none" strike="noStrike" noProof="0">
-                          <a:solidFill>
-                            <a:srgbClr val="000054"/>
-                          </a:solidFill>
-                          <a:latin typeface="Arial"/>
-                          <a:cs typeface="Arial"/>
-                        </a:rPr>
-                        <a:t>get practical with the latest tech,</a:t>
-                      </a:r>
-                    </a:p>
-                    <a:p>
-                      <a:pPr marL="0" lvl="0">
-                        <a:buNone/>
-                      </a:pPr>
-                      <a:r>
-                        <a:rPr lang="en-US" sz="1400" b="0" i="0" u="none" strike="noStrike" noProof="0">
-                          <a:solidFill>
-                            <a:srgbClr val="000054"/>
-                          </a:solidFill>
-                          <a:latin typeface="Arial"/>
-                          <a:cs typeface="Arial"/>
-                        </a:rPr>
-                        <a:t>{mechanical whirring}</a:t>
-                      </a:r>
-                    </a:p>
-                    <a:p>
-                      <a:pPr marL="0" lvl="0">
-                        <a:buNone/>
-                      </a:pPr>
-                      <a:r>
-                        <a:rPr lang="en-US" sz="1400" b="0" i="0" u="none" strike="noStrike" noProof="0">
-                          <a:solidFill>
-                            <a:srgbClr val="000054"/>
-                          </a:solidFill>
-                          <a:latin typeface="Arial"/>
-                          <a:cs typeface="Arial"/>
-                        </a:rPr>
-                        <a:t>learn from industry experts,</a:t>
-                      </a:r>
-                    </a:p>
-                    <a:p>
-                      <a:pPr marL="0" lvl="0">
-                        <a:buNone/>
-                      </a:pPr>
-                      <a:r>
-                        <a:rPr lang="en-US" sz="1400" b="0" i="0" u="none" strike="noStrike" noProof="0">
-                          <a:solidFill>
-                            <a:srgbClr val="000054"/>
-                          </a:solidFill>
-                          <a:latin typeface="Arial"/>
-                          <a:cs typeface="Arial"/>
-                        </a:rPr>
-                        <a:t>{clapping}</a:t>
-                      </a:r>
-                    </a:p>
-                    <a:p>
-                      <a:pPr marL="0" lvl="0">
-                        <a:buNone/>
-                      </a:pPr>
-                      <a:r>
-                        <a:rPr lang="en-US" sz="1400" b="0" i="0" u="none" strike="noStrike" noProof="0">
-                          <a:solidFill>
-                            <a:srgbClr val="000054"/>
-                          </a:solidFill>
-                          <a:latin typeface="Arial"/>
-                          <a:cs typeface="Arial"/>
-                        </a:rPr>
-                        <a:t>secure your future with a flexible pathway,</a:t>
-                      </a:r>
-                    </a:p>
-                    <a:p>
-                      <a:pPr marL="0" lvl="0">
-                        <a:buNone/>
-                      </a:pPr>
-                      <a:r>
-                        <a:rPr lang="en-US" sz="1400" b="0" i="0" u="none" strike="noStrike" noProof="0">
-                          <a:solidFill>
-                            <a:srgbClr val="000054"/>
-                          </a:solidFill>
-                          <a:latin typeface="Arial"/>
-                          <a:cs typeface="Arial"/>
-                        </a:rPr>
-                        <a:t>{footsteps}</a:t>
-                      </a:r>
-                    </a:p>
-                    <a:p>
-                      <a:pPr marL="0" lvl="0">
-                        <a:buNone/>
-                      </a:pPr>
-                      <a:r>
-                        <a:rPr lang="en-US" sz="1400" b="0" i="0" u="none" strike="noStrike" noProof="0">
-                          <a:solidFill>
-                            <a:srgbClr val="000054"/>
-                          </a:solidFill>
-                          <a:latin typeface="Arial"/>
-                          <a:cs typeface="Arial"/>
-                        </a:rPr>
-                        <a:t>and get real-world experience from day one.</a:t>
-                      </a:r>
-                    </a:p>
-                    <a:p>
-                      <a:pPr marL="0" lvl="0">
-                        <a:buNone/>
-                      </a:pPr>
-                      <a:r>
-                        <a:rPr lang="en-US" sz="1400" b="1" i="0" u="none" strike="noStrike" noProof="0">
-                          <a:solidFill>
-                            <a:srgbClr val="000054"/>
-                          </a:solidFill>
-                          <a:latin typeface="Arial"/>
-                          <a:cs typeface="Arial"/>
-                        </a:rPr>
-                        <a:t>Preference RMIT.</a:t>
-                      </a:r>
-                      <a:endParaRPr lang="en-US"/>
-                    </a:p>
-                  </a:txBody>
-                  <a:tcPr/>
-                </a:tc>
-                <a:extLst>
-                  <a:ext uri="{0D108BD9-81ED-4DB2-BD59-A6C34878D82A}">
-                    <a16:rowId xmlns:a16="http://schemas.microsoft.com/office/drawing/2014/main" val="1635963472"/>
-                  </a:ext>
-                </a:extLst>
-              </a:tr>
-            </a:tbl>
-          </a:graphicData>
-        </a:graphic>
-      </p:graphicFrame>
+      <p:pic>
+        <p:nvPicPr>
+          <p:cNvPr id="8" name="Picture 7">
+            <a:extLst>
+              <a:ext uri="{FF2B5EF4-FFF2-40B4-BE49-F238E27FC236}">
+                <a16:creationId xmlns:a16="http://schemas.microsoft.com/office/drawing/2014/main" id="{CE8EE377-B055-3039-A0C3-5D6310E25FFC}"/>
+              </a:ext>
+            </a:extLst>
+          </p:cNvPr>
+          <p:cNvPicPr>
+            <a:picLocks noChangeAspect="1"/>
+          </p:cNvPicPr>
+          <p:nvPr/>
+        </p:nvPicPr>
+        <p:blipFill>
+          <a:blip r:embed="rId2"/>
+          <a:stretch>
+            <a:fillRect/>
+          </a:stretch>
+        </p:blipFill>
+        <p:spPr>
+          <a:xfrm>
+            <a:off x="3896335" y="1143377"/>
+            <a:ext cx="4454885" cy="1369886"/>
+          </a:xfrm>
+          <a:prstGeom prst="rect">
+            <a:avLst/>
+          </a:prstGeom>
+        </p:spPr>
+      </p:pic>
+      <p:pic>
+        <p:nvPicPr>
+          <p:cNvPr id="12" name="Picture 11">
+            <a:extLst>
+              <a:ext uri="{FF2B5EF4-FFF2-40B4-BE49-F238E27FC236}">
+                <a16:creationId xmlns:a16="http://schemas.microsoft.com/office/drawing/2014/main" id="{BCF4C9D9-1F3B-9F64-F700-9F7809B536C6}"/>
+              </a:ext>
+            </a:extLst>
+          </p:cNvPr>
+          <p:cNvPicPr>
+            <a:picLocks noChangeAspect="1"/>
+          </p:cNvPicPr>
+          <p:nvPr/>
+        </p:nvPicPr>
+        <p:blipFill>
+          <a:blip r:embed="rId3"/>
+          <a:stretch>
+            <a:fillRect/>
+          </a:stretch>
+        </p:blipFill>
+        <p:spPr>
+          <a:xfrm>
+            <a:off x="3896335" y="2677967"/>
+            <a:ext cx="4454885" cy="1411707"/>
+          </a:xfrm>
+          <a:prstGeom prst="rect">
+            <a:avLst/>
+          </a:prstGeom>
+        </p:spPr>
+      </p:pic>
     </p:spTree>
     <p:extLst>
       <p:ext uri="{BB962C8B-B14F-4D97-AF65-F5344CB8AC3E}">
-        <p14:creationId xmlns:p14="http://schemas.microsoft.com/office/powerpoint/2010/main" val="41677334"/>
+        <p14:creationId xmlns:p14="http://schemas.microsoft.com/office/powerpoint/2010/main" val="882642451"/>
       </p:ext>
     </p:extLst>
   </p:cSld>
@@ -7245,7 +8325,13 @@
   <p:cSld>
     <p:spTree>
       <p:nvGrpSpPr>
-        <p:cNvPr id="1" name=""/>
+        <p:cNvPr id="1" name="">
+          <a:extLst>
+            <a:ext uri="{FF2B5EF4-FFF2-40B4-BE49-F238E27FC236}">
+              <a16:creationId xmlns:a16="http://schemas.microsoft.com/office/drawing/2014/main" id="{48F806C0-1FFF-25C8-1135-76D1A64319B8}"/>
+            </a:ext>
+          </a:extLst>
+        </p:cNvPr>
         <p:cNvGrpSpPr/>
         <p:nvPr/>
       </p:nvGrpSpPr>
@@ -7259,10 +8345,10 @@
       </p:grpSpPr>
       <p:sp>
         <p:nvSpPr>
-          <p:cNvPr id="2" name="Title 1">
-            <a:extLst>
-              <a:ext uri="{FF2B5EF4-FFF2-40B4-BE49-F238E27FC236}">
-                <a16:creationId xmlns:a16="http://schemas.microsoft.com/office/drawing/2014/main" id="{EF828372-F88C-0FA0-7F8B-E3EBFB581B49}"/>
+          <p:cNvPr id="3" name="Subtitle 2">
+            <a:extLst>
+              <a:ext uri="{FF2B5EF4-FFF2-40B4-BE49-F238E27FC236}">
+                <a16:creationId xmlns:a16="http://schemas.microsoft.com/office/drawing/2014/main" id="{E02C759A-09E1-3756-D2D5-4881CB5F1A8F}"/>
               </a:ext>
             </a:extLst>
           </p:cNvPr>
@@ -7270,166 +8356,332 @@
             <a:spLocks noGrp="1"/>
           </p:cNvSpPr>
           <p:nvPr>
-            <p:ph type="title"/>
+            <p:ph type="subTitle" idx="1"/>
           </p:nvPr>
         </p:nvSpPr>
-        <p:spPr/>
+        <p:spPr>
+          <a:xfrm>
+            <a:off x="419708" y="372429"/>
+            <a:ext cx="2174846" cy="613562"/>
+          </a:xfrm>
+        </p:spPr>
         <p:txBody>
           <a:bodyPr/>
           <a:lstStyle/>
           <a:p>
             <a:r>
               <a:rPr lang="en-US">
-                <a:cs typeface="Arial"/>
+                <a:highlight>
+                  <a:srgbClr val="000054"/>
+                </a:highlight>
               </a:rPr>
-              <a:t>Feedback recap from 15 July </a:t>
-            </a:r>
-            <a:endParaRPr lang="en-US"/>
+              <a:t>Dashboard</a:t>
+            </a:r>
+          </a:p>
+          <a:p>
+            <a:r>
+              <a:rPr lang="en-US">
+                <a:highlight>
+                  <a:srgbClr val="000054"/>
+                </a:highlight>
+              </a:rPr>
+              <a:t>breakdown</a:t>
+            </a:r>
+          </a:p>
+          <a:p>
+            <a:endParaRPr lang="en-US">
+              <a:cs typeface="Arial" panose="020B0604020202020204"/>
+            </a:endParaRPr>
+          </a:p>
+          <a:p>
+            <a:endParaRPr lang="en-AU">
+              <a:cs typeface="Arial" panose="020B0604020202020204"/>
+            </a:endParaRPr>
           </a:p>
         </p:txBody>
       </p:sp>
       <p:sp>
         <p:nvSpPr>
-          <p:cNvPr id="3" name="Text Placeholder 2">
-            <a:extLst>
-              <a:ext uri="{FF2B5EF4-FFF2-40B4-BE49-F238E27FC236}">
-                <a16:creationId xmlns:a16="http://schemas.microsoft.com/office/drawing/2014/main" id="{833CDC7A-6DFE-DD75-A7FC-BE6D2BD0F163}"/>
-              </a:ext>
-            </a:extLst>
-          </p:cNvPr>
-          <p:cNvSpPr>
-            <a:spLocks noGrp="1"/>
+          <p:cNvPr id="10" name="Subtitle 2">
+            <a:extLst>
+              <a:ext uri="{FF2B5EF4-FFF2-40B4-BE49-F238E27FC236}">
+                <a16:creationId xmlns:a16="http://schemas.microsoft.com/office/drawing/2014/main" id="{45ADDAA4-68D4-839B-BA85-D2E3C3E70BBE}"/>
+              </a:ext>
+            </a:extLst>
+          </p:cNvPr>
+          <p:cNvSpPr txBox="1">
+            <a:spLocks/>
           </p:cNvSpPr>
-          <p:nvPr>
-            <p:ph type="body" sz="quarter" idx="10"/>
-          </p:nvPr>
+          <p:nvPr/>
         </p:nvSpPr>
-        <p:spPr/>
+        <p:spPr>
+          <a:xfrm>
+            <a:off x="387382" y="1764241"/>
+            <a:ext cx="3094546" cy="2600204"/>
+          </a:xfrm>
+          <a:prstGeom prst="rect">
+            <a:avLst/>
+          </a:prstGeom>
+        </p:spPr>
         <p:txBody>
-          <a:bodyPr/>
-          <a:lstStyle/>
-          <a:p>
-            <a:pPr marL="285750" indent="-285750">
-              <a:buFont typeface="Arial"/>
-              <a:buChar char="•"/>
-            </a:pPr>
-            <a:r>
-              <a:rPr lang="en-US" b="1">
-                <a:ea typeface="+mn-lt"/>
-                <a:cs typeface="+mn-lt"/>
+          <a:bodyPr vert="horz" lIns="91440" tIns="45720" rIns="91440" bIns="45720" rtlCol="0" anchor="t" anchorCtr="0">
+            <a:noAutofit/>
+          </a:bodyPr>
+          <a:lstStyle>
+            <a:lvl1pPr marL="0" indent="0" algn="l" defTabSz="685783" rtl="0" eaLnBrk="1" latinLnBrk="0" hangingPunct="1">
+              <a:lnSpc>
+                <a:spcPct val="100000"/>
+              </a:lnSpc>
+              <a:spcBef>
+                <a:spcPts val="300"/>
+              </a:spcBef>
+              <a:spcAft>
+                <a:spcPts val="300"/>
+              </a:spcAft>
+              <a:buFont typeface="Arial" panose="020B0604020202020204" pitchFamily="34" charset="0"/>
+              <a:buNone/>
+              <a:defRPr sz="2700" b="1" kern="1200" baseline="0">
+                <a:solidFill>
+                  <a:schemeClr val="bg1"/>
+                </a:solidFill>
+                <a:latin typeface="+mn-lt"/>
+                <a:ea typeface="+mn-ea"/>
+                <a:cs typeface="+mn-cs"/>
+              </a:defRPr>
+            </a:lvl1pPr>
+            <a:lvl2pPr marL="342892" indent="0" algn="ctr" defTabSz="685783" rtl="0" eaLnBrk="1" latinLnBrk="0" hangingPunct="1">
+              <a:lnSpc>
+                <a:spcPct val="100000"/>
+              </a:lnSpc>
+              <a:spcBef>
+                <a:spcPts val="300"/>
+              </a:spcBef>
+              <a:spcAft>
+                <a:spcPts val="300"/>
+              </a:spcAft>
+              <a:buClr>
+                <a:schemeClr val="accent2"/>
+              </a:buClr>
+              <a:buFont typeface="Wingdings" pitchFamily="2" charset="2"/>
+              <a:buNone/>
+              <a:tabLst/>
+              <a:defRPr sz="1500" kern="1200">
+                <a:solidFill>
+                  <a:schemeClr val="tx1"/>
+                </a:solidFill>
+                <a:latin typeface="+mn-lt"/>
+                <a:ea typeface="+mn-ea"/>
+                <a:cs typeface="+mn-cs"/>
+              </a:defRPr>
+            </a:lvl2pPr>
+            <a:lvl3pPr marL="685783" indent="0" algn="ctr" defTabSz="685783" rtl="0" eaLnBrk="1" latinLnBrk="0" hangingPunct="1">
+              <a:lnSpc>
+                <a:spcPct val="90000"/>
+              </a:lnSpc>
+              <a:spcBef>
+                <a:spcPts val="300"/>
+              </a:spcBef>
+              <a:spcAft>
+                <a:spcPts val="300"/>
+              </a:spcAft>
+              <a:buClr>
+                <a:schemeClr val="accent2"/>
+              </a:buClr>
+              <a:buFont typeface="Wingdings" pitchFamily="2" charset="2"/>
+              <a:buNone/>
+              <a:tabLst/>
+              <a:defRPr lang="en-US" sz="1350" kern="1200" baseline="0">
+                <a:solidFill>
+                  <a:schemeClr val="tx1"/>
+                </a:solidFill>
+                <a:latin typeface="+mn-lt"/>
+                <a:ea typeface="+mn-ea"/>
+                <a:cs typeface="+mn-cs"/>
+              </a:defRPr>
+            </a:lvl3pPr>
+            <a:lvl4pPr marL="1028675" indent="0" algn="ctr" defTabSz="685783" rtl="0" eaLnBrk="1" latinLnBrk="0" hangingPunct="1">
+              <a:lnSpc>
+                <a:spcPct val="90000"/>
+              </a:lnSpc>
+              <a:spcBef>
+                <a:spcPts val="375"/>
+              </a:spcBef>
+              <a:buClr>
+                <a:schemeClr val="accent4"/>
+              </a:buClr>
+              <a:buFont typeface="Wingdings" pitchFamily="2" charset="2"/>
+              <a:buNone/>
+              <a:defRPr sz="1200" kern="1200">
+                <a:solidFill>
+                  <a:schemeClr val="tx1"/>
+                </a:solidFill>
+                <a:latin typeface="+mn-lt"/>
+                <a:ea typeface="+mn-ea"/>
+                <a:cs typeface="+mn-cs"/>
+              </a:defRPr>
+            </a:lvl4pPr>
+            <a:lvl5pPr marL="1371566" indent="0" algn="ctr" defTabSz="685783" rtl="0" eaLnBrk="1" latinLnBrk="0" hangingPunct="1">
+              <a:lnSpc>
+                <a:spcPct val="90000"/>
+              </a:lnSpc>
+              <a:spcBef>
+                <a:spcPts val="375"/>
+              </a:spcBef>
+              <a:buFont typeface="Arial" panose="020B0604020202020204" pitchFamily="34" charset="0"/>
+              <a:buNone/>
+              <a:defRPr sz="1200" kern="1200">
+                <a:solidFill>
+                  <a:schemeClr val="tx1"/>
+                </a:solidFill>
+                <a:latin typeface="+mn-lt"/>
+                <a:ea typeface="+mn-ea"/>
+                <a:cs typeface="+mn-cs"/>
+              </a:defRPr>
+            </a:lvl5pPr>
+            <a:lvl6pPr marL="1714457" indent="0" algn="ctr" defTabSz="685783" rtl="0" eaLnBrk="1" latinLnBrk="0" hangingPunct="1">
+              <a:lnSpc>
+                <a:spcPct val="90000"/>
+              </a:lnSpc>
+              <a:spcBef>
+                <a:spcPts val="375"/>
+              </a:spcBef>
+              <a:buFont typeface="Arial" panose="020B0604020202020204" pitchFamily="34" charset="0"/>
+              <a:buNone/>
+              <a:defRPr sz="1200" kern="1200">
+                <a:solidFill>
+                  <a:schemeClr val="tx1"/>
+                </a:solidFill>
+                <a:latin typeface="+mn-lt"/>
+                <a:ea typeface="+mn-ea"/>
+                <a:cs typeface="+mn-cs"/>
+              </a:defRPr>
+            </a:lvl6pPr>
+            <a:lvl7pPr marL="2057348" indent="0" algn="ctr" defTabSz="685783" rtl="0" eaLnBrk="1" latinLnBrk="0" hangingPunct="1">
+              <a:lnSpc>
+                <a:spcPct val="90000"/>
+              </a:lnSpc>
+              <a:spcBef>
+                <a:spcPts val="375"/>
+              </a:spcBef>
+              <a:buFont typeface="Arial" panose="020B0604020202020204" pitchFamily="34" charset="0"/>
+              <a:buNone/>
+              <a:defRPr sz="1200" kern="1200">
+                <a:solidFill>
+                  <a:schemeClr val="tx1"/>
+                </a:solidFill>
+                <a:latin typeface="+mn-lt"/>
+                <a:ea typeface="+mn-ea"/>
+                <a:cs typeface="+mn-cs"/>
+              </a:defRPr>
+            </a:lvl7pPr>
+            <a:lvl8pPr marL="2400240" indent="0" algn="ctr" defTabSz="685783" rtl="0" eaLnBrk="1" latinLnBrk="0" hangingPunct="1">
+              <a:lnSpc>
+                <a:spcPct val="90000"/>
+              </a:lnSpc>
+              <a:spcBef>
+                <a:spcPts val="375"/>
+              </a:spcBef>
+              <a:buFont typeface="Arial" panose="020B0604020202020204" pitchFamily="34" charset="0"/>
+              <a:buNone/>
+              <a:defRPr sz="1200" kern="1200">
+                <a:solidFill>
+                  <a:schemeClr val="tx1"/>
+                </a:solidFill>
+                <a:latin typeface="+mn-lt"/>
+                <a:ea typeface="+mn-ea"/>
+                <a:cs typeface="+mn-cs"/>
+              </a:defRPr>
+            </a:lvl8pPr>
+            <a:lvl9pPr marL="2743132" indent="0" algn="ctr" defTabSz="685783" rtl="0" eaLnBrk="1" latinLnBrk="0" hangingPunct="1">
+              <a:lnSpc>
+                <a:spcPct val="90000"/>
+              </a:lnSpc>
+              <a:spcBef>
+                <a:spcPts val="375"/>
+              </a:spcBef>
+              <a:buFont typeface="Arial" panose="020B0604020202020204" pitchFamily="34" charset="0"/>
+              <a:buNone/>
+              <a:defRPr sz="1200" kern="1200">
+                <a:solidFill>
+                  <a:schemeClr val="tx1"/>
+                </a:solidFill>
+                <a:latin typeface="+mn-lt"/>
+                <a:ea typeface="+mn-ea"/>
+                <a:cs typeface="+mn-cs"/>
+              </a:defRPr>
+            </a:lvl9pPr>
+          </a:lstStyle>
+          <a:p>
+            <a:r>
+              <a:rPr lang="en-US" sz="1000">
+                <a:highlight>
+                  <a:srgbClr val="000054"/>
+                </a:highlight>
               </a:rPr>
-              <a:t>Filter gradient: </a:t>
-            </a:r>
-            <a:r>
-              <a:rPr lang="en-US">
-                <a:ea typeface="+mn-lt"/>
-                <a:cs typeface="+mn-lt"/>
+              <a:t>Asset mix</a:t>
+            </a:r>
+          </a:p>
+          <a:p>
+            <a:r>
+              <a:rPr lang="en-US" sz="800" b="0"/>
+              <a:t>The breakdown of what was produced — statics, display ads, video, print — as a share of the total.</a:t>
+            </a:r>
+          </a:p>
+          <a:p>
+            <a:endParaRPr lang="en-US" sz="800" b="0"/>
+          </a:p>
+          <a:p>
+            <a:r>
+              <a:rPr lang="en-US" sz="1000">
+                <a:highlight>
+                  <a:srgbClr val="000054"/>
+                </a:highlight>
               </a:rPr>
-              <a:t>shifted to prioritize RMIT red more. </a:t>
-            </a:r>
-            <a:endParaRPr lang="en-US"/>
-          </a:p>
-          <a:p>
-            <a:pPr marL="285750" indent="-285750">
-              <a:buFont typeface="Arial"/>
-              <a:buChar char="•"/>
-            </a:pPr>
-            <a:r>
-              <a:rPr lang="en-US" b="1">
-                <a:ea typeface="+mn-lt"/>
-                <a:cs typeface="+mn-lt"/>
-              </a:rPr>
-              <a:t>Pref. Lockup: </a:t>
-            </a:r>
-            <a:r>
-              <a:rPr lang="en-US">
-                <a:ea typeface="+mn-lt"/>
-                <a:cs typeface="+mn-lt"/>
-              </a:rPr>
-              <a:t>offset added, it should now look more aligned with Only at...lockup.</a:t>
-            </a:r>
-            <a:endParaRPr lang="en-US"/>
-          </a:p>
-          <a:p>
-            <a:pPr marL="285750" indent="-285750">
-              <a:buFont typeface="Arial"/>
-              <a:buChar char="•"/>
-            </a:pPr>
-            <a:r>
-              <a:rPr lang="en-US" b="1">
-                <a:ea typeface="+mn-lt"/>
-                <a:cs typeface="+mn-lt"/>
-              </a:rPr>
-              <a:t>Text and copy:</a:t>
-            </a:r>
-            <a:r>
-              <a:rPr lang="en-US">
-                <a:ea typeface="+mn-lt"/>
-                <a:cs typeface="+mn-lt"/>
-              </a:rPr>
-              <a:t> </a:t>
-            </a:r>
-            <a:r>
-              <a:rPr lang="en-US" sz="1600">
-                <a:ea typeface="+mn-lt"/>
-                <a:cs typeface="+mn-lt"/>
-              </a:rPr>
-              <a:t>"Only at Open Day" approach, using offset text, varied font sizes and a bit more hierarchy to give it greater impact.</a:t>
-            </a:r>
-          </a:p>
-          <a:p>
-            <a:pPr marL="285750" indent="-285750">
-              <a:buFont typeface="Arial"/>
-              <a:buChar char="•"/>
-            </a:pPr>
-            <a:r>
-              <a:rPr lang="en-US" b="1">
-                <a:ea typeface="+mn-lt"/>
-                <a:cs typeface="+mn-lt"/>
-              </a:rPr>
-              <a:t>Video storyboard: </a:t>
-            </a:r>
-            <a:r>
-              <a:rPr lang="en-US">
-                <a:ea typeface="+mn-lt"/>
-                <a:cs typeface="+mn-lt"/>
-              </a:rPr>
-              <a:t>since Jane did have a few comments on swapping some of the footage, those have been updated to reflect our latest selection (along with the adjusted filter, of course)</a:t>
-            </a:r>
-            <a:endParaRPr lang="en-US"/>
-          </a:p>
-          <a:p>
-            <a:pPr marL="285750" indent="-285750">
-              <a:buFont typeface="Arial"/>
-              <a:buChar char="•"/>
-            </a:pPr>
-            <a:r>
-              <a:rPr lang="en-US" b="1">
-                <a:ea typeface="+mn-lt"/>
-                <a:cs typeface="+mn-lt"/>
-              </a:rPr>
-              <a:t>Digital display:</a:t>
-            </a:r>
-            <a:r>
-              <a:rPr lang="en-US">
-                <a:ea typeface="+mn-lt"/>
-                <a:cs typeface="+mn-lt"/>
-              </a:rPr>
-              <a:t> Filter and layout adjusted, for no-image sets (size constrains), we're proposing 2 options: pure red and a red-dominant gradient with a touch of navy so they are still somewhat visually connected to other assets</a:t>
-            </a:r>
-            <a:endParaRPr lang="en-US"/>
-          </a:p>
-          <a:p>
-            <a:endParaRPr lang="en-US">
-              <a:cs typeface="Arial"/>
-            </a:endParaRPr>
+              <a:t>Work type mix</a:t>
+            </a:r>
+          </a:p>
+          <a:p>
+            <a:r>
+              <a:rPr lang="en-US" sz="800" b="0"/>
+              <a:t>The breakdown of what kind of work it took to get there — editing, design, concepting — not just outputs.</a:t>
+            </a:r>
           </a:p>
         </p:txBody>
       </p:sp>
+      <p:pic>
+        <p:nvPicPr>
+          <p:cNvPr id="4" name="Picture 3">
+            <a:extLst>
+              <a:ext uri="{FF2B5EF4-FFF2-40B4-BE49-F238E27FC236}">
+                <a16:creationId xmlns:a16="http://schemas.microsoft.com/office/drawing/2014/main" id="{BD5A76FD-9770-DEC6-88BB-607C54143B41}"/>
+              </a:ext>
+            </a:extLst>
+          </p:cNvPr>
+          <p:cNvPicPr>
+            <a:picLocks noChangeAspect="1"/>
+          </p:cNvPicPr>
+          <p:nvPr/>
+        </p:nvPicPr>
+        <p:blipFill>
+          <a:blip r:embed="rId2"/>
+          <a:stretch>
+            <a:fillRect/>
+          </a:stretch>
+        </p:blipFill>
+        <p:spPr>
+          <a:xfrm>
+            <a:off x="3716950" y="1716190"/>
+            <a:ext cx="5199472" cy="1847352"/>
+          </a:xfrm>
+          <a:prstGeom prst="rect">
+            <a:avLst/>
+          </a:prstGeom>
+        </p:spPr>
+      </p:pic>
     </p:spTree>
     <p:extLst>
       <p:ext uri="{BB962C8B-B14F-4D97-AF65-F5344CB8AC3E}">
-        <p14:creationId xmlns:p14="http://schemas.microsoft.com/office/powerpoint/2010/main" val="141687919"/>
+        <p14:creationId xmlns:p14="http://schemas.microsoft.com/office/powerpoint/2010/main" val="443350337"/>
       </p:ext>
     </p:extLst>
   </p:cSld>
@@ -7447,7 +8699,1135 @@
         <p:cNvPr id="1" name="">
           <a:extLst>
             <a:ext uri="{FF2B5EF4-FFF2-40B4-BE49-F238E27FC236}">
-              <a16:creationId xmlns:a16="http://schemas.microsoft.com/office/drawing/2014/main" id="{6602E6EB-CC7F-FA5C-BD1C-F0F9C14A0A0E}"/>
+              <a16:creationId xmlns:a16="http://schemas.microsoft.com/office/drawing/2014/main" id="{ABBA5B7A-D7B6-C073-1E83-F6AA095C4883}"/>
+            </a:ext>
+          </a:extLst>
+        </p:cNvPr>
+        <p:cNvGrpSpPr/>
+        <p:nvPr/>
+      </p:nvGrpSpPr>
+      <p:grpSpPr>
+        <a:xfrm>
+          <a:off x="0" y="0"/>
+          <a:ext cx="0" cy="0"/>
+          <a:chOff x="0" y="0"/>
+          <a:chExt cx="0" cy="0"/>
+        </a:xfrm>
+      </p:grpSpPr>
+      <p:pic>
+        <p:nvPicPr>
+          <p:cNvPr id="18" name="Picture 17">
+            <a:extLst>
+              <a:ext uri="{FF2B5EF4-FFF2-40B4-BE49-F238E27FC236}">
+                <a16:creationId xmlns:a16="http://schemas.microsoft.com/office/drawing/2014/main" id="{5C3103A4-E597-61BA-26C7-8C886D637733}"/>
+              </a:ext>
+            </a:extLst>
+          </p:cNvPr>
+          <p:cNvPicPr>
+            <a:picLocks noChangeAspect="1"/>
+          </p:cNvPicPr>
+          <p:nvPr/>
+        </p:nvPicPr>
+        <p:blipFill>
+          <a:blip r:embed="rId2"/>
+          <a:stretch>
+            <a:fillRect/>
+          </a:stretch>
+        </p:blipFill>
+        <p:spPr>
+          <a:xfrm>
+            <a:off x="3360308" y="342233"/>
+            <a:ext cx="4961488" cy="2018090"/>
+          </a:xfrm>
+          <a:prstGeom prst="rect">
+            <a:avLst/>
+          </a:prstGeom>
+        </p:spPr>
+      </p:pic>
+      <p:pic>
+        <p:nvPicPr>
+          <p:cNvPr id="20" name="Picture 19">
+            <a:extLst>
+              <a:ext uri="{FF2B5EF4-FFF2-40B4-BE49-F238E27FC236}">
+                <a16:creationId xmlns:a16="http://schemas.microsoft.com/office/drawing/2014/main" id="{B79CA132-529E-751A-F4E1-B27731041CE3}"/>
+              </a:ext>
+            </a:extLst>
+          </p:cNvPr>
+          <p:cNvPicPr>
+            <a:picLocks noChangeAspect="1"/>
+          </p:cNvPicPr>
+          <p:nvPr/>
+        </p:nvPicPr>
+        <p:blipFill>
+          <a:blip r:embed="rId3"/>
+          <a:stretch>
+            <a:fillRect/>
+          </a:stretch>
+        </p:blipFill>
+        <p:spPr>
+          <a:xfrm>
+            <a:off x="3360308" y="2429915"/>
+            <a:ext cx="4958670" cy="2200642"/>
+          </a:xfrm>
+          <a:prstGeom prst="rect">
+            <a:avLst/>
+          </a:prstGeom>
+        </p:spPr>
+      </p:pic>
+      <p:sp>
+        <p:nvSpPr>
+          <p:cNvPr id="5" name="Subtitle 2">
+            <a:extLst>
+              <a:ext uri="{FF2B5EF4-FFF2-40B4-BE49-F238E27FC236}">
+                <a16:creationId xmlns:a16="http://schemas.microsoft.com/office/drawing/2014/main" id="{2D69F2AF-2002-6B4A-E4ED-2664B0BD401F}"/>
+              </a:ext>
+            </a:extLst>
+          </p:cNvPr>
+          <p:cNvSpPr txBox="1">
+            <a:spLocks/>
+          </p:cNvSpPr>
+          <p:nvPr/>
+        </p:nvSpPr>
+        <p:spPr>
+          <a:xfrm>
+            <a:off x="419708" y="372429"/>
+            <a:ext cx="2174846" cy="613562"/>
+          </a:xfrm>
+          <a:prstGeom prst="rect">
+            <a:avLst/>
+          </a:prstGeom>
+        </p:spPr>
+        <p:txBody>
+          <a:bodyPr vert="horz" lIns="91440" tIns="45720" rIns="91440" bIns="45720" rtlCol="0" anchor="t" anchorCtr="0">
+            <a:noAutofit/>
+          </a:bodyPr>
+          <a:lstStyle>
+            <a:lvl1pPr marL="0" indent="0" algn="l" defTabSz="685783" rtl="0" eaLnBrk="1" latinLnBrk="0" hangingPunct="1">
+              <a:lnSpc>
+                <a:spcPct val="100000"/>
+              </a:lnSpc>
+              <a:spcBef>
+                <a:spcPts val="300"/>
+              </a:spcBef>
+              <a:spcAft>
+                <a:spcPts val="300"/>
+              </a:spcAft>
+              <a:buFont typeface="Arial" panose="020B0604020202020204" pitchFamily="34" charset="0"/>
+              <a:buNone/>
+              <a:defRPr sz="2700" b="1" kern="1200" baseline="0">
+                <a:solidFill>
+                  <a:schemeClr val="bg1"/>
+                </a:solidFill>
+                <a:latin typeface="+mn-lt"/>
+                <a:ea typeface="+mn-ea"/>
+                <a:cs typeface="+mn-cs"/>
+              </a:defRPr>
+            </a:lvl1pPr>
+            <a:lvl2pPr marL="342892" indent="0" algn="ctr" defTabSz="685783" rtl="0" eaLnBrk="1" latinLnBrk="0" hangingPunct="1">
+              <a:lnSpc>
+                <a:spcPct val="100000"/>
+              </a:lnSpc>
+              <a:spcBef>
+                <a:spcPts val="300"/>
+              </a:spcBef>
+              <a:spcAft>
+                <a:spcPts val="300"/>
+              </a:spcAft>
+              <a:buClr>
+                <a:schemeClr val="accent2"/>
+              </a:buClr>
+              <a:buFont typeface="Wingdings" pitchFamily="2" charset="2"/>
+              <a:buNone/>
+              <a:tabLst/>
+              <a:defRPr sz="1500" kern="1200">
+                <a:solidFill>
+                  <a:schemeClr val="tx1"/>
+                </a:solidFill>
+                <a:latin typeface="+mn-lt"/>
+                <a:ea typeface="+mn-ea"/>
+                <a:cs typeface="+mn-cs"/>
+              </a:defRPr>
+            </a:lvl2pPr>
+            <a:lvl3pPr marL="685783" indent="0" algn="ctr" defTabSz="685783" rtl="0" eaLnBrk="1" latinLnBrk="0" hangingPunct="1">
+              <a:lnSpc>
+                <a:spcPct val="90000"/>
+              </a:lnSpc>
+              <a:spcBef>
+                <a:spcPts val="300"/>
+              </a:spcBef>
+              <a:spcAft>
+                <a:spcPts val="300"/>
+              </a:spcAft>
+              <a:buClr>
+                <a:schemeClr val="accent2"/>
+              </a:buClr>
+              <a:buFont typeface="Wingdings" pitchFamily="2" charset="2"/>
+              <a:buNone/>
+              <a:tabLst/>
+              <a:defRPr lang="en-US" sz="1350" kern="1200" baseline="0">
+                <a:solidFill>
+                  <a:schemeClr val="tx1"/>
+                </a:solidFill>
+                <a:latin typeface="+mn-lt"/>
+                <a:ea typeface="+mn-ea"/>
+                <a:cs typeface="+mn-cs"/>
+              </a:defRPr>
+            </a:lvl3pPr>
+            <a:lvl4pPr marL="1028675" indent="0" algn="ctr" defTabSz="685783" rtl="0" eaLnBrk="1" latinLnBrk="0" hangingPunct="1">
+              <a:lnSpc>
+                <a:spcPct val="90000"/>
+              </a:lnSpc>
+              <a:spcBef>
+                <a:spcPts val="375"/>
+              </a:spcBef>
+              <a:buClr>
+                <a:schemeClr val="accent4"/>
+              </a:buClr>
+              <a:buFont typeface="Wingdings" pitchFamily="2" charset="2"/>
+              <a:buNone/>
+              <a:defRPr sz="1200" kern="1200">
+                <a:solidFill>
+                  <a:schemeClr val="tx1"/>
+                </a:solidFill>
+                <a:latin typeface="+mn-lt"/>
+                <a:ea typeface="+mn-ea"/>
+                <a:cs typeface="+mn-cs"/>
+              </a:defRPr>
+            </a:lvl4pPr>
+            <a:lvl5pPr marL="1371566" indent="0" algn="ctr" defTabSz="685783" rtl="0" eaLnBrk="1" latinLnBrk="0" hangingPunct="1">
+              <a:lnSpc>
+                <a:spcPct val="90000"/>
+              </a:lnSpc>
+              <a:spcBef>
+                <a:spcPts val="375"/>
+              </a:spcBef>
+              <a:buFont typeface="Arial" panose="020B0604020202020204" pitchFamily="34" charset="0"/>
+              <a:buNone/>
+              <a:defRPr sz="1200" kern="1200">
+                <a:solidFill>
+                  <a:schemeClr val="tx1"/>
+                </a:solidFill>
+                <a:latin typeface="+mn-lt"/>
+                <a:ea typeface="+mn-ea"/>
+                <a:cs typeface="+mn-cs"/>
+              </a:defRPr>
+            </a:lvl5pPr>
+            <a:lvl6pPr marL="1714457" indent="0" algn="ctr" defTabSz="685783" rtl="0" eaLnBrk="1" latinLnBrk="0" hangingPunct="1">
+              <a:lnSpc>
+                <a:spcPct val="90000"/>
+              </a:lnSpc>
+              <a:spcBef>
+                <a:spcPts val="375"/>
+              </a:spcBef>
+              <a:buFont typeface="Arial" panose="020B0604020202020204" pitchFamily="34" charset="0"/>
+              <a:buNone/>
+              <a:defRPr sz="1200" kern="1200">
+                <a:solidFill>
+                  <a:schemeClr val="tx1"/>
+                </a:solidFill>
+                <a:latin typeface="+mn-lt"/>
+                <a:ea typeface="+mn-ea"/>
+                <a:cs typeface="+mn-cs"/>
+              </a:defRPr>
+            </a:lvl6pPr>
+            <a:lvl7pPr marL="2057348" indent="0" algn="ctr" defTabSz="685783" rtl="0" eaLnBrk="1" latinLnBrk="0" hangingPunct="1">
+              <a:lnSpc>
+                <a:spcPct val="90000"/>
+              </a:lnSpc>
+              <a:spcBef>
+                <a:spcPts val="375"/>
+              </a:spcBef>
+              <a:buFont typeface="Arial" panose="020B0604020202020204" pitchFamily="34" charset="0"/>
+              <a:buNone/>
+              <a:defRPr sz="1200" kern="1200">
+                <a:solidFill>
+                  <a:schemeClr val="tx1"/>
+                </a:solidFill>
+                <a:latin typeface="+mn-lt"/>
+                <a:ea typeface="+mn-ea"/>
+                <a:cs typeface="+mn-cs"/>
+              </a:defRPr>
+            </a:lvl7pPr>
+            <a:lvl8pPr marL="2400240" indent="0" algn="ctr" defTabSz="685783" rtl="0" eaLnBrk="1" latinLnBrk="0" hangingPunct="1">
+              <a:lnSpc>
+                <a:spcPct val="90000"/>
+              </a:lnSpc>
+              <a:spcBef>
+                <a:spcPts val="375"/>
+              </a:spcBef>
+              <a:buFont typeface="Arial" panose="020B0604020202020204" pitchFamily="34" charset="0"/>
+              <a:buNone/>
+              <a:defRPr sz="1200" kern="1200">
+                <a:solidFill>
+                  <a:schemeClr val="tx1"/>
+                </a:solidFill>
+                <a:latin typeface="+mn-lt"/>
+                <a:ea typeface="+mn-ea"/>
+                <a:cs typeface="+mn-cs"/>
+              </a:defRPr>
+            </a:lvl8pPr>
+            <a:lvl9pPr marL="2743132" indent="0" algn="ctr" defTabSz="685783" rtl="0" eaLnBrk="1" latinLnBrk="0" hangingPunct="1">
+              <a:lnSpc>
+                <a:spcPct val="90000"/>
+              </a:lnSpc>
+              <a:spcBef>
+                <a:spcPts val="375"/>
+              </a:spcBef>
+              <a:buFont typeface="Arial" panose="020B0604020202020204" pitchFamily="34" charset="0"/>
+              <a:buNone/>
+              <a:defRPr sz="1200" kern="1200">
+                <a:solidFill>
+                  <a:schemeClr val="tx1"/>
+                </a:solidFill>
+                <a:latin typeface="+mn-lt"/>
+                <a:ea typeface="+mn-ea"/>
+                <a:cs typeface="+mn-cs"/>
+              </a:defRPr>
+            </a:lvl9pPr>
+          </a:lstStyle>
+          <a:p>
+            <a:r>
+              <a:rPr lang="en-US">
+                <a:highlight>
+                  <a:srgbClr val="000054"/>
+                </a:highlight>
+              </a:rPr>
+              <a:t>Dashboard</a:t>
+            </a:r>
+          </a:p>
+          <a:p>
+            <a:r>
+              <a:rPr lang="en-US">
+                <a:highlight>
+                  <a:srgbClr val="000054"/>
+                </a:highlight>
+              </a:rPr>
+              <a:t>breakdown</a:t>
+            </a:r>
+          </a:p>
+          <a:p>
+            <a:endParaRPr lang="en-US">
+              <a:cs typeface="Arial" panose="020B0604020202020204"/>
+            </a:endParaRPr>
+          </a:p>
+          <a:p>
+            <a:endParaRPr lang="en-AU">
+              <a:cs typeface="Arial" panose="020B0604020202020204"/>
+            </a:endParaRPr>
+          </a:p>
+        </p:txBody>
+      </p:sp>
+      <p:sp>
+        <p:nvSpPr>
+          <p:cNvPr id="6" name="Subtitle 2">
+            <a:extLst>
+              <a:ext uri="{FF2B5EF4-FFF2-40B4-BE49-F238E27FC236}">
+                <a16:creationId xmlns:a16="http://schemas.microsoft.com/office/drawing/2014/main" id="{3E65CD83-5DDC-000A-A16C-334C44DA3497}"/>
+              </a:ext>
+            </a:extLst>
+          </p:cNvPr>
+          <p:cNvSpPr txBox="1">
+            <a:spLocks/>
+          </p:cNvSpPr>
+          <p:nvPr/>
+        </p:nvSpPr>
+        <p:spPr>
+          <a:xfrm>
+            <a:off x="387382" y="1764241"/>
+            <a:ext cx="2427889" cy="2600204"/>
+          </a:xfrm>
+          <a:prstGeom prst="rect">
+            <a:avLst/>
+          </a:prstGeom>
+        </p:spPr>
+        <p:txBody>
+          <a:bodyPr vert="horz" lIns="91440" tIns="45720" rIns="91440" bIns="45720" rtlCol="0" anchor="t" anchorCtr="0">
+            <a:noAutofit/>
+          </a:bodyPr>
+          <a:lstStyle>
+            <a:lvl1pPr marL="0" indent="0" algn="l" defTabSz="685783" rtl="0" eaLnBrk="1" latinLnBrk="0" hangingPunct="1">
+              <a:lnSpc>
+                <a:spcPct val="100000"/>
+              </a:lnSpc>
+              <a:spcBef>
+                <a:spcPts val="300"/>
+              </a:spcBef>
+              <a:spcAft>
+                <a:spcPts val="300"/>
+              </a:spcAft>
+              <a:buFont typeface="Arial" panose="020B0604020202020204" pitchFamily="34" charset="0"/>
+              <a:buNone/>
+              <a:defRPr sz="2700" b="1" kern="1200" baseline="0">
+                <a:solidFill>
+                  <a:schemeClr val="bg1"/>
+                </a:solidFill>
+                <a:latin typeface="+mn-lt"/>
+                <a:ea typeface="+mn-ea"/>
+                <a:cs typeface="+mn-cs"/>
+              </a:defRPr>
+            </a:lvl1pPr>
+            <a:lvl2pPr marL="342892" indent="0" algn="ctr" defTabSz="685783" rtl="0" eaLnBrk="1" latinLnBrk="0" hangingPunct="1">
+              <a:lnSpc>
+                <a:spcPct val="100000"/>
+              </a:lnSpc>
+              <a:spcBef>
+                <a:spcPts val="300"/>
+              </a:spcBef>
+              <a:spcAft>
+                <a:spcPts val="300"/>
+              </a:spcAft>
+              <a:buClr>
+                <a:schemeClr val="accent2"/>
+              </a:buClr>
+              <a:buFont typeface="Wingdings" pitchFamily="2" charset="2"/>
+              <a:buNone/>
+              <a:tabLst/>
+              <a:defRPr sz="1500" kern="1200">
+                <a:solidFill>
+                  <a:schemeClr val="tx1"/>
+                </a:solidFill>
+                <a:latin typeface="+mn-lt"/>
+                <a:ea typeface="+mn-ea"/>
+                <a:cs typeface="+mn-cs"/>
+              </a:defRPr>
+            </a:lvl2pPr>
+            <a:lvl3pPr marL="685783" indent="0" algn="ctr" defTabSz="685783" rtl="0" eaLnBrk="1" latinLnBrk="0" hangingPunct="1">
+              <a:lnSpc>
+                <a:spcPct val="90000"/>
+              </a:lnSpc>
+              <a:spcBef>
+                <a:spcPts val="300"/>
+              </a:spcBef>
+              <a:spcAft>
+                <a:spcPts val="300"/>
+              </a:spcAft>
+              <a:buClr>
+                <a:schemeClr val="accent2"/>
+              </a:buClr>
+              <a:buFont typeface="Wingdings" pitchFamily="2" charset="2"/>
+              <a:buNone/>
+              <a:tabLst/>
+              <a:defRPr lang="en-US" sz="1350" kern="1200" baseline="0">
+                <a:solidFill>
+                  <a:schemeClr val="tx1"/>
+                </a:solidFill>
+                <a:latin typeface="+mn-lt"/>
+                <a:ea typeface="+mn-ea"/>
+                <a:cs typeface="+mn-cs"/>
+              </a:defRPr>
+            </a:lvl3pPr>
+            <a:lvl4pPr marL="1028675" indent="0" algn="ctr" defTabSz="685783" rtl="0" eaLnBrk="1" latinLnBrk="0" hangingPunct="1">
+              <a:lnSpc>
+                <a:spcPct val="90000"/>
+              </a:lnSpc>
+              <a:spcBef>
+                <a:spcPts val="375"/>
+              </a:spcBef>
+              <a:buClr>
+                <a:schemeClr val="accent4"/>
+              </a:buClr>
+              <a:buFont typeface="Wingdings" pitchFamily="2" charset="2"/>
+              <a:buNone/>
+              <a:defRPr sz="1200" kern="1200">
+                <a:solidFill>
+                  <a:schemeClr val="tx1"/>
+                </a:solidFill>
+                <a:latin typeface="+mn-lt"/>
+                <a:ea typeface="+mn-ea"/>
+                <a:cs typeface="+mn-cs"/>
+              </a:defRPr>
+            </a:lvl4pPr>
+            <a:lvl5pPr marL="1371566" indent="0" algn="ctr" defTabSz="685783" rtl="0" eaLnBrk="1" latinLnBrk="0" hangingPunct="1">
+              <a:lnSpc>
+                <a:spcPct val="90000"/>
+              </a:lnSpc>
+              <a:spcBef>
+                <a:spcPts val="375"/>
+              </a:spcBef>
+              <a:buFont typeface="Arial" panose="020B0604020202020204" pitchFamily="34" charset="0"/>
+              <a:buNone/>
+              <a:defRPr sz="1200" kern="1200">
+                <a:solidFill>
+                  <a:schemeClr val="tx1"/>
+                </a:solidFill>
+                <a:latin typeface="+mn-lt"/>
+                <a:ea typeface="+mn-ea"/>
+                <a:cs typeface="+mn-cs"/>
+              </a:defRPr>
+            </a:lvl5pPr>
+            <a:lvl6pPr marL="1714457" indent="0" algn="ctr" defTabSz="685783" rtl="0" eaLnBrk="1" latinLnBrk="0" hangingPunct="1">
+              <a:lnSpc>
+                <a:spcPct val="90000"/>
+              </a:lnSpc>
+              <a:spcBef>
+                <a:spcPts val="375"/>
+              </a:spcBef>
+              <a:buFont typeface="Arial" panose="020B0604020202020204" pitchFamily="34" charset="0"/>
+              <a:buNone/>
+              <a:defRPr sz="1200" kern="1200">
+                <a:solidFill>
+                  <a:schemeClr val="tx1"/>
+                </a:solidFill>
+                <a:latin typeface="+mn-lt"/>
+                <a:ea typeface="+mn-ea"/>
+                <a:cs typeface="+mn-cs"/>
+              </a:defRPr>
+            </a:lvl6pPr>
+            <a:lvl7pPr marL="2057348" indent="0" algn="ctr" defTabSz="685783" rtl="0" eaLnBrk="1" latinLnBrk="0" hangingPunct="1">
+              <a:lnSpc>
+                <a:spcPct val="90000"/>
+              </a:lnSpc>
+              <a:spcBef>
+                <a:spcPts val="375"/>
+              </a:spcBef>
+              <a:buFont typeface="Arial" panose="020B0604020202020204" pitchFamily="34" charset="0"/>
+              <a:buNone/>
+              <a:defRPr sz="1200" kern="1200">
+                <a:solidFill>
+                  <a:schemeClr val="tx1"/>
+                </a:solidFill>
+                <a:latin typeface="+mn-lt"/>
+                <a:ea typeface="+mn-ea"/>
+                <a:cs typeface="+mn-cs"/>
+              </a:defRPr>
+            </a:lvl7pPr>
+            <a:lvl8pPr marL="2400240" indent="0" algn="ctr" defTabSz="685783" rtl="0" eaLnBrk="1" latinLnBrk="0" hangingPunct="1">
+              <a:lnSpc>
+                <a:spcPct val="90000"/>
+              </a:lnSpc>
+              <a:spcBef>
+                <a:spcPts val="375"/>
+              </a:spcBef>
+              <a:buFont typeface="Arial" panose="020B0604020202020204" pitchFamily="34" charset="0"/>
+              <a:buNone/>
+              <a:defRPr sz="1200" kern="1200">
+                <a:solidFill>
+                  <a:schemeClr val="tx1"/>
+                </a:solidFill>
+                <a:latin typeface="+mn-lt"/>
+                <a:ea typeface="+mn-ea"/>
+                <a:cs typeface="+mn-cs"/>
+              </a:defRPr>
+            </a:lvl8pPr>
+            <a:lvl9pPr marL="2743132" indent="0" algn="ctr" defTabSz="685783" rtl="0" eaLnBrk="1" latinLnBrk="0" hangingPunct="1">
+              <a:lnSpc>
+                <a:spcPct val="90000"/>
+              </a:lnSpc>
+              <a:spcBef>
+                <a:spcPts val="375"/>
+              </a:spcBef>
+              <a:buFont typeface="Arial" panose="020B0604020202020204" pitchFamily="34" charset="0"/>
+              <a:buNone/>
+              <a:defRPr sz="1200" kern="1200">
+                <a:solidFill>
+                  <a:schemeClr val="tx1"/>
+                </a:solidFill>
+                <a:latin typeface="+mn-lt"/>
+                <a:ea typeface="+mn-ea"/>
+                <a:cs typeface="+mn-cs"/>
+              </a:defRPr>
+            </a:lvl9pPr>
+          </a:lstStyle>
+          <a:p>
+            <a:r>
+              <a:rPr lang="en-US" sz="1000">
+                <a:highlight>
+                  <a:srgbClr val="000054"/>
+                </a:highlight>
+              </a:rPr>
+              <a:t>Asset count by campaign</a:t>
+            </a:r>
+          </a:p>
+          <a:p>
+            <a:r>
+              <a:rPr lang="en-US" sz="800" b="0"/>
+              <a:t>Total deliverables produced per named campaign — Always On, BAU and Others excluded, so it's just the campaign-driven push.</a:t>
+            </a:r>
+          </a:p>
+          <a:p>
+            <a:endParaRPr lang="en-US" sz="800" b="0"/>
+          </a:p>
+          <a:p>
+            <a:r>
+              <a:rPr lang="en-US" sz="1000">
+                <a:highlight>
+                  <a:srgbClr val="000054"/>
+                </a:highlight>
+              </a:rPr>
+              <a:t>Squads demand distribution</a:t>
+            </a:r>
+          </a:p>
+          <a:p>
+            <a:r>
+              <a:rPr lang="en-US" sz="800" b="0"/>
+              <a:t>For each asset type, who's asking for it — the split between Domestic, INTON and Other Stakeholders. Shows which deliverables are one squad's core business (Display ads, Print assets = mostly Domestic) versus shared across groups (Pages, GIF/Motion = mixed).</a:t>
+            </a:r>
+          </a:p>
+        </p:txBody>
+      </p:sp>
+    </p:spTree>
+    <p:extLst>
+      <p:ext uri="{BB962C8B-B14F-4D97-AF65-F5344CB8AC3E}">
+        <p14:creationId xmlns:p14="http://schemas.microsoft.com/office/powerpoint/2010/main" val="3734082295"/>
+      </p:ext>
+    </p:extLst>
+  </p:cSld>
+  <p:clrMapOvr>
+    <a:masterClrMapping/>
+  </p:clrMapOvr>
+</p:sld>
+</file>
+
+<file path=ppt/slides/slide6.xml><?xml version="1.0" encoding="utf-8"?>
+<p:sld xmlns:a="http://schemas.openxmlformats.org/drawingml/2006/main" xmlns:r="http://schemas.openxmlformats.org/officeDocument/2006/relationships" xmlns:p="http://schemas.openxmlformats.org/presentationml/2006/main">
+  <p:cSld>
+    <p:spTree>
+      <p:nvGrpSpPr>
+        <p:cNvPr id="1" name="">
+          <a:extLst>
+            <a:ext uri="{FF2B5EF4-FFF2-40B4-BE49-F238E27FC236}">
+              <a16:creationId xmlns:a16="http://schemas.microsoft.com/office/drawing/2014/main" id="{E7FD9AE7-8C8A-A4A5-A27D-37052C5D1442}"/>
+            </a:ext>
+          </a:extLst>
+        </p:cNvPr>
+        <p:cNvGrpSpPr/>
+        <p:nvPr/>
+      </p:nvGrpSpPr>
+      <p:grpSpPr>
+        <a:xfrm>
+          <a:off x="0" y="0"/>
+          <a:ext cx="0" cy="0"/>
+          <a:chOff x="0" y="0"/>
+          <a:chExt cx="0" cy="0"/>
+        </a:xfrm>
+      </p:grpSpPr>
+      <p:pic>
+        <p:nvPicPr>
+          <p:cNvPr id="4" name="Picture 3">
+            <a:extLst>
+              <a:ext uri="{FF2B5EF4-FFF2-40B4-BE49-F238E27FC236}">
+                <a16:creationId xmlns:a16="http://schemas.microsoft.com/office/drawing/2014/main" id="{918C2866-4ADA-D35E-95CE-184751FD650C}"/>
+              </a:ext>
+            </a:extLst>
+          </p:cNvPr>
+          <p:cNvPicPr>
+            <a:picLocks noChangeAspect="1"/>
+          </p:cNvPicPr>
+          <p:nvPr/>
+        </p:nvPicPr>
+        <p:blipFill>
+          <a:blip r:embed="rId2"/>
+          <a:stretch>
+            <a:fillRect/>
+          </a:stretch>
+        </p:blipFill>
+        <p:spPr>
+          <a:xfrm>
+            <a:off x="3100192" y="1226499"/>
+            <a:ext cx="5696968" cy="2336723"/>
+          </a:xfrm>
+          <a:prstGeom prst="rect">
+            <a:avLst/>
+          </a:prstGeom>
+        </p:spPr>
+      </p:pic>
+      <p:sp>
+        <p:nvSpPr>
+          <p:cNvPr id="8" name="Subtitle 2">
+            <a:extLst>
+              <a:ext uri="{FF2B5EF4-FFF2-40B4-BE49-F238E27FC236}">
+                <a16:creationId xmlns:a16="http://schemas.microsoft.com/office/drawing/2014/main" id="{BED8C51A-EFB6-F901-084A-C6AFD87D03EB}"/>
+              </a:ext>
+            </a:extLst>
+          </p:cNvPr>
+          <p:cNvSpPr txBox="1">
+            <a:spLocks/>
+          </p:cNvSpPr>
+          <p:nvPr/>
+        </p:nvSpPr>
+        <p:spPr>
+          <a:xfrm>
+            <a:off x="419708" y="1429260"/>
+            <a:ext cx="2174846" cy="613562"/>
+          </a:xfrm>
+          <a:prstGeom prst="rect">
+            <a:avLst/>
+          </a:prstGeom>
+        </p:spPr>
+        <p:txBody>
+          <a:bodyPr vert="horz" lIns="91440" tIns="45720" rIns="91440" bIns="45720" rtlCol="0" anchor="t" anchorCtr="0">
+            <a:noAutofit/>
+          </a:bodyPr>
+          <a:lstStyle>
+            <a:lvl1pPr marL="0" indent="0" algn="l" defTabSz="685783" rtl="0" eaLnBrk="1" latinLnBrk="0" hangingPunct="1">
+              <a:lnSpc>
+                <a:spcPct val="100000"/>
+              </a:lnSpc>
+              <a:spcBef>
+                <a:spcPts val="300"/>
+              </a:spcBef>
+              <a:spcAft>
+                <a:spcPts val="300"/>
+              </a:spcAft>
+              <a:buFont typeface="Arial" panose="020B0604020202020204" pitchFamily="34" charset="0"/>
+              <a:buNone/>
+              <a:defRPr sz="2700" b="1" kern="1200" baseline="0">
+                <a:solidFill>
+                  <a:schemeClr val="bg1"/>
+                </a:solidFill>
+                <a:latin typeface="+mn-lt"/>
+                <a:ea typeface="+mn-ea"/>
+                <a:cs typeface="+mn-cs"/>
+              </a:defRPr>
+            </a:lvl1pPr>
+            <a:lvl2pPr marL="342892" indent="0" algn="ctr" defTabSz="685783" rtl="0" eaLnBrk="1" latinLnBrk="0" hangingPunct="1">
+              <a:lnSpc>
+                <a:spcPct val="100000"/>
+              </a:lnSpc>
+              <a:spcBef>
+                <a:spcPts val="300"/>
+              </a:spcBef>
+              <a:spcAft>
+                <a:spcPts val="300"/>
+              </a:spcAft>
+              <a:buClr>
+                <a:schemeClr val="accent2"/>
+              </a:buClr>
+              <a:buFont typeface="Wingdings" pitchFamily="2" charset="2"/>
+              <a:buNone/>
+              <a:tabLst/>
+              <a:defRPr sz="1500" kern="1200">
+                <a:solidFill>
+                  <a:schemeClr val="tx1"/>
+                </a:solidFill>
+                <a:latin typeface="+mn-lt"/>
+                <a:ea typeface="+mn-ea"/>
+                <a:cs typeface="+mn-cs"/>
+              </a:defRPr>
+            </a:lvl2pPr>
+            <a:lvl3pPr marL="685783" indent="0" algn="ctr" defTabSz="685783" rtl="0" eaLnBrk="1" latinLnBrk="0" hangingPunct="1">
+              <a:lnSpc>
+                <a:spcPct val="90000"/>
+              </a:lnSpc>
+              <a:spcBef>
+                <a:spcPts val="300"/>
+              </a:spcBef>
+              <a:spcAft>
+                <a:spcPts val="300"/>
+              </a:spcAft>
+              <a:buClr>
+                <a:schemeClr val="accent2"/>
+              </a:buClr>
+              <a:buFont typeface="Wingdings" pitchFamily="2" charset="2"/>
+              <a:buNone/>
+              <a:tabLst/>
+              <a:defRPr lang="en-US" sz="1350" kern="1200" baseline="0">
+                <a:solidFill>
+                  <a:schemeClr val="tx1"/>
+                </a:solidFill>
+                <a:latin typeface="+mn-lt"/>
+                <a:ea typeface="+mn-ea"/>
+                <a:cs typeface="+mn-cs"/>
+              </a:defRPr>
+            </a:lvl3pPr>
+            <a:lvl4pPr marL="1028675" indent="0" algn="ctr" defTabSz="685783" rtl="0" eaLnBrk="1" latinLnBrk="0" hangingPunct="1">
+              <a:lnSpc>
+                <a:spcPct val="90000"/>
+              </a:lnSpc>
+              <a:spcBef>
+                <a:spcPts val="375"/>
+              </a:spcBef>
+              <a:buClr>
+                <a:schemeClr val="accent4"/>
+              </a:buClr>
+              <a:buFont typeface="Wingdings" pitchFamily="2" charset="2"/>
+              <a:buNone/>
+              <a:defRPr sz="1200" kern="1200">
+                <a:solidFill>
+                  <a:schemeClr val="tx1"/>
+                </a:solidFill>
+                <a:latin typeface="+mn-lt"/>
+                <a:ea typeface="+mn-ea"/>
+                <a:cs typeface="+mn-cs"/>
+              </a:defRPr>
+            </a:lvl4pPr>
+            <a:lvl5pPr marL="1371566" indent="0" algn="ctr" defTabSz="685783" rtl="0" eaLnBrk="1" latinLnBrk="0" hangingPunct="1">
+              <a:lnSpc>
+                <a:spcPct val="90000"/>
+              </a:lnSpc>
+              <a:spcBef>
+                <a:spcPts val="375"/>
+              </a:spcBef>
+              <a:buFont typeface="Arial" panose="020B0604020202020204" pitchFamily="34" charset="0"/>
+              <a:buNone/>
+              <a:defRPr sz="1200" kern="1200">
+                <a:solidFill>
+                  <a:schemeClr val="tx1"/>
+                </a:solidFill>
+                <a:latin typeface="+mn-lt"/>
+                <a:ea typeface="+mn-ea"/>
+                <a:cs typeface="+mn-cs"/>
+              </a:defRPr>
+            </a:lvl5pPr>
+            <a:lvl6pPr marL="1714457" indent="0" algn="ctr" defTabSz="685783" rtl="0" eaLnBrk="1" latinLnBrk="0" hangingPunct="1">
+              <a:lnSpc>
+                <a:spcPct val="90000"/>
+              </a:lnSpc>
+              <a:spcBef>
+                <a:spcPts val="375"/>
+              </a:spcBef>
+              <a:buFont typeface="Arial" panose="020B0604020202020204" pitchFamily="34" charset="0"/>
+              <a:buNone/>
+              <a:defRPr sz="1200" kern="1200">
+                <a:solidFill>
+                  <a:schemeClr val="tx1"/>
+                </a:solidFill>
+                <a:latin typeface="+mn-lt"/>
+                <a:ea typeface="+mn-ea"/>
+                <a:cs typeface="+mn-cs"/>
+              </a:defRPr>
+            </a:lvl6pPr>
+            <a:lvl7pPr marL="2057348" indent="0" algn="ctr" defTabSz="685783" rtl="0" eaLnBrk="1" latinLnBrk="0" hangingPunct="1">
+              <a:lnSpc>
+                <a:spcPct val="90000"/>
+              </a:lnSpc>
+              <a:spcBef>
+                <a:spcPts val="375"/>
+              </a:spcBef>
+              <a:buFont typeface="Arial" panose="020B0604020202020204" pitchFamily="34" charset="0"/>
+              <a:buNone/>
+              <a:defRPr sz="1200" kern="1200">
+                <a:solidFill>
+                  <a:schemeClr val="tx1"/>
+                </a:solidFill>
+                <a:latin typeface="+mn-lt"/>
+                <a:ea typeface="+mn-ea"/>
+                <a:cs typeface="+mn-cs"/>
+              </a:defRPr>
+            </a:lvl7pPr>
+            <a:lvl8pPr marL="2400240" indent="0" algn="ctr" defTabSz="685783" rtl="0" eaLnBrk="1" latinLnBrk="0" hangingPunct="1">
+              <a:lnSpc>
+                <a:spcPct val="90000"/>
+              </a:lnSpc>
+              <a:spcBef>
+                <a:spcPts val="375"/>
+              </a:spcBef>
+              <a:buFont typeface="Arial" panose="020B0604020202020204" pitchFamily="34" charset="0"/>
+              <a:buNone/>
+              <a:defRPr sz="1200" kern="1200">
+                <a:solidFill>
+                  <a:schemeClr val="tx1"/>
+                </a:solidFill>
+                <a:latin typeface="+mn-lt"/>
+                <a:ea typeface="+mn-ea"/>
+                <a:cs typeface="+mn-cs"/>
+              </a:defRPr>
+            </a:lvl8pPr>
+            <a:lvl9pPr marL="2743132" indent="0" algn="ctr" defTabSz="685783" rtl="0" eaLnBrk="1" latinLnBrk="0" hangingPunct="1">
+              <a:lnSpc>
+                <a:spcPct val="90000"/>
+              </a:lnSpc>
+              <a:spcBef>
+                <a:spcPts val="375"/>
+              </a:spcBef>
+              <a:buFont typeface="Arial" panose="020B0604020202020204" pitchFamily="34" charset="0"/>
+              <a:buNone/>
+              <a:defRPr sz="1200" kern="1200">
+                <a:solidFill>
+                  <a:schemeClr val="tx1"/>
+                </a:solidFill>
+                <a:latin typeface="+mn-lt"/>
+                <a:ea typeface="+mn-ea"/>
+                <a:cs typeface="+mn-cs"/>
+              </a:defRPr>
+            </a:lvl9pPr>
+          </a:lstStyle>
+          <a:p>
+            <a:r>
+              <a:rPr lang="en-US">
+                <a:highlight>
+                  <a:srgbClr val="000054"/>
+                </a:highlight>
+              </a:rPr>
+              <a:t>Dashboard</a:t>
+            </a:r>
+          </a:p>
+          <a:p>
+            <a:r>
+              <a:rPr lang="en-US">
+                <a:highlight>
+                  <a:srgbClr val="000054"/>
+                </a:highlight>
+              </a:rPr>
+              <a:t>breakdown</a:t>
+            </a:r>
+          </a:p>
+          <a:p>
+            <a:endParaRPr lang="en-US">
+              <a:cs typeface="Arial" panose="020B0604020202020204"/>
+            </a:endParaRPr>
+          </a:p>
+          <a:p>
+            <a:endParaRPr lang="en-AU">
+              <a:cs typeface="Arial" panose="020B0604020202020204"/>
+            </a:endParaRPr>
+          </a:p>
+        </p:txBody>
+      </p:sp>
+      <p:sp>
+        <p:nvSpPr>
+          <p:cNvPr id="11" name="Subtitle 2">
+            <a:extLst>
+              <a:ext uri="{FF2B5EF4-FFF2-40B4-BE49-F238E27FC236}">
+                <a16:creationId xmlns:a16="http://schemas.microsoft.com/office/drawing/2014/main" id="{F1CD64DB-368A-3D7D-5B9C-3BCDA9D09341}"/>
+              </a:ext>
+            </a:extLst>
+          </p:cNvPr>
+          <p:cNvSpPr txBox="1">
+            <a:spLocks/>
+          </p:cNvSpPr>
+          <p:nvPr/>
+        </p:nvSpPr>
+        <p:spPr>
+          <a:xfrm>
+            <a:off x="387382" y="2555311"/>
+            <a:ext cx="2427889" cy="2600204"/>
+          </a:xfrm>
+          <a:prstGeom prst="rect">
+            <a:avLst/>
+          </a:prstGeom>
+        </p:spPr>
+        <p:txBody>
+          <a:bodyPr vert="horz" lIns="91440" tIns="45720" rIns="91440" bIns="45720" rtlCol="0" anchor="t" anchorCtr="0">
+            <a:noAutofit/>
+          </a:bodyPr>
+          <a:lstStyle>
+            <a:lvl1pPr marL="0" indent="0" algn="l" defTabSz="685783" rtl="0" eaLnBrk="1" latinLnBrk="0" hangingPunct="1">
+              <a:lnSpc>
+                <a:spcPct val="100000"/>
+              </a:lnSpc>
+              <a:spcBef>
+                <a:spcPts val="300"/>
+              </a:spcBef>
+              <a:spcAft>
+                <a:spcPts val="300"/>
+              </a:spcAft>
+              <a:buFont typeface="Arial" panose="020B0604020202020204" pitchFamily="34" charset="0"/>
+              <a:buNone/>
+              <a:defRPr sz="2700" b="1" kern="1200" baseline="0">
+                <a:solidFill>
+                  <a:schemeClr val="bg1"/>
+                </a:solidFill>
+                <a:latin typeface="+mn-lt"/>
+                <a:ea typeface="+mn-ea"/>
+                <a:cs typeface="+mn-cs"/>
+              </a:defRPr>
+            </a:lvl1pPr>
+            <a:lvl2pPr marL="342892" indent="0" algn="ctr" defTabSz="685783" rtl="0" eaLnBrk="1" latinLnBrk="0" hangingPunct="1">
+              <a:lnSpc>
+                <a:spcPct val="100000"/>
+              </a:lnSpc>
+              <a:spcBef>
+                <a:spcPts val="300"/>
+              </a:spcBef>
+              <a:spcAft>
+                <a:spcPts val="300"/>
+              </a:spcAft>
+              <a:buClr>
+                <a:schemeClr val="accent2"/>
+              </a:buClr>
+              <a:buFont typeface="Wingdings" pitchFamily="2" charset="2"/>
+              <a:buNone/>
+              <a:tabLst/>
+              <a:defRPr sz="1500" kern="1200">
+                <a:solidFill>
+                  <a:schemeClr val="tx1"/>
+                </a:solidFill>
+                <a:latin typeface="+mn-lt"/>
+                <a:ea typeface="+mn-ea"/>
+                <a:cs typeface="+mn-cs"/>
+              </a:defRPr>
+            </a:lvl2pPr>
+            <a:lvl3pPr marL="685783" indent="0" algn="ctr" defTabSz="685783" rtl="0" eaLnBrk="1" latinLnBrk="0" hangingPunct="1">
+              <a:lnSpc>
+                <a:spcPct val="90000"/>
+              </a:lnSpc>
+              <a:spcBef>
+                <a:spcPts val="300"/>
+              </a:spcBef>
+              <a:spcAft>
+                <a:spcPts val="300"/>
+              </a:spcAft>
+              <a:buClr>
+                <a:schemeClr val="accent2"/>
+              </a:buClr>
+              <a:buFont typeface="Wingdings" pitchFamily="2" charset="2"/>
+              <a:buNone/>
+              <a:tabLst/>
+              <a:defRPr lang="en-US" sz="1350" kern="1200" baseline="0">
+                <a:solidFill>
+                  <a:schemeClr val="tx1"/>
+                </a:solidFill>
+                <a:latin typeface="+mn-lt"/>
+                <a:ea typeface="+mn-ea"/>
+                <a:cs typeface="+mn-cs"/>
+              </a:defRPr>
+            </a:lvl3pPr>
+            <a:lvl4pPr marL="1028675" indent="0" algn="ctr" defTabSz="685783" rtl="0" eaLnBrk="1" latinLnBrk="0" hangingPunct="1">
+              <a:lnSpc>
+                <a:spcPct val="90000"/>
+              </a:lnSpc>
+              <a:spcBef>
+                <a:spcPts val="375"/>
+              </a:spcBef>
+              <a:buClr>
+                <a:schemeClr val="accent4"/>
+              </a:buClr>
+              <a:buFont typeface="Wingdings" pitchFamily="2" charset="2"/>
+              <a:buNone/>
+              <a:defRPr sz="1200" kern="1200">
+                <a:solidFill>
+                  <a:schemeClr val="tx1"/>
+                </a:solidFill>
+                <a:latin typeface="+mn-lt"/>
+                <a:ea typeface="+mn-ea"/>
+                <a:cs typeface="+mn-cs"/>
+              </a:defRPr>
+            </a:lvl4pPr>
+            <a:lvl5pPr marL="1371566" indent="0" algn="ctr" defTabSz="685783" rtl="0" eaLnBrk="1" latinLnBrk="0" hangingPunct="1">
+              <a:lnSpc>
+                <a:spcPct val="90000"/>
+              </a:lnSpc>
+              <a:spcBef>
+                <a:spcPts val="375"/>
+              </a:spcBef>
+              <a:buFont typeface="Arial" panose="020B0604020202020204" pitchFamily="34" charset="0"/>
+              <a:buNone/>
+              <a:defRPr sz="1200" kern="1200">
+                <a:solidFill>
+                  <a:schemeClr val="tx1"/>
+                </a:solidFill>
+                <a:latin typeface="+mn-lt"/>
+                <a:ea typeface="+mn-ea"/>
+                <a:cs typeface="+mn-cs"/>
+              </a:defRPr>
+            </a:lvl5pPr>
+            <a:lvl6pPr marL="1714457" indent="0" algn="ctr" defTabSz="685783" rtl="0" eaLnBrk="1" latinLnBrk="0" hangingPunct="1">
+              <a:lnSpc>
+                <a:spcPct val="90000"/>
+              </a:lnSpc>
+              <a:spcBef>
+                <a:spcPts val="375"/>
+              </a:spcBef>
+              <a:buFont typeface="Arial" panose="020B0604020202020204" pitchFamily="34" charset="0"/>
+              <a:buNone/>
+              <a:defRPr sz="1200" kern="1200">
+                <a:solidFill>
+                  <a:schemeClr val="tx1"/>
+                </a:solidFill>
+                <a:latin typeface="+mn-lt"/>
+                <a:ea typeface="+mn-ea"/>
+                <a:cs typeface="+mn-cs"/>
+              </a:defRPr>
+            </a:lvl6pPr>
+            <a:lvl7pPr marL="2057348" indent="0" algn="ctr" defTabSz="685783" rtl="0" eaLnBrk="1" latinLnBrk="0" hangingPunct="1">
+              <a:lnSpc>
+                <a:spcPct val="90000"/>
+              </a:lnSpc>
+              <a:spcBef>
+                <a:spcPts val="375"/>
+              </a:spcBef>
+              <a:buFont typeface="Arial" panose="020B0604020202020204" pitchFamily="34" charset="0"/>
+              <a:buNone/>
+              <a:defRPr sz="1200" kern="1200">
+                <a:solidFill>
+                  <a:schemeClr val="tx1"/>
+                </a:solidFill>
+                <a:latin typeface="+mn-lt"/>
+                <a:ea typeface="+mn-ea"/>
+                <a:cs typeface="+mn-cs"/>
+              </a:defRPr>
+            </a:lvl7pPr>
+            <a:lvl8pPr marL="2400240" indent="0" algn="ctr" defTabSz="685783" rtl="0" eaLnBrk="1" latinLnBrk="0" hangingPunct="1">
+              <a:lnSpc>
+                <a:spcPct val="90000"/>
+              </a:lnSpc>
+              <a:spcBef>
+                <a:spcPts val="375"/>
+              </a:spcBef>
+              <a:buFont typeface="Arial" panose="020B0604020202020204" pitchFamily="34" charset="0"/>
+              <a:buNone/>
+              <a:defRPr sz="1200" kern="1200">
+                <a:solidFill>
+                  <a:schemeClr val="tx1"/>
+                </a:solidFill>
+                <a:latin typeface="+mn-lt"/>
+                <a:ea typeface="+mn-ea"/>
+                <a:cs typeface="+mn-cs"/>
+              </a:defRPr>
+            </a:lvl8pPr>
+            <a:lvl9pPr marL="2743132" indent="0" algn="ctr" defTabSz="685783" rtl="0" eaLnBrk="1" latinLnBrk="0" hangingPunct="1">
+              <a:lnSpc>
+                <a:spcPct val="90000"/>
+              </a:lnSpc>
+              <a:spcBef>
+                <a:spcPts val="375"/>
+              </a:spcBef>
+              <a:buFont typeface="Arial" panose="020B0604020202020204" pitchFamily="34" charset="0"/>
+              <a:buNone/>
+              <a:defRPr sz="1200" kern="1200">
+                <a:solidFill>
+                  <a:schemeClr val="tx1"/>
+                </a:solidFill>
+                <a:latin typeface="+mn-lt"/>
+                <a:ea typeface="+mn-ea"/>
+                <a:cs typeface="+mn-cs"/>
+              </a:defRPr>
+            </a:lvl9pPr>
+          </a:lstStyle>
+          <a:p>
+            <a:r>
+              <a:rPr lang="en-US" sz="1000">
+                <a:highlight>
+                  <a:srgbClr val="000054"/>
+                </a:highlight>
+              </a:rPr>
+              <a:t>Workload &amp; tasks across the year</a:t>
+            </a:r>
+          </a:p>
+          <a:p>
+            <a:r>
+              <a:rPr lang="en-US" sz="800" b="0"/>
+              <a:t>Assets per month, plotted across the year — with every task shown as a dot, colour-coded by stakeholder group. Hover or click a dot to jump straight into that task's details.</a:t>
+            </a:r>
+          </a:p>
+          <a:p>
+            <a:endParaRPr lang="en-US" sz="800" b="0"/>
+          </a:p>
+        </p:txBody>
+      </p:sp>
+    </p:spTree>
+    <p:extLst>
+      <p:ext uri="{BB962C8B-B14F-4D97-AF65-F5344CB8AC3E}">
+        <p14:creationId xmlns:p14="http://schemas.microsoft.com/office/powerpoint/2010/main" val="3631319172"/>
+      </p:ext>
+    </p:extLst>
+  </p:cSld>
+  <p:clrMapOvr>
+    <a:masterClrMapping/>
+  </p:clrMapOvr>
+</p:sld>
+</file>
+
+<file path=ppt/slides/slide7.xml><?xml version="1.0" encoding="utf-8"?>
+<p:sld xmlns:a="http://schemas.openxmlformats.org/drawingml/2006/main" xmlns:r="http://schemas.openxmlformats.org/officeDocument/2006/relationships" xmlns:p="http://schemas.openxmlformats.org/presentationml/2006/main">
+  <p:cSld>
+    <p:spTree>
+      <p:nvGrpSpPr>
+        <p:cNvPr id="1" name="">
+          <a:extLst>
+            <a:ext uri="{FF2B5EF4-FFF2-40B4-BE49-F238E27FC236}">
+              <a16:creationId xmlns:a16="http://schemas.microsoft.com/office/drawing/2014/main" id="{3D6E90A3-F2EC-81F7-8AF4-80370FA6E039}"/>
             </a:ext>
           </a:extLst>
         </p:cNvPr>
@@ -7464,89 +9844,462 @@
       </p:grpSpPr>
       <p:sp>
         <p:nvSpPr>
-          <p:cNvPr id="2" name="Title 1">
-            <a:extLst>
-              <a:ext uri="{FF2B5EF4-FFF2-40B4-BE49-F238E27FC236}">
-                <a16:creationId xmlns:a16="http://schemas.microsoft.com/office/drawing/2014/main" id="{F27911A7-0A3A-B3A9-F67F-EF7AFAA4A997}"/>
-              </a:ext>
-            </a:extLst>
-          </p:cNvPr>
-          <p:cNvSpPr>
-            <a:spLocks noGrp="1"/>
+          <p:cNvPr id="8" name="Subtitle 2">
+            <a:extLst>
+              <a:ext uri="{FF2B5EF4-FFF2-40B4-BE49-F238E27FC236}">
+                <a16:creationId xmlns:a16="http://schemas.microsoft.com/office/drawing/2014/main" id="{7F3AF82D-5973-EDEF-E2F0-35758C9FBAA1}"/>
+              </a:ext>
+            </a:extLst>
+          </p:cNvPr>
+          <p:cNvSpPr txBox="1">
+            <a:spLocks/>
           </p:cNvSpPr>
-          <p:nvPr>
-            <p:ph type="title"/>
-          </p:nvPr>
+          <p:nvPr/>
         </p:nvSpPr>
         <p:spPr>
           <a:xfrm>
-            <a:off x="245330" y="299902"/>
-            <a:ext cx="2999760" cy="271379"/>
-          </a:xfrm>
+            <a:off x="419708" y="1429260"/>
+            <a:ext cx="2174846" cy="613562"/>
+          </a:xfrm>
+          <a:prstGeom prst="rect">
+            <a:avLst/>
+          </a:prstGeom>
         </p:spPr>
         <p:txBody>
-          <a:bodyPr/>
-          <a:lstStyle/>
-          <a:p>
-            <a:r>
-              <a:rPr lang="en-US" sz="1600">
-                <a:cs typeface="Arial"/>
+          <a:bodyPr vert="horz" lIns="91440" tIns="45720" rIns="91440" bIns="45720" rtlCol="0" anchor="t" anchorCtr="0">
+            <a:noAutofit/>
+          </a:bodyPr>
+          <a:lstStyle>
+            <a:lvl1pPr marL="0" indent="0" algn="l" defTabSz="685783" rtl="0" eaLnBrk="1" latinLnBrk="0" hangingPunct="1">
+              <a:lnSpc>
+                <a:spcPct val="100000"/>
+              </a:lnSpc>
+              <a:spcBef>
+                <a:spcPts val="300"/>
+              </a:spcBef>
+              <a:spcAft>
+                <a:spcPts val="300"/>
+              </a:spcAft>
+              <a:buFont typeface="Arial" panose="020B0604020202020204" pitchFamily="34" charset="0"/>
+              <a:buNone/>
+              <a:defRPr sz="2700" b="1" kern="1200" baseline="0">
+                <a:solidFill>
+                  <a:schemeClr val="bg1"/>
+                </a:solidFill>
+                <a:latin typeface="+mn-lt"/>
+                <a:ea typeface="+mn-ea"/>
+                <a:cs typeface="+mn-cs"/>
+              </a:defRPr>
+            </a:lvl1pPr>
+            <a:lvl2pPr marL="342892" indent="0" algn="ctr" defTabSz="685783" rtl="0" eaLnBrk="1" latinLnBrk="0" hangingPunct="1">
+              <a:lnSpc>
+                <a:spcPct val="100000"/>
+              </a:lnSpc>
+              <a:spcBef>
+                <a:spcPts val="300"/>
+              </a:spcBef>
+              <a:spcAft>
+                <a:spcPts val="300"/>
+              </a:spcAft>
+              <a:buClr>
+                <a:schemeClr val="accent2"/>
+              </a:buClr>
+              <a:buFont typeface="Wingdings" pitchFamily="2" charset="2"/>
+              <a:buNone/>
+              <a:tabLst/>
+              <a:defRPr sz="1500" kern="1200">
+                <a:solidFill>
+                  <a:schemeClr val="tx1"/>
+                </a:solidFill>
+                <a:latin typeface="+mn-lt"/>
+                <a:ea typeface="+mn-ea"/>
+                <a:cs typeface="+mn-cs"/>
+              </a:defRPr>
+            </a:lvl2pPr>
+            <a:lvl3pPr marL="685783" indent="0" algn="ctr" defTabSz="685783" rtl="0" eaLnBrk="1" latinLnBrk="0" hangingPunct="1">
+              <a:lnSpc>
+                <a:spcPct val="90000"/>
+              </a:lnSpc>
+              <a:spcBef>
+                <a:spcPts val="300"/>
+              </a:spcBef>
+              <a:spcAft>
+                <a:spcPts val="300"/>
+              </a:spcAft>
+              <a:buClr>
+                <a:schemeClr val="accent2"/>
+              </a:buClr>
+              <a:buFont typeface="Wingdings" pitchFamily="2" charset="2"/>
+              <a:buNone/>
+              <a:tabLst/>
+              <a:defRPr lang="en-US" sz="1350" kern="1200" baseline="0">
+                <a:solidFill>
+                  <a:schemeClr val="tx1"/>
+                </a:solidFill>
+                <a:latin typeface="+mn-lt"/>
+                <a:ea typeface="+mn-ea"/>
+                <a:cs typeface="+mn-cs"/>
+              </a:defRPr>
+            </a:lvl3pPr>
+            <a:lvl4pPr marL="1028675" indent="0" algn="ctr" defTabSz="685783" rtl="0" eaLnBrk="1" latinLnBrk="0" hangingPunct="1">
+              <a:lnSpc>
+                <a:spcPct val="90000"/>
+              </a:lnSpc>
+              <a:spcBef>
+                <a:spcPts val="375"/>
+              </a:spcBef>
+              <a:buClr>
+                <a:schemeClr val="accent4"/>
+              </a:buClr>
+              <a:buFont typeface="Wingdings" pitchFamily="2" charset="2"/>
+              <a:buNone/>
+              <a:defRPr sz="1200" kern="1200">
+                <a:solidFill>
+                  <a:schemeClr val="tx1"/>
+                </a:solidFill>
+                <a:latin typeface="+mn-lt"/>
+                <a:ea typeface="+mn-ea"/>
+                <a:cs typeface="+mn-cs"/>
+              </a:defRPr>
+            </a:lvl4pPr>
+            <a:lvl5pPr marL="1371566" indent="0" algn="ctr" defTabSz="685783" rtl="0" eaLnBrk="1" latinLnBrk="0" hangingPunct="1">
+              <a:lnSpc>
+                <a:spcPct val="90000"/>
+              </a:lnSpc>
+              <a:spcBef>
+                <a:spcPts val="375"/>
+              </a:spcBef>
+              <a:buFont typeface="Arial" panose="020B0604020202020204" pitchFamily="34" charset="0"/>
+              <a:buNone/>
+              <a:defRPr sz="1200" kern="1200">
+                <a:solidFill>
+                  <a:schemeClr val="tx1"/>
+                </a:solidFill>
+                <a:latin typeface="+mn-lt"/>
+                <a:ea typeface="+mn-ea"/>
+                <a:cs typeface="+mn-cs"/>
+              </a:defRPr>
+            </a:lvl5pPr>
+            <a:lvl6pPr marL="1714457" indent="0" algn="ctr" defTabSz="685783" rtl="0" eaLnBrk="1" latinLnBrk="0" hangingPunct="1">
+              <a:lnSpc>
+                <a:spcPct val="90000"/>
+              </a:lnSpc>
+              <a:spcBef>
+                <a:spcPts val="375"/>
+              </a:spcBef>
+              <a:buFont typeface="Arial" panose="020B0604020202020204" pitchFamily="34" charset="0"/>
+              <a:buNone/>
+              <a:defRPr sz="1200" kern="1200">
+                <a:solidFill>
+                  <a:schemeClr val="tx1"/>
+                </a:solidFill>
+                <a:latin typeface="+mn-lt"/>
+                <a:ea typeface="+mn-ea"/>
+                <a:cs typeface="+mn-cs"/>
+              </a:defRPr>
+            </a:lvl6pPr>
+            <a:lvl7pPr marL="2057348" indent="0" algn="ctr" defTabSz="685783" rtl="0" eaLnBrk="1" latinLnBrk="0" hangingPunct="1">
+              <a:lnSpc>
+                <a:spcPct val="90000"/>
+              </a:lnSpc>
+              <a:spcBef>
+                <a:spcPts val="375"/>
+              </a:spcBef>
+              <a:buFont typeface="Arial" panose="020B0604020202020204" pitchFamily="34" charset="0"/>
+              <a:buNone/>
+              <a:defRPr sz="1200" kern="1200">
+                <a:solidFill>
+                  <a:schemeClr val="tx1"/>
+                </a:solidFill>
+                <a:latin typeface="+mn-lt"/>
+                <a:ea typeface="+mn-ea"/>
+                <a:cs typeface="+mn-cs"/>
+              </a:defRPr>
+            </a:lvl7pPr>
+            <a:lvl8pPr marL="2400240" indent="0" algn="ctr" defTabSz="685783" rtl="0" eaLnBrk="1" latinLnBrk="0" hangingPunct="1">
+              <a:lnSpc>
+                <a:spcPct val="90000"/>
+              </a:lnSpc>
+              <a:spcBef>
+                <a:spcPts val="375"/>
+              </a:spcBef>
+              <a:buFont typeface="Arial" panose="020B0604020202020204" pitchFamily="34" charset="0"/>
+              <a:buNone/>
+              <a:defRPr sz="1200" kern="1200">
+                <a:solidFill>
+                  <a:schemeClr val="tx1"/>
+                </a:solidFill>
+                <a:latin typeface="+mn-lt"/>
+                <a:ea typeface="+mn-ea"/>
+                <a:cs typeface="+mn-cs"/>
+              </a:defRPr>
+            </a:lvl8pPr>
+            <a:lvl9pPr marL="2743132" indent="0" algn="ctr" defTabSz="685783" rtl="0" eaLnBrk="1" latinLnBrk="0" hangingPunct="1">
+              <a:lnSpc>
+                <a:spcPct val="90000"/>
+              </a:lnSpc>
+              <a:spcBef>
+                <a:spcPts val="375"/>
+              </a:spcBef>
+              <a:buFont typeface="Arial" panose="020B0604020202020204" pitchFamily="34" charset="0"/>
+              <a:buNone/>
+              <a:defRPr sz="1200" kern="1200">
+                <a:solidFill>
+                  <a:schemeClr val="tx1"/>
+                </a:solidFill>
+                <a:latin typeface="+mn-lt"/>
+                <a:ea typeface="+mn-ea"/>
+                <a:cs typeface="+mn-cs"/>
+              </a:defRPr>
+            </a:lvl9pPr>
+          </a:lstStyle>
+          <a:p>
+            <a:r>
+              <a:rPr lang="en-US">
+                <a:highlight>
+                  <a:srgbClr val="000054"/>
+                </a:highlight>
               </a:rPr>
-              <a:t>Preference RMIT lockup</a:t>
-            </a:r>
+              <a:t>Task List</a:t>
+            </a:r>
+          </a:p>
+          <a:p>
+            <a:endParaRPr lang="en-US">
+              <a:cs typeface="Arial" panose="020B0604020202020204"/>
+            </a:endParaRPr>
+          </a:p>
+          <a:p>
+            <a:endParaRPr lang="en-AU">
+              <a:cs typeface="Arial" panose="020B0604020202020204"/>
+            </a:endParaRPr>
           </a:p>
         </p:txBody>
       </p:sp>
       <p:sp>
         <p:nvSpPr>
-          <p:cNvPr id="18" name="TextBox 17">
-            <a:extLst>
-              <a:ext uri="{FF2B5EF4-FFF2-40B4-BE49-F238E27FC236}">
-                <a16:creationId xmlns:a16="http://schemas.microsoft.com/office/drawing/2014/main" id="{96A224C3-D33C-21F8-7846-B954DBFE0B6C}"/>
-              </a:ext>
-            </a:extLst>
-          </p:cNvPr>
-          <p:cNvSpPr txBox="1"/>
+          <p:cNvPr id="11" name="Subtitle 2">
+            <a:extLst>
+              <a:ext uri="{FF2B5EF4-FFF2-40B4-BE49-F238E27FC236}">
+                <a16:creationId xmlns:a16="http://schemas.microsoft.com/office/drawing/2014/main" id="{FBFFE7E6-0EA7-F5F7-8977-B74987E99A02}"/>
+              </a:ext>
+            </a:extLst>
+          </p:cNvPr>
+          <p:cNvSpPr txBox="1">
+            <a:spLocks/>
+          </p:cNvSpPr>
           <p:nvPr/>
         </p:nvSpPr>
         <p:spPr>
           <a:xfrm>
-            <a:off x="4975251" y="2604106"/>
-            <a:ext cx="2894893" cy="230832"/>
+            <a:off x="387382" y="2042822"/>
+            <a:ext cx="2427889" cy="2600204"/>
           </a:xfrm>
           <a:prstGeom prst="rect">
             <a:avLst/>
           </a:prstGeom>
-          <a:solidFill>
-            <a:schemeClr val="tx2"/>
-          </a:solidFill>
         </p:spPr>
         <p:txBody>
-          <a:bodyPr vert="horz" wrap="square" lIns="91440" tIns="45720" rIns="91440" bIns="45720" rtlCol="0" anchor="t" anchorCtr="0">
-            <a:spAutoFit/>
+          <a:bodyPr vert="horz" lIns="91440" tIns="45720" rIns="91440" bIns="45720" rtlCol="0" anchor="t" anchorCtr="0">
+            <a:noAutofit/>
           </a:bodyPr>
-          <a:lstStyle/>
-          <a:p>
-            <a:r>
-              <a:rPr lang="en-US" sz="900">
-                <a:solidFill>
-                  <a:srgbClr val="000054"/>
-                </a:solidFill>
-                <a:latin typeface="Calibri" panose="020F0502020204030204" pitchFamily="34" charset="0"/>
-                <a:ea typeface="Calibri" panose="020F0502020204030204" pitchFamily="34" charset="0"/>
-                <a:cs typeface="Calibri" panose="020F0502020204030204" pitchFamily="34" charset="0"/>
-              </a:rPr>
-              <a:t>“Only at RMIT can you…” lockup for reference</a:t>
+          <a:lstStyle>
+            <a:lvl1pPr marL="0" indent="0" algn="l" defTabSz="685783" rtl="0" eaLnBrk="1" latinLnBrk="0" hangingPunct="1">
+              <a:lnSpc>
+                <a:spcPct val="100000"/>
+              </a:lnSpc>
+              <a:spcBef>
+                <a:spcPts val="300"/>
+              </a:spcBef>
+              <a:spcAft>
+                <a:spcPts val="300"/>
+              </a:spcAft>
+              <a:buFont typeface="Arial" panose="020B0604020202020204" pitchFamily="34" charset="0"/>
+              <a:buNone/>
+              <a:defRPr sz="2700" b="1" kern="1200" baseline="0">
+                <a:solidFill>
+                  <a:schemeClr val="bg1"/>
+                </a:solidFill>
+                <a:latin typeface="+mn-lt"/>
+                <a:ea typeface="+mn-ea"/>
+                <a:cs typeface="+mn-cs"/>
+              </a:defRPr>
+            </a:lvl1pPr>
+            <a:lvl2pPr marL="342892" indent="0" algn="ctr" defTabSz="685783" rtl="0" eaLnBrk="1" latinLnBrk="0" hangingPunct="1">
+              <a:lnSpc>
+                <a:spcPct val="100000"/>
+              </a:lnSpc>
+              <a:spcBef>
+                <a:spcPts val="300"/>
+              </a:spcBef>
+              <a:spcAft>
+                <a:spcPts val="300"/>
+              </a:spcAft>
+              <a:buClr>
+                <a:schemeClr val="accent2"/>
+              </a:buClr>
+              <a:buFont typeface="Wingdings" pitchFamily="2" charset="2"/>
+              <a:buNone/>
+              <a:tabLst/>
+              <a:defRPr sz="1500" kern="1200">
+                <a:solidFill>
+                  <a:schemeClr val="tx1"/>
+                </a:solidFill>
+                <a:latin typeface="+mn-lt"/>
+                <a:ea typeface="+mn-ea"/>
+                <a:cs typeface="+mn-cs"/>
+              </a:defRPr>
+            </a:lvl2pPr>
+            <a:lvl3pPr marL="685783" indent="0" algn="ctr" defTabSz="685783" rtl="0" eaLnBrk="1" latinLnBrk="0" hangingPunct="1">
+              <a:lnSpc>
+                <a:spcPct val="90000"/>
+              </a:lnSpc>
+              <a:spcBef>
+                <a:spcPts val="300"/>
+              </a:spcBef>
+              <a:spcAft>
+                <a:spcPts val="300"/>
+              </a:spcAft>
+              <a:buClr>
+                <a:schemeClr val="accent2"/>
+              </a:buClr>
+              <a:buFont typeface="Wingdings" pitchFamily="2" charset="2"/>
+              <a:buNone/>
+              <a:tabLst/>
+              <a:defRPr lang="en-US" sz="1350" kern="1200" baseline="0">
+                <a:solidFill>
+                  <a:schemeClr val="tx1"/>
+                </a:solidFill>
+                <a:latin typeface="+mn-lt"/>
+                <a:ea typeface="+mn-ea"/>
+                <a:cs typeface="+mn-cs"/>
+              </a:defRPr>
+            </a:lvl3pPr>
+            <a:lvl4pPr marL="1028675" indent="0" algn="ctr" defTabSz="685783" rtl="0" eaLnBrk="1" latinLnBrk="0" hangingPunct="1">
+              <a:lnSpc>
+                <a:spcPct val="90000"/>
+              </a:lnSpc>
+              <a:spcBef>
+                <a:spcPts val="375"/>
+              </a:spcBef>
+              <a:buClr>
+                <a:schemeClr val="accent4"/>
+              </a:buClr>
+              <a:buFont typeface="Wingdings" pitchFamily="2" charset="2"/>
+              <a:buNone/>
+              <a:defRPr sz="1200" kern="1200">
+                <a:solidFill>
+                  <a:schemeClr val="tx1"/>
+                </a:solidFill>
+                <a:latin typeface="+mn-lt"/>
+                <a:ea typeface="+mn-ea"/>
+                <a:cs typeface="+mn-cs"/>
+              </a:defRPr>
+            </a:lvl4pPr>
+            <a:lvl5pPr marL="1371566" indent="0" algn="ctr" defTabSz="685783" rtl="0" eaLnBrk="1" latinLnBrk="0" hangingPunct="1">
+              <a:lnSpc>
+                <a:spcPct val="90000"/>
+              </a:lnSpc>
+              <a:spcBef>
+                <a:spcPts val="375"/>
+              </a:spcBef>
+              <a:buFont typeface="Arial" panose="020B0604020202020204" pitchFamily="34" charset="0"/>
+              <a:buNone/>
+              <a:defRPr sz="1200" kern="1200">
+                <a:solidFill>
+                  <a:schemeClr val="tx1"/>
+                </a:solidFill>
+                <a:latin typeface="+mn-lt"/>
+                <a:ea typeface="+mn-ea"/>
+                <a:cs typeface="+mn-cs"/>
+              </a:defRPr>
+            </a:lvl5pPr>
+            <a:lvl6pPr marL="1714457" indent="0" algn="ctr" defTabSz="685783" rtl="0" eaLnBrk="1" latinLnBrk="0" hangingPunct="1">
+              <a:lnSpc>
+                <a:spcPct val="90000"/>
+              </a:lnSpc>
+              <a:spcBef>
+                <a:spcPts val="375"/>
+              </a:spcBef>
+              <a:buFont typeface="Arial" panose="020B0604020202020204" pitchFamily="34" charset="0"/>
+              <a:buNone/>
+              <a:defRPr sz="1200" kern="1200">
+                <a:solidFill>
+                  <a:schemeClr val="tx1"/>
+                </a:solidFill>
+                <a:latin typeface="+mn-lt"/>
+                <a:ea typeface="+mn-ea"/>
+                <a:cs typeface="+mn-cs"/>
+              </a:defRPr>
+            </a:lvl6pPr>
+            <a:lvl7pPr marL="2057348" indent="0" algn="ctr" defTabSz="685783" rtl="0" eaLnBrk="1" latinLnBrk="0" hangingPunct="1">
+              <a:lnSpc>
+                <a:spcPct val="90000"/>
+              </a:lnSpc>
+              <a:spcBef>
+                <a:spcPts val="375"/>
+              </a:spcBef>
+              <a:buFont typeface="Arial" panose="020B0604020202020204" pitchFamily="34" charset="0"/>
+              <a:buNone/>
+              <a:defRPr sz="1200" kern="1200">
+                <a:solidFill>
+                  <a:schemeClr val="tx1"/>
+                </a:solidFill>
+                <a:latin typeface="+mn-lt"/>
+                <a:ea typeface="+mn-ea"/>
+                <a:cs typeface="+mn-cs"/>
+              </a:defRPr>
+            </a:lvl7pPr>
+            <a:lvl8pPr marL="2400240" indent="0" algn="ctr" defTabSz="685783" rtl="0" eaLnBrk="1" latinLnBrk="0" hangingPunct="1">
+              <a:lnSpc>
+                <a:spcPct val="90000"/>
+              </a:lnSpc>
+              <a:spcBef>
+                <a:spcPts val="375"/>
+              </a:spcBef>
+              <a:buFont typeface="Arial" panose="020B0604020202020204" pitchFamily="34" charset="0"/>
+              <a:buNone/>
+              <a:defRPr sz="1200" kern="1200">
+                <a:solidFill>
+                  <a:schemeClr val="tx1"/>
+                </a:solidFill>
+                <a:latin typeface="+mn-lt"/>
+                <a:ea typeface="+mn-ea"/>
+                <a:cs typeface="+mn-cs"/>
+              </a:defRPr>
+            </a:lvl8pPr>
+            <a:lvl9pPr marL="2743132" indent="0" algn="ctr" defTabSz="685783" rtl="0" eaLnBrk="1" latinLnBrk="0" hangingPunct="1">
+              <a:lnSpc>
+                <a:spcPct val="90000"/>
+              </a:lnSpc>
+              <a:spcBef>
+                <a:spcPts val="375"/>
+              </a:spcBef>
+              <a:buFont typeface="Arial" panose="020B0604020202020204" pitchFamily="34" charset="0"/>
+              <a:buNone/>
+              <a:defRPr sz="1200" kern="1200">
+                <a:solidFill>
+                  <a:schemeClr val="tx1"/>
+                </a:solidFill>
+                <a:latin typeface="+mn-lt"/>
+                <a:ea typeface="+mn-ea"/>
+                <a:cs typeface="+mn-cs"/>
+              </a:defRPr>
+            </a:lvl9pPr>
+          </a:lstStyle>
+          <a:p>
+            <a:r>
+              <a:rPr lang="en-US" sz="800" b="0"/>
+              <a:t>Every task GCMC has ever logged, in one searchable table — search by code or name, filter by squad, campaign, work type, asset type, person, size or function, and sort any column. Click a row to open and edit it.</a:t>
             </a:r>
           </a:p>
         </p:txBody>
       </p:sp>
       <p:pic>
         <p:nvPicPr>
-          <p:cNvPr id="24" name="Picture 23">
-            <a:extLst>
-              <a:ext uri="{FF2B5EF4-FFF2-40B4-BE49-F238E27FC236}">
-                <a16:creationId xmlns:a16="http://schemas.microsoft.com/office/drawing/2014/main" id="{A7594C53-D930-066A-AF0A-8AF28B6A76A1}"/>
+          <p:cNvPr id="3" name="Picture 2">
+            <a:extLst>
+              <a:ext uri="{FF2B5EF4-FFF2-40B4-BE49-F238E27FC236}">
+                <a16:creationId xmlns:a16="http://schemas.microsoft.com/office/drawing/2014/main" id="{A5E608C9-0261-F32D-586E-49A97FA4AA02}"/>
               </a:ext>
             </a:extLst>
           </p:cNvPr>
@@ -7556,33 +10309,515 @@
           <p:nvPr/>
         </p:nvPicPr>
         <p:blipFill>
-          <a:blip r:embed="rId2" cstate="print">
-            <a:extLst>
-              <a:ext uri="{28A0092B-C50C-407E-A947-70E740481C1C}">
-                <a14:useLocalDpi xmlns:a14="http://schemas.microsoft.com/office/drawing/2010/main" val="0"/>
-              </a:ext>
-            </a:extLst>
-          </a:blip>
+          <a:blip r:embed="rId2"/>
           <a:stretch>
             <a:fillRect/>
           </a:stretch>
         </p:blipFill>
         <p:spPr>
           <a:xfrm>
-            <a:off x="1121055" y="949720"/>
-            <a:ext cx="2462080" cy="2053153"/>
+            <a:off x="2954909" y="1058869"/>
+            <a:ext cx="5860268" cy="3025762"/>
           </a:xfrm>
           <a:prstGeom prst="rect">
             <a:avLst/>
           </a:prstGeom>
         </p:spPr>
       </p:pic>
+    </p:spTree>
+    <p:extLst>
+      <p:ext uri="{BB962C8B-B14F-4D97-AF65-F5344CB8AC3E}">
+        <p14:creationId xmlns:p14="http://schemas.microsoft.com/office/powerpoint/2010/main" val="1986077195"/>
+      </p:ext>
+    </p:extLst>
+  </p:cSld>
+  <p:clrMapOvr>
+    <a:masterClrMapping/>
+  </p:clrMapOvr>
+</p:sld>
+</file>
+
+<file path=ppt/slides/slide8.xml><?xml version="1.0" encoding="utf-8"?>
+<p:sld xmlns:a="http://schemas.openxmlformats.org/drawingml/2006/main" xmlns:r="http://schemas.openxmlformats.org/officeDocument/2006/relationships" xmlns:p="http://schemas.openxmlformats.org/presentationml/2006/main">
+  <p:cSld>
+    <p:spTree>
+      <p:nvGrpSpPr>
+        <p:cNvPr id="1" name="">
+          <a:extLst>
+            <a:ext uri="{FF2B5EF4-FFF2-40B4-BE49-F238E27FC236}">
+              <a16:creationId xmlns:a16="http://schemas.microsoft.com/office/drawing/2014/main" id="{794B6CFF-D754-C3A4-3A05-FCEC70BA60AE}"/>
+            </a:ext>
+          </a:extLst>
+        </p:cNvPr>
+        <p:cNvGrpSpPr/>
+        <p:nvPr/>
+      </p:nvGrpSpPr>
+      <p:grpSpPr>
+        <a:xfrm>
+          <a:off x="0" y="0"/>
+          <a:ext cx="0" cy="0"/>
+          <a:chOff x="0" y="0"/>
+          <a:chExt cx="0" cy="0"/>
+        </a:xfrm>
+      </p:grpSpPr>
+      <p:sp>
+        <p:nvSpPr>
+          <p:cNvPr id="8" name="Subtitle 2">
+            <a:extLst>
+              <a:ext uri="{FF2B5EF4-FFF2-40B4-BE49-F238E27FC236}">
+                <a16:creationId xmlns:a16="http://schemas.microsoft.com/office/drawing/2014/main" id="{80995274-FD6E-1F46-56A4-2345DDBAB2A3}"/>
+              </a:ext>
+            </a:extLst>
+          </p:cNvPr>
+          <p:cNvSpPr txBox="1">
+            <a:spLocks/>
+          </p:cNvSpPr>
+          <p:nvPr/>
+        </p:nvSpPr>
+        <p:spPr>
+          <a:xfrm>
+            <a:off x="419708" y="1429260"/>
+            <a:ext cx="2174846" cy="613562"/>
+          </a:xfrm>
+          <a:prstGeom prst="rect">
+            <a:avLst/>
+          </a:prstGeom>
+        </p:spPr>
+        <p:txBody>
+          <a:bodyPr vert="horz" lIns="91440" tIns="45720" rIns="91440" bIns="45720" rtlCol="0" anchor="t" anchorCtr="0">
+            <a:noAutofit/>
+          </a:bodyPr>
+          <a:lstStyle>
+            <a:lvl1pPr marL="0" indent="0" algn="l" defTabSz="685783" rtl="0" eaLnBrk="1" latinLnBrk="0" hangingPunct="1">
+              <a:lnSpc>
+                <a:spcPct val="100000"/>
+              </a:lnSpc>
+              <a:spcBef>
+                <a:spcPts val="300"/>
+              </a:spcBef>
+              <a:spcAft>
+                <a:spcPts val="300"/>
+              </a:spcAft>
+              <a:buFont typeface="Arial" panose="020B0604020202020204" pitchFamily="34" charset="0"/>
+              <a:buNone/>
+              <a:defRPr sz="2700" b="1" kern="1200" baseline="0">
+                <a:solidFill>
+                  <a:schemeClr val="bg1"/>
+                </a:solidFill>
+                <a:latin typeface="+mn-lt"/>
+                <a:ea typeface="+mn-ea"/>
+                <a:cs typeface="+mn-cs"/>
+              </a:defRPr>
+            </a:lvl1pPr>
+            <a:lvl2pPr marL="342892" indent="0" algn="ctr" defTabSz="685783" rtl="0" eaLnBrk="1" latinLnBrk="0" hangingPunct="1">
+              <a:lnSpc>
+                <a:spcPct val="100000"/>
+              </a:lnSpc>
+              <a:spcBef>
+                <a:spcPts val="300"/>
+              </a:spcBef>
+              <a:spcAft>
+                <a:spcPts val="300"/>
+              </a:spcAft>
+              <a:buClr>
+                <a:schemeClr val="accent2"/>
+              </a:buClr>
+              <a:buFont typeface="Wingdings" pitchFamily="2" charset="2"/>
+              <a:buNone/>
+              <a:tabLst/>
+              <a:defRPr sz="1500" kern="1200">
+                <a:solidFill>
+                  <a:schemeClr val="tx1"/>
+                </a:solidFill>
+                <a:latin typeface="+mn-lt"/>
+                <a:ea typeface="+mn-ea"/>
+                <a:cs typeface="+mn-cs"/>
+              </a:defRPr>
+            </a:lvl2pPr>
+            <a:lvl3pPr marL="685783" indent="0" algn="ctr" defTabSz="685783" rtl="0" eaLnBrk="1" latinLnBrk="0" hangingPunct="1">
+              <a:lnSpc>
+                <a:spcPct val="90000"/>
+              </a:lnSpc>
+              <a:spcBef>
+                <a:spcPts val="300"/>
+              </a:spcBef>
+              <a:spcAft>
+                <a:spcPts val="300"/>
+              </a:spcAft>
+              <a:buClr>
+                <a:schemeClr val="accent2"/>
+              </a:buClr>
+              <a:buFont typeface="Wingdings" pitchFamily="2" charset="2"/>
+              <a:buNone/>
+              <a:tabLst/>
+              <a:defRPr lang="en-US" sz="1350" kern="1200" baseline="0">
+                <a:solidFill>
+                  <a:schemeClr val="tx1"/>
+                </a:solidFill>
+                <a:latin typeface="+mn-lt"/>
+                <a:ea typeface="+mn-ea"/>
+                <a:cs typeface="+mn-cs"/>
+              </a:defRPr>
+            </a:lvl3pPr>
+            <a:lvl4pPr marL="1028675" indent="0" algn="ctr" defTabSz="685783" rtl="0" eaLnBrk="1" latinLnBrk="0" hangingPunct="1">
+              <a:lnSpc>
+                <a:spcPct val="90000"/>
+              </a:lnSpc>
+              <a:spcBef>
+                <a:spcPts val="375"/>
+              </a:spcBef>
+              <a:buClr>
+                <a:schemeClr val="accent4"/>
+              </a:buClr>
+              <a:buFont typeface="Wingdings" pitchFamily="2" charset="2"/>
+              <a:buNone/>
+              <a:defRPr sz="1200" kern="1200">
+                <a:solidFill>
+                  <a:schemeClr val="tx1"/>
+                </a:solidFill>
+                <a:latin typeface="+mn-lt"/>
+                <a:ea typeface="+mn-ea"/>
+                <a:cs typeface="+mn-cs"/>
+              </a:defRPr>
+            </a:lvl4pPr>
+            <a:lvl5pPr marL="1371566" indent="0" algn="ctr" defTabSz="685783" rtl="0" eaLnBrk="1" latinLnBrk="0" hangingPunct="1">
+              <a:lnSpc>
+                <a:spcPct val="90000"/>
+              </a:lnSpc>
+              <a:spcBef>
+                <a:spcPts val="375"/>
+              </a:spcBef>
+              <a:buFont typeface="Arial" panose="020B0604020202020204" pitchFamily="34" charset="0"/>
+              <a:buNone/>
+              <a:defRPr sz="1200" kern="1200">
+                <a:solidFill>
+                  <a:schemeClr val="tx1"/>
+                </a:solidFill>
+                <a:latin typeface="+mn-lt"/>
+                <a:ea typeface="+mn-ea"/>
+                <a:cs typeface="+mn-cs"/>
+              </a:defRPr>
+            </a:lvl5pPr>
+            <a:lvl6pPr marL="1714457" indent="0" algn="ctr" defTabSz="685783" rtl="0" eaLnBrk="1" latinLnBrk="0" hangingPunct="1">
+              <a:lnSpc>
+                <a:spcPct val="90000"/>
+              </a:lnSpc>
+              <a:spcBef>
+                <a:spcPts val="375"/>
+              </a:spcBef>
+              <a:buFont typeface="Arial" panose="020B0604020202020204" pitchFamily="34" charset="0"/>
+              <a:buNone/>
+              <a:defRPr sz="1200" kern="1200">
+                <a:solidFill>
+                  <a:schemeClr val="tx1"/>
+                </a:solidFill>
+                <a:latin typeface="+mn-lt"/>
+                <a:ea typeface="+mn-ea"/>
+                <a:cs typeface="+mn-cs"/>
+              </a:defRPr>
+            </a:lvl6pPr>
+            <a:lvl7pPr marL="2057348" indent="0" algn="ctr" defTabSz="685783" rtl="0" eaLnBrk="1" latinLnBrk="0" hangingPunct="1">
+              <a:lnSpc>
+                <a:spcPct val="90000"/>
+              </a:lnSpc>
+              <a:spcBef>
+                <a:spcPts val="375"/>
+              </a:spcBef>
+              <a:buFont typeface="Arial" panose="020B0604020202020204" pitchFamily="34" charset="0"/>
+              <a:buNone/>
+              <a:defRPr sz="1200" kern="1200">
+                <a:solidFill>
+                  <a:schemeClr val="tx1"/>
+                </a:solidFill>
+                <a:latin typeface="+mn-lt"/>
+                <a:ea typeface="+mn-ea"/>
+                <a:cs typeface="+mn-cs"/>
+              </a:defRPr>
+            </a:lvl7pPr>
+            <a:lvl8pPr marL="2400240" indent="0" algn="ctr" defTabSz="685783" rtl="0" eaLnBrk="1" latinLnBrk="0" hangingPunct="1">
+              <a:lnSpc>
+                <a:spcPct val="90000"/>
+              </a:lnSpc>
+              <a:spcBef>
+                <a:spcPts val="375"/>
+              </a:spcBef>
+              <a:buFont typeface="Arial" panose="020B0604020202020204" pitchFamily="34" charset="0"/>
+              <a:buNone/>
+              <a:defRPr sz="1200" kern="1200">
+                <a:solidFill>
+                  <a:schemeClr val="tx1"/>
+                </a:solidFill>
+                <a:latin typeface="+mn-lt"/>
+                <a:ea typeface="+mn-ea"/>
+                <a:cs typeface="+mn-cs"/>
+              </a:defRPr>
+            </a:lvl8pPr>
+            <a:lvl9pPr marL="2743132" indent="0" algn="ctr" defTabSz="685783" rtl="0" eaLnBrk="1" latinLnBrk="0" hangingPunct="1">
+              <a:lnSpc>
+                <a:spcPct val="90000"/>
+              </a:lnSpc>
+              <a:spcBef>
+                <a:spcPts val="375"/>
+              </a:spcBef>
+              <a:buFont typeface="Arial" panose="020B0604020202020204" pitchFamily="34" charset="0"/>
+              <a:buNone/>
+              <a:defRPr sz="1200" kern="1200">
+                <a:solidFill>
+                  <a:schemeClr val="tx1"/>
+                </a:solidFill>
+                <a:latin typeface="+mn-lt"/>
+                <a:ea typeface="+mn-ea"/>
+                <a:cs typeface="+mn-cs"/>
+              </a:defRPr>
+            </a:lvl9pPr>
+          </a:lstStyle>
+          <a:p>
+            <a:r>
+              <a:rPr lang="en-US">
+                <a:highlight>
+                  <a:srgbClr val="000054"/>
+                </a:highlight>
+              </a:rPr>
+              <a:t>Task List</a:t>
+            </a:r>
+          </a:p>
+          <a:p>
+            <a:endParaRPr lang="en-US">
+              <a:cs typeface="Arial" panose="020B0604020202020204"/>
+            </a:endParaRPr>
+          </a:p>
+          <a:p>
+            <a:endParaRPr lang="en-AU">
+              <a:cs typeface="Arial" panose="020B0604020202020204"/>
+            </a:endParaRPr>
+          </a:p>
+        </p:txBody>
+      </p:sp>
+      <p:sp>
+        <p:nvSpPr>
+          <p:cNvPr id="11" name="Subtitle 2">
+            <a:extLst>
+              <a:ext uri="{FF2B5EF4-FFF2-40B4-BE49-F238E27FC236}">
+                <a16:creationId xmlns:a16="http://schemas.microsoft.com/office/drawing/2014/main" id="{5B574322-CF3B-0EEC-453D-17F780AD9FD5}"/>
+              </a:ext>
+            </a:extLst>
+          </p:cNvPr>
+          <p:cNvSpPr txBox="1">
+            <a:spLocks/>
+          </p:cNvSpPr>
+          <p:nvPr/>
+        </p:nvSpPr>
+        <p:spPr>
+          <a:xfrm>
+            <a:off x="387382" y="2042822"/>
+            <a:ext cx="2427889" cy="2600204"/>
+          </a:xfrm>
+          <a:prstGeom prst="rect">
+            <a:avLst/>
+          </a:prstGeom>
+        </p:spPr>
+        <p:txBody>
+          <a:bodyPr vert="horz" lIns="91440" tIns="45720" rIns="91440" bIns="45720" rtlCol="0" anchor="t" anchorCtr="0">
+            <a:noAutofit/>
+          </a:bodyPr>
+          <a:lstStyle>
+            <a:lvl1pPr marL="0" indent="0" algn="l" defTabSz="685783" rtl="0" eaLnBrk="1" latinLnBrk="0" hangingPunct="1">
+              <a:lnSpc>
+                <a:spcPct val="100000"/>
+              </a:lnSpc>
+              <a:spcBef>
+                <a:spcPts val="300"/>
+              </a:spcBef>
+              <a:spcAft>
+                <a:spcPts val="300"/>
+              </a:spcAft>
+              <a:buFont typeface="Arial" panose="020B0604020202020204" pitchFamily="34" charset="0"/>
+              <a:buNone/>
+              <a:defRPr sz="2700" b="1" kern="1200" baseline="0">
+                <a:solidFill>
+                  <a:schemeClr val="bg1"/>
+                </a:solidFill>
+                <a:latin typeface="+mn-lt"/>
+                <a:ea typeface="+mn-ea"/>
+                <a:cs typeface="+mn-cs"/>
+              </a:defRPr>
+            </a:lvl1pPr>
+            <a:lvl2pPr marL="342892" indent="0" algn="ctr" defTabSz="685783" rtl="0" eaLnBrk="1" latinLnBrk="0" hangingPunct="1">
+              <a:lnSpc>
+                <a:spcPct val="100000"/>
+              </a:lnSpc>
+              <a:spcBef>
+                <a:spcPts val="300"/>
+              </a:spcBef>
+              <a:spcAft>
+                <a:spcPts val="300"/>
+              </a:spcAft>
+              <a:buClr>
+                <a:schemeClr val="accent2"/>
+              </a:buClr>
+              <a:buFont typeface="Wingdings" pitchFamily="2" charset="2"/>
+              <a:buNone/>
+              <a:tabLst/>
+              <a:defRPr sz="1500" kern="1200">
+                <a:solidFill>
+                  <a:schemeClr val="tx1"/>
+                </a:solidFill>
+                <a:latin typeface="+mn-lt"/>
+                <a:ea typeface="+mn-ea"/>
+                <a:cs typeface="+mn-cs"/>
+              </a:defRPr>
+            </a:lvl2pPr>
+            <a:lvl3pPr marL="685783" indent="0" algn="ctr" defTabSz="685783" rtl="0" eaLnBrk="1" latinLnBrk="0" hangingPunct="1">
+              <a:lnSpc>
+                <a:spcPct val="90000"/>
+              </a:lnSpc>
+              <a:spcBef>
+                <a:spcPts val="300"/>
+              </a:spcBef>
+              <a:spcAft>
+                <a:spcPts val="300"/>
+              </a:spcAft>
+              <a:buClr>
+                <a:schemeClr val="accent2"/>
+              </a:buClr>
+              <a:buFont typeface="Wingdings" pitchFamily="2" charset="2"/>
+              <a:buNone/>
+              <a:tabLst/>
+              <a:defRPr lang="en-US" sz="1350" kern="1200" baseline="0">
+                <a:solidFill>
+                  <a:schemeClr val="tx1"/>
+                </a:solidFill>
+                <a:latin typeface="+mn-lt"/>
+                <a:ea typeface="+mn-ea"/>
+                <a:cs typeface="+mn-cs"/>
+              </a:defRPr>
+            </a:lvl3pPr>
+            <a:lvl4pPr marL="1028675" indent="0" algn="ctr" defTabSz="685783" rtl="0" eaLnBrk="1" latinLnBrk="0" hangingPunct="1">
+              <a:lnSpc>
+                <a:spcPct val="90000"/>
+              </a:lnSpc>
+              <a:spcBef>
+                <a:spcPts val="375"/>
+              </a:spcBef>
+              <a:buClr>
+                <a:schemeClr val="accent4"/>
+              </a:buClr>
+              <a:buFont typeface="Wingdings" pitchFamily="2" charset="2"/>
+              <a:buNone/>
+              <a:defRPr sz="1200" kern="1200">
+                <a:solidFill>
+                  <a:schemeClr val="tx1"/>
+                </a:solidFill>
+                <a:latin typeface="+mn-lt"/>
+                <a:ea typeface="+mn-ea"/>
+                <a:cs typeface="+mn-cs"/>
+              </a:defRPr>
+            </a:lvl4pPr>
+            <a:lvl5pPr marL="1371566" indent="0" algn="ctr" defTabSz="685783" rtl="0" eaLnBrk="1" latinLnBrk="0" hangingPunct="1">
+              <a:lnSpc>
+                <a:spcPct val="90000"/>
+              </a:lnSpc>
+              <a:spcBef>
+                <a:spcPts val="375"/>
+              </a:spcBef>
+              <a:buFont typeface="Arial" panose="020B0604020202020204" pitchFamily="34" charset="0"/>
+              <a:buNone/>
+              <a:defRPr sz="1200" kern="1200">
+                <a:solidFill>
+                  <a:schemeClr val="tx1"/>
+                </a:solidFill>
+                <a:latin typeface="+mn-lt"/>
+                <a:ea typeface="+mn-ea"/>
+                <a:cs typeface="+mn-cs"/>
+              </a:defRPr>
+            </a:lvl5pPr>
+            <a:lvl6pPr marL="1714457" indent="0" algn="ctr" defTabSz="685783" rtl="0" eaLnBrk="1" latinLnBrk="0" hangingPunct="1">
+              <a:lnSpc>
+                <a:spcPct val="90000"/>
+              </a:lnSpc>
+              <a:spcBef>
+                <a:spcPts val="375"/>
+              </a:spcBef>
+              <a:buFont typeface="Arial" panose="020B0604020202020204" pitchFamily="34" charset="0"/>
+              <a:buNone/>
+              <a:defRPr sz="1200" kern="1200">
+                <a:solidFill>
+                  <a:schemeClr val="tx1"/>
+                </a:solidFill>
+                <a:latin typeface="+mn-lt"/>
+                <a:ea typeface="+mn-ea"/>
+                <a:cs typeface="+mn-cs"/>
+              </a:defRPr>
+            </a:lvl6pPr>
+            <a:lvl7pPr marL="2057348" indent="0" algn="ctr" defTabSz="685783" rtl="0" eaLnBrk="1" latinLnBrk="0" hangingPunct="1">
+              <a:lnSpc>
+                <a:spcPct val="90000"/>
+              </a:lnSpc>
+              <a:spcBef>
+                <a:spcPts val="375"/>
+              </a:spcBef>
+              <a:buFont typeface="Arial" panose="020B0604020202020204" pitchFamily="34" charset="0"/>
+              <a:buNone/>
+              <a:defRPr sz="1200" kern="1200">
+                <a:solidFill>
+                  <a:schemeClr val="tx1"/>
+                </a:solidFill>
+                <a:latin typeface="+mn-lt"/>
+                <a:ea typeface="+mn-ea"/>
+                <a:cs typeface="+mn-cs"/>
+              </a:defRPr>
+            </a:lvl7pPr>
+            <a:lvl8pPr marL="2400240" indent="0" algn="ctr" defTabSz="685783" rtl="0" eaLnBrk="1" latinLnBrk="0" hangingPunct="1">
+              <a:lnSpc>
+                <a:spcPct val="90000"/>
+              </a:lnSpc>
+              <a:spcBef>
+                <a:spcPts val="375"/>
+              </a:spcBef>
+              <a:buFont typeface="Arial" panose="020B0604020202020204" pitchFamily="34" charset="0"/>
+              <a:buNone/>
+              <a:defRPr sz="1200" kern="1200">
+                <a:solidFill>
+                  <a:schemeClr val="tx1"/>
+                </a:solidFill>
+                <a:latin typeface="+mn-lt"/>
+                <a:ea typeface="+mn-ea"/>
+                <a:cs typeface="+mn-cs"/>
+              </a:defRPr>
+            </a:lvl8pPr>
+            <a:lvl9pPr marL="2743132" indent="0" algn="ctr" defTabSz="685783" rtl="0" eaLnBrk="1" latinLnBrk="0" hangingPunct="1">
+              <a:lnSpc>
+                <a:spcPct val="90000"/>
+              </a:lnSpc>
+              <a:spcBef>
+                <a:spcPts val="375"/>
+              </a:spcBef>
+              <a:buFont typeface="Arial" panose="020B0604020202020204" pitchFamily="34" charset="0"/>
+              <a:buNone/>
+              <a:defRPr sz="1200" kern="1200">
+                <a:solidFill>
+                  <a:schemeClr val="tx1"/>
+                </a:solidFill>
+                <a:latin typeface="+mn-lt"/>
+                <a:ea typeface="+mn-ea"/>
+                <a:cs typeface="+mn-cs"/>
+              </a:defRPr>
+            </a:lvl9pPr>
+          </a:lstStyle>
+          <a:p>
+            <a:r>
+              <a:rPr lang="en-US" sz="800" b="0"/>
+              <a:t>Every task GCMC has ever logged, in one searchable table — search by code or name, filter by squad, campaign, work type, asset type, person, size or function, and sort any column. Click a row to open and edit it.</a:t>
+            </a:r>
+          </a:p>
+        </p:txBody>
+      </p:sp>
       <p:pic>
         <p:nvPicPr>
-          <p:cNvPr id="28" name="Picture 27">
-            <a:extLst>
-              <a:ext uri="{FF2B5EF4-FFF2-40B4-BE49-F238E27FC236}">
-                <a16:creationId xmlns:a16="http://schemas.microsoft.com/office/drawing/2014/main" id="{423DA413-0841-695A-5820-94AE12372DF3}"/>
+          <p:cNvPr id="4" name="Picture 3">
+            <a:extLst>
+              <a:ext uri="{FF2B5EF4-FFF2-40B4-BE49-F238E27FC236}">
+                <a16:creationId xmlns:a16="http://schemas.microsoft.com/office/drawing/2014/main" id="{B661FC98-DABA-E020-ED17-A7CD72CC1B6F}"/>
               </a:ext>
             </a:extLst>
           </p:cNvPr>
@@ -7592,207 +10827,55 @@
           <p:nvPr/>
         </p:nvPicPr>
         <p:blipFill>
-          <a:blip r:embed="rId3" cstate="print">
-            <a:extLst>
-              <a:ext uri="{28A0092B-C50C-407E-A947-70E740481C1C}">
-                <a14:useLocalDpi xmlns:a14="http://schemas.microsoft.com/office/drawing/2010/main" val="0"/>
-              </a:ext>
-            </a:extLst>
-          </a:blip>
-          <a:srcRect l="51307"/>
+          <a:blip r:embed="rId2"/>
           <a:stretch>
             <a:fillRect/>
           </a:stretch>
         </p:blipFill>
         <p:spPr>
           <a:xfrm>
-            <a:off x="1121055" y="3095334"/>
-            <a:ext cx="2462080" cy="1285914"/>
+            <a:off x="3055577" y="986470"/>
+            <a:ext cx="5635585" cy="3238126"/>
           </a:xfrm>
           <a:prstGeom prst="rect">
             <a:avLst/>
           </a:prstGeom>
         </p:spPr>
       </p:pic>
-      <p:sp>
-        <p:nvSpPr>
-          <p:cNvPr id="31" name="TextBox 30">
-            <a:extLst>
-              <a:ext uri="{FF2B5EF4-FFF2-40B4-BE49-F238E27FC236}">
-                <a16:creationId xmlns:a16="http://schemas.microsoft.com/office/drawing/2014/main" id="{F56F98BD-8D14-4052-5006-0879A2A34393}"/>
-              </a:ext>
-            </a:extLst>
-          </p:cNvPr>
-          <p:cNvSpPr txBox="1"/>
-          <p:nvPr/>
-        </p:nvSpPr>
-        <p:spPr>
-          <a:xfrm>
-            <a:off x="4975252" y="3931220"/>
-            <a:ext cx="1644210" cy="507831"/>
-          </a:xfrm>
-          <a:prstGeom prst="rect">
-            <a:avLst/>
-          </a:prstGeom>
-          <a:solidFill>
-            <a:schemeClr val="tx2"/>
-          </a:solidFill>
-        </p:spPr>
-        <p:txBody>
-          <a:bodyPr vert="horz" wrap="square" lIns="91440" tIns="45720" rIns="91440" bIns="45720" rtlCol="0" anchor="t" anchorCtr="0">
-            <a:spAutoFit/>
-          </a:bodyPr>
-          <a:lstStyle/>
-          <a:p>
-            <a:r>
-              <a:rPr lang="en-US" sz="900">
-                <a:solidFill>
-                  <a:srgbClr val="000054"/>
-                </a:solidFill>
-                <a:latin typeface="Calibri" panose="020F0502020204030204" pitchFamily="34" charset="0"/>
-                <a:ea typeface="Calibri" panose="020F0502020204030204" pitchFamily="34" charset="0"/>
-                <a:cs typeface="Calibri" panose="020F0502020204030204" pitchFamily="34" charset="0"/>
-              </a:rPr>
-              <a:t>Dedicated option to </a:t>
-            </a:r>
-            <a:r>
-              <a:rPr lang="en-US" sz="900" err="1">
-                <a:solidFill>
-                  <a:srgbClr val="000054"/>
-                </a:solidFill>
-                <a:latin typeface="Calibri" panose="020F0502020204030204" pitchFamily="34" charset="0"/>
-                <a:ea typeface="Calibri" panose="020F0502020204030204" pitchFamily="34" charset="0"/>
-                <a:cs typeface="Calibri" panose="020F0502020204030204" pitchFamily="34" charset="0"/>
-              </a:rPr>
-              <a:t>prioritise</a:t>
-            </a:r>
-            <a:r>
-              <a:rPr lang="en-US" sz="900">
-                <a:solidFill>
-                  <a:srgbClr val="000054"/>
-                </a:solidFill>
-                <a:latin typeface="Calibri" panose="020F0502020204030204" pitchFamily="34" charset="0"/>
-                <a:ea typeface="Calibri" panose="020F0502020204030204" pitchFamily="34" charset="0"/>
-                <a:cs typeface="Calibri" panose="020F0502020204030204" pitchFamily="34" charset="0"/>
-              </a:rPr>
-              <a:t> readability for small sizes (728x90 and 320x50)</a:t>
-            </a:r>
-          </a:p>
-        </p:txBody>
-      </p:sp>
-      <p:pic>
-        <p:nvPicPr>
-          <p:cNvPr id="34" name="Picture 33">
-            <a:extLst>
-              <a:ext uri="{FF2B5EF4-FFF2-40B4-BE49-F238E27FC236}">
-                <a16:creationId xmlns:a16="http://schemas.microsoft.com/office/drawing/2014/main" id="{6E36379B-2C1B-604F-9DA5-27CFC274933B}"/>
-              </a:ext>
-            </a:extLst>
-          </p:cNvPr>
-          <p:cNvPicPr>
-            <a:picLocks noChangeAspect="1"/>
-          </p:cNvPicPr>
-          <p:nvPr/>
-        </p:nvPicPr>
-        <p:blipFill>
-          <a:blip r:embed="rId4" cstate="print">
-            <a:extLst>
-              <a:ext uri="{28A0092B-C50C-407E-A947-70E740481C1C}">
-                <a14:useLocalDpi xmlns:a14="http://schemas.microsoft.com/office/drawing/2010/main" val="0"/>
-              </a:ext>
-            </a:extLst>
-          </a:blip>
-          <a:srcRect b="52385"/>
-          <a:stretch>
-            <a:fillRect/>
-          </a:stretch>
-        </p:blipFill>
-        <p:spPr>
-          <a:xfrm>
-            <a:off x="5062893" y="3125612"/>
-            <a:ext cx="1865212" cy="740093"/>
-          </a:xfrm>
-          <a:prstGeom prst="rect">
-            <a:avLst/>
-          </a:prstGeom>
-        </p:spPr>
-      </p:pic>
-      <p:pic>
-        <p:nvPicPr>
-          <p:cNvPr id="36" name="Picture 35">
-            <a:extLst>
-              <a:ext uri="{FF2B5EF4-FFF2-40B4-BE49-F238E27FC236}">
-                <a16:creationId xmlns:a16="http://schemas.microsoft.com/office/drawing/2014/main" id="{10724E9E-810A-1148-AC2D-5D3901A21852}"/>
-              </a:ext>
-            </a:extLst>
-          </p:cNvPr>
-          <p:cNvPicPr>
-            <a:picLocks noChangeAspect="1"/>
-          </p:cNvPicPr>
-          <p:nvPr/>
-        </p:nvPicPr>
-        <p:blipFill>
-          <a:blip r:embed="rId5" cstate="print">
-            <a:extLst>
-              <a:ext uri="{28A0092B-C50C-407E-A947-70E740481C1C}">
-                <a14:useLocalDpi xmlns:a14="http://schemas.microsoft.com/office/drawing/2010/main" val="0"/>
-              </a:ext>
-            </a:extLst>
-          </a:blip>
-          <a:stretch>
-            <a:fillRect/>
-          </a:stretch>
-        </p:blipFill>
-        <p:spPr>
-          <a:xfrm>
-            <a:off x="5058315" y="989957"/>
-            <a:ext cx="1897578" cy="1581793"/>
-          </a:xfrm>
-          <a:prstGeom prst="rect">
-            <a:avLst/>
-          </a:prstGeom>
-        </p:spPr>
-      </p:pic>
-      <p:cxnSp>
-        <p:nvCxnSpPr>
-          <p:cNvPr id="4" name="Straight Connector 3">
-            <a:extLst>
-              <a:ext uri="{FF2B5EF4-FFF2-40B4-BE49-F238E27FC236}">
-                <a16:creationId xmlns:a16="http://schemas.microsoft.com/office/drawing/2014/main" id="{1843BEAC-BB8E-0E6F-1E0B-FDEA382A6E6F}"/>
-              </a:ext>
-            </a:extLst>
-          </p:cNvPr>
-          <p:cNvCxnSpPr/>
-          <p:nvPr/>
-        </p:nvCxnSpPr>
-        <p:spPr>
-          <a:xfrm>
-            <a:off x="4521550" y="643233"/>
-            <a:ext cx="0" cy="3941379"/>
-          </a:xfrm>
-          <a:prstGeom prst="line">
-            <a:avLst/>
-          </a:prstGeom>
-        </p:spPr>
-        <p:style>
-          <a:lnRef idx="1">
-            <a:schemeClr val="accent1"/>
-          </a:lnRef>
-          <a:fillRef idx="0">
-            <a:schemeClr val="accent1"/>
-          </a:fillRef>
-          <a:effectRef idx="0">
-            <a:schemeClr val="accent1"/>
-          </a:effectRef>
-          <a:fontRef idx="minor">
-            <a:schemeClr val="tx1"/>
-          </a:fontRef>
-        </p:style>
-      </p:cxnSp>
     </p:spTree>
     <p:extLst>
       <p:ext uri="{BB962C8B-B14F-4D97-AF65-F5344CB8AC3E}">
-        <p14:creationId xmlns:p14="http://schemas.microsoft.com/office/powerpoint/2010/main" val="4154937665"/>
+        <p14:creationId xmlns:p14="http://schemas.microsoft.com/office/powerpoint/2010/main" val="309096946"/>
+      </p:ext>
+    </p:extLst>
+  </p:cSld>
+  <p:clrMapOvr>
+    <a:masterClrMapping/>
+  </p:clrMapOvr>
+</p:sld>
+</file>
+
+<file path=ppt/slides/slide9.xml><?xml version="1.0" encoding="utf-8"?>
+<p:sld xmlns:a="http://schemas.openxmlformats.org/drawingml/2006/main" xmlns:r="http://schemas.openxmlformats.org/officeDocument/2006/relationships" xmlns:p="http://schemas.openxmlformats.org/presentationml/2006/main">
+  <p:cSld>
+    <p:spTree>
+      <p:nvGrpSpPr>
+        <p:cNvPr id="1" name=""/>
+        <p:cNvGrpSpPr/>
+        <p:nvPr/>
+      </p:nvGrpSpPr>
+      <p:grpSpPr>
+        <a:xfrm>
+          <a:off x="0" y="0"/>
+          <a:ext cx="0" cy="0"/>
+          <a:chOff x="0" y="0"/>
+          <a:chExt cx="0" cy="0"/>
+        </a:xfrm>
+      </p:grpSpPr>
+    </p:spTree>
+    <p:extLst>
+      <p:ext uri="{BB962C8B-B14F-4D97-AF65-F5344CB8AC3E}">
+        <p14:creationId xmlns:p14="http://schemas.microsoft.com/office/powerpoint/2010/main" val="141687919"/>
       </p:ext>
     </p:extLst>
   </p:cSld>

--- a/Docs/Workload Report User Guide.pptx
+++ b/Docs/Workload Report User Guide.pptx
@@ -5,22 +5,27 @@
     <p:sldMasterId id="2147483720" r:id="rId4"/>
   </p:sldMasterIdLst>
   <p:notesMasterIdLst>
-    <p:notesMasterId r:id="rId18"/>
+    <p:notesMasterId r:id="rId23"/>
   </p:notesMasterIdLst>
   <p:sldIdLst>
     <p:sldId id="304" r:id="rId5"/>
-    <p:sldId id="306" r:id="rId6"/>
-    <p:sldId id="343" r:id="rId7"/>
-    <p:sldId id="346" r:id="rId8"/>
-    <p:sldId id="344" r:id="rId9"/>
-    <p:sldId id="345" r:id="rId10"/>
-    <p:sldId id="349" r:id="rId11"/>
-    <p:sldId id="350" r:id="rId12"/>
-    <p:sldId id="342" r:id="rId13"/>
-    <p:sldId id="347" r:id="rId14"/>
-    <p:sldId id="315" r:id="rId15"/>
-    <p:sldId id="348" r:id="rId16"/>
-    <p:sldId id="333" r:id="rId17"/>
+    <p:sldId id="356" r:id="rId6"/>
+    <p:sldId id="306" r:id="rId7"/>
+    <p:sldId id="343" r:id="rId8"/>
+    <p:sldId id="346" r:id="rId9"/>
+    <p:sldId id="344" r:id="rId10"/>
+    <p:sldId id="345" r:id="rId11"/>
+    <p:sldId id="357" r:id="rId12"/>
+    <p:sldId id="355" r:id="rId13"/>
+    <p:sldId id="358" r:id="rId14"/>
+    <p:sldId id="349" r:id="rId15"/>
+    <p:sldId id="350" r:id="rId16"/>
+    <p:sldId id="347" r:id="rId17"/>
+    <p:sldId id="342" r:id="rId18"/>
+    <p:sldId id="351" r:id="rId19"/>
+    <p:sldId id="352" r:id="rId20"/>
+    <p:sldId id="353" r:id="rId21"/>
+    <p:sldId id="354" r:id="rId22"/>
   </p:sldIdLst>
   <p:sldSz cx="9144000" cy="5143500" type="screen16x9"/>
   <p:notesSz cx="6858000" cy="9144000"/>
@@ -6681,6 +6686,1438 @@
         <p:cNvPr id="1" name="">
           <a:extLst>
             <a:ext uri="{FF2B5EF4-FFF2-40B4-BE49-F238E27FC236}">
+              <a16:creationId xmlns:a16="http://schemas.microsoft.com/office/drawing/2014/main" id="{6CC0115E-83B3-B420-B86B-33C3214A7F43}"/>
+            </a:ext>
+          </a:extLst>
+        </p:cNvPr>
+        <p:cNvGrpSpPr/>
+        <p:nvPr/>
+      </p:nvGrpSpPr>
+      <p:grpSpPr>
+        <a:xfrm>
+          <a:off x="0" y="0"/>
+          <a:ext cx="0" cy="0"/>
+          <a:chOff x="0" y="0"/>
+          <a:chExt cx="0" cy="0"/>
+        </a:xfrm>
+      </p:grpSpPr>
+      <p:sp>
+        <p:nvSpPr>
+          <p:cNvPr id="11" name="Subtitle 2">
+            <a:extLst>
+              <a:ext uri="{FF2B5EF4-FFF2-40B4-BE49-F238E27FC236}">
+                <a16:creationId xmlns:a16="http://schemas.microsoft.com/office/drawing/2014/main" id="{FFB1BD81-FBCF-A393-5089-3FAA109A171D}"/>
+              </a:ext>
+            </a:extLst>
+          </p:cNvPr>
+          <p:cNvSpPr txBox="1">
+            <a:spLocks/>
+          </p:cNvSpPr>
+          <p:nvPr/>
+        </p:nvSpPr>
+        <p:spPr>
+          <a:xfrm>
+            <a:off x="387382" y="1460733"/>
+            <a:ext cx="2310774" cy="2600204"/>
+          </a:xfrm>
+          <a:prstGeom prst="rect">
+            <a:avLst/>
+          </a:prstGeom>
+        </p:spPr>
+        <p:txBody>
+          <a:bodyPr vert="horz" lIns="91440" tIns="45720" rIns="91440" bIns="45720" rtlCol="0" anchor="t" anchorCtr="0">
+            <a:noAutofit/>
+          </a:bodyPr>
+          <a:lstStyle>
+            <a:lvl1pPr marL="0" indent="0" algn="l" defTabSz="685783" rtl="0" eaLnBrk="1" latinLnBrk="0" hangingPunct="1">
+              <a:lnSpc>
+                <a:spcPct val="100000"/>
+              </a:lnSpc>
+              <a:spcBef>
+                <a:spcPts val="300"/>
+              </a:spcBef>
+              <a:spcAft>
+                <a:spcPts val="300"/>
+              </a:spcAft>
+              <a:buFont typeface="Arial" panose="020B0604020202020204" pitchFamily="34" charset="0"/>
+              <a:buNone/>
+              <a:defRPr sz="2700" b="1" kern="1200" baseline="0">
+                <a:solidFill>
+                  <a:schemeClr val="bg1"/>
+                </a:solidFill>
+                <a:latin typeface="+mn-lt"/>
+                <a:ea typeface="+mn-ea"/>
+                <a:cs typeface="+mn-cs"/>
+              </a:defRPr>
+            </a:lvl1pPr>
+            <a:lvl2pPr marL="342892" indent="0" algn="ctr" defTabSz="685783" rtl="0" eaLnBrk="1" latinLnBrk="0" hangingPunct="1">
+              <a:lnSpc>
+                <a:spcPct val="100000"/>
+              </a:lnSpc>
+              <a:spcBef>
+                <a:spcPts val="300"/>
+              </a:spcBef>
+              <a:spcAft>
+                <a:spcPts val="300"/>
+              </a:spcAft>
+              <a:buClr>
+                <a:schemeClr val="accent2"/>
+              </a:buClr>
+              <a:buFont typeface="Wingdings" pitchFamily="2" charset="2"/>
+              <a:buNone/>
+              <a:tabLst/>
+              <a:defRPr sz="1500" kern="1200">
+                <a:solidFill>
+                  <a:schemeClr val="tx1"/>
+                </a:solidFill>
+                <a:latin typeface="+mn-lt"/>
+                <a:ea typeface="+mn-ea"/>
+                <a:cs typeface="+mn-cs"/>
+              </a:defRPr>
+            </a:lvl2pPr>
+            <a:lvl3pPr marL="685783" indent="0" algn="ctr" defTabSz="685783" rtl="0" eaLnBrk="1" latinLnBrk="0" hangingPunct="1">
+              <a:lnSpc>
+                <a:spcPct val="90000"/>
+              </a:lnSpc>
+              <a:spcBef>
+                <a:spcPts val="300"/>
+              </a:spcBef>
+              <a:spcAft>
+                <a:spcPts val="300"/>
+              </a:spcAft>
+              <a:buClr>
+                <a:schemeClr val="accent2"/>
+              </a:buClr>
+              <a:buFont typeface="Wingdings" pitchFamily="2" charset="2"/>
+              <a:buNone/>
+              <a:tabLst/>
+              <a:defRPr lang="en-US" sz="1350" kern="1200" baseline="0">
+                <a:solidFill>
+                  <a:schemeClr val="tx1"/>
+                </a:solidFill>
+                <a:latin typeface="+mn-lt"/>
+                <a:ea typeface="+mn-ea"/>
+                <a:cs typeface="+mn-cs"/>
+              </a:defRPr>
+            </a:lvl3pPr>
+            <a:lvl4pPr marL="1028675" indent="0" algn="ctr" defTabSz="685783" rtl="0" eaLnBrk="1" latinLnBrk="0" hangingPunct="1">
+              <a:lnSpc>
+                <a:spcPct val="90000"/>
+              </a:lnSpc>
+              <a:spcBef>
+                <a:spcPts val="375"/>
+              </a:spcBef>
+              <a:buClr>
+                <a:schemeClr val="accent4"/>
+              </a:buClr>
+              <a:buFont typeface="Wingdings" pitchFamily="2" charset="2"/>
+              <a:buNone/>
+              <a:defRPr sz="1200" kern="1200">
+                <a:solidFill>
+                  <a:schemeClr val="tx1"/>
+                </a:solidFill>
+                <a:latin typeface="+mn-lt"/>
+                <a:ea typeface="+mn-ea"/>
+                <a:cs typeface="+mn-cs"/>
+              </a:defRPr>
+            </a:lvl4pPr>
+            <a:lvl5pPr marL="1371566" indent="0" algn="ctr" defTabSz="685783" rtl="0" eaLnBrk="1" latinLnBrk="0" hangingPunct="1">
+              <a:lnSpc>
+                <a:spcPct val="90000"/>
+              </a:lnSpc>
+              <a:spcBef>
+                <a:spcPts val="375"/>
+              </a:spcBef>
+              <a:buFont typeface="Arial" panose="020B0604020202020204" pitchFamily="34" charset="0"/>
+              <a:buNone/>
+              <a:defRPr sz="1200" kern="1200">
+                <a:solidFill>
+                  <a:schemeClr val="tx1"/>
+                </a:solidFill>
+                <a:latin typeface="+mn-lt"/>
+                <a:ea typeface="+mn-ea"/>
+                <a:cs typeface="+mn-cs"/>
+              </a:defRPr>
+            </a:lvl5pPr>
+            <a:lvl6pPr marL="1714457" indent="0" algn="ctr" defTabSz="685783" rtl="0" eaLnBrk="1" latinLnBrk="0" hangingPunct="1">
+              <a:lnSpc>
+                <a:spcPct val="90000"/>
+              </a:lnSpc>
+              <a:spcBef>
+                <a:spcPts val="375"/>
+              </a:spcBef>
+              <a:buFont typeface="Arial" panose="020B0604020202020204" pitchFamily="34" charset="0"/>
+              <a:buNone/>
+              <a:defRPr sz="1200" kern="1200">
+                <a:solidFill>
+                  <a:schemeClr val="tx1"/>
+                </a:solidFill>
+                <a:latin typeface="+mn-lt"/>
+                <a:ea typeface="+mn-ea"/>
+                <a:cs typeface="+mn-cs"/>
+              </a:defRPr>
+            </a:lvl6pPr>
+            <a:lvl7pPr marL="2057348" indent="0" algn="ctr" defTabSz="685783" rtl="0" eaLnBrk="1" latinLnBrk="0" hangingPunct="1">
+              <a:lnSpc>
+                <a:spcPct val="90000"/>
+              </a:lnSpc>
+              <a:spcBef>
+                <a:spcPts val="375"/>
+              </a:spcBef>
+              <a:buFont typeface="Arial" panose="020B0604020202020204" pitchFamily="34" charset="0"/>
+              <a:buNone/>
+              <a:defRPr sz="1200" kern="1200">
+                <a:solidFill>
+                  <a:schemeClr val="tx1"/>
+                </a:solidFill>
+                <a:latin typeface="+mn-lt"/>
+                <a:ea typeface="+mn-ea"/>
+                <a:cs typeface="+mn-cs"/>
+              </a:defRPr>
+            </a:lvl7pPr>
+            <a:lvl8pPr marL="2400240" indent="0" algn="ctr" defTabSz="685783" rtl="0" eaLnBrk="1" latinLnBrk="0" hangingPunct="1">
+              <a:lnSpc>
+                <a:spcPct val="90000"/>
+              </a:lnSpc>
+              <a:spcBef>
+                <a:spcPts val="375"/>
+              </a:spcBef>
+              <a:buFont typeface="Arial" panose="020B0604020202020204" pitchFamily="34" charset="0"/>
+              <a:buNone/>
+              <a:defRPr sz="1200" kern="1200">
+                <a:solidFill>
+                  <a:schemeClr val="tx1"/>
+                </a:solidFill>
+                <a:latin typeface="+mn-lt"/>
+                <a:ea typeface="+mn-ea"/>
+                <a:cs typeface="+mn-cs"/>
+              </a:defRPr>
+            </a:lvl8pPr>
+            <a:lvl9pPr marL="2743132" indent="0" algn="ctr" defTabSz="685783" rtl="0" eaLnBrk="1" latinLnBrk="0" hangingPunct="1">
+              <a:lnSpc>
+                <a:spcPct val="90000"/>
+              </a:lnSpc>
+              <a:spcBef>
+                <a:spcPts val="375"/>
+              </a:spcBef>
+              <a:buFont typeface="Arial" panose="020B0604020202020204" pitchFamily="34" charset="0"/>
+              <a:buNone/>
+              <a:defRPr sz="1200" kern="1200">
+                <a:solidFill>
+                  <a:schemeClr val="tx1"/>
+                </a:solidFill>
+                <a:latin typeface="+mn-lt"/>
+                <a:ea typeface="+mn-ea"/>
+                <a:cs typeface="+mn-cs"/>
+              </a:defRPr>
+            </a:lvl9pPr>
+          </a:lstStyle>
+          <a:p>
+            <a:r>
+              <a:rPr lang="en-US" sz="900"/>
+              <a:t>Turns every panel into a year-over-year view — 2026 against 2025, matched to the same date range (up to today) so the comparison is fair, not skewed by how much of the year has passed.</a:t>
+            </a:r>
+          </a:p>
+          <a:p>
+            <a:pPr marL="171450" indent="-171450">
+              <a:buFont typeface="Arial" panose="020B0604020202020204" pitchFamily="34" charset="0"/>
+              <a:buChar char="•"/>
+            </a:pPr>
+            <a:r>
+              <a:rPr lang="en-US" sz="800" b="0"/>
+              <a:t>Big numbers get a % change and a same-period reference ("was 1,040 in 2025").</a:t>
+            </a:r>
+          </a:p>
+          <a:p>
+            <a:pPr marL="171450" indent="-171450">
+              <a:buFont typeface="Arial" panose="020B0604020202020204" pitchFamily="34" charset="0"/>
+              <a:buChar char="•"/>
+            </a:pPr>
+            <a:r>
+              <a:rPr lang="en-US" sz="800" b="0"/>
+              <a:t>Bar and list panels (squads, asset mix, work type mix) show a % delta per item, plus "New" for anything that didn't exist last year.</a:t>
+            </a:r>
+          </a:p>
+          <a:p>
+            <a:pPr marL="171450" indent="-171450">
+              <a:buFont typeface="Arial" panose="020B0604020202020204" pitchFamily="34" charset="0"/>
+              <a:buChar char="•"/>
+            </a:pPr>
+            <a:r>
+              <a:rPr lang="en-US" sz="800" b="0"/>
+              <a:t>The workload chart overlays both years so you can see exactly where this year is running ahead or behind.</a:t>
+            </a:r>
+          </a:p>
+          <a:p>
+            <a:pPr marL="171450" indent="-171450">
+              <a:buFont typeface="Arial" panose="020B0604020202020204" pitchFamily="34" charset="0"/>
+              <a:buChar char="•"/>
+            </a:pPr>
+            <a:r>
+              <a:rPr lang="en-US" sz="800" b="0"/>
+              <a:t>Campaign and squad-distribution charts follow the same solid-vs-faded pattern.</a:t>
+            </a:r>
+          </a:p>
+        </p:txBody>
+      </p:sp>
+      <p:sp>
+        <p:nvSpPr>
+          <p:cNvPr id="12" name="Subtitle 2">
+            <a:extLst>
+              <a:ext uri="{FF2B5EF4-FFF2-40B4-BE49-F238E27FC236}">
+                <a16:creationId xmlns:a16="http://schemas.microsoft.com/office/drawing/2014/main" id="{32FE33F5-B35F-9E10-05AC-754D8B49EF3D}"/>
+              </a:ext>
+            </a:extLst>
+          </p:cNvPr>
+          <p:cNvSpPr>
+            <a:spLocks noGrp="1"/>
+          </p:cNvSpPr>
+          <p:nvPr>
+            <p:ph type="subTitle" idx="1"/>
+          </p:nvPr>
+        </p:nvSpPr>
+        <p:spPr>
+          <a:xfrm>
+            <a:off x="419708" y="404731"/>
+            <a:ext cx="2278448" cy="613562"/>
+          </a:xfrm>
+        </p:spPr>
+        <p:txBody>
+          <a:bodyPr/>
+          <a:lstStyle/>
+          <a:p>
+            <a:r>
+              <a:rPr lang="en-US">
+                <a:highlight>
+                  <a:srgbClr val="000054"/>
+                </a:highlight>
+              </a:rPr>
+              <a:t>Compare</a:t>
+            </a:r>
+          </a:p>
+          <a:p>
+            <a:r>
+              <a:rPr lang="en-US">
+                <a:highlight>
+                  <a:srgbClr val="000054"/>
+                </a:highlight>
+              </a:rPr>
+              <a:t>mode</a:t>
+            </a:r>
+          </a:p>
+        </p:txBody>
+      </p:sp>
+      <p:pic>
+        <p:nvPicPr>
+          <p:cNvPr id="3" name="Picture 2">
+            <a:extLst>
+              <a:ext uri="{FF2B5EF4-FFF2-40B4-BE49-F238E27FC236}">
+                <a16:creationId xmlns:a16="http://schemas.microsoft.com/office/drawing/2014/main" id="{46535FFA-70B3-0B52-A253-F48C0FF16B25}"/>
+              </a:ext>
+            </a:extLst>
+          </p:cNvPr>
+          <p:cNvPicPr>
+            <a:picLocks noChangeAspect="1"/>
+          </p:cNvPicPr>
+          <p:nvPr/>
+        </p:nvPicPr>
+        <p:blipFill>
+          <a:blip r:embed="rId2"/>
+          <a:stretch>
+            <a:fillRect/>
+          </a:stretch>
+        </p:blipFill>
+        <p:spPr>
+          <a:xfrm>
+            <a:off x="3015497" y="909801"/>
+            <a:ext cx="5907786" cy="3323898"/>
+          </a:xfrm>
+          <a:prstGeom prst="rect">
+            <a:avLst/>
+          </a:prstGeom>
+        </p:spPr>
+      </p:pic>
+      <p:pic>
+        <p:nvPicPr>
+          <p:cNvPr id="4" name="Picture 3">
+            <a:extLst>
+              <a:ext uri="{FF2B5EF4-FFF2-40B4-BE49-F238E27FC236}">
+                <a16:creationId xmlns:a16="http://schemas.microsoft.com/office/drawing/2014/main" id="{7950CA9B-3866-AC85-BAC9-0D4C5F57F5BF}"/>
+              </a:ext>
+            </a:extLst>
+          </p:cNvPr>
+          <p:cNvPicPr>
+            <a:picLocks noChangeAspect="1"/>
+          </p:cNvPicPr>
+          <p:nvPr/>
+        </p:nvPicPr>
+        <p:blipFill>
+          <a:blip r:embed="rId3"/>
+          <a:stretch>
+            <a:fillRect/>
+          </a:stretch>
+        </p:blipFill>
+        <p:spPr>
+          <a:xfrm>
+            <a:off x="3015497" y="369487"/>
+            <a:ext cx="3738087" cy="372117"/>
+          </a:xfrm>
+          <a:prstGeom prst="rect">
+            <a:avLst/>
+          </a:prstGeom>
+        </p:spPr>
+      </p:pic>
+    </p:spTree>
+    <p:extLst>
+      <p:ext uri="{BB962C8B-B14F-4D97-AF65-F5344CB8AC3E}">
+        <p14:creationId xmlns:p14="http://schemas.microsoft.com/office/powerpoint/2010/main" val="591374148"/>
+      </p:ext>
+    </p:extLst>
+  </p:cSld>
+  <p:clrMapOvr>
+    <a:masterClrMapping/>
+  </p:clrMapOvr>
+</p:sld>
+</file>
+
+<file path=ppt/slides/slide11.xml><?xml version="1.0" encoding="utf-8"?>
+<p:sld xmlns:a="http://schemas.openxmlformats.org/drawingml/2006/main" xmlns:r="http://schemas.openxmlformats.org/officeDocument/2006/relationships" xmlns:p="http://schemas.openxmlformats.org/presentationml/2006/main">
+  <p:cSld>
+    <p:spTree>
+      <p:nvGrpSpPr>
+        <p:cNvPr id="1" name="">
+          <a:extLst>
+            <a:ext uri="{FF2B5EF4-FFF2-40B4-BE49-F238E27FC236}">
+              <a16:creationId xmlns:a16="http://schemas.microsoft.com/office/drawing/2014/main" id="{3D6E90A3-F2EC-81F7-8AF4-80370FA6E039}"/>
+            </a:ext>
+          </a:extLst>
+        </p:cNvPr>
+        <p:cNvGrpSpPr/>
+        <p:nvPr/>
+      </p:nvGrpSpPr>
+      <p:grpSpPr>
+        <a:xfrm>
+          <a:off x="0" y="0"/>
+          <a:ext cx="0" cy="0"/>
+          <a:chOff x="0" y="0"/>
+          <a:chExt cx="0" cy="0"/>
+        </a:xfrm>
+      </p:grpSpPr>
+      <p:sp>
+        <p:nvSpPr>
+          <p:cNvPr id="8" name="Subtitle 2">
+            <a:extLst>
+              <a:ext uri="{FF2B5EF4-FFF2-40B4-BE49-F238E27FC236}">
+                <a16:creationId xmlns:a16="http://schemas.microsoft.com/office/drawing/2014/main" id="{7F3AF82D-5973-EDEF-E2F0-35758C9FBAA1}"/>
+              </a:ext>
+            </a:extLst>
+          </p:cNvPr>
+          <p:cNvSpPr txBox="1">
+            <a:spLocks/>
+          </p:cNvSpPr>
+          <p:nvPr/>
+        </p:nvSpPr>
+        <p:spPr>
+          <a:xfrm>
+            <a:off x="419708" y="1429260"/>
+            <a:ext cx="2174846" cy="613562"/>
+          </a:xfrm>
+          <a:prstGeom prst="rect">
+            <a:avLst/>
+          </a:prstGeom>
+        </p:spPr>
+        <p:txBody>
+          <a:bodyPr vert="horz" lIns="91440" tIns="45720" rIns="91440" bIns="45720" rtlCol="0" anchor="t" anchorCtr="0">
+            <a:noAutofit/>
+          </a:bodyPr>
+          <a:lstStyle>
+            <a:lvl1pPr marL="0" indent="0" algn="l" defTabSz="685783" rtl="0" eaLnBrk="1" latinLnBrk="0" hangingPunct="1">
+              <a:lnSpc>
+                <a:spcPct val="100000"/>
+              </a:lnSpc>
+              <a:spcBef>
+                <a:spcPts val="300"/>
+              </a:spcBef>
+              <a:spcAft>
+                <a:spcPts val="300"/>
+              </a:spcAft>
+              <a:buFont typeface="Arial" panose="020B0604020202020204" pitchFamily="34" charset="0"/>
+              <a:buNone/>
+              <a:defRPr sz="2700" b="1" kern="1200" baseline="0">
+                <a:solidFill>
+                  <a:schemeClr val="bg1"/>
+                </a:solidFill>
+                <a:latin typeface="+mn-lt"/>
+                <a:ea typeface="+mn-ea"/>
+                <a:cs typeface="+mn-cs"/>
+              </a:defRPr>
+            </a:lvl1pPr>
+            <a:lvl2pPr marL="342892" indent="0" algn="ctr" defTabSz="685783" rtl="0" eaLnBrk="1" latinLnBrk="0" hangingPunct="1">
+              <a:lnSpc>
+                <a:spcPct val="100000"/>
+              </a:lnSpc>
+              <a:spcBef>
+                <a:spcPts val="300"/>
+              </a:spcBef>
+              <a:spcAft>
+                <a:spcPts val="300"/>
+              </a:spcAft>
+              <a:buClr>
+                <a:schemeClr val="accent2"/>
+              </a:buClr>
+              <a:buFont typeface="Wingdings" pitchFamily="2" charset="2"/>
+              <a:buNone/>
+              <a:tabLst/>
+              <a:defRPr sz="1500" kern="1200">
+                <a:solidFill>
+                  <a:schemeClr val="tx1"/>
+                </a:solidFill>
+                <a:latin typeface="+mn-lt"/>
+                <a:ea typeface="+mn-ea"/>
+                <a:cs typeface="+mn-cs"/>
+              </a:defRPr>
+            </a:lvl2pPr>
+            <a:lvl3pPr marL="685783" indent="0" algn="ctr" defTabSz="685783" rtl="0" eaLnBrk="1" latinLnBrk="0" hangingPunct="1">
+              <a:lnSpc>
+                <a:spcPct val="90000"/>
+              </a:lnSpc>
+              <a:spcBef>
+                <a:spcPts val="300"/>
+              </a:spcBef>
+              <a:spcAft>
+                <a:spcPts val="300"/>
+              </a:spcAft>
+              <a:buClr>
+                <a:schemeClr val="accent2"/>
+              </a:buClr>
+              <a:buFont typeface="Wingdings" pitchFamily="2" charset="2"/>
+              <a:buNone/>
+              <a:tabLst/>
+              <a:defRPr lang="en-US" sz="1350" kern="1200" baseline="0">
+                <a:solidFill>
+                  <a:schemeClr val="tx1"/>
+                </a:solidFill>
+                <a:latin typeface="+mn-lt"/>
+                <a:ea typeface="+mn-ea"/>
+                <a:cs typeface="+mn-cs"/>
+              </a:defRPr>
+            </a:lvl3pPr>
+            <a:lvl4pPr marL="1028675" indent="0" algn="ctr" defTabSz="685783" rtl="0" eaLnBrk="1" latinLnBrk="0" hangingPunct="1">
+              <a:lnSpc>
+                <a:spcPct val="90000"/>
+              </a:lnSpc>
+              <a:spcBef>
+                <a:spcPts val="375"/>
+              </a:spcBef>
+              <a:buClr>
+                <a:schemeClr val="accent4"/>
+              </a:buClr>
+              <a:buFont typeface="Wingdings" pitchFamily="2" charset="2"/>
+              <a:buNone/>
+              <a:defRPr sz="1200" kern="1200">
+                <a:solidFill>
+                  <a:schemeClr val="tx1"/>
+                </a:solidFill>
+                <a:latin typeface="+mn-lt"/>
+                <a:ea typeface="+mn-ea"/>
+                <a:cs typeface="+mn-cs"/>
+              </a:defRPr>
+            </a:lvl4pPr>
+            <a:lvl5pPr marL="1371566" indent="0" algn="ctr" defTabSz="685783" rtl="0" eaLnBrk="1" latinLnBrk="0" hangingPunct="1">
+              <a:lnSpc>
+                <a:spcPct val="90000"/>
+              </a:lnSpc>
+              <a:spcBef>
+                <a:spcPts val="375"/>
+              </a:spcBef>
+              <a:buFont typeface="Arial" panose="020B0604020202020204" pitchFamily="34" charset="0"/>
+              <a:buNone/>
+              <a:defRPr sz="1200" kern="1200">
+                <a:solidFill>
+                  <a:schemeClr val="tx1"/>
+                </a:solidFill>
+                <a:latin typeface="+mn-lt"/>
+                <a:ea typeface="+mn-ea"/>
+                <a:cs typeface="+mn-cs"/>
+              </a:defRPr>
+            </a:lvl5pPr>
+            <a:lvl6pPr marL="1714457" indent="0" algn="ctr" defTabSz="685783" rtl="0" eaLnBrk="1" latinLnBrk="0" hangingPunct="1">
+              <a:lnSpc>
+                <a:spcPct val="90000"/>
+              </a:lnSpc>
+              <a:spcBef>
+                <a:spcPts val="375"/>
+              </a:spcBef>
+              <a:buFont typeface="Arial" panose="020B0604020202020204" pitchFamily="34" charset="0"/>
+              <a:buNone/>
+              <a:defRPr sz="1200" kern="1200">
+                <a:solidFill>
+                  <a:schemeClr val="tx1"/>
+                </a:solidFill>
+                <a:latin typeface="+mn-lt"/>
+                <a:ea typeface="+mn-ea"/>
+                <a:cs typeface="+mn-cs"/>
+              </a:defRPr>
+            </a:lvl6pPr>
+            <a:lvl7pPr marL="2057348" indent="0" algn="ctr" defTabSz="685783" rtl="0" eaLnBrk="1" latinLnBrk="0" hangingPunct="1">
+              <a:lnSpc>
+                <a:spcPct val="90000"/>
+              </a:lnSpc>
+              <a:spcBef>
+                <a:spcPts val="375"/>
+              </a:spcBef>
+              <a:buFont typeface="Arial" panose="020B0604020202020204" pitchFamily="34" charset="0"/>
+              <a:buNone/>
+              <a:defRPr sz="1200" kern="1200">
+                <a:solidFill>
+                  <a:schemeClr val="tx1"/>
+                </a:solidFill>
+                <a:latin typeface="+mn-lt"/>
+                <a:ea typeface="+mn-ea"/>
+                <a:cs typeface="+mn-cs"/>
+              </a:defRPr>
+            </a:lvl7pPr>
+            <a:lvl8pPr marL="2400240" indent="0" algn="ctr" defTabSz="685783" rtl="0" eaLnBrk="1" latinLnBrk="0" hangingPunct="1">
+              <a:lnSpc>
+                <a:spcPct val="90000"/>
+              </a:lnSpc>
+              <a:spcBef>
+                <a:spcPts val="375"/>
+              </a:spcBef>
+              <a:buFont typeface="Arial" panose="020B0604020202020204" pitchFamily="34" charset="0"/>
+              <a:buNone/>
+              <a:defRPr sz="1200" kern="1200">
+                <a:solidFill>
+                  <a:schemeClr val="tx1"/>
+                </a:solidFill>
+                <a:latin typeface="+mn-lt"/>
+                <a:ea typeface="+mn-ea"/>
+                <a:cs typeface="+mn-cs"/>
+              </a:defRPr>
+            </a:lvl8pPr>
+            <a:lvl9pPr marL="2743132" indent="0" algn="ctr" defTabSz="685783" rtl="0" eaLnBrk="1" latinLnBrk="0" hangingPunct="1">
+              <a:lnSpc>
+                <a:spcPct val="90000"/>
+              </a:lnSpc>
+              <a:spcBef>
+                <a:spcPts val="375"/>
+              </a:spcBef>
+              <a:buFont typeface="Arial" panose="020B0604020202020204" pitchFamily="34" charset="0"/>
+              <a:buNone/>
+              <a:defRPr sz="1200" kern="1200">
+                <a:solidFill>
+                  <a:schemeClr val="tx1"/>
+                </a:solidFill>
+                <a:latin typeface="+mn-lt"/>
+                <a:ea typeface="+mn-ea"/>
+                <a:cs typeface="+mn-cs"/>
+              </a:defRPr>
+            </a:lvl9pPr>
+          </a:lstStyle>
+          <a:p>
+            <a:r>
+              <a:rPr lang="en-US">
+                <a:highlight>
+                  <a:srgbClr val="000054"/>
+                </a:highlight>
+              </a:rPr>
+              <a:t>Task List</a:t>
+            </a:r>
+          </a:p>
+          <a:p>
+            <a:endParaRPr lang="en-US">
+              <a:cs typeface="Arial" panose="020B0604020202020204"/>
+            </a:endParaRPr>
+          </a:p>
+          <a:p>
+            <a:endParaRPr lang="en-AU">
+              <a:cs typeface="Arial" panose="020B0604020202020204"/>
+            </a:endParaRPr>
+          </a:p>
+        </p:txBody>
+      </p:sp>
+      <p:sp>
+        <p:nvSpPr>
+          <p:cNvPr id="11" name="Subtitle 2">
+            <a:extLst>
+              <a:ext uri="{FF2B5EF4-FFF2-40B4-BE49-F238E27FC236}">
+                <a16:creationId xmlns:a16="http://schemas.microsoft.com/office/drawing/2014/main" id="{FBFFE7E6-0EA7-F5F7-8977-B74987E99A02}"/>
+              </a:ext>
+            </a:extLst>
+          </p:cNvPr>
+          <p:cNvSpPr txBox="1">
+            <a:spLocks/>
+          </p:cNvSpPr>
+          <p:nvPr/>
+        </p:nvSpPr>
+        <p:spPr>
+          <a:xfrm>
+            <a:off x="387382" y="2042822"/>
+            <a:ext cx="2427889" cy="2600204"/>
+          </a:xfrm>
+          <a:prstGeom prst="rect">
+            <a:avLst/>
+          </a:prstGeom>
+        </p:spPr>
+        <p:txBody>
+          <a:bodyPr vert="horz" lIns="91440" tIns="45720" rIns="91440" bIns="45720" rtlCol="0" anchor="t" anchorCtr="0">
+            <a:noAutofit/>
+          </a:bodyPr>
+          <a:lstStyle>
+            <a:lvl1pPr marL="0" indent="0" algn="l" defTabSz="685783" rtl="0" eaLnBrk="1" latinLnBrk="0" hangingPunct="1">
+              <a:lnSpc>
+                <a:spcPct val="100000"/>
+              </a:lnSpc>
+              <a:spcBef>
+                <a:spcPts val="300"/>
+              </a:spcBef>
+              <a:spcAft>
+                <a:spcPts val="300"/>
+              </a:spcAft>
+              <a:buFont typeface="Arial" panose="020B0604020202020204" pitchFamily="34" charset="0"/>
+              <a:buNone/>
+              <a:defRPr sz="2700" b="1" kern="1200" baseline="0">
+                <a:solidFill>
+                  <a:schemeClr val="bg1"/>
+                </a:solidFill>
+                <a:latin typeface="+mn-lt"/>
+                <a:ea typeface="+mn-ea"/>
+                <a:cs typeface="+mn-cs"/>
+              </a:defRPr>
+            </a:lvl1pPr>
+            <a:lvl2pPr marL="342892" indent="0" algn="ctr" defTabSz="685783" rtl="0" eaLnBrk="1" latinLnBrk="0" hangingPunct="1">
+              <a:lnSpc>
+                <a:spcPct val="100000"/>
+              </a:lnSpc>
+              <a:spcBef>
+                <a:spcPts val="300"/>
+              </a:spcBef>
+              <a:spcAft>
+                <a:spcPts val="300"/>
+              </a:spcAft>
+              <a:buClr>
+                <a:schemeClr val="accent2"/>
+              </a:buClr>
+              <a:buFont typeface="Wingdings" pitchFamily="2" charset="2"/>
+              <a:buNone/>
+              <a:tabLst/>
+              <a:defRPr sz="1500" kern="1200">
+                <a:solidFill>
+                  <a:schemeClr val="tx1"/>
+                </a:solidFill>
+                <a:latin typeface="+mn-lt"/>
+                <a:ea typeface="+mn-ea"/>
+                <a:cs typeface="+mn-cs"/>
+              </a:defRPr>
+            </a:lvl2pPr>
+            <a:lvl3pPr marL="685783" indent="0" algn="ctr" defTabSz="685783" rtl="0" eaLnBrk="1" latinLnBrk="0" hangingPunct="1">
+              <a:lnSpc>
+                <a:spcPct val="90000"/>
+              </a:lnSpc>
+              <a:spcBef>
+                <a:spcPts val="300"/>
+              </a:spcBef>
+              <a:spcAft>
+                <a:spcPts val="300"/>
+              </a:spcAft>
+              <a:buClr>
+                <a:schemeClr val="accent2"/>
+              </a:buClr>
+              <a:buFont typeface="Wingdings" pitchFamily="2" charset="2"/>
+              <a:buNone/>
+              <a:tabLst/>
+              <a:defRPr lang="en-US" sz="1350" kern="1200" baseline="0">
+                <a:solidFill>
+                  <a:schemeClr val="tx1"/>
+                </a:solidFill>
+                <a:latin typeface="+mn-lt"/>
+                <a:ea typeface="+mn-ea"/>
+                <a:cs typeface="+mn-cs"/>
+              </a:defRPr>
+            </a:lvl3pPr>
+            <a:lvl4pPr marL="1028675" indent="0" algn="ctr" defTabSz="685783" rtl="0" eaLnBrk="1" latinLnBrk="0" hangingPunct="1">
+              <a:lnSpc>
+                <a:spcPct val="90000"/>
+              </a:lnSpc>
+              <a:spcBef>
+                <a:spcPts val="375"/>
+              </a:spcBef>
+              <a:buClr>
+                <a:schemeClr val="accent4"/>
+              </a:buClr>
+              <a:buFont typeface="Wingdings" pitchFamily="2" charset="2"/>
+              <a:buNone/>
+              <a:defRPr sz="1200" kern="1200">
+                <a:solidFill>
+                  <a:schemeClr val="tx1"/>
+                </a:solidFill>
+                <a:latin typeface="+mn-lt"/>
+                <a:ea typeface="+mn-ea"/>
+                <a:cs typeface="+mn-cs"/>
+              </a:defRPr>
+            </a:lvl4pPr>
+            <a:lvl5pPr marL="1371566" indent="0" algn="ctr" defTabSz="685783" rtl="0" eaLnBrk="1" latinLnBrk="0" hangingPunct="1">
+              <a:lnSpc>
+                <a:spcPct val="90000"/>
+              </a:lnSpc>
+              <a:spcBef>
+                <a:spcPts val="375"/>
+              </a:spcBef>
+              <a:buFont typeface="Arial" panose="020B0604020202020204" pitchFamily="34" charset="0"/>
+              <a:buNone/>
+              <a:defRPr sz="1200" kern="1200">
+                <a:solidFill>
+                  <a:schemeClr val="tx1"/>
+                </a:solidFill>
+                <a:latin typeface="+mn-lt"/>
+                <a:ea typeface="+mn-ea"/>
+                <a:cs typeface="+mn-cs"/>
+              </a:defRPr>
+            </a:lvl5pPr>
+            <a:lvl6pPr marL="1714457" indent="0" algn="ctr" defTabSz="685783" rtl="0" eaLnBrk="1" latinLnBrk="0" hangingPunct="1">
+              <a:lnSpc>
+                <a:spcPct val="90000"/>
+              </a:lnSpc>
+              <a:spcBef>
+                <a:spcPts val="375"/>
+              </a:spcBef>
+              <a:buFont typeface="Arial" panose="020B0604020202020204" pitchFamily="34" charset="0"/>
+              <a:buNone/>
+              <a:defRPr sz="1200" kern="1200">
+                <a:solidFill>
+                  <a:schemeClr val="tx1"/>
+                </a:solidFill>
+                <a:latin typeface="+mn-lt"/>
+                <a:ea typeface="+mn-ea"/>
+                <a:cs typeface="+mn-cs"/>
+              </a:defRPr>
+            </a:lvl6pPr>
+            <a:lvl7pPr marL="2057348" indent="0" algn="ctr" defTabSz="685783" rtl="0" eaLnBrk="1" latinLnBrk="0" hangingPunct="1">
+              <a:lnSpc>
+                <a:spcPct val="90000"/>
+              </a:lnSpc>
+              <a:spcBef>
+                <a:spcPts val="375"/>
+              </a:spcBef>
+              <a:buFont typeface="Arial" panose="020B0604020202020204" pitchFamily="34" charset="0"/>
+              <a:buNone/>
+              <a:defRPr sz="1200" kern="1200">
+                <a:solidFill>
+                  <a:schemeClr val="tx1"/>
+                </a:solidFill>
+                <a:latin typeface="+mn-lt"/>
+                <a:ea typeface="+mn-ea"/>
+                <a:cs typeface="+mn-cs"/>
+              </a:defRPr>
+            </a:lvl7pPr>
+            <a:lvl8pPr marL="2400240" indent="0" algn="ctr" defTabSz="685783" rtl="0" eaLnBrk="1" latinLnBrk="0" hangingPunct="1">
+              <a:lnSpc>
+                <a:spcPct val="90000"/>
+              </a:lnSpc>
+              <a:spcBef>
+                <a:spcPts val="375"/>
+              </a:spcBef>
+              <a:buFont typeface="Arial" panose="020B0604020202020204" pitchFamily="34" charset="0"/>
+              <a:buNone/>
+              <a:defRPr sz="1200" kern="1200">
+                <a:solidFill>
+                  <a:schemeClr val="tx1"/>
+                </a:solidFill>
+                <a:latin typeface="+mn-lt"/>
+                <a:ea typeface="+mn-ea"/>
+                <a:cs typeface="+mn-cs"/>
+              </a:defRPr>
+            </a:lvl8pPr>
+            <a:lvl9pPr marL="2743132" indent="0" algn="ctr" defTabSz="685783" rtl="0" eaLnBrk="1" latinLnBrk="0" hangingPunct="1">
+              <a:lnSpc>
+                <a:spcPct val="90000"/>
+              </a:lnSpc>
+              <a:spcBef>
+                <a:spcPts val="375"/>
+              </a:spcBef>
+              <a:buFont typeface="Arial" panose="020B0604020202020204" pitchFamily="34" charset="0"/>
+              <a:buNone/>
+              <a:defRPr sz="1200" kern="1200">
+                <a:solidFill>
+                  <a:schemeClr val="tx1"/>
+                </a:solidFill>
+                <a:latin typeface="+mn-lt"/>
+                <a:ea typeface="+mn-ea"/>
+                <a:cs typeface="+mn-cs"/>
+              </a:defRPr>
+            </a:lvl9pPr>
+          </a:lstStyle>
+          <a:p>
+            <a:r>
+              <a:rPr lang="en-US" sz="800" b="0"/>
+              <a:t>Every task GCMC has ever logged, in one searchable table — search by code or name, filter by squad, campaign, work type, asset type, person, size or function, and sort any column. Click a row to open and edit it.</a:t>
+            </a:r>
+          </a:p>
+        </p:txBody>
+      </p:sp>
+      <p:pic>
+        <p:nvPicPr>
+          <p:cNvPr id="3" name="Picture 2">
+            <a:extLst>
+              <a:ext uri="{FF2B5EF4-FFF2-40B4-BE49-F238E27FC236}">
+                <a16:creationId xmlns:a16="http://schemas.microsoft.com/office/drawing/2014/main" id="{A5E608C9-0261-F32D-586E-49A97FA4AA02}"/>
+              </a:ext>
+            </a:extLst>
+          </p:cNvPr>
+          <p:cNvPicPr>
+            <a:picLocks noChangeAspect="1"/>
+          </p:cNvPicPr>
+          <p:nvPr/>
+        </p:nvPicPr>
+        <p:blipFill>
+          <a:blip r:embed="rId2"/>
+          <a:stretch>
+            <a:fillRect/>
+          </a:stretch>
+        </p:blipFill>
+        <p:spPr>
+          <a:xfrm>
+            <a:off x="2954909" y="1058869"/>
+            <a:ext cx="5860268" cy="3025762"/>
+          </a:xfrm>
+          <a:prstGeom prst="rect">
+            <a:avLst/>
+          </a:prstGeom>
+        </p:spPr>
+      </p:pic>
+    </p:spTree>
+    <p:extLst>
+      <p:ext uri="{BB962C8B-B14F-4D97-AF65-F5344CB8AC3E}">
+        <p14:creationId xmlns:p14="http://schemas.microsoft.com/office/powerpoint/2010/main" val="1986077195"/>
+      </p:ext>
+    </p:extLst>
+  </p:cSld>
+  <p:clrMapOvr>
+    <a:masterClrMapping/>
+  </p:clrMapOvr>
+</p:sld>
+</file>
+
+<file path=ppt/slides/slide12.xml><?xml version="1.0" encoding="utf-8"?>
+<p:sld xmlns:a="http://schemas.openxmlformats.org/drawingml/2006/main" xmlns:r="http://schemas.openxmlformats.org/officeDocument/2006/relationships" xmlns:p="http://schemas.openxmlformats.org/presentationml/2006/main">
+  <p:cSld>
+    <p:spTree>
+      <p:nvGrpSpPr>
+        <p:cNvPr id="1" name="">
+          <a:extLst>
+            <a:ext uri="{FF2B5EF4-FFF2-40B4-BE49-F238E27FC236}">
+              <a16:creationId xmlns:a16="http://schemas.microsoft.com/office/drawing/2014/main" id="{794B6CFF-D754-C3A4-3A05-FCEC70BA60AE}"/>
+            </a:ext>
+          </a:extLst>
+        </p:cNvPr>
+        <p:cNvGrpSpPr/>
+        <p:nvPr/>
+      </p:nvGrpSpPr>
+      <p:grpSpPr>
+        <a:xfrm>
+          <a:off x="0" y="0"/>
+          <a:ext cx="0" cy="0"/>
+          <a:chOff x="0" y="0"/>
+          <a:chExt cx="0" cy="0"/>
+        </a:xfrm>
+      </p:grpSpPr>
+      <p:sp>
+        <p:nvSpPr>
+          <p:cNvPr id="8" name="Subtitle 2">
+            <a:extLst>
+              <a:ext uri="{FF2B5EF4-FFF2-40B4-BE49-F238E27FC236}">
+                <a16:creationId xmlns:a16="http://schemas.microsoft.com/office/drawing/2014/main" id="{80995274-FD6E-1F46-56A4-2345DDBAB2A3}"/>
+              </a:ext>
+            </a:extLst>
+          </p:cNvPr>
+          <p:cNvSpPr txBox="1">
+            <a:spLocks/>
+          </p:cNvSpPr>
+          <p:nvPr/>
+        </p:nvSpPr>
+        <p:spPr>
+          <a:xfrm>
+            <a:off x="419708" y="986470"/>
+            <a:ext cx="2174846" cy="613562"/>
+          </a:xfrm>
+          <a:prstGeom prst="rect">
+            <a:avLst/>
+          </a:prstGeom>
+        </p:spPr>
+        <p:txBody>
+          <a:bodyPr vert="horz" lIns="91440" tIns="45720" rIns="91440" bIns="45720" rtlCol="0" anchor="t" anchorCtr="0">
+            <a:noAutofit/>
+          </a:bodyPr>
+          <a:lstStyle>
+            <a:lvl1pPr marL="0" indent="0" algn="l" defTabSz="685783" rtl="0" eaLnBrk="1" latinLnBrk="0" hangingPunct="1">
+              <a:lnSpc>
+                <a:spcPct val="100000"/>
+              </a:lnSpc>
+              <a:spcBef>
+                <a:spcPts val="300"/>
+              </a:spcBef>
+              <a:spcAft>
+                <a:spcPts val="300"/>
+              </a:spcAft>
+              <a:buFont typeface="Arial" panose="020B0604020202020204" pitchFamily="34" charset="0"/>
+              <a:buNone/>
+              <a:defRPr sz="2700" b="1" kern="1200" baseline="0">
+                <a:solidFill>
+                  <a:schemeClr val="bg1"/>
+                </a:solidFill>
+                <a:latin typeface="+mn-lt"/>
+                <a:ea typeface="+mn-ea"/>
+                <a:cs typeface="+mn-cs"/>
+              </a:defRPr>
+            </a:lvl1pPr>
+            <a:lvl2pPr marL="342892" indent="0" algn="ctr" defTabSz="685783" rtl="0" eaLnBrk="1" latinLnBrk="0" hangingPunct="1">
+              <a:lnSpc>
+                <a:spcPct val="100000"/>
+              </a:lnSpc>
+              <a:spcBef>
+                <a:spcPts val="300"/>
+              </a:spcBef>
+              <a:spcAft>
+                <a:spcPts val="300"/>
+              </a:spcAft>
+              <a:buClr>
+                <a:schemeClr val="accent2"/>
+              </a:buClr>
+              <a:buFont typeface="Wingdings" pitchFamily="2" charset="2"/>
+              <a:buNone/>
+              <a:tabLst/>
+              <a:defRPr sz="1500" kern="1200">
+                <a:solidFill>
+                  <a:schemeClr val="tx1"/>
+                </a:solidFill>
+                <a:latin typeface="+mn-lt"/>
+                <a:ea typeface="+mn-ea"/>
+                <a:cs typeface="+mn-cs"/>
+              </a:defRPr>
+            </a:lvl2pPr>
+            <a:lvl3pPr marL="685783" indent="0" algn="ctr" defTabSz="685783" rtl="0" eaLnBrk="1" latinLnBrk="0" hangingPunct="1">
+              <a:lnSpc>
+                <a:spcPct val="90000"/>
+              </a:lnSpc>
+              <a:spcBef>
+                <a:spcPts val="300"/>
+              </a:spcBef>
+              <a:spcAft>
+                <a:spcPts val="300"/>
+              </a:spcAft>
+              <a:buClr>
+                <a:schemeClr val="accent2"/>
+              </a:buClr>
+              <a:buFont typeface="Wingdings" pitchFamily="2" charset="2"/>
+              <a:buNone/>
+              <a:tabLst/>
+              <a:defRPr lang="en-US" sz="1350" kern="1200" baseline="0">
+                <a:solidFill>
+                  <a:schemeClr val="tx1"/>
+                </a:solidFill>
+                <a:latin typeface="+mn-lt"/>
+                <a:ea typeface="+mn-ea"/>
+                <a:cs typeface="+mn-cs"/>
+              </a:defRPr>
+            </a:lvl3pPr>
+            <a:lvl4pPr marL="1028675" indent="0" algn="ctr" defTabSz="685783" rtl="0" eaLnBrk="1" latinLnBrk="0" hangingPunct="1">
+              <a:lnSpc>
+                <a:spcPct val="90000"/>
+              </a:lnSpc>
+              <a:spcBef>
+                <a:spcPts val="375"/>
+              </a:spcBef>
+              <a:buClr>
+                <a:schemeClr val="accent4"/>
+              </a:buClr>
+              <a:buFont typeface="Wingdings" pitchFamily="2" charset="2"/>
+              <a:buNone/>
+              <a:defRPr sz="1200" kern="1200">
+                <a:solidFill>
+                  <a:schemeClr val="tx1"/>
+                </a:solidFill>
+                <a:latin typeface="+mn-lt"/>
+                <a:ea typeface="+mn-ea"/>
+                <a:cs typeface="+mn-cs"/>
+              </a:defRPr>
+            </a:lvl4pPr>
+            <a:lvl5pPr marL="1371566" indent="0" algn="ctr" defTabSz="685783" rtl="0" eaLnBrk="1" latinLnBrk="0" hangingPunct="1">
+              <a:lnSpc>
+                <a:spcPct val="90000"/>
+              </a:lnSpc>
+              <a:spcBef>
+                <a:spcPts val="375"/>
+              </a:spcBef>
+              <a:buFont typeface="Arial" panose="020B0604020202020204" pitchFamily="34" charset="0"/>
+              <a:buNone/>
+              <a:defRPr sz="1200" kern="1200">
+                <a:solidFill>
+                  <a:schemeClr val="tx1"/>
+                </a:solidFill>
+                <a:latin typeface="+mn-lt"/>
+                <a:ea typeface="+mn-ea"/>
+                <a:cs typeface="+mn-cs"/>
+              </a:defRPr>
+            </a:lvl5pPr>
+            <a:lvl6pPr marL="1714457" indent="0" algn="ctr" defTabSz="685783" rtl="0" eaLnBrk="1" latinLnBrk="0" hangingPunct="1">
+              <a:lnSpc>
+                <a:spcPct val="90000"/>
+              </a:lnSpc>
+              <a:spcBef>
+                <a:spcPts val="375"/>
+              </a:spcBef>
+              <a:buFont typeface="Arial" panose="020B0604020202020204" pitchFamily="34" charset="0"/>
+              <a:buNone/>
+              <a:defRPr sz="1200" kern="1200">
+                <a:solidFill>
+                  <a:schemeClr val="tx1"/>
+                </a:solidFill>
+                <a:latin typeface="+mn-lt"/>
+                <a:ea typeface="+mn-ea"/>
+                <a:cs typeface="+mn-cs"/>
+              </a:defRPr>
+            </a:lvl6pPr>
+            <a:lvl7pPr marL="2057348" indent="0" algn="ctr" defTabSz="685783" rtl="0" eaLnBrk="1" latinLnBrk="0" hangingPunct="1">
+              <a:lnSpc>
+                <a:spcPct val="90000"/>
+              </a:lnSpc>
+              <a:spcBef>
+                <a:spcPts val="375"/>
+              </a:spcBef>
+              <a:buFont typeface="Arial" panose="020B0604020202020204" pitchFamily="34" charset="0"/>
+              <a:buNone/>
+              <a:defRPr sz="1200" kern="1200">
+                <a:solidFill>
+                  <a:schemeClr val="tx1"/>
+                </a:solidFill>
+                <a:latin typeface="+mn-lt"/>
+                <a:ea typeface="+mn-ea"/>
+                <a:cs typeface="+mn-cs"/>
+              </a:defRPr>
+            </a:lvl7pPr>
+            <a:lvl8pPr marL="2400240" indent="0" algn="ctr" defTabSz="685783" rtl="0" eaLnBrk="1" latinLnBrk="0" hangingPunct="1">
+              <a:lnSpc>
+                <a:spcPct val="90000"/>
+              </a:lnSpc>
+              <a:spcBef>
+                <a:spcPts val="375"/>
+              </a:spcBef>
+              <a:buFont typeface="Arial" panose="020B0604020202020204" pitchFamily="34" charset="0"/>
+              <a:buNone/>
+              <a:defRPr sz="1200" kern="1200">
+                <a:solidFill>
+                  <a:schemeClr val="tx1"/>
+                </a:solidFill>
+                <a:latin typeface="+mn-lt"/>
+                <a:ea typeface="+mn-ea"/>
+                <a:cs typeface="+mn-cs"/>
+              </a:defRPr>
+            </a:lvl8pPr>
+            <a:lvl9pPr marL="2743132" indent="0" algn="ctr" defTabSz="685783" rtl="0" eaLnBrk="1" latinLnBrk="0" hangingPunct="1">
+              <a:lnSpc>
+                <a:spcPct val="90000"/>
+              </a:lnSpc>
+              <a:spcBef>
+                <a:spcPts val="375"/>
+              </a:spcBef>
+              <a:buFont typeface="Arial" panose="020B0604020202020204" pitchFamily="34" charset="0"/>
+              <a:buNone/>
+              <a:defRPr sz="1200" kern="1200">
+                <a:solidFill>
+                  <a:schemeClr val="tx1"/>
+                </a:solidFill>
+                <a:latin typeface="+mn-lt"/>
+                <a:ea typeface="+mn-ea"/>
+                <a:cs typeface="+mn-cs"/>
+              </a:defRPr>
+            </a:lvl9pPr>
+          </a:lstStyle>
+          <a:p>
+            <a:r>
+              <a:rPr lang="en-US">
+                <a:highlight>
+                  <a:srgbClr val="000054"/>
+                </a:highlight>
+              </a:rPr>
+              <a:t>Setting page</a:t>
+            </a:r>
+            <a:endParaRPr lang="en-AU">
+              <a:cs typeface="Arial" panose="020B0604020202020204"/>
+            </a:endParaRPr>
+          </a:p>
+        </p:txBody>
+      </p:sp>
+      <p:sp>
+        <p:nvSpPr>
+          <p:cNvPr id="11" name="Subtitle 2">
+            <a:extLst>
+              <a:ext uri="{FF2B5EF4-FFF2-40B4-BE49-F238E27FC236}">
+                <a16:creationId xmlns:a16="http://schemas.microsoft.com/office/drawing/2014/main" id="{5B574322-CF3B-0EEC-453D-17F780AD9FD5}"/>
+              </a:ext>
+            </a:extLst>
+          </p:cNvPr>
+          <p:cNvSpPr txBox="1">
+            <a:spLocks/>
+          </p:cNvSpPr>
+          <p:nvPr/>
+        </p:nvSpPr>
+        <p:spPr>
+          <a:xfrm>
+            <a:off x="387382" y="2042822"/>
+            <a:ext cx="2427889" cy="2600204"/>
+          </a:xfrm>
+          <a:prstGeom prst="rect">
+            <a:avLst/>
+          </a:prstGeom>
+        </p:spPr>
+        <p:txBody>
+          <a:bodyPr vert="horz" lIns="91440" tIns="45720" rIns="91440" bIns="45720" rtlCol="0" anchor="t" anchorCtr="0">
+            <a:noAutofit/>
+          </a:bodyPr>
+          <a:lstStyle>
+            <a:lvl1pPr marL="0" indent="0" algn="l" defTabSz="685783" rtl="0" eaLnBrk="1" latinLnBrk="0" hangingPunct="1">
+              <a:lnSpc>
+                <a:spcPct val="100000"/>
+              </a:lnSpc>
+              <a:spcBef>
+                <a:spcPts val="300"/>
+              </a:spcBef>
+              <a:spcAft>
+                <a:spcPts val="300"/>
+              </a:spcAft>
+              <a:buFont typeface="Arial" panose="020B0604020202020204" pitchFamily="34" charset="0"/>
+              <a:buNone/>
+              <a:defRPr sz="2700" b="1" kern="1200" baseline="0">
+                <a:solidFill>
+                  <a:schemeClr val="bg1"/>
+                </a:solidFill>
+                <a:latin typeface="+mn-lt"/>
+                <a:ea typeface="+mn-ea"/>
+                <a:cs typeface="+mn-cs"/>
+              </a:defRPr>
+            </a:lvl1pPr>
+            <a:lvl2pPr marL="342892" indent="0" algn="ctr" defTabSz="685783" rtl="0" eaLnBrk="1" latinLnBrk="0" hangingPunct="1">
+              <a:lnSpc>
+                <a:spcPct val="100000"/>
+              </a:lnSpc>
+              <a:spcBef>
+                <a:spcPts val="300"/>
+              </a:spcBef>
+              <a:spcAft>
+                <a:spcPts val="300"/>
+              </a:spcAft>
+              <a:buClr>
+                <a:schemeClr val="accent2"/>
+              </a:buClr>
+              <a:buFont typeface="Wingdings" pitchFamily="2" charset="2"/>
+              <a:buNone/>
+              <a:tabLst/>
+              <a:defRPr sz="1500" kern="1200">
+                <a:solidFill>
+                  <a:schemeClr val="tx1"/>
+                </a:solidFill>
+                <a:latin typeface="+mn-lt"/>
+                <a:ea typeface="+mn-ea"/>
+                <a:cs typeface="+mn-cs"/>
+              </a:defRPr>
+            </a:lvl2pPr>
+            <a:lvl3pPr marL="685783" indent="0" algn="ctr" defTabSz="685783" rtl="0" eaLnBrk="1" latinLnBrk="0" hangingPunct="1">
+              <a:lnSpc>
+                <a:spcPct val="90000"/>
+              </a:lnSpc>
+              <a:spcBef>
+                <a:spcPts val="300"/>
+              </a:spcBef>
+              <a:spcAft>
+                <a:spcPts val="300"/>
+              </a:spcAft>
+              <a:buClr>
+                <a:schemeClr val="accent2"/>
+              </a:buClr>
+              <a:buFont typeface="Wingdings" pitchFamily="2" charset="2"/>
+              <a:buNone/>
+              <a:tabLst/>
+              <a:defRPr lang="en-US" sz="1350" kern="1200" baseline="0">
+                <a:solidFill>
+                  <a:schemeClr val="tx1"/>
+                </a:solidFill>
+                <a:latin typeface="+mn-lt"/>
+                <a:ea typeface="+mn-ea"/>
+                <a:cs typeface="+mn-cs"/>
+              </a:defRPr>
+            </a:lvl3pPr>
+            <a:lvl4pPr marL="1028675" indent="0" algn="ctr" defTabSz="685783" rtl="0" eaLnBrk="1" latinLnBrk="0" hangingPunct="1">
+              <a:lnSpc>
+                <a:spcPct val="90000"/>
+              </a:lnSpc>
+              <a:spcBef>
+                <a:spcPts val="375"/>
+              </a:spcBef>
+              <a:buClr>
+                <a:schemeClr val="accent4"/>
+              </a:buClr>
+              <a:buFont typeface="Wingdings" pitchFamily="2" charset="2"/>
+              <a:buNone/>
+              <a:defRPr sz="1200" kern="1200">
+                <a:solidFill>
+                  <a:schemeClr val="tx1"/>
+                </a:solidFill>
+                <a:latin typeface="+mn-lt"/>
+                <a:ea typeface="+mn-ea"/>
+                <a:cs typeface="+mn-cs"/>
+              </a:defRPr>
+            </a:lvl4pPr>
+            <a:lvl5pPr marL="1371566" indent="0" algn="ctr" defTabSz="685783" rtl="0" eaLnBrk="1" latinLnBrk="0" hangingPunct="1">
+              <a:lnSpc>
+                <a:spcPct val="90000"/>
+              </a:lnSpc>
+              <a:spcBef>
+                <a:spcPts val="375"/>
+              </a:spcBef>
+              <a:buFont typeface="Arial" panose="020B0604020202020204" pitchFamily="34" charset="0"/>
+              <a:buNone/>
+              <a:defRPr sz="1200" kern="1200">
+                <a:solidFill>
+                  <a:schemeClr val="tx1"/>
+                </a:solidFill>
+                <a:latin typeface="+mn-lt"/>
+                <a:ea typeface="+mn-ea"/>
+                <a:cs typeface="+mn-cs"/>
+              </a:defRPr>
+            </a:lvl5pPr>
+            <a:lvl6pPr marL="1714457" indent="0" algn="ctr" defTabSz="685783" rtl="0" eaLnBrk="1" latinLnBrk="0" hangingPunct="1">
+              <a:lnSpc>
+                <a:spcPct val="90000"/>
+              </a:lnSpc>
+              <a:spcBef>
+                <a:spcPts val="375"/>
+              </a:spcBef>
+              <a:buFont typeface="Arial" panose="020B0604020202020204" pitchFamily="34" charset="0"/>
+              <a:buNone/>
+              <a:defRPr sz="1200" kern="1200">
+                <a:solidFill>
+                  <a:schemeClr val="tx1"/>
+                </a:solidFill>
+                <a:latin typeface="+mn-lt"/>
+                <a:ea typeface="+mn-ea"/>
+                <a:cs typeface="+mn-cs"/>
+              </a:defRPr>
+            </a:lvl6pPr>
+            <a:lvl7pPr marL="2057348" indent="0" algn="ctr" defTabSz="685783" rtl="0" eaLnBrk="1" latinLnBrk="0" hangingPunct="1">
+              <a:lnSpc>
+                <a:spcPct val="90000"/>
+              </a:lnSpc>
+              <a:spcBef>
+                <a:spcPts val="375"/>
+              </a:spcBef>
+              <a:buFont typeface="Arial" panose="020B0604020202020204" pitchFamily="34" charset="0"/>
+              <a:buNone/>
+              <a:defRPr sz="1200" kern="1200">
+                <a:solidFill>
+                  <a:schemeClr val="tx1"/>
+                </a:solidFill>
+                <a:latin typeface="+mn-lt"/>
+                <a:ea typeface="+mn-ea"/>
+                <a:cs typeface="+mn-cs"/>
+              </a:defRPr>
+            </a:lvl7pPr>
+            <a:lvl8pPr marL="2400240" indent="0" algn="ctr" defTabSz="685783" rtl="0" eaLnBrk="1" latinLnBrk="0" hangingPunct="1">
+              <a:lnSpc>
+                <a:spcPct val="90000"/>
+              </a:lnSpc>
+              <a:spcBef>
+                <a:spcPts val="375"/>
+              </a:spcBef>
+              <a:buFont typeface="Arial" panose="020B0604020202020204" pitchFamily="34" charset="0"/>
+              <a:buNone/>
+              <a:defRPr sz="1200" kern="1200">
+                <a:solidFill>
+                  <a:schemeClr val="tx1"/>
+                </a:solidFill>
+                <a:latin typeface="+mn-lt"/>
+                <a:ea typeface="+mn-ea"/>
+                <a:cs typeface="+mn-cs"/>
+              </a:defRPr>
+            </a:lvl8pPr>
+            <a:lvl9pPr marL="2743132" indent="0" algn="ctr" defTabSz="685783" rtl="0" eaLnBrk="1" latinLnBrk="0" hangingPunct="1">
+              <a:lnSpc>
+                <a:spcPct val="90000"/>
+              </a:lnSpc>
+              <a:spcBef>
+                <a:spcPts val="375"/>
+              </a:spcBef>
+              <a:buFont typeface="Arial" panose="020B0604020202020204" pitchFamily="34" charset="0"/>
+              <a:buNone/>
+              <a:defRPr sz="1200" kern="1200">
+                <a:solidFill>
+                  <a:schemeClr val="tx1"/>
+                </a:solidFill>
+                <a:latin typeface="+mn-lt"/>
+                <a:ea typeface="+mn-ea"/>
+                <a:cs typeface="+mn-cs"/>
+              </a:defRPr>
+            </a:lvl9pPr>
+          </a:lstStyle>
+          <a:p>
+            <a:r>
+              <a:rPr lang="en-US" sz="1050" b="0"/>
+              <a:t>Where GCMC customises the app to match how the team actually works — the lists, functions and defaults everything else in the app draws from.</a:t>
+            </a:r>
+            <a:endParaRPr lang="en-US" sz="100" b="0"/>
+          </a:p>
+        </p:txBody>
+      </p:sp>
+      <p:pic>
+        <p:nvPicPr>
+          <p:cNvPr id="4" name="Picture 3">
+            <a:extLst>
+              <a:ext uri="{FF2B5EF4-FFF2-40B4-BE49-F238E27FC236}">
+                <a16:creationId xmlns:a16="http://schemas.microsoft.com/office/drawing/2014/main" id="{B661FC98-DABA-E020-ED17-A7CD72CC1B6F}"/>
+              </a:ext>
+            </a:extLst>
+          </p:cNvPr>
+          <p:cNvPicPr>
+            <a:picLocks noChangeAspect="1"/>
+          </p:cNvPicPr>
+          <p:nvPr/>
+        </p:nvPicPr>
+        <p:blipFill>
+          <a:blip r:embed="rId2"/>
+          <a:stretch>
+            <a:fillRect/>
+          </a:stretch>
+        </p:blipFill>
+        <p:spPr>
+          <a:xfrm>
+            <a:off x="3055577" y="986470"/>
+            <a:ext cx="5635585" cy="3238126"/>
+          </a:xfrm>
+          <a:prstGeom prst="rect">
+            <a:avLst/>
+          </a:prstGeom>
+        </p:spPr>
+      </p:pic>
+    </p:spTree>
+    <p:extLst>
+      <p:ext uri="{BB962C8B-B14F-4D97-AF65-F5344CB8AC3E}">
+        <p14:creationId xmlns:p14="http://schemas.microsoft.com/office/powerpoint/2010/main" val="309096946"/>
+      </p:ext>
+    </p:extLst>
+  </p:cSld>
+  <p:clrMapOvr>
+    <a:masterClrMapping/>
+  </p:clrMapOvr>
+</p:sld>
+</file>
+
+<file path=ppt/slides/slide13.xml><?xml version="1.0" encoding="utf-8"?>
+<p:sld xmlns:a="http://schemas.openxmlformats.org/drawingml/2006/main" xmlns:r="http://schemas.openxmlformats.org/officeDocument/2006/relationships" xmlns:p="http://schemas.openxmlformats.org/presentationml/2006/main">
+  <p:cSld>
+    <p:spTree>
+      <p:nvGrpSpPr>
+        <p:cNvPr id="1" name="">
+          <a:extLst>
+            <a:ext uri="{FF2B5EF4-FFF2-40B4-BE49-F238E27FC236}">
               <a16:creationId xmlns:a16="http://schemas.microsoft.com/office/drawing/2014/main" id="{DD34E61B-ACB8-A5D5-A5EB-2205A8B1F209}"/>
             </a:ext>
           </a:extLst>
@@ -6714,7 +8151,7 @@
         </p:nvSpPr>
         <p:spPr>
           <a:xfrm>
-            <a:off x="172557" y="869818"/>
+            <a:off x="172557" y="932519"/>
             <a:ext cx="8430423" cy="1313530"/>
           </a:xfrm>
         </p:spPr>
@@ -6723,27 +8160,12 @@
           <a:lstStyle/>
           <a:p>
             <a:r>
-              <a:rPr lang="en-US" sz="6000">
+              <a:rPr lang="en-US" sz="1800">
                 <a:latin typeface="Calibri" panose="020F0502020204030204" pitchFamily="34" charset="0"/>
                 <a:ea typeface="Calibri" panose="020F0502020204030204" pitchFamily="34" charset="0"/>
                 <a:cs typeface="Calibri" panose="020F0502020204030204" pitchFamily="34" charset="0"/>
               </a:rPr>
-              <a:t>GCMC</a:t>
-            </a:r>
-            <a:br>
-              <a:rPr lang="en-US" sz="4400">
-                <a:latin typeface="Calibri" panose="020F0502020204030204" pitchFamily="34" charset="0"/>
-                <a:ea typeface="Calibri" panose="020F0502020204030204" pitchFamily="34" charset="0"/>
-                <a:cs typeface="Calibri" panose="020F0502020204030204" pitchFamily="34" charset="0"/>
-              </a:rPr>
-            </a:br>
-            <a:r>
-              <a:rPr lang="en-US" sz="4400">
-                <a:latin typeface="Calibri" panose="020F0502020204030204" pitchFamily="34" charset="0"/>
-                <a:ea typeface="Calibri" panose="020F0502020204030204" pitchFamily="34" charset="0"/>
-                <a:cs typeface="Calibri" panose="020F0502020204030204" pitchFamily="34" charset="0"/>
-              </a:rPr>
-              <a:t>Workload report</a:t>
+              <a:t>GCMC Workload report</a:t>
             </a:r>
           </a:p>
         </p:txBody>
@@ -6766,7 +8188,7 @@
         </p:nvSpPr>
         <p:spPr>
           <a:xfrm>
-            <a:off x="172557" y="2351241"/>
+            <a:off x="172557" y="1189097"/>
             <a:ext cx="8430423" cy="1056952"/>
           </a:xfrm>
         </p:spPr>
@@ -6775,14 +8197,8 @@
           <a:lstStyle/>
           <a:p>
             <a:r>
-              <a:rPr lang="en-US"/>
-              <a:t>Usage and migration guide</a:t>
-            </a:r>
-          </a:p>
-          <a:p>
-            <a:r>
-              <a:rPr lang="en-US" sz="1000" b="0"/>
-              <a:t>For GCMC’s manager + functions teams (design, production and contents)</a:t>
+              <a:rPr lang="en-US" sz="4000"/>
+              <a:t>Add / migration guide</a:t>
             </a:r>
           </a:p>
         </p:txBody>
@@ -6800,7 +8216,7 @@
 </p:sld>
 </file>
 
-<file path=ppt/slides/slide11.xml><?xml version="1.0" encoding="utf-8"?>
+<file path=ppt/slides/slide14.xml><?xml version="1.0" encoding="utf-8"?>
 <p:sld xmlns:a="http://schemas.openxmlformats.org/drawingml/2006/main" xmlns:r="http://schemas.openxmlformats.org/officeDocument/2006/relationships" xmlns:p="http://schemas.openxmlformats.org/presentationml/2006/main">
   <p:cSld>
     <p:spTree>
@@ -6817,115 +8233,347 @@
           <a:chExt cx="0" cy="0"/>
         </a:xfrm>
       </p:grpSpPr>
+      <p:grpSp>
+        <p:nvGrpSpPr>
+          <p:cNvPr id="19" name="Group 18">
+            <a:extLst>
+              <a:ext uri="{FF2B5EF4-FFF2-40B4-BE49-F238E27FC236}">
+                <a16:creationId xmlns:a16="http://schemas.microsoft.com/office/drawing/2014/main" id="{F8F9C686-0A60-1599-5643-FF4317B57904}"/>
+              </a:ext>
+            </a:extLst>
+          </p:cNvPr>
+          <p:cNvGrpSpPr/>
+          <p:nvPr/>
+        </p:nvGrpSpPr>
+        <p:grpSpPr>
+          <a:xfrm>
+            <a:off x="463957" y="1328810"/>
+            <a:ext cx="8211581" cy="2865922"/>
+            <a:chOff x="396324" y="855843"/>
+            <a:chExt cx="5117103" cy="2865922"/>
+          </a:xfrm>
+        </p:grpSpPr>
+        <p:sp>
+          <p:nvSpPr>
+            <p:cNvPr id="18" name="Rectangle: Rounded Corners 17">
+              <a:extLst>
+                <a:ext uri="{FF2B5EF4-FFF2-40B4-BE49-F238E27FC236}">
+                  <a16:creationId xmlns:a16="http://schemas.microsoft.com/office/drawing/2014/main" id="{B5D26015-615F-480C-5AB3-AD350BFBC92B}"/>
+                </a:ext>
+              </a:extLst>
+            </p:cNvPr>
+            <p:cNvSpPr/>
+            <p:nvPr/>
+          </p:nvSpPr>
+          <p:spPr>
+            <a:xfrm>
+              <a:off x="396324" y="855843"/>
+              <a:ext cx="5117103" cy="2865922"/>
+            </a:xfrm>
+            <a:prstGeom prst="roundRect">
+              <a:avLst>
+                <a:gd name="adj" fmla="val 7760"/>
+              </a:avLst>
+            </a:prstGeom>
+            <a:solidFill>
+              <a:schemeClr val="bg1">
+                <a:lumMod val="95000"/>
+              </a:schemeClr>
+            </a:solidFill>
+            <a:ln>
+              <a:noFill/>
+            </a:ln>
+          </p:spPr>
+          <p:style>
+            <a:lnRef idx="2">
+              <a:schemeClr val="accent4">
+                <a:shade val="15000"/>
+              </a:schemeClr>
+            </a:lnRef>
+            <a:fillRef idx="1">
+              <a:schemeClr val="accent4"/>
+            </a:fillRef>
+            <a:effectRef idx="0">
+              <a:schemeClr val="accent4"/>
+            </a:effectRef>
+            <a:fontRef idx="minor">
+              <a:schemeClr val="lt1"/>
+            </a:fontRef>
+          </p:style>
+          <p:txBody>
+            <a:bodyPr rtlCol="0" anchor="ctr"/>
+            <a:lstStyle/>
+            <a:p>
+              <a:pPr algn="ctr"/>
+              <a:endParaRPr lang="en-US" sz="1200"/>
+            </a:p>
+          </p:txBody>
+        </p:sp>
+        <p:sp>
+          <p:nvSpPr>
+            <p:cNvPr id="11" name="TextBox 10">
+              <a:extLst>
+                <a:ext uri="{FF2B5EF4-FFF2-40B4-BE49-F238E27FC236}">
+                  <a16:creationId xmlns:a16="http://schemas.microsoft.com/office/drawing/2014/main" id="{F435A107-23C1-50C0-5F73-C5C22781997B}"/>
+                </a:ext>
+              </a:extLst>
+            </p:cNvPr>
+            <p:cNvSpPr txBox="1"/>
+            <p:nvPr/>
+          </p:nvSpPr>
+          <p:spPr>
+            <a:xfrm>
+              <a:off x="614855" y="1597903"/>
+              <a:ext cx="4572000" cy="1546577"/>
+            </a:xfrm>
+            <a:prstGeom prst="rect">
+              <a:avLst/>
+            </a:prstGeom>
+            <a:noFill/>
+          </p:spPr>
+          <p:txBody>
+            <a:bodyPr wrap="square">
+              <a:spAutoFit/>
+            </a:bodyPr>
+            <a:lstStyle/>
+            <a:p>
+              <a:pPr marL="285750" indent="-285750">
+                <a:buFont typeface="Arial" panose="020B0604020202020204" pitchFamily="34" charset="0"/>
+                <a:buChar char="•"/>
+              </a:pPr>
+              <a:endParaRPr lang="en-US" sz="1050"/>
+            </a:p>
+            <a:p>
+              <a:pPr marL="285750" indent="-285750">
+                <a:buFont typeface="Arial" panose="020B0604020202020204" pitchFamily="34" charset="0"/>
+                <a:buChar char="•"/>
+              </a:pPr>
+              <a:r>
+                <a:rPr lang="en-US" sz="1050" b="1"/>
+                <a:t>Squads </a:t>
+              </a:r>
+              <a:r>
+                <a:rPr lang="en-US" sz="1050">
+                  <a:solidFill>
+                    <a:schemeClr val="bg1">
+                      <a:lumMod val="50000"/>
+                    </a:schemeClr>
+                  </a:solidFill>
+                </a:rPr>
+                <a:t>— the stakeholder teams requesting work (DOM, INTON, Alumni, etc.)</a:t>
+              </a:r>
+            </a:p>
+            <a:p>
+              <a:pPr marL="285750" indent="-285750">
+                <a:buFont typeface="Arial" panose="020B0604020202020204" pitchFamily="34" charset="0"/>
+                <a:buChar char="•"/>
+              </a:pPr>
+              <a:r>
+                <a:rPr lang="en-US" sz="1050" b="1"/>
+                <a:t>Campaigns </a:t>
+              </a:r>
+              <a:r>
+                <a:rPr lang="en-US" sz="1050">
+                  <a:solidFill>
+                    <a:schemeClr val="bg1">
+                      <a:lumMod val="50000"/>
+                    </a:schemeClr>
+                  </a:solidFill>
+                </a:rPr>
+                <a:t>— the named campaigns or initiatives tasks are logged against</a:t>
+              </a:r>
+            </a:p>
+            <a:p>
+              <a:pPr marL="285750" indent="-285750">
+                <a:buFont typeface="Arial" panose="020B0604020202020204" pitchFamily="34" charset="0"/>
+                <a:buChar char="•"/>
+              </a:pPr>
+              <a:r>
+                <a:rPr lang="en-US" sz="1050" b="1"/>
+                <a:t>Work Types </a:t>
+              </a:r>
+              <a:r>
+                <a:rPr lang="en-US" sz="1050">
+                  <a:solidFill>
+                    <a:schemeClr val="bg1">
+                      <a:lumMod val="50000"/>
+                    </a:schemeClr>
+                  </a:solidFill>
+                </a:rPr>
+                <a:t>— the kinds of work performed (Graphic design, Video editing, Articles writing etc.)</a:t>
+              </a:r>
+            </a:p>
+            <a:p>
+              <a:pPr marL="285750" indent="-285750">
+                <a:buFont typeface="Arial" panose="020B0604020202020204" pitchFamily="34" charset="0"/>
+                <a:buChar char="•"/>
+              </a:pPr>
+              <a:r>
+                <a:rPr lang="en-US" sz="1050" b="1"/>
+                <a:t>Asset Types </a:t>
+              </a:r>
+              <a:r>
+                <a:rPr lang="en-US" sz="1050">
+                  <a:solidFill>
+                    <a:schemeClr val="bg1">
+                      <a:lumMod val="50000"/>
+                    </a:schemeClr>
+                  </a:solidFill>
+                </a:rPr>
+                <a:t>— the kinds of deliverables produced (Statics, Display ads, Articles, etc.)</a:t>
+              </a:r>
+            </a:p>
+            <a:p>
+              <a:pPr marL="285750" indent="-285750">
+                <a:buFont typeface="Arial" panose="020B0604020202020204" pitchFamily="34" charset="0"/>
+                <a:buChar char="•"/>
+              </a:pPr>
+              <a:r>
+                <a:rPr lang="en-US" sz="1050" b="1"/>
+                <a:t>Functions </a:t>
+              </a:r>
+              <a:r>
+                <a:rPr lang="en-US" sz="1050">
+                  <a:solidFill>
+                    <a:schemeClr val="bg1">
+                      <a:lumMod val="50000"/>
+                    </a:schemeClr>
+                  </a:solidFill>
+                </a:rPr>
+                <a:t>— the four GCMC teams that record workload (Vietnam Design, Melbourne Design, Production, Content), each with its own colour and task-form tab</a:t>
+              </a:r>
+            </a:p>
+            <a:p>
+              <a:pPr marL="285750" indent="-285750">
+                <a:buFont typeface="Arial" panose="020B0604020202020204" pitchFamily="34" charset="0"/>
+                <a:buChar char="•"/>
+              </a:pPr>
+              <a:r>
+                <a:rPr lang="en-US" sz="1050" b="1"/>
+                <a:t>People </a:t>
+              </a:r>
+              <a:r>
+                <a:rPr lang="en-US" sz="1050">
+                  <a:solidFill>
+                    <a:schemeClr val="bg1">
+                      <a:lumMod val="50000"/>
+                    </a:schemeClr>
+                  </a:solidFill>
+                </a:rPr>
+                <a:t>— the team roster tasks get assigned to</a:t>
+              </a:r>
+            </a:p>
+            <a:p>
+              <a:pPr marL="285750" indent="-285750">
+                <a:buFont typeface="Arial" panose="020B0604020202020204" pitchFamily="34" charset="0"/>
+                <a:buChar char="•"/>
+              </a:pPr>
+              <a:r>
+                <a:rPr lang="en-US" sz="1050" b="1"/>
+                <a:t>Task sizes </a:t>
+              </a:r>
+              <a:r>
+                <a:rPr lang="en-US" sz="1050">
+                  <a:solidFill>
+                    <a:schemeClr val="bg1">
+                      <a:lumMod val="50000"/>
+                    </a:schemeClr>
+                  </a:solidFill>
+                </a:rPr>
+                <a:t>— XS–XL, each with a default turnaround used to auto-fill new tasks' end dates</a:t>
+              </a:r>
+            </a:p>
+          </p:txBody>
+        </p:sp>
+        <p:sp>
+          <p:nvSpPr>
+            <p:cNvPr id="13" name="TextBox 12">
+              <a:extLst>
+                <a:ext uri="{FF2B5EF4-FFF2-40B4-BE49-F238E27FC236}">
+                  <a16:creationId xmlns:a16="http://schemas.microsoft.com/office/drawing/2014/main" id="{2E02F10B-F55B-744D-F3A7-D985C8CC0AE8}"/>
+                </a:ext>
+              </a:extLst>
+            </p:cNvPr>
+            <p:cNvSpPr txBox="1"/>
+            <p:nvPr/>
+          </p:nvSpPr>
+          <p:spPr>
+            <a:xfrm>
+              <a:off x="614855" y="1300563"/>
+              <a:ext cx="4572000" cy="338554"/>
+            </a:xfrm>
+            <a:prstGeom prst="rect">
+              <a:avLst/>
+            </a:prstGeom>
+            <a:noFill/>
+          </p:spPr>
+          <p:txBody>
+            <a:bodyPr wrap="square">
+              <a:spAutoFit/>
+            </a:bodyPr>
+            <a:lstStyle/>
+            <a:p>
+              <a:r>
+                <a:rPr lang="en-US" sz="1600" b="1">
+                  <a:solidFill>
+                    <a:srgbClr val="E61E2A"/>
+                  </a:solidFill>
+                </a:rPr>
+                <a:t>Go through the setting to see how each group is defined. This includes </a:t>
+              </a:r>
+            </a:p>
+          </p:txBody>
+        </p:sp>
+      </p:grpSp>
       <p:sp>
         <p:nvSpPr>
-          <p:cNvPr id="5" name="Title 1">
-            <a:extLst>
-              <a:ext uri="{FF2B5EF4-FFF2-40B4-BE49-F238E27FC236}">
-                <a16:creationId xmlns:a16="http://schemas.microsoft.com/office/drawing/2014/main" id="{53C8DA78-30DA-0B1B-58F4-03825933247D}"/>
-              </a:ext>
-            </a:extLst>
-          </p:cNvPr>
-          <p:cNvSpPr>
-            <a:spLocks noGrp="1"/>
-          </p:cNvSpPr>
-          <p:nvPr>
-            <p:ph type="title"/>
-          </p:nvPr>
+          <p:cNvPr id="22" name="TextBox 21">
+            <a:extLst>
+              <a:ext uri="{FF2B5EF4-FFF2-40B4-BE49-F238E27FC236}">
+                <a16:creationId xmlns:a16="http://schemas.microsoft.com/office/drawing/2014/main" id="{0F1FF5EC-EC27-E8D8-E9B8-C9184C3A8C8D}"/>
+              </a:ext>
+            </a:extLst>
+          </p:cNvPr>
+          <p:cNvSpPr txBox="1"/>
+          <p:nvPr/>
         </p:nvSpPr>
         <p:spPr>
           <a:xfrm>
-            <a:off x="245329" y="299902"/>
-            <a:ext cx="1930436" cy="1694259"/>
-          </a:xfrm>
+            <a:off x="497738" y="428276"/>
+            <a:ext cx="1880602" cy="461665"/>
+          </a:xfrm>
+          <a:prstGeom prst="rect">
+            <a:avLst/>
+          </a:prstGeom>
+          <a:noFill/>
         </p:spPr>
         <p:txBody>
-          <a:bodyPr/>
+          <a:bodyPr vert="horz" wrap="square" lIns="91440" tIns="45720" rIns="91440" bIns="45720" rtlCol="0" anchor="t" anchorCtr="0">
+            <a:spAutoFit/>
+          </a:bodyPr>
           <a:lstStyle/>
           <a:p>
-            <a:r>
-              <a:rPr lang="en-US"/>
-              <a:t>VTAC campaign</a:t>
-            </a:r>
-            <a:br>
-              <a:rPr lang="en-US"/>
-            </a:br>
-            <a:r>
-              <a:rPr lang="en-US"/>
-              <a:t>scripts</a:t>
-            </a:r>
-            <a:br>
-              <a:rPr lang="en-US">
-                <a:cs typeface="Arial"/>
+            <a:pPr algn="l"/>
+            <a:r>
+              <a:rPr lang="en-US" sz="2400" b="1">
+                <a:solidFill>
+                  <a:srgbClr val="E61E2A"/>
+                </a:solidFill>
               </a:rPr>
-            </a:br>
-            <a:r>
-              <a:rPr lang="en-US">
-                <a:cs typeface="Arial"/>
-              </a:rPr>
-              <a:t>30 second</a:t>
-            </a:r>
-            <a:br>
-              <a:rPr lang="en-US">
-                <a:cs typeface="Arial"/>
-              </a:rPr>
-            </a:br>
-            <a:br>
-              <a:rPr lang="en-US">
-                <a:cs typeface="Arial"/>
-              </a:rPr>
-            </a:br>
-            <a:endParaRPr lang="en-AU" sz="1800" b="0">
-              <a:cs typeface="Arial"/>
+              <a:t>Preparation</a:t>
+            </a:r>
+            <a:endParaRPr lang="en-US" sz="2400" b="1" dirty="0">
+              <a:solidFill>
+                <a:srgbClr val="E61E2A"/>
+              </a:solidFill>
             </a:endParaRPr>
-          </a:p>
-        </p:txBody>
-      </p:sp>
-      <p:sp>
-        <p:nvSpPr>
-          <p:cNvPr id="7" name="Text Placeholder 2">
-            <a:extLst>
-              <a:ext uri="{FF2B5EF4-FFF2-40B4-BE49-F238E27FC236}">
-                <a16:creationId xmlns:a16="http://schemas.microsoft.com/office/drawing/2014/main" id="{0A8887F3-DC54-74AB-9F3B-F783AA61A6D9}"/>
-              </a:ext>
-            </a:extLst>
-          </p:cNvPr>
-          <p:cNvSpPr>
-            <a:spLocks noGrp="1"/>
-          </p:cNvSpPr>
-          <p:nvPr>
-            <p:ph type="body" sz="quarter" idx="10"/>
-          </p:nvPr>
-        </p:nvSpPr>
-        <p:spPr>
-          <a:xfrm>
-            <a:off x="2762250" y="1257300"/>
-            <a:ext cx="6165056" cy="3323035"/>
-          </a:xfrm>
-        </p:spPr>
-        <p:txBody>
-          <a:bodyPr/>
-          <a:lstStyle/>
-          <a:p>
-            <a:endParaRPr lang="en-AU" b="0">
-              <a:cs typeface="Arial"/>
-            </a:endParaRPr>
-          </a:p>
-          <a:p>
-            <a:endParaRPr lang="en-AU" b="0"/>
-          </a:p>
-          <a:p>
-            <a:endParaRPr lang="en-AU" b="0"/>
-          </a:p>
-          <a:p>
-            <a:endParaRPr lang="en-AU"/>
           </a:p>
         </p:txBody>
       </p:sp>
     </p:spTree>
     <p:extLst>
       <p:ext uri="{BB962C8B-B14F-4D97-AF65-F5344CB8AC3E}">
-        <p14:creationId xmlns:p14="http://schemas.microsoft.com/office/powerpoint/2010/main" val="41677334"/>
+        <p14:creationId xmlns:p14="http://schemas.microsoft.com/office/powerpoint/2010/main" val="141687919"/>
       </p:ext>
     </p:extLst>
   </p:cSld>
@@ -6935,7 +8583,7 @@
 </p:sld>
 </file>
 
-<file path=ppt/slides/slide12.xml><?xml version="1.0" encoding="utf-8"?>
+<file path=ppt/slides/slide15.xml><?xml version="1.0" encoding="utf-8"?>
 <p:sld xmlns:a="http://schemas.openxmlformats.org/drawingml/2006/main" xmlns:r="http://schemas.openxmlformats.org/officeDocument/2006/relationships" xmlns:p="http://schemas.openxmlformats.org/presentationml/2006/main">
   <p:cSld>
     <p:spTree>
@@ -6943,7 +8591,2768 @@
         <p:cNvPr id="1" name="">
           <a:extLst>
             <a:ext uri="{FF2B5EF4-FFF2-40B4-BE49-F238E27FC236}">
-              <a16:creationId xmlns:a16="http://schemas.microsoft.com/office/drawing/2014/main" id="{FFB6DACD-12FB-E58D-3DA5-948E6E51559D}"/>
+              <a16:creationId xmlns:a16="http://schemas.microsoft.com/office/drawing/2014/main" id="{3AC904E4-2764-9FE1-70BB-B05BE9FA3810}"/>
+            </a:ext>
+          </a:extLst>
+        </p:cNvPr>
+        <p:cNvGrpSpPr/>
+        <p:nvPr/>
+      </p:nvGrpSpPr>
+      <p:grpSpPr>
+        <a:xfrm>
+          <a:off x="0" y="0"/>
+          <a:ext cx="0" cy="0"/>
+          <a:chOff x="0" y="0"/>
+          <a:chExt cx="0" cy="0"/>
+        </a:xfrm>
+      </p:grpSpPr>
+      <p:grpSp>
+        <p:nvGrpSpPr>
+          <p:cNvPr id="2" name="Group 1">
+            <a:extLst>
+              <a:ext uri="{FF2B5EF4-FFF2-40B4-BE49-F238E27FC236}">
+                <a16:creationId xmlns:a16="http://schemas.microsoft.com/office/drawing/2014/main" id="{D023E849-95B8-EEAF-ED9E-CE306072B022}"/>
+              </a:ext>
+            </a:extLst>
+          </p:cNvPr>
+          <p:cNvGrpSpPr/>
+          <p:nvPr/>
+        </p:nvGrpSpPr>
+        <p:grpSpPr>
+          <a:xfrm>
+            <a:off x="427922" y="1148631"/>
+            <a:ext cx="4324256" cy="1495471"/>
+            <a:chOff x="427922" y="1148631"/>
+            <a:chExt cx="4324256" cy="1495471"/>
+          </a:xfrm>
+        </p:grpSpPr>
+        <p:sp>
+          <p:nvSpPr>
+            <p:cNvPr id="18" name="Rectangle: Rounded Corners 17">
+              <a:extLst>
+                <a:ext uri="{FF2B5EF4-FFF2-40B4-BE49-F238E27FC236}">
+                  <a16:creationId xmlns:a16="http://schemas.microsoft.com/office/drawing/2014/main" id="{201A1B7E-CD58-94C4-5E5A-B08AF4C13531}"/>
+                </a:ext>
+              </a:extLst>
+            </p:cNvPr>
+            <p:cNvSpPr/>
+            <p:nvPr/>
+          </p:nvSpPr>
+          <p:spPr>
+            <a:xfrm>
+              <a:off x="427922" y="1148631"/>
+              <a:ext cx="4324256" cy="1495471"/>
+            </a:xfrm>
+            <a:prstGeom prst="roundRect">
+              <a:avLst>
+                <a:gd name="adj" fmla="val 7760"/>
+              </a:avLst>
+            </a:prstGeom>
+            <a:solidFill>
+              <a:schemeClr val="bg1">
+                <a:lumMod val="95000"/>
+              </a:schemeClr>
+            </a:solidFill>
+            <a:ln>
+              <a:noFill/>
+            </a:ln>
+          </p:spPr>
+          <p:style>
+            <a:lnRef idx="2">
+              <a:schemeClr val="accent4">
+                <a:shade val="15000"/>
+              </a:schemeClr>
+            </a:lnRef>
+            <a:fillRef idx="1">
+              <a:schemeClr val="accent4"/>
+            </a:fillRef>
+            <a:effectRef idx="0">
+              <a:schemeClr val="accent4"/>
+            </a:effectRef>
+            <a:fontRef idx="minor">
+              <a:schemeClr val="lt1"/>
+            </a:fontRef>
+          </p:style>
+          <p:txBody>
+            <a:bodyPr rtlCol="0" anchor="ctr"/>
+            <a:lstStyle/>
+            <a:p>
+              <a:pPr algn="ctr"/>
+              <a:endParaRPr lang="en-US" sz="1200"/>
+            </a:p>
+          </p:txBody>
+        </p:sp>
+        <p:sp>
+          <p:nvSpPr>
+            <p:cNvPr id="11" name="TextBox 10">
+              <a:extLst>
+                <a:ext uri="{FF2B5EF4-FFF2-40B4-BE49-F238E27FC236}">
+                  <a16:creationId xmlns:a16="http://schemas.microsoft.com/office/drawing/2014/main" id="{912711EC-0210-BB8E-D879-1B6DE9013E95}"/>
+                </a:ext>
+              </a:extLst>
+            </p:cNvPr>
+            <p:cNvSpPr txBox="1"/>
+            <p:nvPr/>
+          </p:nvSpPr>
+          <p:spPr>
+            <a:xfrm>
+              <a:off x="630681" y="1620427"/>
+              <a:ext cx="3846731" cy="738664"/>
+            </a:xfrm>
+            <a:prstGeom prst="rect">
+              <a:avLst/>
+            </a:prstGeom>
+            <a:noFill/>
+          </p:spPr>
+          <p:txBody>
+            <a:bodyPr wrap="square">
+              <a:spAutoFit/>
+            </a:bodyPr>
+            <a:lstStyle/>
+            <a:p>
+              <a:r>
+                <a:rPr lang="en-US" sz="1050"/>
+                <a:t>Check existing items carefully before adding a new one — it's easy to accidentally create two entries for the same thing (e.g. "DOM" and "Domestic"). Duplicates split the data and quietly break the dashboard's numbers.</a:t>
+              </a:r>
+              <a:endParaRPr lang="en-US" sz="1050">
+                <a:solidFill>
+                  <a:schemeClr val="bg1">
+                    <a:lumMod val="50000"/>
+                  </a:schemeClr>
+                </a:solidFill>
+              </a:endParaRPr>
+            </a:p>
+          </p:txBody>
+        </p:sp>
+        <p:sp>
+          <p:nvSpPr>
+            <p:cNvPr id="13" name="TextBox 12">
+              <a:extLst>
+                <a:ext uri="{FF2B5EF4-FFF2-40B4-BE49-F238E27FC236}">
+                  <a16:creationId xmlns:a16="http://schemas.microsoft.com/office/drawing/2014/main" id="{23FC5411-57F1-7CFC-F63E-15A32D9D28BD}"/>
+                </a:ext>
+              </a:extLst>
+            </p:cNvPr>
+            <p:cNvSpPr txBox="1"/>
+            <p:nvPr/>
+          </p:nvSpPr>
+          <p:spPr>
+            <a:xfrm>
+              <a:off x="630681" y="1343428"/>
+              <a:ext cx="3846731" cy="276999"/>
+            </a:xfrm>
+            <a:prstGeom prst="rect">
+              <a:avLst/>
+            </a:prstGeom>
+            <a:noFill/>
+          </p:spPr>
+          <p:txBody>
+            <a:bodyPr wrap="square">
+              <a:spAutoFit/>
+            </a:bodyPr>
+            <a:lstStyle/>
+            <a:p>
+              <a:r>
+                <a:rPr lang="en-US" sz="1200" b="1">
+                  <a:solidFill>
+                    <a:srgbClr val="E61E2A"/>
+                  </a:solidFill>
+                </a:rPr>
+                <a:t>Watch for duplicates. </a:t>
+              </a:r>
+            </a:p>
+          </p:txBody>
+        </p:sp>
+      </p:grpSp>
+      <p:sp>
+        <p:nvSpPr>
+          <p:cNvPr id="22" name="TextBox 21">
+            <a:extLst>
+              <a:ext uri="{FF2B5EF4-FFF2-40B4-BE49-F238E27FC236}">
+                <a16:creationId xmlns:a16="http://schemas.microsoft.com/office/drawing/2014/main" id="{8981132A-69CC-365A-7B5A-4FF2759BDCEC}"/>
+              </a:ext>
+            </a:extLst>
+          </p:cNvPr>
+          <p:cNvSpPr txBox="1"/>
+          <p:nvPr/>
+        </p:nvSpPr>
+        <p:spPr>
+          <a:xfrm>
+            <a:off x="497737" y="428276"/>
+            <a:ext cx="3299500" cy="461665"/>
+          </a:xfrm>
+          <a:prstGeom prst="rect">
+            <a:avLst/>
+          </a:prstGeom>
+          <a:noFill/>
+        </p:spPr>
+        <p:txBody>
+          <a:bodyPr vert="horz" wrap="square" lIns="91440" tIns="45720" rIns="91440" bIns="45720" rtlCol="0" anchor="t" anchorCtr="0">
+            <a:spAutoFit/>
+          </a:bodyPr>
+          <a:lstStyle/>
+          <a:p>
+            <a:pPr algn="l"/>
+            <a:r>
+              <a:rPr lang="en-US" sz="2400" b="1">
+                <a:solidFill>
+                  <a:srgbClr val="E61E2A"/>
+                </a:solidFill>
+              </a:rPr>
+              <a:t>Important notes</a:t>
+            </a:r>
+            <a:endParaRPr lang="en-US" sz="2400" b="1" dirty="0">
+              <a:solidFill>
+                <a:srgbClr val="E61E2A"/>
+              </a:solidFill>
+            </a:endParaRPr>
+          </a:p>
+        </p:txBody>
+      </p:sp>
+      <p:grpSp>
+        <p:nvGrpSpPr>
+          <p:cNvPr id="3" name="Group 2">
+            <a:extLst>
+              <a:ext uri="{FF2B5EF4-FFF2-40B4-BE49-F238E27FC236}">
+                <a16:creationId xmlns:a16="http://schemas.microsoft.com/office/drawing/2014/main" id="{FE83F644-9B39-5A8B-2DE8-0EAF4781FCB2}"/>
+              </a:ext>
+            </a:extLst>
+          </p:cNvPr>
+          <p:cNvGrpSpPr/>
+          <p:nvPr/>
+        </p:nvGrpSpPr>
+        <p:grpSpPr>
+          <a:xfrm>
+            <a:off x="427922" y="2787494"/>
+            <a:ext cx="4324256" cy="1495471"/>
+            <a:chOff x="427922" y="1148631"/>
+            <a:chExt cx="4324256" cy="1495471"/>
+          </a:xfrm>
+        </p:grpSpPr>
+        <p:sp>
+          <p:nvSpPr>
+            <p:cNvPr id="4" name="Rectangle: Rounded Corners 3">
+              <a:extLst>
+                <a:ext uri="{FF2B5EF4-FFF2-40B4-BE49-F238E27FC236}">
+                  <a16:creationId xmlns:a16="http://schemas.microsoft.com/office/drawing/2014/main" id="{F4665779-3DEA-7ABF-BBB1-6EE2D3E913C1}"/>
+                </a:ext>
+              </a:extLst>
+            </p:cNvPr>
+            <p:cNvSpPr/>
+            <p:nvPr/>
+          </p:nvSpPr>
+          <p:spPr>
+            <a:xfrm>
+              <a:off x="427922" y="1148631"/>
+              <a:ext cx="4324256" cy="1495471"/>
+            </a:xfrm>
+            <a:prstGeom prst="roundRect">
+              <a:avLst>
+                <a:gd name="adj" fmla="val 7760"/>
+              </a:avLst>
+            </a:prstGeom>
+            <a:solidFill>
+              <a:schemeClr val="bg1">
+                <a:lumMod val="95000"/>
+              </a:schemeClr>
+            </a:solidFill>
+            <a:ln>
+              <a:noFill/>
+            </a:ln>
+          </p:spPr>
+          <p:style>
+            <a:lnRef idx="2">
+              <a:schemeClr val="accent4">
+                <a:shade val="15000"/>
+              </a:schemeClr>
+            </a:lnRef>
+            <a:fillRef idx="1">
+              <a:schemeClr val="accent4"/>
+            </a:fillRef>
+            <a:effectRef idx="0">
+              <a:schemeClr val="accent4"/>
+            </a:effectRef>
+            <a:fontRef idx="minor">
+              <a:schemeClr val="lt1"/>
+            </a:fontRef>
+          </p:style>
+          <p:txBody>
+            <a:bodyPr rtlCol="0" anchor="ctr"/>
+            <a:lstStyle/>
+            <a:p>
+              <a:pPr algn="ctr"/>
+              <a:endParaRPr lang="en-US" sz="1200"/>
+            </a:p>
+          </p:txBody>
+        </p:sp>
+        <p:sp>
+          <p:nvSpPr>
+            <p:cNvPr id="5" name="TextBox 4">
+              <a:extLst>
+                <a:ext uri="{FF2B5EF4-FFF2-40B4-BE49-F238E27FC236}">
+                  <a16:creationId xmlns:a16="http://schemas.microsoft.com/office/drawing/2014/main" id="{9447FFD0-43C0-22AE-06FB-1F6A13A2430D}"/>
+                </a:ext>
+              </a:extLst>
+            </p:cNvPr>
+            <p:cNvSpPr txBox="1"/>
+            <p:nvPr/>
+          </p:nvSpPr>
+          <p:spPr>
+            <a:xfrm>
+              <a:off x="630681" y="1620427"/>
+              <a:ext cx="3846731" cy="738664"/>
+            </a:xfrm>
+            <a:prstGeom prst="rect">
+              <a:avLst/>
+            </a:prstGeom>
+            <a:noFill/>
+          </p:spPr>
+          <p:txBody>
+            <a:bodyPr wrap="square">
+              <a:spAutoFit/>
+            </a:bodyPr>
+            <a:lstStyle/>
+            <a:p>
+              <a:r>
+                <a:rPr lang="en-US" sz="1050"/>
+                <a:t>Each item shows its task count — treat that as a warning sign. Renaming is usually fine (it rewrites every task that uses it), but removing something with tasks attached will reassign those tasks to "Others."</a:t>
+              </a:r>
+              <a:endParaRPr lang="en-US" sz="1050">
+                <a:solidFill>
+                  <a:schemeClr val="bg1">
+                    <a:lumMod val="50000"/>
+                  </a:schemeClr>
+                </a:solidFill>
+              </a:endParaRPr>
+            </a:p>
+          </p:txBody>
+        </p:sp>
+        <p:sp>
+          <p:nvSpPr>
+            <p:cNvPr id="6" name="TextBox 5">
+              <a:extLst>
+                <a:ext uri="{FF2B5EF4-FFF2-40B4-BE49-F238E27FC236}">
+                  <a16:creationId xmlns:a16="http://schemas.microsoft.com/office/drawing/2014/main" id="{3D54D6D6-35A5-16A4-5A5C-ACEABD54784D}"/>
+                </a:ext>
+              </a:extLst>
+            </p:cNvPr>
+            <p:cNvSpPr txBox="1"/>
+            <p:nvPr/>
+          </p:nvSpPr>
+          <p:spPr>
+            <a:xfrm>
+              <a:off x="630681" y="1343428"/>
+              <a:ext cx="3846731" cy="276999"/>
+            </a:xfrm>
+            <a:prstGeom prst="rect">
+              <a:avLst/>
+            </a:prstGeom>
+            <a:noFill/>
+          </p:spPr>
+          <p:txBody>
+            <a:bodyPr wrap="square">
+              <a:spAutoFit/>
+            </a:bodyPr>
+            <a:lstStyle/>
+            <a:p>
+              <a:r>
+                <a:rPr lang="en-US" sz="1200" b="1">
+                  <a:solidFill>
+                    <a:srgbClr val="E61E2A"/>
+                  </a:solidFill>
+                </a:rPr>
+                <a:t>Be careful renaming/removing items in use</a:t>
+              </a:r>
+            </a:p>
+          </p:txBody>
+        </p:sp>
+      </p:grpSp>
+      <p:grpSp>
+        <p:nvGrpSpPr>
+          <p:cNvPr id="12" name="Group 11">
+            <a:extLst>
+              <a:ext uri="{FF2B5EF4-FFF2-40B4-BE49-F238E27FC236}">
+                <a16:creationId xmlns:a16="http://schemas.microsoft.com/office/drawing/2014/main" id="{45854A09-29F3-F68B-77DC-00C481180751}"/>
+              </a:ext>
+            </a:extLst>
+          </p:cNvPr>
+          <p:cNvGrpSpPr/>
+          <p:nvPr/>
+        </p:nvGrpSpPr>
+        <p:grpSpPr>
+          <a:xfrm>
+            <a:off x="4819744" y="1148630"/>
+            <a:ext cx="3896334" cy="3134335"/>
+            <a:chOff x="427922" y="1148631"/>
+            <a:chExt cx="4324256" cy="1495471"/>
+          </a:xfrm>
+        </p:grpSpPr>
+        <p:sp>
+          <p:nvSpPr>
+            <p:cNvPr id="14" name="Rectangle: Rounded Corners 13">
+              <a:extLst>
+                <a:ext uri="{FF2B5EF4-FFF2-40B4-BE49-F238E27FC236}">
+                  <a16:creationId xmlns:a16="http://schemas.microsoft.com/office/drawing/2014/main" id="{DDBADFFD-3C0E-AF35-72FA-96F0E40A3AC2}"/>
+                </a:ext>
+              </a:extLst>
+            </p:cNvPr>
+            <p:cNvSpPr/>
+            <p:nvPr/>
+          </p:nvSpPr>
+          <p:spPr>
+            <a:xfrm>
+              <a:off x="427922" y="1148631"/>
+              <a:ext cx="4324256" cy="1495471"/>
+            </a:xfrm>
+            <a:prstGeom prst="roundRect">
+              <a:avLst>
+                <a:gd name="adj" fmla="val 7760"/>
+              </a:avLst>
+            </a:prstGeom>
+            <a:solidFill>
+              <a:srgbClr val="E61E2A"/>
+            </a:solidFill>
+            <a:ln>
+              <a:noFill/>
+            </a:ln>
+          </p:spPr>
+          <p:style>
+            <a:lnRef idx="2">
+              <a:schemeClr val="accent4">
+                <a:shade val="15000"/>
+              </a:schemeClr>
+            </a:lnRef>
+            <a:fillRef idx="1">
+              <a:schemeClr val="accent4"/>
+            </a:fillRef>
+            <a:effectRef idx="0">
+              <a:schemeClr val="accent4"/>
+            </a:effectRef>
+            <a:fontRef idx="minor">
+              <a:schemeClr val="lt1"/>
+            </a:fontRef>
+          </p:style>
+          <p:txBody>
+            <a:bodyPr rtlCol="0" anchor="ctr"/>
+            <a:lstStyle/>
+            <a:p>
+              <a:pPr algn="ctr"/>
+              <a:endParaRPr lang="en-US" sz="1200">
+                <a:solidFill>
+                  <a:srgbClr val="C00000"/>
+                </a:solidFill>
+              </a:endParaRPr>
+            </a:p>
+          </p:txBody>
+        </p:sp>
+        <p:sp>
+          <p:nvSpPr>
+            <p:cNvPr id="15" name="TextBox 14">
+              <a:extLst>
+                <a:ext uri="{FF2B5EF4-FFF2-40B4-BE49-F238E27FC236}">
+                  <a16:creationId xmlns:a16="http://schemas.microsoft.com/office/drawing/2014/main" id="{C0458A27-A022-816A-6A2F-252D66E885DD}"/>
+                </a:ext>
+              </a:extLst>
+            </p:cNvPr>
+            <p:cNvSpPr txBox="1"/>
+            <p:nvPr/>
+          </p:nvSpPr>
+          <p:spPr>
+            <a:xfrm>
+              <a:off x="630681" y="1620427"/>
+              <a:ext cx="3846731" cy="815007"/>
+            </a:xfrm>
+            <a:prstGeom prst="rect">
+              <a:avLst/>
+            </a:prstGeom>
+            <a:noFill/>
+          </p:spPr>
+          <p:txBody>
+            <a:bodyPr wrap="square">
+              <a:spAutoFit/>
+            </a:bodyPr>
+            <a:lstStyle/>
+            <a:p>
+              <a:r>
+                <a:rPr lang="en-US" sz="1050" b="1" i="1">
+                  <a:solidFill>
+                    <a:schemeClr val="bg1"/>
+                  </a:solidFill>
+                </a:rPr>
+                <a:t>This is the one that matters most: every team needs to define "a unit of work" or "an asset" the same way, or add a new one that makes sense</a:t>
+              </a:r>
+            </a:p>
+            <a:p>
+              <a:endParaRPr lang="en-US" sz="1050">
+                <a:solidFill>
+                  <a:schemeClr val="bg1"/>
+                </a:solidFill>
+              </a:endParaRPr>
+            </a:p>
+            <a:p>
+              <a:r>
+                <a:rPr lang="en-US" sz="1050">
+                  <a:solidFill>
+                    <a:schemeClr val="bg1"/>
+                  </a:solidFill>
+                </a:rPr>
+                <a:t>Refer to VN Design's existing types (and their tasks) as a reference point before inventing new ones. Keep categories broad — things like "Paragraphs," "Lines," "Minutes of shooting," or "Photos taken" are too granular; stick to categories the whole team can count consistently.</a:t>
+              </a:r>
+            </a:p>
+          </p:txBody>
+        </p:sp>
+        <p:sp>
+          <p:nvSpPr>
+            <p:cNvPr id="16" name="TextBox 15">
+              <a:extLst>
+                <a:ext uri="{FF2B5EF4-FFF2-40B4-BE49-F238E27FC236}">
+                  <a16:creationId xmlns:a16="http://schemas.microsoft.com/office/drawing/2014/main" id="{258F7984-C5BC-D214-4B39-2D59087A13AA}"/>
+                </a:ext>
+              </a:extLst>
+            </p:cNvPr>
+            <p:cNvSpPr txBox="1"/>
+            <p:nvPr/>
+          </p:nvSpPr>
+          <p:spPr>
+            <a:xfrm>
+              <a:off x="630681" y="1343428"/>
+              <a:ext cx="3846731" cy="220272"/>
+            </a:xfrm>
+            <a:prstGeom prst="rect">
+              <a:avLst/>
+            </a:prstGeom>
+            <a:noFill/>
+          </p:spPr>
+          <p:txBody>
+            <a:bodyPr wrap="square">
+              <a:spAutoFit/>
+            </a:bodyPr>
+            <a:lstStyle/>
+            <a:p>
+              <a:r>
+                <a:rPr lang="en-US" sz="1200" b="1">
+                  <a:solidFill>
+                    <a:schemeClr val="bg1"/>
+                  </a:solidFill>
+                </a:rPr>
+                <a:t>Work / Asset types — agree on a shared definition. </a:t>
+              </a:r>
+            </a:p>
+          </p:txBody>
+        </p:sp>
+      </p:grpSp>
+    </p:spTree>
+    <p:extLst>
+      <p:ext uri="{BB962C8B-B14F-4D97-AF65-F5344CB8AC3E}">
+        <p14:creationId xmlns:p14="http://schemas.microsoft.com/office/powerpoint/2010/main" val="3689880933"/>
+      </p:ext>
+    </p:extLst>
+  </p:cSld>
+  <p:clrMapOvr>
+    <a:masterClrMapping/>
+  </p:clrMapOvr>
+</p:sld>
+</file>
+
+<file path=ppt/slides/slide16.xml><?xml version="1.0" encoding="utf-8"?>
+<p:sld xmlns:a="http://schemas.openxmlformats.org/drawingml/2006/main" xmlns:r="http://schemas.openxmlformats.org/officeDocument/2006/relationships" xmlns:p="http://schemas.openxmlformats.org/presentationml/2006/main">
+  <p:cSld>
+    <p:spTree>
+      <p:nvGrpSpPr>
+        <p:cNvPr id="1" name="">
+          <a:extLst>
+            <a:ext uri="{FF2B5EF4-FFF2-40B4-BE49-F238E27FC236}">
+              <a16:creationId xmlns:a16="http://schemas.microsoft.com/office/drawing/2014/main" id="{14F0541D-805A-227A-1478-7FD7CB21914F}"/>
+            </a:ext>
+          </a:extLst>
+        </p:cNvPr>
+        <p:cNvGrpSpPr/>
+        <p:nvPr/>
+      </p:nvGrpSpPr>
+      <p:grpSpPr>
+        <a:xfrm>
+          <a:off x="0" y="0"/>
+          <a:ext cx="0" cy="0"/>
+          <a:chOff x="0" y="0"/>
+          <a:chExt cx="0" cy="0"/>
+        </a:xfrm>
+      </p:grpSpPr>
+      <p:grpSp>
+        <p:nvGrpSpPr>
+          <p:cNvPr id="2" name="Group 1">
+            <a:extLst>
+              <a:ext uri="{FF2B5EF4-FFF2-40B4-BE49-F238E27FC236}">
+                <a16:creationId xmlns:a16="http://schemas.microsoft.com/office/drawing/2014/main" id="{C1B2326B-5141-BBA5-5BEE-2ADF366B1B46}"/>
+              </a:ext>
+            </a:extLst>
+          </p:cNvPr>
+          <p:cNvGrpSpPr/>
+          <p:nvPr/>
+        </p:nvGrpSpPr>
+        <p:grpSpPr>
+          <a:xfrm>
+            <a:off x="4819744" y="1182840"/>
+            <a:ext cx="3324272" cy="3199223"/>
+            <a:chOff x="427922" y="1148631"/>
+            <a:chExt cx="4324256" cy="1323158"/>
+          </a:xfrm>
+        </p:grpSpPr>
+        <p:sp>
+          <p:nvSpPr>
+            <p:cNvPr id="18" name="Rectangle: Rounded Corners 17">
+              <a:extLst>
+                <a:ext uri="{FF2B5EF4-FFF2-40B4-BE49-F238E27FC236}">
+                  <a16:creationId xmlns:a16="http://schemas.microsoft.com/office/drawing/2014/main" id="{3716A98E-1CCC-444F-E738-0B5EB4E2419D}"/>
+                </a:ext>
+              </a:extLst>
+            </p:cNvPr>
+            <p:cNvSpPr/>
+            <p:nvPr/>
+          </p:nvSpPr>
+          <p:spPr>
+            <a:xfrm>
+              <a:off x="427922" y="1148631"/>
+              <a:ext cx="4324256" cy="1323158"/>
+            </a:xfrm>
+            <a:prstGeom prst="roundRect">
+              <a:avLst>
+                <a:gd name="adj" fmla="val 7760"/>
+              </a:avLst>
+            </a:prstGeom>
+            <a:solidFill>
+              <a:schemeClr val="bg1">
+                <a:lumMod val="95000"/>
+              </a:schemeClr>
+            </a:solidFill>
+            <a:ln>
+              <a:noFill/>
+            </a:ln>
+          </p:spPr>
+          <p:style>
+            <a:lnRef idx="2">
+              <a:schemeClr val="accent4">
+                <a:shade val="15000"/>
+              </a:schemeClr>
+            </a:lnRef>
+            <a:fillRef idx="1">
+              <a:schemeClr val="accent4"/>
+            </a:fillRef>
+            <a:effectRef idx="0">
+              <a:schemeClr val="accent4"/>
+            </a:effectRef>
+            <a:fontRef idx="minor">
+              <a:schemeClr val="lt1"/>
+            </a:fontRef>
+          </p:style>
+          <p:txBody>
+            <a:bodyPr rtlCol="0" anchor="ctr"/>
+            <a:lstStyle/>
+            <a:p>
+              <a:pPr algn="ctr"/>
+              <a:endParaRPr lang="en-US" sz="1200"/>
+            </a:p>
+          </p:txBody>
+        </p:sp>
+        <p:sp>
+          <p:nvSpPr>
+            <p:cNvPr id="11" name="TextBox 10">
+              <a:extLst>
+                <a:ext uri="{FF2B5EF4-FFF2-40B4-BE49-F238E27FC236}">
+                  <a16:creationId xmlns:a16="http://schemas.microsoft.com/office/drawing/2014/main" id="{43FFA940-88DF-EB8B-492B-05269B1F9357}"/>
+                </a:ext>
+              </a:extLst>
+            </p:cNvPr>
+            <p:cNvSpPr txBox="1"/>
+            <p:nvPr/>
+          </p:nvSpPr>
+          <p:spPr>
+            <a:xfrm>
+              <a:off x="630681" y="1577551"/>
+              <a:ext cx="3846731" cy="706473"/>
+            </a:xfrm>
+            <a:prstGeom prst="rect">
+              <a:avLst/>
+            </a:prstGeom>
+            <a:noFill/>
+          </p:spPr>
+          <p:txBody>
+            <a:bodyPr wrap="square">
+              <a:spAutoFit/>
+            </a:bodyPr>
+            <a:lstStyle/>
+            <a:p>
+              <a:r>
+                <a:rPr lang="en-US" sz="1050"/>
+                <a:t>(e.g. a new "Media" function). This only controls what shows up on that function's tab in the task form — it's purely for keeping the form uncluttered, and doesn't touch any task that's already been recorded. </a:t>
+              </a:r>
+            </a:p>
+            <a:p>
+              <a:endParaRPr lang="en-US" sz="1050" i="1"/>
+            </a:p>
+            <a:p>
+              <a:r>
+                <a:rPr lang="en-US" sz="1050" i="1"/>
+                <a:t>Note: Vietnam Design and Melbourne Design stay as separate functions, but can be grouped together as "Design" when viewing the dashboard.</a:t>
+              </a:r>
+            </a:p>
+          </p:txBody>
+        </p:sp>
+        <p:sp>
+          <p:nvSpPr>
+            <p:cNvPr id="13" name="TextBox 12">
+              <a:extLst>
+                <a:ext uri="{FF2B5EF4-FFF2-40B4-BE49-F238E27FC236}">
+                  <a16:creationId xmlns:a16="http://schemas.microsoft.com/office/drawing/2014/main" id="{51712005-2B60-413E-2464-D21425653303}"/>
+                </a:ext>
+              </a:extLst>
+            </p:cNvPr>
+            <p:cNvSpPr txBox="1"/>
+            <p:nvPr/>
+          </p:nvSpPr>
+          <p:spPr>
+            <a:xfrm>
+              <a:off x="630681" y="1346790"/>
+              <a:ext cx="3846731" cy="190939"/>
+            </a:xfrm>
+            <a:prstGeom prst="rect">
+              <a:avLst/>
+            </a:prstGeom>
+            <a:noFill/>
+          </p:spPr>
+          <p:txBody>
+            <a:bodyPr wrap="square">
+              <a:spAutoFit/>
+            </a:bodyPr>
+            <a:lstStyle/>
+            <a:p>
+              <a:r>
+                <a:rPr lang="en-US" sz="1200" b="1">
+                  <a:solidFill>
+                    <a:srgbClr val="E61E2A"/>
+                  </a:solidFill>
+                </a:rPr>
+                <a:t>Functions </a:t>
+              </a:r>
+              <a:r>
+                <a:rPr lang="en-US" sz="1200" b="1"/>
+                <a:t>— add/remove as your team structure changes </a:t>
+              </a:r>
+            </a:p>
+          </p:txBody>
+        </p:sp>
+      </p:grpSp>
+      <p:sp>
+        <p:nvSpPr>
+          <p:cNvPr id="22" name="TextBox 21">
+            <a:extLst>
+              <a:ext uri="{FF2B5EF4-FFF2-40B4-BE49-F238E27FC236}">
+                <a16:creationId xmlns:a16="http://schemas.microsoft.com/office/drawing/2014/main" id="{4A1B79C1-2C5F-29DA-2080-A8368BF0E1B9}"/>
+              </a:ext>
+            </a:extLst>
+          </p:cNvPr>
+          <p:cNvSpPr txBox="1"/>
+          <p:nvPr/>
+        </p:nvSpPr>
+        <p:spPr>
+          <a:xfrm>
+            <a:off x="497738" y="428276"/>
+            <a:ext cx="3511208" cy="461665"/>
+          </a:xfrm>
+          <a:prstGeom prst="rect">
+            <a:avLst/>
+          </a:prstGeom>
+          <a:noFill/>
+        </p:spPr>
+        <p:txBody>
+          <a:bodyPr vert="horz" wrap="square" lIns="91440" tIns="45720" rIns="91440" bIns="45720" rtlCol="0" anchor="t" anchorCtr="0">
+            <a:spAutoFit/>
+          </a:bodyPr>
+          <a:lstStyle/>
+          <a:p>
+            <a:r>
+              <a:rPr lang="en-US" sz="2400" b="1">
+                <a:solidFill>
+                  <a:srgbClr val="E61E2A"/>
+                </a:solidFill>
+              </a:rPr>
+              <a:t>Important notes</a:t>
+            </a:r>
+            <a:endParaRPr lang="en-US" sz="2400" b="1" dirty="0">
+              <a:solidFill>
+                <a:srgbClr val="E61E2A"/>
+              </a:solidFill>
+            </a:endParaRPr>
+          </a:p>
+        </p:txBody>
+      </p:sp>
+      <p:grpSp>
+        <p:nvGrpSpPr>
+          <p:cNvPr id="12" name="Group 11">
+            <a:extLst>
+              <a:ext uri="{FF2B5EF4-FFF2-40B4-BE49-F238E27FC236}">
+                <a16:creationId xmlns:a16="http://schemas.microsoft.com/office/drawing/2014/main" id="{867D627C-ACD2-EECC-8FFC-77DCD1983408}"/>
+              </a:ext>
+            </a:extLst>
+          </p:cNvPr>
+          <p:cNvGrpSpPr/>
+          <p:nvPr/>
+        </p:nvGrpSpPr>
+        <p:grpSpPr>
+          <a:xfrm>
+            <a:off x="427921" y="1182840"/>
+            <a:ext cx="4324255" cy="1828798"/>
+            <a:chOff x="427922" y="1306309"/>
+            <a:chExt cx="4324256" cy="1337792"/>
+          </a:xfrm>
+        </p:grpSpPr>
+        <p:sp>
+          <p:nvSpPr>
+            <p:cNvPr id="14" name="Rectangle: Rounded Corners 13">
+              <a:extLst>
+                <a:ext uri="{FF2B5EF4-FFF2-40B4-BE49-F238E27FC236}">
+                  <a16:creationId xmlns:a16="http://schemas.microsoft.com/office/drawing/2014/main" id="{C2D3829F-C50B-F45B-0A2D-AF180A930A55}"/>
+                </a:ext>
+              </a:extLst>
+            </p:cNvPr>
+            <p:cNvSpPr/>
+            <p:nvPr/>
+          </p:nvSpPr>
+          <p:spPr>
+            <a:xfrm>
+              <a:off x="427922" y="1306309"/>
+              <a:ext cx="4324256" cy="1337792"/>
+            </a:xfrm>
+            <a:prstGeom prst="roundRect">
+              <a:avLst>
+                <a:gd name="adj" fmla="val 7760"/>
+              </a:avLst>
+            </a:prstGeom>
+            <a:solidFill>
+              <a:schemeClr val="bg1">
+                <a:lumMod val="95000"/>
+              </a:schemeClr>
+            </a:solidFill>
+            <a:ln>
+              <a:noFill/>
+            </a:ln>
+          </p:spPr>
+          <p:style>
+            <a:lnRef idx="2">
+              <a:schemeClr val="accent4">
+                <a:shade val="15000"/>
+              </a:schemeClr>
+            </a:lnRef>
+            <a:fillRef idx="1">
+              <a:schemeClr val="accent4"/>
+            </a:fillRef>
+            <a:effectRef idx="0">
+              <a:schemeClr val="accent4"/>
+            </a:effectRef>
+            <a:fontRef idx="minor">
+              <a:schemeClr val="lt1"/>
+            </a:fontRef>
+          </p:style>
+          <p:txBody>
+            <a:bodyPr rtlCol="0" anchor="ctr"/>
+            <a:lstStyle/>
+            <a:p>
+              <a:pPr algn="ctr"/>
+              <a:endParaRPr lang="en-US" sz="1200"/>
+            </a:p>
+          </p:txBody>
+        </p:sp>
+        <p:sp>
+          <p:nvSpPr>
+            <p:cNvPr id="15" name="TextBox 14">
+              <a:extLst>
+                <a:ext uri="{FF2B5EF4-FFF2-40B4-BE49-F238E27FC236}">
+                  <a16:creationId xmlns:a16="http://schemas.microsoft.com/office/drawing/2014/main" id="{170657D9-090C-F612-6817-ACFB78AD5EE9}"/>
+                </a:ext>
+              </a:extLst>
+            </p:cNvPr>
+            <p:cNvSpPr txBox="1"/>
+            <p:nvPr/>
+          </p:nvSpPr>
+          <p:spPr>
+            <a:xfrm>
+              <a:off x="630681" y="1889136"/>
+              <a:ext cx="3846731" cy="429530"/>
+            </a:xfrm>
+            <a:prstGeom prst="rect">
+              <a:avLst/>
+            </a:prstGeom>
+            <a:noFill/>
+          </p:spPr>
+          <p:txBody>
+            <a:bodyPr wrap="square">
+              <a:spAutoFit/>
+            </a:bodyPr>
+            <a:lstStyle/>
+            <a:p>
+              <a:r>
+                <a:rPr lang="en-US" sz="1050"/>
+                <a:t>Nothing on the dashboard uses this yet, but it's reserved for future team-level reporting. Fill in the monday.com user ID where you have it — that's what lets the monday auto-fill assign people automatically when it matches a task.</a:t>
+              </a:r>
+            </a:p>
+          </p:txBody>
+        </p:sp>
+        <p:sp>
+          <p:nvSpPr>
+            <p:cNvPr id="16" name="TextBox 15">
+              <a:extLst>
+                <a:ext uri="{FF2B5EF4-FFF2-40B4-BE49-F238E27FC236}">
+                  <a16:creationId xmlns:a16="http://schemas.microsoft.com/office/drawing/2014/main" id="{A268B337-794F-334A-B639-4B0CCE9B1F20}"/>
+                </a:ext>
+              </a:extLst>
+            </p:cNvPr>
+            <p:cNvSpPr txBox="1"/>
+            <p:nvPr/>
+          </p:nvSpPr>
+          <p:spPr>
+            <a:xfrm>
+              <a:off x="630681" y="1472767"/>
+              <a:ext cx="3846731" cy="337715"/>
+            </a:xfrm>
+            <a:prstGeom prst="rect">
+              <a:avLst/>
+            </a:prstGeom>
+            <a:noFill/>
+          </p:spPr>
+          <p:txBody>
+            <a:bodyPr wrap="square">
+              <a:spAutoFit/>
+            </a:bodyPr>
+            <a:lstStyle/>
+            <a:p>
+              <a:r>
+                <a:rPr lang="en-US" sz="1200" b="1">
+                  <a:solidFill>
+                    <a:srgbClr val="E61E2A"/>
+                  </a:solidFill>
+                </a:rPr>
+                <a:t>People</a:t>
+              </a:r>
+              <a:r>
+                <a:rPr lang="en-US" sz="1200" b="1"/>
+                <a:t> — the roster is already populated, add more as needed. </a:t>
+              </a:r>
+            </a:p>
+          </p:txBody>
+        </p:sp>
+      </p:grpSp>
+      <p:grpSp>
+        <p:nvGrpSpPr>
+          <p:cNvPr id="25" name="Group 24">
+            <a:extLst>
+              <a:ext uri="{FF2B5EF4-FFF2-40B4-BE49-F238E27FC236}">
+                <a16:creationId xmlns:a16="http://schemas.microsoft.com/office/drawing/2014/main" id="{A852B611-254B-C7B3-047E-31A1E6BFE711}"/>
+              </a:ext>
+            </a:extLst>
+          </p:cNvPr>
+          <p:cNvGrpSpPr/>
+          <p:nvPr/>
+        </p:nvGrpSpPr>
+        <p:grpSpPr>
+          <a:xfrm>
+            <a:off x="427922" y="3136803"/>
+            <a:ext cx="4324256" cy="1245260"/>
+            <a:chOff x="427922" y="3037706"/>
+            <a:chExt cx="4324256" cy="1245260"/>
+          </a:xfrm>
+        </p:grpSpPr>
+        <p:sp>
+          <p:nvSpPr>
+            <p:cNvPr id="19" name="Rectangle: Rounded Corners 18">
+              <a:extLst>
+                <a:ext uri="{FF2B5EF4-FFF2-40B4-BE49-F238E27FC236}">
+                  <a16:creationId xmlns:a16="http://schemas.microsoft.com/office/drawing/2014/main" id="{F7AB9D8B-B1C9-D6DC-22C5-0F8149F607CF}"/>
+                </a:ext>
+              </a:extLst>
+            </p:cNvPr>
+            <p:cNvSpPr/>
+            <p:nvPr/>
+          </p:nvSpPr>
+          <p:spPr>
+            <a:xfrm>
+              <a:off x="427922" y="3037706"/>
+              <a:ext cx="4324256" cy="1245260"/>
+            </a:xfrm>
+            <a:prstGeom prst="roundRect">
+              <a:avLst>
+                <a:gd name="adj" fmla="val 7760"/>
+              </a:avLst>
+            </a:prstGeom>
+            <a:solidFill>
+              <a:schemeClr val="bg1">
+                <a:lumMod val="95000"/>
+              </a:schemeClr>
+            </a:solidFill>
+            <a:ln>
+              <a:noFill/>
+            </a:ln>
+          </p:spPr>
+          <p:style>
+            <a:lnRef idx="2">
+              <a:schemeClr val="accent4">
+                <a:shade val="15000"/>
+              </a:schemeClr>
+            </a:lnRef>
+            <a:fillRef idx="1">
+              <a:schemeClr val="accent4"/>
+            </a:fillRef>
+            <a:effectRef idx="0">
+              <a:schemeClr val="accent4"/>
+            </a:effectRef>
+            <a:fontRef idx="minor">
+              <a:schemeClr val="lt1"/>
+            </a:fontRef>
+          </p:style>
+          <p:txBody>
+            <a:bodyPr rtlCol="0" anchor="ctr"/>
+            <a:lstStyle/>
+            <a:p>
+              <a:pPr algn="ctr"/>
+              <a:endParaRPr lang="en-US" sz="1200"/>
+            </a:p>
+          </p:txBody>
+        </p:sp>
+        <p:sp>
+          <p:nvSpPr>
+            <p:cNvPr id="20" name="TextBox 19">
+              <a:extLst>
+                <a:ext uri="{FF2B5EF4-FFF2-40B4-BE49-F238E27FC236}">
+                  <a16:creationId xmlns:a16="http://schemas.microsoft.com/office/drawing/2014/main" id="{993B9323-8156-9747-A705-7B6690F4AEBD}"/>
+                </a:ext>
+              </a:extLst>
+            </p:cNvPr>
+            <p:cNvSpPr txBox="1"/>
+            <p:nvPr/>
+          </p:nvSpPr>
+          <p:spPr>
+            <a:xfrm>
+              <a:off x="630681" y="3580721"/>
+              <a:ext cx="3846731" cy="577081"/>
+            </a:xfrm>
+            <a:prstGeom prst="rect">
+              <a:avLst/>
+            </a:prstGeom>
+            <a:noFill/>
+          </p:spPr>
+          <p:txBody>
+            <a:bodyPr wrap="square">
+              <a:spAutoFit/>
+            </a:bodyPr>
+            <a:lstStyle/>
+            <a:p>
+              <a:r>
+                <a:rPr lang="en-US" sz="1050"/>
+                <a:t>When a size (XS–XL) is picked, the app adds that size's duration to the start date to suggest an end date. The current durations mirror GCMC's existing T-shirt sizing definitions.</a:t>
+              </a:r>
+            </a:p>
+          </p:txBody>
+        </p:sp>
+        <p:sp>
+          <p:nvSpPr>
+            <p:cNvPr id="21" name="TextBox 20">
+              <a:extLst>
+                <a:ext uri="{FF2B5EF4-FFF2-40B4-BE49-F238E27FC236}">
+                  <a16:creationId xmlns:a16="http://schemas.microsoft.com/office/drawing/2014/main" id="{A61C4CF7-B51A-2DAA-CCF8-658929AECC4F}"/>
+                </a:ext>
+              </a:extLst>
+            </p:cNvPr>
+            <p:cNvSpPr txBox="1"/>
+            <p:nvPr/>
+          </p:nvSpPr>
+          <p:spPr>
+            <a:xfrm>
+              <a:off x="630681" y="3226374"/>
+              <a:ext cx="3846731" cy="276999"/>
+            </a:xfrm>
+            <a:prstGeom prst="rect">
+              <a:avLst/>
+            </a:prstGeom>
+            <a:noFill/>
+          </p:spPr>
+          <p:txBody>
+            <a:bodyPr wrap="square">
+              <a:spAutoFit/>
+            </a:bodyPr>
+            <a:lstStyle/>
+            <a:p>
+              <a:r>
+                <a:rPr lang="en-US" sz="1200" b="1">
+                  <a:solidFill>
+                    <a:srgbClr val="E61E2A"/>
+                  </a:solidFill>
+                </a:rPr>
+                <a:t>Task sizes </a:t>
+              </a:r>
+              <a:r>
+                <a:rPr lang="en-US" sz="1200" b="1"/>
+                <a:t>— controls the auto-filled end date. </a:t>
+              </a:r>
+            </a:p>
+          </p:txBody>
+        </p:sp>
+      </p:grpSp>
+    </p:spTree>
+    <p:extLst>
+      <p:ext uri="{BB962C8B-B14F-4D97-AF65-F5344CB8AC3E}">
+        <p14:creationId xmlns:p14="http://schemas.microsoft.com/office/powerpoint/2010/main" val="2401091406"/>
+      </p:ext>
+    </p:extLst>
+  </p:cSld>
+  <p:clrMapOvr>
+    <a:masterClrMapping/>
+  </p:clrMapOvr>
+</p:sld>
+</file>
+
+<file path=ppt/slides/slide17.xml><?xml version="1.0" encoding="utf-8"?>
+<p:sld xmlns:a="http://schemas.openxmlformats.org/drawingml/2006/main" xmlns:r="http://schemas.openxmlformats.org/officeDocument/2006/relationships" xmlns:p="http://schemas.openxmlformats.org/presentationml/2006/main">
+  <p:cSld>
+    <p:spTree>
+      <p:nvGrpSpPr>
+        <p:cNvPr id="1" name="">
+          <a:extLst>
+            <a:ext uri="{FF2B5EF4-FFF2-40B4-BE49-F238E27FC236}">
+              <a16:creationId xmlns:a16="http://schemas.microsoft.com/office/drawing/2014/main" id="{8C6EC879-1B06-8C45-A346-FC759DC41362}"/>
+            </a:ext>
+          </a:extLst>
+        </p:cNvPr>
+        <p:cNvGrpSpPr/>
+        <p:nvPr/>
+      </p:nvGrpSpPr>
+      <p:grpSpPr>
+        <a:xfrm>
+          <a:off x="0" y="0"/>
+          <a:ext cx="0" cy="0"/>
+          <a:chOff x="0" y="0"/>
+          <a:chExt cx="0" cy="0"/>
+        </a:xfrm>
+      </p:grpSpPr>
+      <p:sp>
+        <p:nvSpPr>
+          <p:cNvPr id="22" name="TextBox 21">
+            <a:extLst>
+              <a:ext uri="{FF2B5EF4-FFF2-40B4-BE49-F238E27FC236}">
+                <a16:creationId xmlns:a16="http://schemas.microsoft.com/office/drawing/2014/main" id="{1F8D0F28-EC3D-46D9-C710-18C94B05082D}"/>
+              </a:ext>
+            </a:extLst>
+          </p:cNvPr>
+          <p:cNvSpPr txBox="1"/>
+          <p:nvPr/>
+        </p:nvSpPr>
+        <p:spPr>
+          <a:xfrm>
+            <a:off x="3709398" y="1307868"/>
+            <a:ext cx="3511208" cy="369332"/>
+          </a:xfrm>
+          <a:prstGeom prst="rect">
+            <a:avLst/>
+          </a:prstGeom>
+          <a:noFill/>
+        </p:spPr>
+        <p:txBody>
+          <a:bodyPr vert="horz" wrap="square" lIns="91440" tIns="45720" rIns="91440" bIns="45720" rtlCol="0" anchor="t" anchorCtr="0">
+            <a:spAutoFit/>
+          </a:bodyPr>
+          <a:lstStyle/>
+          <a:p>
+            <a:r>
+              <a:rPr lang="en-US" sz="1800" b="1">
+                <a:solidFill>
+                  <a:srgbClr val="E61E2A"/>
+                </a:solidFill>
+              </a:rPr>
+              <a:t>Add new task</a:t>
+            </a:r>
+            <a:endParaRPr lang="en-US" sz="1800" b="1" dirty="0">
+              <a:solidFill>
+                <a:srgbClr val="E61E2A"/>
+              </a:solidFill>
+            </a:endParaRPr>
+          </a:p>
+        </p:txBody>
+      </p:sp>
+      <p:pic>
+        <p:nvPicPr>
+          <p:cNvPr id="23" name="Picture 22">
+            <a:extLst>
+              <a:ext uri="{FF2B5EF4-FFF2-40B4-BE49-F238E27FC236}">
+                <a16:creationId xmlns:a16="http://schemas.microsoft.com/office/drawing/2014/main" id="{32A645E2-21F8-64B5-6314-82845BF99C26}"/>
+              </a:ext>
+            </a:extLst>
+          </p:cNvPr>
+          <p:cNvPicPr>
+            <a:picLocks noChangeAspect="1"/>
+          </p:cNvPicPr>
+          <p:nvPr/>
+        </p:nvPicPr>
+        <p:blipFill>
+          <a:blip r:embed="rId2"/>
+          <a:stretch>
+            <a:fillRect/>
+          </a:stretch>
+        </p:blipFill>
+        <p:spPr>
+          <a:xfrm>
+            <a:off x="236271" y="169002"/>
+            <a:ext cx="3177648" cy="4708433"/>
+          </a:xfrm>
+          <a:prstGeom prst="rect">
+            <a:avLst/>
+          </a:prstGeom>
+        </p:spPr>
+      </p:pic>
+      <p:sp>
+        <p:nvSpPr>
+          <p:cNvPr id="26" name="TextBox 25">
+            <a:extLst>
+              <a:ext uri="{FF2B5EF4-FFF2-40B4-BE49-F238E27FC236}">
+                <a16:creationId xmlns:a16="http://schemas.microsoft.com/office/drawing/2014/main" id="{3A270F11-04C0-6655-60B2-DC07014DF0E6}"/>
+              </a:ext>
+            </a:extLst>
+          </p:cNvPr>
+          <p:cNvSpPr txBox="1"/>
+          <p:nvPr/>
+        </p:nvSpPr>
+        <p:spPr>
+          <a:xfrm>
+            <a:off x="3749938" y="1899812"/>
+            <a:ext cx="2551766" cy="2923877"/>
+          </a:xfrm>
+          <a:prstGeom prst="rect">
+            <a:avLst/>
+          </a:prstGeom>
+          <a:noFill/>
+        </p:spPr>
+        <p:txBody>
+          <a:bodyPr wrap="square">
+            <a:spAutoFit/>
+          </a:bodyPr>
+          <a:lstStyle/>
+          <a:p>
+            <a:pPr marL="0" marR="0" indent="0" algn="l" rtl="0">
+              <a:buNone/>
+            </a:pPr>
+            <a:r>
+              <a:rPr lang="en-US" sz="800" b="1" i="0">
+                <a:solidFill>
+                  <a:schemeClr val="bg1"/>
+                </a:solidFill>
+                <a:effectLst/>
+                <a:highlight>
+                  <a:srgbClr val="000054"/>
+                </a:highlight>
+                <a:latin typeface="Calibri" panose="020F0502020204030204" pitchFamily="34" charset="0"/>
+                <a:ea typeface="Calibri" panose="020F0502020204030204" pitchFamily="34" charset="0"/>
+                <a:cs typeface="Calibri" panose="020F0502020204030204" pitchFamily="34" charset="0"/>
+              </a:rPr>
+              <a:t>1. Task code &amp; name</a:t>
+            </a:r>
+          </a:p>
+          <a:p>
+            <a:pPr marL="0" marR="0" indent="0" algn="l" rtl="0">
+              <a:buNone/>
+            </a:pPr>
+            <a:r>
+              <a:rPr lang="en-US" sz="800" b="0" i="0">
+                <a:solidFill>
+                  <a:schemeClr val="bg2">
+                    <a:lumMod val="10000"/>
+                  </a:schemeClr>
+                </a:solidFill>
+                <a:effectLst/>
+                <a:latin typeface="Calibri" panose="020F0502020204030204" pitchFamily="34" charset="0"/>
+                <a:ea typeface="Calibri" panose="020F0502020204030204" pitchFamily="34" charset="0"/>
+                <a:cs typeface="Calibri" panose="020F0502020204030204" pitchFamily="34" charset="0"/>
+              </a:rPr>
+              <a:t>Paste the exact task name from monday.com, code included — the app detects the code and formats it automatically. If that code's already registered, you'll be prompted to edit the existing task instead of creating a duplicate. Codes are optional; they're a VN Design convention only.</a:t>
+            </a:r>
+          </a:p>
+          <a:p>
+            <a:pPr marL="0" marR="0" indent="0" algn="l" rtl="0">
+              <a:buNone/>
+            </a:pPr>
+            <a:endParaRPr lang="en-US" sz="800" b="0" i="0">
+              <a:solidFill>
+                <a:srgbClr val="A6A59B"/>
+              </a:solidFill>
+              <a:effectLst/>
+              <a:latin typeface="Calibri" panose="020F0502020204030204" pitchFamily="34" charset="0"/>
+              <a:ea typeface="Calibri" panose="020F0502020204030204" pitchFamily="34" charset="0"/>
+              <a:cs typeface="Calibri" panose="020F0502020204030204" pitchFamily="34" charset="0"/>
+            </a:endParaRPr>
+          </a:p>
+          <a:p>
+            <a:pPr marL="0" marR="0" indent="0" algn="l" rtl="0">
+              <a:buNone/>
+            </a:pPr>
+            <a:r>
+              <a:rPr lang="en-US" sz="800" b="1" i="0">
+                <a:solidFill>
+                  <a:schemeClr val="bg1"/>
+                </a:solidFill>
+                <a:effectLst/>
+                <a:highlight>
+                  <a:srgbClr val="000054"/>
+                </a:highlight>
+                <a:latin typeface="Calibri" panose="020F0502020204030204" pitchFamily="34" charset="0"/>
+                <a:ea typeface="Calibri" panose="020F0502020204030204" pitchFamily="34" charset="0"/>
+                <a:cs typeface="Calibri" panose="020F0502020204030204" pitchFamily="34" charset="0"/>
+              </a:rPr>
+              <a:t>2. monday.com auto-fill</a:t>
+            </a:r>
+          </a:p>
+          <a:p>
+            <a:pPr marL="0" marR="0" indent="0" algn="l" rtl="0">
+              <a:buNone/>
+            </a:pPr>
+            <a:r>
+              <a:rPr lang="en-US" sz="800" b="0" i="0">
+                <a:solidFill>
+                  <a:schemeClr val="bg2">
+                    <a:lumMod val="10000"/>
+                  </a:schemeClr>
+                </a:solidFill>
+                <a:effectLst/>
+                <a:latin typeface="Calibri" panose="020F0502020204030204" pitchFamily="34" charset="0"/>
+                <a:ea typeface="Calibri" panose="020F0502020204030204" pitchFamily="34" charset="0"/>
+                <a:cs typeface="Calibri" panose="020F0502020204030204" pitchFamily="34" charset="0"/>
+              </a:rPr>
+              <a:t>(2025-26 only). Click the button to search monday.com. Pick a result from the dropdown and it auto-fills:</a:t>
+            </a:r>
+          </a:p>
+          <a:p>
+            <a:pPr marL="0" marR="0" indent="0" algn="l" rtl="0">
+              <a:buNone/>
+            </a:pPr>
+            <a:endParaRPr lang="en-US" sz="800" b="0" i="0">
+              <a:solidFill>
+                <a:schemeClr val="bg2">
+                  <a:lumMod val="10000"/>
+                </a:schemeClr>
+              </a:solidFill>
+              <a:effectLst/>
+              <a:latin typeface="Calibri" panose="020F0502020204030204" pitchFamily="34" charset="0"/>
+              <a:ea typeface="Calibri" panose="020F0502020204030204" pitchFamily="34" charset="0"/>
+              <a:cs typeface="Calibri" panose="020F0502020204030204" pitchFamily="34" charset="0"/>
+            </a:endParaRPr>
+          </a:p>
+          <a:p>
+            <a:pPr marL="0" marR="0" indent="0" algn="l" rtl="0">
+              <a:buFont typeface="Arial" panose="020B0604020202020204" pitchFamily="34" charset="0"/>
+              <a:buChar char="•"/>
+            </a:pPr>
+            <a:r>
+              <a:rPr lang="en-US" sz="800" b="1" i="0">
+                <a:solidFill>
+                  <a:schemeClr val="bg2">
+                    <a:lumMod val="10000"/>
+                  </a:schemeClr>
+                </a:solidFill>
+                <a:effectLst/>
+                <a:latin typeface="Calibri" panose="020F0502020204030204" pitchFamily="34" charset="0"/>
+                <a:ea typeface="Calibri" panose="020F0502020204030204" pitchFamily="34" charset="0"/>
+                <a:cs typeface="Calibri" panose="020F0502020204030204" pitchFamily="34" charset="0"/>
+              </a:rPr>
+              <a:t>T-shirt size</a:t>
+            </a:r>
+          </a:p>
+          <a:p>
+            <a:pPr marL="0" marR="0" indent="0" algn="l" rtl="0">
+              <a:buFont typeface="Arial" panose="020B0604020202020204" pitchFamily="34" charset="0"/>
+              <a:buChar char="•"/>
+            </a:pPr>
+            <a:r>
+              <a:rPr lang="en-US" sz="800" b="1" i="0">
+                <a:solidFill>
+                  <a:schemeClr val="bg2">
+                    <a:lumMod val="10000"/>
+                  </a:schemeClr>
+                </a:solidFill>
+                <a:effectLst/>
+                <a:latin typeface="Calibri" panose="020F0502020204030204" pitchFamily="34" charset="0"/>
+                <a:ea typeface="Calibri" panose="020F0502020204030204" pitchFamily="34" charset="0"/>
+                <a:cs typeface="Calibri" panose="020F0502020204030204" pitchFamily="34" charset="0"/>
+              </a:rPr>
+              <a:t>Person in charge</a:t>
+            </a:r>
+          </a:p>
+          <a:p>
+            <a:pPr marL="0" marR="0" indent="0" algn="l" rtl="0">
+              <a:buFont typeface="Arial" panose="020B0604020202020204" pitchFamily="34" charset="0"/>
+              <a:buChar char="•"/>
+            </a:pPr>
+            <a:r>
+              <a:rPr lang="en-US" sz="800" b="1" i="0">
+                <a:solidFill>
+                  <a:schemeClr val="bg2">
+                    <a:lumMod val="10000"/>
+                  </a:schemeClr>
+                </a:solidFill>
+                <a:effectLst/>
+                <a:latin typeface="Calibri" panose="020F0502020204030204" pitchFamily="34" charset="0"/>
+                <a:ea typeface="Calibri" panose="020F0502020204030204" pitchFamily="34" charset="0"/>
+                <a:cs typeface="Calibri" panose="020F0502020204030204" pitchFamily="34" charset="0"/>
+              </a:rPr>
+              <a:t>Start and end dates (not always available)</a:t>
+            </a:r>
+          </a:p>
+          <a:p>
+            <a:pPr marL="0" marR="0" indent="0" algn="l" rtl="0">
+              <a:buFont typeface="Arial" panose="020B0604020202020204" pitchFamily="34" charset="0"/>
+              <a:buChar char="•"/>
+            </a:pPr>
+            <a:endParaRPr lang="en-US" sz="800" b="0" i="0">
+              <a:solidFill>
+                <a:srgbClr val="A6A59B"/>
+              </a:solidFill>
+              <a:effectLst/>
+              <a:latin typeface="Calibri" panose="020F0502020204030204" pitchFamily="34" charset="0"/>
+              <a:ea typeface="Calibri" panose="020F0502020204030204" pitchFamily="34" charset="0"/>
+              <a:cs typeface="Calibri" panose="020F0502020204030204" pitchFamily="34" charset="0"/>
+            </a:endParaRPr>
+          </a:p>
+          <a:p>
+            <a:pPr marL="0" marR="0" indent="0" algn="l" rtl="0">
+              <a:buNone/>
+            </a:pPr>
+            <a:r>
+              <a:rPr lang="en-US" sz="800" b="1" i="0">
+                <a:solidFill>
+                  <a:schemeClr val="bg1"/>
+                </a:solidFill>
+                <a:effectLst/>
+                <a:highlight>
+                  <a:srgbClr val="000054"/>
+                </a:highlight>
+                <a:latin typeface="Calibri" panose="020F0502020204030204" pitchFamily="34" charset="0"/>
+                <a:ea typeface="Calibri" panose="020F0502020204030204" pitchFamily="34" charset="0"/>
+                <a:cs typeface="Calibri" panose="020F0502020204030204" pitchFamily="34" charset="0"/>
+              </a:rPr>
+              <a:t>3. Squad &amp; campaign</a:t>
+            </a:r>
+          </a:p>
+          <a:p>
+            <a:pPr marL="0" marR="0" indent="0" algn="l" rtl="0">
+              <a:buNone/>
+            </a:pPr>
+            <a:r>
+              <a:rPr lang="en-US" sz="800" b="0" i="0">
+                <a:solidFill>
+                  <a:schemeClr val="bg2">
+                    <a:lumMod val="10000"/>
+                  </a:schemeClr>
+                </a:solidFill>
+                <a:effectLst/>
+                <a:latin typeface="Calibri" panose="020F0502020204030204" pitchFamily="34" charset="0"/>
+                <a:ea typeface="Calibri" panose="020F0502020204030204" pitchFamily="34" charset="0"/>
+                <a:cs typeface="Calibri" panose="020F0502020204030204" pitchFamily="34" charset="0"/>
+              </a:rPr>
+              <a:t>Fill these in — certain keywords in the task name can trigger auto-fill.</a:t>
+            </a:r>
+          </a:p>
+          <a:p>
+            <a:pPr marL="0" marR="0" indent="0" algn="l" rtl="0">
+              <a:buNone/>
+            </a:pPr>
+            <a:endParaRPr lang="en-US" sz="800" b="0" i="0">
+              <a:solidFill>
+                <a:srgbClr val="A6A59B"/>
+              </a:solidFill>
+              <a:effectLst/>
+              <a:latin typeface="Calibri" panose="020F0502020204030204" pitchFamily="34" charset="0"/>
+              <a:ea typeface="Calibri" panose="020F0502020204030204" pitchFamily="34" charset="0"/>
+              <a:cs typeface="Calibri" panose="020F0502020204030204" pitchFamily="34" charset="0"/>
+            </a:endParaRPr>
+          </a:p>
+          <a:p>
+            <a:pPr marL="0" marR="0" indent="0" algn="l" rtl="0">
+              <a:buNone/>
+            </a:pPr>
+            <a:r>
+              <a:rPr lang="en-US" sz="800" b="1" i="0">
+                <a:solidFill>
+                  <a:schemeClr val="bg1"/>
+                </a:solidFill>
+                <a:effectLst/>
+                <a:highlight>
+                  <a:srgbClr val="000054"/>
+                </a:highlight>
+                <a:latin typeface="Calibri" panose="020F0502020204030204" pitchFamily="34" charset="0"/>
+                <a:ea typeface="Calibri" panose="020F0502020204030204" pitchFamily="34" charset="0"/>
+                <a:cs typeface="Calibri" panose="020F0502020204030204" pitchFamily="34" charset="0"/>
+              </a:rPr>
+              <a:t>4. Task size</a:t>
+            </a:r>
+          </a:p>
+          <a:p>
+            <a:pPr marL="0" marR="0" indent="0" algn="l" rtl="0">
+              <a:buNone/>
+            </a:pPr>
+            <a:r>
+              <a:rPr lang="en-US" sz="800" b="0" i="0">
+                <a:solidFill>
+                  <a:schemeClr val="bg2">
+                    <a:lumMod val="10000"/>
+                  </a:schemeClr>
+                </a:solidFill>
+                <a:effectLst/>
+                <a:latin typeface="Calibri" panose="020F0502020204030204" pitchFamily="34" charset="0"/>
+                <a:ea typeface="Calibri" panose="020F0502020204030204" pitchFamily="34" charset="0"/>
+                <a:cs typeface="Calibri" panose="020F0502020204030204" pitchFamily="34" charset="0"/>
+              </a:rPr>
+              <a:t>Check it if auto-fill didn't already set it.</a:t>
+            </a:r>
+          </a:p>
+          <a:p>
+            <a:pPr marL="0" marR="0" indent="0" algn="l" rtl="0">
+              <a:buNone/>
+            </a:pPr>
+            <a:endParaRPr lang="en-US" sz="800" b="0" i="0">
+              <a:solidFill>
+                <a:srgbClr val="A6A59B"/>
+              </a:solidFill>
+              <a:effectLst/>
+              <a:latin typeface="Calibri" panose="020F0502020204030204" pitchFamily="34" charset="0"/>
+              <a:ea typeface="Calibri" panose="020F0502020204030204" pitchFamily="34" charset="0"/>
+              <a:cs typeface="Calibri" panose="020F0502020204030204" pitchFamily="34" charset="0"/>
+            </a:endParaRPr>
+          </a:p>
+        </p:txBody>
+      </p:sp>
+      <p:sp>
+        <p:nvSpPr>
+          <p:cNvPr id="28" name="TextBox 27">
+            <a:extLst>
+              <a:ext uri="{FF2B5EF4-FFF2-40B4-BE49-F238E27FC236}">
+                <a16:creationId xmlns:a16="http://schemas.microsoft.com/office/drawing/2014/main" id="{2246D5E8-1DE6-B00B-FF73-362EFD228ECB}"/>
+              </a:ext>
+            </a:extLst>
+          </p:cNvPr>
+          <p:cNvSpPr txBox="1"/>
+          <p:nvPr/>
+        </p:nvSpPr>
+        <p:spPr>
+          <a:xfrm>
+            <a:off x="6551106" y="639416"/>
+            <a:ext cx="2356623" cy="3785652"/>
+          </a:xfrm>
+          <a:prstGeom prst="rect">
+            <a:avLst/>
+          </a:prstGeom>
+          <a:noFill/>
+        </p:spPr>
+        <p:txBody>
+          <a:bodyPr wrap="square">
+            <a:spAutoFit/>
+          </a:bodyPr>
+          <a:lstStyle/>
+          <a:p>
+            <a:endParaRPr lang="en-US" sz="800">
+              <a:solidFill>
+                <a:srgbClr val="A6A59B"/>
+              </a:solidFill>
+              <a:highlight>
+                <a:srgbClr val="000054"/>
+              </a:highlight>
+              <a:latin typeface="Calibri" panose="020F0502020204030204" pitchFamily="34" charset="0"/>
+              <a:ea typeface="Calibri" panose="020F0502020204030204" pitchFamily="34" charset="0"/>
+              <a:cs typeface="Calibri" panose="020F0502020204030204" pitchFamily="34" charset="0"/>
+            </a:endParaRPr>
+          </a:p>
+          <a:p>
+            <a:r>
+              <a:rPr lang="en-US" sz="800" b="1">
+                <a:solidFill>
+                  <a:schemeClr val="bg1"/>
+                </a:solidFill>
+                <a:highlight>
+                  <a:srgbClr val="000054"/>
+                </a:highlight>
+                <a:latin typeface="Calibri" panose="020F0502020204030204" pitchFamily="34" charset="0"/>
+                <a:ea typeface="Calibri" panose="020F0502020204030204" pitchFamily="34" charset="0"/>
+                <a:cs typeface="Calibri" panose="020F0502020204030204" pitchFamily="34" charset="0"/>
+              </a:rPr>
+              <a:t>5. Function tabs</a:t>
+            </a:r>
+          </a:p>
+          <a:p>
+            <a:r>
+              <a:rPr lang="en-US" sz="800">
+                <a:solidFill>
+                  <a:schemeClr val="bg2">
+                    <a:lumMod val="10000"/>
+                  </a:schemeClr>
+                </a:solidFill>
+                <a:latin typeface="Calibri" panose="020F0502020204030204" pitchFamily="34" charset="0"/>
+                <a:ea typeface="Calibri" panose="020F0502020204030204" pitchFamily="34" charset="0"/>
+                <a:cs typeface="Calibri" panose="020F0502020204030204" pitchFamily="34" charset="0"/>
+              </a:rPr>
+              <a:t>Enable whichever functions are contributing — each gets its own tab for work types and asset counts, and more than one can log against the same task. Add a new type if it's genuinely missing, but think twice first. Big campaigns can have all four functions enabled at once.</a:t>
+            </a:r>
+          </a:p>
+          <a:p>
+            <a:br>
+              <a:rPr lang="en-US" sz="800" i="1">
+                <a:solidFill>
+                  <a:schemeClr val="bg2">
+                    <a:lumMod val="10000"/>
+                  </a:schemeClr>
+                </a:solidFill>
+                <a:latin typeface="Calibri" panose="020F0502020204030204" pitchFamily="34" charset="0"/>
+                <a:ea typeface="Calibri" panose="020F0502020204030204" pitchFamily="34" charset="0"/>
+                <a:cs typeface="Calibri" panose="020F0502020204030204" pitchFamily="34" charset="0"/>
+              </a:rPr>
+            </a:br>
+            <a:r>
+              <a:rPr lang="en-US" sz="800" i="1">
+                <a:solidFill>
+                  <a:schemeClr val="bg2">
+                    <a:lumMod val="10000"/>
+                  </a:schemeClr>
+                </a:solidFill>
+                <a:latin typeface="Calibri" panose="020F0502020204030204" pitchFamily="34" charset="0"/>
+                <a:ea typeface="Calibri" panose="020F0502020204030204" pitchFamily="34" charset="0"/>
+                <a:cs typeface="Calibri" panose="020F0502020204030204" pitchFamily="34" charset="0"/>
+              </a:rPr>
+              <a:t>Function-specific timeline: leave this off for now — the dashboard doesn't use it yet. Timeline stays task-level (one shared start/end for the whole task).</a:t>
+            </a:r>
+          </a:p>
+          <a:p>
+            <a:pPr marL="0" marR="0" indent="0" rtl="0">
+              <a:buNone/>
+            </a:pPr>
+            <a:endParaRPr lang="en-US" sz="800" b="1" i="0">
+              <a:solidFill>
+                <a:schemeClr val="bg1"/>
+              </a:solidFill>
+              <a:effectLst/>
+              <a:highlight>
+                <a:srgbClr val="000054"/>
+              </a:highlight>
+              <a:latin typeface="Calibri" panose="020F0502020204030204" pitchFamily="34" charset="0"/>
+              <a:ea typeface="Calibri" panose="020F0502020204030204" pitchFamily="34" charset="0"/>
+              <a:cs typeface="Calibri" panose="020F0502020204030204" pitchFamily="34" charset="0"/>
+            </a:endParaRPr>
+          </a:p>
+          <a:p>
+            <a:pPr marL="0" marR="0" indent="0" rtl="0">
+              <a:buNone/>
+            </a:pPr>
+            <a:r>
+              <a:rPr lang="en-US" sz="800" b="1" i="0">
+                <a:solidFill>
+                  <a:schemeClr val="bg1"/>
+                </a:solidFill>
+                <a:effectLst/>
+                <a:highlight>
+                  <a:srgbClr val="000054"/>
+                </a:highlight>
+                <a:latin typeface="Calibri" panose="020F0502020204030204" pitchFamily="34" charset="0"/>
+                <a:ea typeface="Calibri" panose="020F0502020204030204" pitchFamily="34" charset="0"/>
+                <a:cs typeface="Calibri" panose="020F0502020204030204" pitchFamily="34" charset="0"/>
+              </a:rPr>
+              <a:t>6. Person in charge</a:t>
+            </a:r>
+          </a:p>
+          <a:p>
+            <a:pPr marL="0" marR="0" indent="0" rtl="0">
+              <a:buNone/>
+            </a:pPr>
+            <a:r>
+              <a:rPr lang="en-US" sz="800" b="0" i="0">
+                <a:solidFill>
+                  <a:schemeClr val="bg2">
+                    <a:lumMod val="10000"/>
+                  </a:schemeClr>
+                </a:solidFill>
+                <a:effectLst/>
+                <a:latin typeface="Calibri" panose="020F0502020204030204" pitchFamily="34" charset="0"/>
+                <a:ea typeface="Calibri" panose="020F0502020204030204" pitchFamily="34" charset="0"/>
+                <a:cs typeface="Calibri" panose="020F0502020204030204" pitchFamily="34" charset="0"/>
+              </a:rPr>
+              <a:t>Check and add as needed — auto-fills from monday.com if that person's name and monday ID are set up in Settings.</a:t>
+            </a:r>
+          </a:p>
+          <a:p>
+            <a:pPr marL="0" marR="0" indent="0" rtl="0">
+              <a:buNone/>
+            </a:pPr>
+            <a:endParaRPr lang="en-US" sz="800" b="0" i="0">
+              <a:solidFill>
+                <a:srgbClr val="A6A59B"/>
+              </a:solidFill>
+              <a:effectLst/>
+              <a:latin typeface="Calibri" panose="020F0502020204030204" pitchFamily="34" charset="0"/>
+              <a:ea typeface="Calibri" panose="020F0502020204030204" pitchFamily="34" charset="0"/>
+              <a:cs typeface="Calibri" panose="020F0502020204030204" pitchFamily="34" charset="0"/>
+            </a:endParaRPr>
+          </a:p>
+          <a:p>
+            <a:pPr marL="0" marR="0" indent="0" rtl="0">
+              <a:buNone/>
+            </a:pPr>
+            <a:r>
+              <a:rPr lang="en-US" sz="800" b="1" i="0">
+                <a:solidFill>
+                  <a:schemeClr val="bg1"/>
+                </a:solidFill>
+                <a:effectLst/>
+                <a:highlight>
+                  <a:srgbClr val="000054"/>
+                </a:highlight>
+                <a:latin typeface="Calibri" panose="020F0502020204030204" pitchFamily="34" charset="0"/>
+                <a:ea typeface="Calibri" panose="020F0502020204030204" pitchFamily="34" charset="0"/>
+                <a:cs typeface="Calibri" panose="020F0502020204030204" pitchFamily="34" charset="0"/>
+              </a:rPr>
+              <a:t>7. Start / end dates &amp; half of year</a:t>
+            </a:r>
+          </a:p>
+          <a:p>
+            <a:pPr marL="0" marR="0" indent="0" rtl="0">
+              <a:buNone/>
+            </a:pPr>
+            <a:r>
+              <a:rPr lang="en-US" sz="800" b="0" i="0">
+                <a:solidFill>
+                  <a:schemeClr val="bg2">
+                    <a:lumMod val="10000"/>
+                  </a:schemeClr>
+                </a:solidFill>
+                <a:effectLst/>
+                <a:latin typeface="Calibri" panose="020F0502020204030204" pitchFamily="34" charset="0"/>
+                <a:ea typeface="Calibri" panose="020F0502020204030204" pitchFamily="34" charset="0"/>
+                <a:cs typeface="Calibri" panose="020F0502020204030204" pitchFamily="34" charset="0"/>
+              </a:rPr>
+              <a:t>Start date is auto-filled from a valid code or monday's Timeline column.</a:t>
+            </a:r>
+          </a:p>
+          <a:p>
+            <a:pPr marL="0" marR="0" indent="0" rtl="0">
+              <a:buNone/>
+            </a:pPr>
+            <a:r>
+              <a:rPr lang="en-US" sz="800" b="0" i="0">
+                <a:solidFill>
+                  <a:schemeClr val="bg2">
+                    <a:lumMod val="10000"/>
+                  </a:schemeClr>
+                </a:solidFill>
+                <a:effectLst/>
+                <a:latin typeface="Calibri" panose="020F0502020204030204" pitchFamily="34" charset="0"/>
+                <a:ea typeface="Calibri" panose="020F0502020204030204" pitchFamily="34" charset="0"/>
+                <a:cs typeface="Calibri" panose="020F0502020204030204" pitchFamily="34" charset="0"/>
+              </a:rPr>
+              <a:t>End date is auto-filled from </a:t>
+            </a:r>
+          </a:p>
+          <a:p>
+            <a:pPr marL="0" marR="0" indent="0" rtl="0">
+              <a:buNone/>
+            </a:pPr>
+            <a:r>
+              <a:rPr lang="en-US" sz="800">
+                <a:solidFill>
+                  <a:schemeClr val="bg2">
+                    <a:lumMod val="10000"/>
+                  </a:schemeClr>
+                </a:solidFill>
+                <a:latin typeface="Calibri" panose="020F0502020204030204" pitchFamily="34" charset="0"/>
+                <a:ea typeface="Calibri" panose="020F0502020204030204" pitchFamily="34" charset="0"/>
+                <a:cs typeface="Calibri" panose="020F0502020204030204" pitchFamily="34" charset="0"/>
+              </a:rPr>
+              <a:t>T </a:t>
+            </a:r>
+            <a:r>
+              <a:rPr lang="en-US" sz="800" b="0" i="0">
+                <a:solidFill>
+                  <a:schemeClr val="bg2">
+                    <a:lumMod val="10000"/>
+                  </a:schemeClr>
+                </a:solidFill>
+                <a:effectLst/>
+                <a:latin typeface="Calibri" panose="020F0502020204030204" pitchFamily="34" charset="0"/>
+                <a:ea typeface="Calibri" panose="020F0502020204030204" pitchFamily="34" charset="0"/>
+                <a:cs typeface="Calibri" panose="020F0502020204030204" pitchFamily="34" charset="0"/>
+              </a:rPr>
+              <a:t>shirt size (or from monday, if available) — override either manually if needed. Half of year</a:t>
+            </a:r>
+          </a:p>
+          <a:p>
+            <a:pPr marL="0" marR="0" indent="0" rtl="0">
+              <a:buNone/>
+            </a:pPr>
+            <a:r>
+              <a:rPr lang="en-US" sz="800" b="0" i="0">
+                <a:solidFill>
+                  <a:schemeClr val="bg2">
+                    <a:lumMod val="10000"/>
+                  </a:schemeClr>
+                </a:solidFill>
+                <a:effectLst/>
+                <a:latin typeface="Calibri" panose="020F0502020204030204" pitchFamily="34" charset="0"/>
+                <a:ea typeface="Calibri" panose="020F0502020204030204" pitchFamily="34" charset="0"/>
+                <a:cs typeface="Calibri" panose="020F0502020204030204" pitchFamily="34" charset="0"/>
+              </a:rPr>
+              <a:t> auto-fills too, based on the end date.</a:t>
+            </a:r>
+          </a:p>
+          <a:p>
+            <a:pPr marL="0" marR="0" indent="0" rtl="0">
+              <a:buNone/>
+            </a:pPr>
+            <a:endParaRPr lang="en-US" sz="800" b="0" i="0">
+              <a:solidFill>
+                <a:srgbClr val="A6A59B"/>
+              </a:solidFill>
+              <a:effectLst/>
+              <a:latin typeface="Calibri" panose="020F0502020204030204" pitchFamily="34" charset="0"/>
+              <a:ea typeface="Calibri" panose="020F0502020204030204" pitchFamily="34" charset="0"/>
+              <a:cs typeface="Calibri" panose="020F0502020204030204" pitchFamily="34" charset="0"/>
+            </a:endParaRPr>
+          </a:p>
+          <a:p>
+            <a:pPr marL="0" marR="0" indent="0" rtl="0">
+              <a:buNone/>
+            </a:pPr>
+            <a:r>
+              <a:rPr lang="en-US" sz="800" b="1" i="0">
+                <a:solidFill>
+                  <a:schemeClr val="bg1"/>
+                </a:solidFill>
+                <a:effectLst/>
+                <a:highlight>
+                  <a:srgbClr val="000054"/>
+                </a:highlight>
+                <a:latin typeface="Calibri" panose="020F0502020204030204" pitchFamily="34" charset="0"/>
+                <a:ea typeface="Calibri" panose="020F0502020204030204" pitchFamily="34" charset="0"/>
+                <a:cs typeface="Calibri" panose="020F0502020204030204" pitchFamily="34" charset="0"/>
+              </a:rPr>
+              <a:t>8. Register</a:t>
+            </a:r>
+          </a:p>
+          <a:p>
+            <a:pPr marL="0" marR="0" indent="0" rtl="0">
+              <a:buNone/>
+            </a:pPr>
+            <a:r>
+              <a:rPr lang="en-US" sz="800" b="0" i="0">
+                <a:solidFill>
+                  <a:schemeClr val="bg2">
+                    <a:lumMod val="10000"/>
+                  </a:schemeClr>
+                </a:solidFill>
+                <a:effectLst/>
+                <a:latin typeface="Calibri" panose="020F0502020204030204" pitchFamily="34" charset="0"/>
+                <a:ea typeface="Calibri" panose="020F0502020204030204" pitchFamily="34" charset="0"/>
+                <a:cs typeface="Calibri" panose="020F0502020204030204" pitchFamily="34" charset="0"/>
+              </a:rPr>
+              <a:t>Once required fields are filled, click Register task — it saves straight to the database and the dashboard updates live, no refresh needed.</a:t>
+            </a:r>
+          </a:p>
+        </p:txBody>
+      </p:sp>
+      <p:cxnSp>
+        <p:nvCxnSpPr>
+          <p:cNvPr id="30" name="Straight Connector 29">
+            <a:extLst>
+              <a:ext uri="{FF2B5EF4-FFF2-40B4-BE49-F238E27FC236}">
+                <a16:creationId xmlns:a16="http://schemas.microsoft.com/office/drawing/2014/main" id="{9532553C-D4F2-ABA5-B23E-13C43311C8E9}"/>
+              </a:ext>
+            </a:extLst>
+          </p:cNvPr>
+          <p:cNvCxnSpPr/>
+          <p:nvPr/>
+        </p:nvCxnSpPr>
+        <p:spPr>
+          <a:xfrm>
+            <a:off x="6396297" y="744782"/>
+            <a:ext cx="0" cy="4086330"/>
+          </a:xfrm>
+          <a:prstGeom prst="line">
+            <a:avLst/>
+          </a:prstGeom>
+        </p:spPr>
+        <p:style>
+          <a:lnRef idx="1">
+            <a:schemeClr val="accent4"/>
+          </a:lnRef>
+          <a:fillRef idx="0">
+            <a:schemeClr val="accent4"/>
+          </a:fillRef>
+          <a:effectRef idx="0">
+            <a:schemeClr val="accent4"/>
+          </a:effectRef>
+          <a:fontRef idx="minor">
+            <a:schemeClr val="tx1"/>
+          </a:fontRef>
+        </p:style>
+      </p:cxnSp>
+      <p:pic>
+        <p:nvPicPr>
+          <p:cNvPr id="32" name="Picture 31">
+            <a:extLst>
+              <a:ext uri="{FF2B5EF4-FFF2-40B4-BE49-F238E27FC236}">
+                <a16:creationId xmlns:a16="http://schemas.microsoft.com/office/drawing/2014/main" id="{C003945C-F2E3-4107-165C-F028FBC38FDC}"/>
+              </a:ext>
+            </a:extLst>
+          </p:cNvPr>
+          <p:cNvPicPr>
+            <a:picLocks noChangeAspect="1"/>
+          </p:cNvPicPr>
+          <p:nvPr/>
+        </p:nvPicPr>
+        <p:blipFill>
+          <a:blip r:embed="rId3"/>
+          <a:stretch>
+            <a:fillRect/>
+          </a:stretch>
+        </p:blipFill>
+        <p:spPr>
+          <a:xfrm>
+            <a:off x="3803189" y="682922"/>
+            <a:ext cx="573672" cy="598614"/>
+          </a:xfrm>
+          <a:prstGeom prst="rect">
+            <a:avLst/>
+          </a:prstGeom>
+        </p:spPr>
+      </p:pic>
+      <p:pic>
+        <p:nvPicPr>
+          <p:cNvPr id="34" name="Picture 33">
+            <a:extLst>
+              <a:ext uri="{FF2B5EF4-FFF2-40B4-BE49-F238E27FC236}">
+                <a16:creationId xmlns:a16="http://schemas.microsoft.com/office/drawing/2014/main" id="{65E411B9-7A32-0ED7-5483-EC9FF2F73D27}"/>
+              </a:ext>
+            </a:extLst>
+          </p:cNvPr>
+          <p:cNvPicPr>
+            <a:picLocks noChangeAspect="1"/>
+          </p:cNvPicPr>
+          <p:nvPr/>
+        </p:nvPicPr>
+        <p:blipFill>
+          <a:blip r:embed="rId4"/>
+          <a:stretch>
+            <a:fillRect/>
+          </a:stretch>
+        </p:blipFill>
+        <p:spPr>
+          <a:xfrm>
+            <a:off x="4881652" y="2894827"/>
+            <a:ext cx="408485" cy="151873"/>
+          </a:xfrm>
+          <a:prstGeom prst="rect">
+            <a:avLst/>
+          </a:prstGeom>
+        </p:spPr>
+      </p:pic>
+    </p:spTree>
+    <p:extLst>
+      <p:ext uri="{BB962C8B-B14F-4D97-AF65-F5344CB8AC3E}">
+        <p14:creationId xmlns:p14="http://schemas.microsoft.com/office/powerpoint/2010/main" val="663834425"/>
+      </p:ext>
+    </p:extLst>
+  </p:cSld>
+  <p:clrMapOvr>
+    <a:masterClrMapping/>
+  </p:clrMapOvr>
+</p:sld>
+</file>
+
+<file path=ppt/slides/slide18.xml><?xml version="1.0" encoding="utf-8"?>
+<p:sld xmlns:a="http://schemas.openxmlformats.org/drawingml/2006/main" xmlns:r="http://schemas.openxmlformats.org/officeDocument/2006/relationships" xmlns:p="http://schemas.openxmlformats.org/presentationml/2006/main">
+  <p:cSld>
+    <p:spTree>
+      <p:nvGrpSpPr>
+        <p:cNvPr id="1" name="">
+          <a:extLst>
+            <a:ext uri="{FF2B5EF4-FFF2-40B4-BE49-F238E27FC236}">
+              <a16:creationId xmlns:a16="http://schemas.microsoft.com/office/drawing/2014/main" id="{A8A9A8C4-287F-EBCB-9B2C-1D1419E225E7}"/>
+            </a:ext>
+          </a:extLst>
+        </p:cNvPr>
+        <p:cNvGrpSpPr/>
+        <p:nvPr/>
+      </p:nvGrpSpPr>
+      <p:grpSpPr>
+        <a:xfrm>
+          <a:off x="0" y="0"/>
+          <a:ext cx="0" cy="0"/>
+          <a:chOff x="0" y="0"/>
+          <a:chExt cx="0" cy="0"/>
+        </a:xfrm>
+      </p:grpSpPr>
+      <p:sp>
+        <p:nvSpPr>
+          <p:cNvPr id="11" name="TextBox 10">
+            <a:extLst>
+              <a:ext uri="{FF2B5EF4-FFF2-40B4-BE49-F238E27FC236}">
+                <a16:creationId xmlns:a16="http://schemas.microsoft.com/office/drawing/2014/main" id="{75D7C5C1-4A28-E22B-5985-0B9BFF52238C}"/>
+              </a:ext>
+            </a:extLst>
+          </p:cNvPr>
+          <p:cNvSpPr txBox="1"/>
+          <p:nvPr/>
+        </p:nvSpPr>
+        <p:spPr>
+          <a:xfrm>
+            <a:off x="3412576" y="3080814"/>
+            <a:ext cx="2361883" cy="1615827"/>
+          </a:xfrm>
+          <a:prstGeom prst="rect">
+            <a:avLst/>
+          </a:prstGeom>
+          <a:noFill/>
+        </p:spPr>
+        <p:txBody>
+          <a:bodyPr wrap="square">
+            <a:spAutoFit/>
+          </a:bodyPr>
+          <a:lstStyle/>
+          <a:p>
+            <a:r>
+              <a:rPr lang="en-US" sz="900">
+                <a:latin typeface="Calibri" panose="020F0502020204030204" pitchFamily="34" charset="0"/>
+                <a:ea typeface="Calibri" panose="020F0502020204030204" pitchFamily="34" charset="0"/>
+                <a:cs typeface="Calibri" panose="020F0502020204030204" pitchFamily="34" charset="0"/>
+              </a:rPr>
+              <a:t>Export your team's annual task list from monday.com and use it as your migration tracker — one row per task, checked off as it's added to the app. </a:t>
+            </a:r>
+          </a:p>
+          <a:p>
+            <a:endParaRPr lang="en-US" sz="900">
+              <a:latin typeface="Calibri" panose="020F0502020204030204" pitchFamily="34" charset="0"/>
+              <a:ea typeface="Calibri" panose="020F0502020204030204" pitchFamily="34" charset="0"/>
+              <a:cs typeface="Calibri" panose="020F0502020204030204" pitchFamily="34" charset="0"/>
+            </a:endParaRPr>
+          </a:p>
+          <a:p>
+            <a:r>
+              <a:rPr lang="en-US" sz="900">
+                <a:latin typeface="Calibri" panose="020F0502020204030204" pitchFamily="34" charset="0"/>
+                <a:ea typeface="Calibri" panose="020F0502020204030204" pitchFamily="34" charset="0"/>
+                <a:cs typeface="Calibri" panose="020F0502020204030204" pitchFamily="34" charset="0"/>
+              </a:rPr>
+              <a:t>Many tasks are already multi-function collabs and exist in the system from another team's entry; for those, you don't need to re-create the task — just search for the task, add your function's tab with its own work types and asset counts.</a:t>
+            </a:r>
+          </a:p>
+        </p:txBody>
+      </p:sp>
+      <p:sp>
+        <p:nvSpPr>
+          <p:cNvPr id="22" name="TextBox 21">
+            <a:extLst>
+              <a:ext uri="{FF2B5EF4-FFF2-40B4-BE49-F238E27FC236}">
+                <a16:creationId xmlns:a16="http://schemas.microsoft.com/office/drawing/2014/main" id="{0CCFFA27-DAAF-8AC4-E65E-C1680A181A80}"/>
+              </a:ext>
+            </a:extLst>
+          </p:cNvPr>
+          <p:cNvSpPr txBox="1"/>
+          <p:nvPr/>
+        </p:nvSpPr>
+        <p:spPr>
+          <a:xfrm>
+            <a:off x="497738" y="428276"/>
+            <a:ext cx="5677840" cy="461665"/>
+          </a:xfrm>
+          <a:prstGeom prst="rect">
+            <a:avLst/>
+          </a:prstGeom>
+          <a:noFill/>
+        </p:spPr>
+        <p:txBody>
+          <a:bodyPr vert="horz" wrap="square" lIns="91440" tIns="45720" rIns="91440" bIns="45720" rtlCol="0" anchor="t" anchorCtr="0">
+            <a:spAutoFit/>
+          </a:bodyPr>
+          <a:lstStyle/>
+          <a:p>
+            <a:r>
+              <a:rPr lang="en-US" sz="2400" b="1">
+                <a:solidFill>
+                  <a:srgbClr val="E61E2A"/>
+                </a:solidFill>
+              </a:rPr>
+              <a:t>Recommended Migration process</a:t>
+            </a:r>
+            <a:endParaRPr lang="en-US" sz="2400" b="1" dirty="0">
+              <a:solidFill>
+                <a:srgbClr val="E61E2A"/>
+              </a:solidFill>
+            </a:endParaRPr>
+          </a:p>
+        </p:txBody>
+      </p:sp>
+      <p:pic>
+        <p:nvPicPr>
+          <p:cNvPr id="4" name="Picture 3">
+            <a:extLst>
+              <a:ext uri="{FF2B5EF4-FFF2-40B4-BE49-F238E27FC236}">
+                <a16:creationId xmlns:a16="http://schemas.microsoft.com/office/drawing/2014/main" id="{7E2E4A52-422E-621F-21D7-2CB365FCB05B}"/>
+              </a:ext>
+            </a:extLst>
+          </p:cNvPr>
+          <p:cNvPicPr>
+            <a:picLocks noChangeAspect="1"/>
+          </p:cNvPicPr>
+          <p:nvPr/>
+        </p:nvPicPr>
+        <p:blipFill>
+          <a:blip r:embed="rId2"/>
+          <a:stretch>
+            <a:fillRect/>
+          </a:stretch>
+        </p:blipFill>
+        <p:spPr>
+          <a:xfrm>
+            <a:off x="3456654" y="1286936"/>
+            <a:ext cx="2106105" cy="838932"/>
+          </a:xfrm>
+          <a:prstGeom prst="rect">
+            <a:avLst/>
+          </a:prstGeom>
+        </p:spPr>
+      </p:pic>
+      <p:cxnSp>
+        <p:nvCxnSpPr>
+          <p:cNvPr id="7" name="Straight Connector 6">
+            <a:extLst>
+              <a:ext uri="{FF2B5EF4-FFF2-40B4-BE49-F238E27FC236}">
+                <a16:creationId xmlns:a16="http://schemas.microsoft.com/office/drawing/2014/main" id="{012C0FCD-BB1E-EA0A-B23B-AEA0CD17E883}"/>
+              </a:ext>
+            </a:extLst>
+          </p:cNvPr>
+          <p:cNvCxnSpPr>
+            <a:cxnSpLocks/>
+          </p:cNvCxnSpPr>
+          <p:nvPr/>
+        </p:nvCxnSpPr>
+        <p:spPr>
+          <a:xfrm>
+            <a:off x="6040445" y="1065249"/>
+            <a:ext cx="0" cy="3609966"/>
+          </a:xfrm>
+          <a:prstGeom prst="line">
+            <a:avLst/>
+          </a:prstGeom>
+          <a:ln w="19050"/>
+        </p:spPr>
+        <p:style>
+          <a:lnRef idx="1">
+            <a:schemeClr val="accent4"/>
+          </a:lnRef>
+          <a:fillRef idx="0">
+            <a:schemeClr val="accent4"/>
+          </a:fillRef>
+          <a:effectRef idx="0">
+            <a:schemeClr val="accent4"/>
+          </a:effectRef>
+          <a:fontRef idx="minor">
+            <a:schemeClr val="tx1"/>
+          </a:fontRef>
+        </p:style>
+      </p:cxnSp>
+      <p:cxnSp>
+        <p:nvCxnSpPr>
+          <p:cNvPr id="10" name="Straight Connector 9">
+            <a:extLst>
+              <a:ext uri="{FF2B5EF4-FFF2-40B4-BE49-F238E27FC236}">
+                <a16:creationId xmlns:a16="http://schemas.microsoft.com/office/drawing/2014/main" id="{1E7DADA7-D0F0-A720-0515-0A326F7F7E5A}"/>
+              </a:ext>
+            </a:extLst>
+          </p:cNvPr>
+          <p:cNvCxnSpPr>
+            <a:cxnSpLocks/>
+          </p:cNvCxnSpPr>
+          <p:nvPr/>
+        </p:nvCxnSpPr>
+        <p:spPr>
+          <a:xfrm>
+            <a:off x="3081247" y="1065249"/>
+            <a:ext cx="0" cy="3609966"/>
+          </a:xfrm>
+          <a:prstGeom prst="line">
+            <a:avLst/>
+          </a:prstGeom>
+          <a:ln w="19050"/>
+        </p:spPr>
+        <p:style>
+          <a:lnRef idx="1">
+            <a:schemeClr val="accent4"/>
+          </a:lnRef>
+          <a:fillRef idx="0">
+            <a:schemeClr val="accent4"/>
+          </a:fillRef>
+          <a:effectRef idx="0">
+            <a:schemeClr val="accent4"/>
+          </a:effectRef>
+          <a:fontRef idx="minor">
+            <a:schemeClr val="tx1"/>
+          </a:fontRef>
+        </p:style>
+      </p:cxnSp>
+      <p:pic>
+        <p:nvPicPr>
+          <p:cNvPr id="23" name="Picture 22">
+            <a:extLst>
+              <a:ext uri="{FF2B5EF4-FFF2-40B4-BE49-F238E27FC236}">
+                <a16:creationId xmlns:a16="http://schemas.microsoft.com/office/drawing/2014/main" id="{7C609821-0124-9500-FDAE-DCAB173E9D31}"/>
+              </a:ext>
+            </a:extLst>
+          </p:cNvPr>
+          <p:cNvPicPr>
+            <a:picLocks noChangeAspect="1"/>
+          </p:cNvPicPr>
+          <p:nvPr/>
+        </p:nvPicPr>
+        <p:blipFill>
+          <a:blip r:embed="rId3"/>
+          <a:stretch>
+            <a:fillRect/>
+          </a:stretch>
+        </p:blipFill>
+        <p:spPr>
+          <a:xfrm>
+            <a:off x="633095" y="1133236"/>
+            <a:ext cx="1970467" cy="1058880"/>
+          </a:xfrm>
+          <a:prstGeom prst="rect">
+            <a:avLst/>
+          </a:prstGeom>
+        </p:spPr>
+      </p:pic>
+      <p:sp>
+        <p:nvSpPr>
+          <p:cNvPr id="27" name="TextBox 26">
+            <a:extLst>
+              <a:ext uri="{FF2B5EF4-FFF2-40B4-BE49-F238E27FC236}">
+                <a16:creationId xmlns:a16="http://schemas.microsoft.com/office/drawing/2014/main" id="{B742B302-9AF9-35FB-59E1-AAEA130420BA}"/>
+              </a:ext>
+            </a:extLst>
+          </p:cNvPr>
+          <p:cNvSpPr txBox="1"/>
+          <p:nvPr/>
+        </p:nvSpPr>
+        <p:spPr>
+          <a:xfrm>
+            <a:off x="416090" y="3080814"/>
+            <a:ext cx="2399180" cy="1215717"/>
+          </a:xfrm>
+          <a:prstGeom prst="rect">
+            <a:avLst/>
+          </a:prstGeom>
+          <a:noFill/>
+        </p:spPr>
+        <p:txBody>
+          <a:bodyPr wrap="square">
+            <a:spAutoFit/>
+          </a:bodyPr>
+          <a:lstStyle/>
+          <a:p>
+            <a:r>
+              <a:rPr lang="en-US" sz="900">
+                <a:latin typeface="Calibri" panose="020F0502020204030204" pitchFamily="34" charset="0"/>
+                <a:ea typeface="Calibri" panose="020F0502020204030204" pitchFamily="34" charset="0"/>
+                <a:cs typeface="Calibri" panose="020F0502020204030204" pitchFamily="34" charset="0"/>
+              </a:rPr>
+              <a:t>Before migrating anything, go into Settings and check what work/asset types your function will use. Reuse VN Design's existing definitions where they fit — only add new ones where your function genuinely needs a type that doesn't exist yet. </a:t>
+            </a:r>
+          </a:p>
+          <a:p>
+            <a:endParaRPr lang="en-US" sz="900">
+              <a:latin typeface="Calibri" panose="020F0502020204030204" pitchFamily="34" charset="0"/>
+              <a:ea typeface="Calibri" panose="020F0502020204030204" pitchFamily="34" charset="0"/>
+              <a:cs typeface="Calibri" panose="020F0502020204030204" pitchFamily="34" charset="0"/>
+            </a:endParaRPr>
+          </a:p>
+          <a:p>
+            <a:br>
+              <a:rPr lang="en-US" sz="500">
+                <a:latin typeface="Calibri" panose="020F0502020204030204" pitchFamily="34" charset="0"/>
+                <a:ea typeface="Calibri" panose="020F0502020204030204" pitchFamily="34" charset="0"/>
+                <a:cs typeface="Calibri" panose="020F0502020204030204" pitchFamily="34" charset="0"/>
+              </a:rPr>
+            </a:br>
+            <a:endParaRPr lang="en-US" sz="500">
+              <a:latin typeface="Calibri" panose="020F0502020204030204" pitchFamily="34" charset="0"/>
+              <a:ea typeface="Calibri" panose="020F0502020204030204" pitchFamily="34" charset="0"/>
+              <a:cs typeface="Calibri" panose="020F0502020204030204" pitchFamily="34" charset="0"/>
+            </a:endParaRPr>
+          </a:p>
+        </p:txBody>
+      </p:sp>
+      <p:sp>
+        <p:nvSpPr>
+          <p:cNvPr id="28" name="TextBox 27">
+            <a:extLst>
+              <a:ext uri="{FF2B5EF4-FFF2-40B4-BE49-F238E27FC236}">
+                <a16:creationId xmlns:a16="http://schemas.microsoft.com/office/drawing/2014/main" id="{40F273F5-8307-3BF8-CA28-2EA3E35CE865}"/>
+              </a:ext>
+            </a:extLst>
+          </p:cNvPr>
+          <p:cNvSpPr txBox="1"/>
+          <p:nvPr/>
+        </p:nvSpPr>
+        <p:spPr>
+          <a:xfrm>
+            <a:off x="749986" y="2522864"/>
+            <a:ext cx="1860330" cy="430887"/>
+          </a:xfrm>
+          <a:prstGeom prst="rect">
+            <a:avLst/>
+          </a:prstGeom>
+          <a:noFill/>
+        </p:spPr>
+        <p:txBody>
+          <a:bodyPr wrap="square">
+            <a:spAutoFit/>
+          </a:bodyPr>
+          <a:lstStyle/>
+          <a:p>
+            <a:r>
+              <a:rPr lang="en-US" sz="1100" b="1">
+                <a:solidFill>
+                  <a:srgbClr val="E61E2A"/>
+                </a:solidFill>
+              </a:rPr>
+              <a:t>Review and define your functions’s work types</a:t>
+            </a:r>
+            <a:endParaRPr lang="en-US" sz="1100" b="1"/>
+          </a:p>
+        </p:txBody>
+      </p:sp>
+      <p:sp>
+        <p:nvSpPr>
+          <p:cNvPr id="33" name="TextBox 32">
+            <a:extLst>
+              <a:ext uri="{FF2B5EF4-FFF2-40B4-BE49-F238E27FC236}">
+                <a16:creationId xmlns:a16="http://schemas.microsoft.com/office/drawing/2014/main" id="{D697889D-2CFF-A673-26C8-42C3C5BF8416}"/>
+              </a:ext>
+            </a:extLst>
+          </p:cNvPr>
+          <p:cNvSpPr txBox="1"/>
+          <p:nvPr/>
+        </p:nvSpPr>
+        <p:spPr>
+          <a:xfrm>
+            <a:off x="6398802" y="3084286"/>
+            <a:ext cx="2362319" cy="1615827"/>
+          </a:xfrm>
+          <a:prstGeom prst="rect">
+            <a:avLst/>
+          </a:prstGeom>
+          <a:noFill/>
+        </p:spPr>
+        <p:txBody>
+          <a:bodyPr wrap="square">
+            <a:spAutoFit/>
+          </a:bodyPr>
+          <a:lstStyle/>
+          <a:p>
+            <a:r>
+              <a:rPr lang="en-US" sz="900">
+                <a:latin typeface="Calibri" panose="020F0502020204030204" pitchFamily="34" charset="0"/>
+                <a:ea typeface="Calibri" panose="020F0502020204030204" pitchFamily="34" charset="0"/>
+                <a:cs typeface="Calibri" panose="020F0502020204030204" pitchFamily="34" charset="0"/>
+              </a:rPr>
+              <a:t>Enter tasks into the app using the tracker as your checklist. Since the dashboard updates live, review it as you go — a quick sense-check that squads, campaigns and asset counts are landing where you'd expect catches mistakes early, before the whole team's history is migrated.</a:t>
+            </a:r>
+          </a:p>
+          <a:p>
+            <a:br>
+              <a:rPr lang="en-US" sz="900">
+                <a:latin typeface="Calibri" panose="020F0502020204030204" pitchFamily="34" charset="0"/>
+                <a:ea typeface="Calibri" panose="020F0502020204030204" pitchFamily="34" charset="0"/>
+                <a:cs typeface="Calibri" panose="020F0502020204030204" pitchFamily="34" charset="0"/>
+              </a:rPr>
+            </a:br>
+            <a:endParaRPr lang="en-US" sz="900">
+              <a:latin typeface="Calibri" panose="020F0502020204030204" pitchFamily="34" charset="0"/>
+              <a:ea typeface="Calibri" panose="020F0502020204030204" pitchFamily="34" charset="0"/>
+              <a:cs typeface="Calibri" panose="020F0502020204030204" pitchFamily="34" charset="0"/>
+            </a:endParaRPr>
+          </a:p>
+          <a:p>
+            <a:br>
+              <a:rPr lang="en-US" sz="900">
+                <a:latin typeface="Calibri" panose="020F0502020204030204" pitchFamily="34" charset="0"/>
+                <a:ea typeface="Calibri" panose="020F0502020204030204" pitchFamily="34" charset="0"/>
+                <a:cs typeface="Calibri" panose="020F0502020204030204" pitchFamily="34" charset="0"/>
+              </a:rPr>
+            </a:br>
+            <a:endParaRPr lang="en-US" sz="900">
+              <a:latin typeface="Calibri" panose="020F0502020204030204" pitchFamily="34" charset="0"/>
+              <a:ea typeface="Calibri" panose="020F0502020204030204" pitchFamily="34" charset="0"/>
+              <a:cs typeface="Calibri" panose="020F0502020204030204" pitchFamily="34" charset="0"/>
+            </a:endParaRPr>
+          </a:p>
+        </p:txBody>
+      </p:sp>
+      <p:sp>
+        <p:nvSpPr>
+          <p:cNvPr id="35" name="Rectangle: Rounded Corners 34">
+            <a:extLst>
+              <a:ext uri="{FF2B5EF4-FFF2-40B4-BE49-F238E27FC236}">
+                <a16:creationId xmlns:a16="http://schemas.microsoft.com/office/drawing/2014/main" id="{04D50D6B-7AD5-B33F-9358-343DBC717DF5}"/>
+              </a:ext>
+            </a:extLst>
+          </p:cNvPr>
+          <p:cNvSpPr/>
+          <p:nvPr/>
+        </p:nvSpPr>
+        <p:spPr>
+          <a:xfrm>
+            <a:off x="497738" y="2617984"/>
+            <a:ext cx="252248" cy="252248"/>
+          </a:xfrm>
+          <a:prstGeom prst="roundRect">
+            <a:avLst/>
+          </a:prstGeom>
+          <a:solidFill>
+            <a:srgbClr val="E61E2A"/>
+          </a:solidFill>
+          <a:ln>
+            <a:noFill/>
+          </a:ln>
+        </p:spPr>
+        <p:style>
+          <a:lnRef idx="2">
+            <a:schemeClr val="accent1">
+              <a:shade val="15000"/>
+            </a:schemeClr>
+          </a:lnRef>
+          <a:fillRef idx="1">
+            <a:schemeClr val="accent1"/>
+          </a:fillRef>
+          <a:effectRef idx="0">
+            <a:schemeClr val="accent1"/>
+          </a:effectRef>
+          <a:fontRef idx="minor">
+            <a:schemeClr val="lt1"/>
+          </a:fontRef>
+        </p:style>
+        <p:txBody>
+          <a:bodyPr rtlCol="0" anchor="ctr"/>
+          <a:lstStyle/>
+          <a:p>
+            <a:pPr algn="ctr"/>
+            <a:r>
+              <a:rPr lang="en-US" sz="1200"/>
+              <a:t>1</a:t>
+            </a:r>
+            <a:endParaRPr lang="en-US" sz="1000"/>
+          </a:p>
+        </p:txBody>
+      </p:sp>
+      <p:sp>
+        <p:nvSpPr>
+          <p:cNvPr id="36" name="TextBox 35">
+            <a:extLst>
+              <a:ext uri="{FF2B5EF4-FFF2-40B4-BE49-F238E27FC236}">
+                <a16:creationId xmlns:a16="http://schemas.microsoft.com/office/drawing/2014/main" id="{1CBF5666-1719-D84E-2EF9-94A21C07E17E}"/>
+              </a:ext>
+            </a:extLst>
+          </p:cNvPr>
+          <p:cNvSpPr txBox="1"/>
+          <p:nvPr/>
+        </p:nvSpPr>
+        <p:spPr>
+          <a:xfrm>
+            <a:off x="3781754" y="2522864"/>
+            <a:ext cx="1781006" cy="430887"/>
+          </a:xfrm>
+          <a:prstGeom prst="rect">
+            <a:avLst/>
+          </a:prstGeom>
+          <a:noFill/>
+        </p:spPr>
+        <p:txBody>
+          <a:bodyPr wrap="square">
+            <a:spAutoFit/>
+          </a:bodyPr>
+          <a:lstStyle/>
+          <a:p>
+            <a:r>
+              <a:rPr lang="en-US" sz="1100" b="1">
+                <a:solidFill>
+                  <a:srgbClr val="E61E2A"/>
+                </a:solidFill>
+              </a:rPr>
+              <a:t>Track progress and data with a task sheet</a:t>
+            </a:r>
+            <a:endParaRPr lang="en-US" sz="1100" b="1"/>
+          </a:p>
+        </p:txBody>
+      </p:sp>
+      <p:sp>
+        <p:nvSpPr>
+          <p:cNvPr id="37" name="Rectangle: Rounded Corners 36">
+            <a:extLst>
+              <a:ext uri="{FF2B5EF4-FFF2-40B4-BE49-F238E27FC236}">
+                <a16:creationId xmlns:a16="http://schemas.microsoft.com/office/drawing/2014/main" id="{7CDF632C-51D0-BFC8-83F2-1364D639FD93}"/>
+              </a:ext>
+            </a:extLst>
+          </p:cNvPr>
+          <p:cNvSpPr/>
+          <p:nvPr/>
+        </p:nvSpPr>
+        <p:spPr>
+          <a:xfrm>
+            <a:off x="3529506" y="2617984"/>
+            <a:ext cx="252248" cy="252248"/>
+          </a:xfrm>
+          <a:prstGeom prst="roundRect">
+            <a:avLst/>
+          </a:prstGeom>
+          <a:solidFill>
+            <a:srgbClr val="E61E2A"/>
+          </a:solidFill>
+          <a:ln>
+            <a:noFill/>
+          </a:ln>
+        </p:spPr>
+        <p:style>
+          <a:lnRef idx="2">
+            <a:schemeClr val="accent1">
+              <a:shade val="15000"/>
+            </a:schemeClr>
+          </a:lnRef>
+          <a:fillRef idx="1">
+            <a:schemeClr val="accent1"/>
+          </a:fillRef>
+          <a:effectRef idx="0">
+            <a:schemeClr val="accent1"/>
+          </a:effectRef>
+          <a:fontRef idx="minor">
+            <a:schemeClr val="lt1"/>
+          </a:fontRef>
+        </p:style>
+        <p:txBody>
+          <a:bodyPr rtlCol="0" anchor="ctr"/>
+          <a:lstStyle/>
+          <a:p>
+            <a:pPr algn="ctr"/>
+            <a:r>
+              <a:rPr lang="en-US" sz="1200"/>
+              <a:t>2</a:t>
+            </a:r>
+            <a:endParaRPr lang="en-US" sz="1000"/>
+          </a:p>
+        </p:txBody>
+      </p:sp>
+      <p:sp>
+        <p:nvSpPr>
+          <p:cNvPr id="38" name="TextBox 37">
+            <a:extLst>
+              <a:ext uri="{FF2B5EF4-FFF2-40B4-BE49-F238E27FC236}">
+                <a16:creationId xmlns:a16="http://schemas.microsoft.com/office/drawing/2014/main" id="{62E8DAD2-58B3-8D62-1A29-07AB8A771DF2}"/>
+              </a:ext>
+            </a:extLst>
+          </p:cNvPr>
+          <p:cNvSpPr txBox="1"/>
+          <p:nvPr/>
+        </p:nvSpPr>
+        <p:spPr>
+          <a:xfrm>
+            <a:off x="6691054" y="2532854"/>
+            <a:ext cx="1922891" cy="430887"/>
+          </a:xfrm>
+          <a:prstGeom prst="rect">
+            <a:avLst/>
+          </a:prstGeom>
+          <a:noFill/>
+        </p:spPr>
+        <p:txBody>
+          <a:bodyPr wrap="square">
+            <a:spAutoFit/>
+          </a:bodyPr>
+          <a:lstStyle/>
+          <a:p>
+            <a:r>
+              <a:rPr lang="en-US" sz="1100" b="1">
+                <a:solidFill>
+                  <a:srgbClr val="E61E2A"/>
+                </a:solidFill>
+              </a:rPr>
+              <a:t>Fill and review live</a:t>
+            </a:r>
+          </a:p>
+          <a:p>
+            <a:r>
+              <a:rPr lang="en-US" sz="1100" b="1">
+                <a:solidFill>
+                  <a:srgbClr val="E61E2A"/>
+                </a:solidFill>
+              </a:rPr>
+              <a:t>changes</a:t>
+            </a:r>
+            <a:endParaRPr lang="en-US" sz="1100" b="1"/>
+          </a:p>
+        </p:txBody>
+      </p:sp>
+      <p:sp>
+        <p:nvSpPr>
+          <p:cNvPr id="39" name="Rectangle: Rounded Corners 38">
+            <a:extLst>
+              <a:ext uri="{FF2B5EF4-FFF2-40B4-BE49-F238E27FC236}">
+                <a16:creationId xmlns:a16="http://schemas.microsoft.com/office/drawing/2014/main" id="{B5B92CF8-6F8B-53BA-EE42-BB6D3D764206}"/>
+              </a:ext>
+            </a:extLst>
+          </p:cNvPr>
+          <p:cNvSpPr/>
+          <p:nvPr/>
+        </p:nvSpPr>
+        <p:spPr>
+          <a:xfrm>
+            <a:off x="6438807" y="2627974"/>
+            <a:ext cx="252248" cy="252248"/>
+          </a:xfrm>
+          <a:prstGeom prst="roundRect">
+            <a:avLst/>
+          </a:prstGeom>
+          <a:solidFill>
+            <a:srgbClr val="E61E2A"/>
+          </a:solidFill>
+          <a:ln>
+            <a:noFill/>
+          </a:ln>
+        </p:spPr>
+        <p:style>
+          <a:lnRef idx="2">
+            <a:schemeClr val="accent1">
+              <a:shade val="15000"/>
+            </a:schemeClr>
+          </a:lnRef>
+          <a:fillRef idx="1">
+            <a:schemeClr val="accent1"/>
+          </a:fillRef>
+          <a:effectRef idx="0">
+            <a:schemeClr val="accent1"/>
+          </a:effectRef>
+          <a:fontRef idx="minor">
+            <a:schemeClr val="lt1"/>
+          </a:fontRef>
+        </p:style>
+        <p:txBody>
+          <a:bodyPr rtlCol="0" anchor="ctr"/>
+          <a:lstStyle/>
+          <a:p>
+            <a:pPr algn="ctr"/>
+            <a:r>
+              <a:rPr lang="en-US" sz="1200"/>
+              <a:t>3</a:t>
+            </a:r>
+            <a:endParaRPr lang="en-US" sz="1000"/>
+          </a:p>
+        </p:txBody>
+      </p:sp>
+      <p:grpSp>
+        <p:nvGrpSpPr>
+          <p:cNvPr id="42" name="Group 41">
+            <a:extLst>
+              <a:ext uri="{FF2B5EF4-FFF2-40B4-BE49-F238E27FC236}">
+                <a16:creationId xmlns:a16="http://schemas.microsoft.com/office/drawing/2014/main" id="{717AC0E9-34A5-39DC-0021-3196BF91297D}"/>
+              </a:ext>
+            </a:extLst>
+          </p:cNvPr>
+          <p:cNvGrpSpPr/>
+          <p:nvPr/>
+        </p:nvGrpSpPr>
+        <p:grpSpPr>
+          <a:xfrm>
+            <a:off x="6376247" y="1133236"/>
+            <a:ext cx="2386241" cy="1081757"/>
+            <a:chOff x="6376247" y="1133236"/>
+            <a:chExt cx="2386241" cy="1081757"/>
+          </a:xfrm>
+        </p:grpSpPr>
+        <p:pic>
+          <p:nvPicPr>
+            <p:cNvPr id="6" name="Picture 5">
+              <a:extLst>
+                <a:ext uri="{FF2B5EF4-FFF2-40B4-BE49-F238E27FC236}">
+                  <a16:creationId xmlns:a16="http://schemas.microsoft.com/office/drawing/2014/main" id="{AD62A72B-ACF7-D42B-7A8D-FDEA48DEF00B}"/>
+                </a:ext>
+              </a:extLst>
+            </p:cNvPr>
+            <p:cNvPicPr>
+              <a:picLocks noChangeAspect="1"/>
+            </p:cNvPicPr>
+            <p:nvPr/>
+          </p:nvPicPr>
+          <p:blipFill>
+            <a:blip r:embed="rId4"/>
+            <a:stretch>
+              <a:fillRect/>
+            </a:stretch>
+          </p:blipFill>
+          <p:spPr>
+            <a:xfrm>
+              <a:off x="6376247" y="1133236"/>
+              <a:ext cx="1095545" cy="1081757"/>
+            </a:xfrm>
+            <a:prstGeom prst="rect">
+              <a:avLst/>
+            </a:prstGeom>
+          </p:spPr>
+        </p:pic>
+        <p:pic>
+          <p:nvPicPr>
+            <p:cNvPr id="41" name="Picture 40">
+              <a:extLst>
+                <a:ext uri="{FF2B5EF4-FFF2-40B4-BE49-F238E27FC236}">
+                  <a16:creationId xmlns:a16="http://schemas.microsoft.com/office/drawing/2014/main" id="{0CB782CF-2C2E-F936-0A69-D17BC688A102}"/>
+                </a:ext>
+              </a:extLst>
+            </p:cNvPr>
+            <p:cNvPicPr>
+              <a:picLocks noChangeAspect="1"/>
+            </p:cNvPicPr>
+            <p:nvPr/>
+          </p:nvPicPr>
+          <p:blipFill>
+            <a:blip r:embed="rId5"/>
+            <a:stretch>
+              <a:fillRect/>
+            </a:stretch>
+          </p:blipFill>
+          <p:spPr>
+            <a:xfrm>
+              <a:off x="7530730" y="1133236"/>
+              <a:ext cx="1231758" cy="1058880"/>
+            </a:xfrm>
+            <a:prstGeom prst="rect">
+              <a:avLst/>
+            </a:prstGeom>
+          </p:spPr>
+        </p:pic>
+      </p:grpSp>
+    </p:spTree>
+    <p:extLst>
+      <p:ext uri="{BB962C8B-B14F-4D97-AF65-F5344CB8AC3E}">
+        <p14:creationId xmlns:p14="http://schemas.microsoft.com/office/powerpoint/2010/main" val="913168235"/>
+      </p:ext>
+    </p:extLst>
+  </p:cSld>
+  <p:clrMapOvr>
+    <a:masterClrMapping/>
+  </p:clrMapOvr>
+</p:sld>
+</file>
+
+<file path=ppt/slides/slide2.xml><?xml version="1.0" encoding="utf-8"?>
+<p:sld xmlns:a="http://schemas.openxmlformats.org/drawingml/2006/main" xmlns:r="http://schemas.openxmlformats.org/officeDocument/2006/relationships" xmlns:p="http://schemas.openxmlformats.org/presentationml/2006/main">
+  <p:cSld>
+    <p:spTree>
+      <p:nvGrpSpPr>
+        <p:cNvPr id="1" name="">
+          <a:extLst>
+            <a:ext uri="{FF2B5EF4-FFF2-40B4-BE49-F238E27FC236}">
+              <a16:creationId xmlns:a16="http://schemas.microsoft.com/office/drawing/2014/main" id="{FA6EBA9F-6B4F-7C2B-363E-FC58851CE872}"/>
             </a:ext>
           </a:extLst>
         </p:cNvPr>
@@ -6963,7 +11372,7 @@
           <p:cNvPr id="2" name="Title 1">
             <a:extLst>
               <a:ext uri="{FF2B5EF4-FFF2-40B4-BE49-F238E27FC236}">
-                <a16:creationId xmlns:a16="http://schemas.microsoft.com/office/drawing/2014/main" id="{E05D786B-25C0-288E-7A66-9D00B657B68A}"/>
+                <a16:creationId xmlns:a16="http://schemas.microsoft.com/office/drawing/2014/main" id="{BE090114-BF63-6DC4-5FE2-BE730D910F4D}"/>
               </a:ext>
             </a:extLst>
           </p:cNvPr>
@@ -6971,30 +11380,36 @@
             <a:spLocks noGrp="1"/>
           </p:cNvSpPr>
           <p:nvPr>
-            <p:ph type="title"/>
+            <p:ph type="ctrTitle"/>
           </p:nvPr>
         </p:nvSpPr>
-        <p:spPr/>
+        <p:spPr>
+          <a:xfrm>
+            <a:off x="172557" y="932519"/>
+            <a:ext cx="8430423" cy="1313530"/>
+          </a:xfrm>
+        </p:spPr>
         <p:txBody>
           <a:bodyPr/>
           <a:lstStyle/>
           <a:p>
             <a:r>
-              <a:rPr lang="en-US">
-                <a:cs typeface="Arial"/>
+              <a:rPr lang="en-US" sz="1800">
+                <a:latin typeface="Calibri" panose="020F0502020204030204" pitchFamily="34" charset="0"/>
+                <a:ea typeface="Calibri" panose="020F0502020204030204" pitchFamily="34" charset="0"/>
+                <a:cs typeface="Calibri" panose="020F0502020204030204" pitchFamily="34" charset="0"/>
               </a:rPr>
-              <a:t>Feedback recap from 15 July </a:t>
-            </a:r>
-            <a:endParaRPr lang="en-US"/>
+              <a:t>GCMC Workload report</a:t>
+            </a:r>
           </a:p>
         </p:txBody>
       </p:sp>
       <p:sp>
         <p:nvSpPr>
-          <p:cNvPr id="3" name="Text Placeholder 2">
-            <a:extLst>
-              <a:ext uri="{FF2B5EF4-FFF2-40B4-BE49-F238E27FC236}">
-                <a16:creationId xmlns:a16="http://schemas.microsoft.com/office/drawing/2014/main" id="{50DB5857-4550-273C-5DD7-835E11038B5C}"/>
+          <p:cNvPr id="3" name="Subtitle 2">
+            <a:extLst>
+              <a:ext uri="{FF2B5EF4-FFF2-40B4-BE49-F238E27FC236}">
+                <a16:creationId xmlns:a16="http://schemas.microsoft.com/office/drawing/2014/main" id="{2A1AF4B3-3054-497B-570C-1F522B08E4D7}"/>
               </a:ext>
             </a:extLst>
           </p:cNvPr>
@@ -7002,135 +11417,149 @@
             <a:spLocks noGrp="1"/>
           </p:cNvSpPr>
           <p:nvPr>
-            <p:ph type="body" sz="quarter" idx="10"/>
+            <p:ph type="subTitle" idx="1"/>
           </p:nvPr>
         </p:nvSpPr>
-        <p:spPr/>
+        <p:spPr>
+          <a:xfrm>
+            <a:off x="172557" y="1189097"/>
+            <a:ext cx="8430423" cy="1056952"/>
+          </a:xfrm>
+        </p:spPr>
         <p:txBody>
           <a:bodyPr/>
           <a:lstStyle/>
           <a:p>
-            <a:pPr marL="285750" indent="-285750">
-              <a:buFont typeface="Arial"/>
-              <a:buChar char="•"/>
-            </a:pPr>
-            <a:r>
-              <a:rPr lang="en-US" b="1">
-                <a:ea typeface="+mn-lt"/>
-                <a:cs typeface="+mn-lt"/>
+            <a:r>
+              <a:rPr lang="en-US" sz="4000"/>
+              <a:t>Sign-in information</a:t>
+            </a:r>
+          </a:p>
+          <a:p>
+            <a:r>
+              <a:rPr lang="en-US" sz="1200"/>
+              <a:t>Use “</a:t>
+            </a:r>
+            <a:r>
+              <a:rPr lang="en-US" sz="1200">
+                <a:solidFill>
+                  <a:srgbClr val="FF0000"/>
+                </a:solidFill>
               </a:rPr>
-              <a:t>Filter gradient: </a:t>
-            </a:r>
-            <a:r>
-              <a:rPr lang="en-US">
-                <a:ea typeface="+mn-lt"/>
-                <a:cs typeface="+mn-lt"/>
+              <a:t>gcmc</a:t>
+            </a:r>
+            <a:r>
+              <a:rPr lang="en-US" sz="1200"/>
+              <a:t>” for both username and password. Otherwise app stays in view-only mode.</a:t>
+            </a:r>
+          </a:p>
+        </p:txBody>
+      </p:sp>
+      <p:pic>
+        <p:nvPicPr>
+          <p:cNvPr id="5" name="Picture 4">
+            <a:extLst>
+              <a:ext uri="{FF2B5EF4-FFF2-40B4-BE49-F238E27FC236}">
+                <a16:creationId xmlns:a16="http://schemas.microsoft.com/office/drawing/2014/main" id="{DBB8A047-EEBE-5838-A575-AF405E508E53}"/>
+              </a:ext>
+            </a:extLst>
+          </p:cNvPr>
+          <p:cNvPicPr>
+            <a:picLocks noChangeAspect="1"/>
+          </p:cNvPicPr>
+          <p:nvPr/>
+        </p:nvPicPr>
+        <p:blipFill>
+          <a:blip r:embed="rId2">
+            <a:extLst>
+              <a:ext uri="{BEBA8EAE-BF5A-486C-A8C5-ECC9F3942E4B}">
+                <a14:imgProps xmlns:a14="http://schemas.microsoft.com/office/drawing/2010/main">
+                  <a14:imgLayer r:embed="rId3">
+                    <a14:imgEffect>
+                      <a14:backgroundRemoval t="9091" b="89091" l="5147" r="89706">
+                        <a14:foregroundMark x1="10294" y1="41818" x2="55882" y2="43636"/>
+                        <a14:foregroundMark x1="55882" y1="43636" x2="41176" y2="60000"/>
+                        <a14:foregroundMark x1="52206" y1="43636" x2="5147" y2="45455"/>
+                      </a14:backgroundRemoval>
+                    </a14:imgEffect>
+                  </a14:imgLayer>
+                </a14:imgProps>
+              </a:ext>
+            </a:extLst>
+          </a:blip>
+          <a:stretch>
+            <a:fillRect/>
+          </a:stretch>
+        </p:blipFill>
+        <p:spPr>
+          <a:xfrm>
+            <a:off x="5029147" y="1367065"/>
+            <a:ext cx="1060847" cy="429019"/>
+          </a:xfrm>
+          <a:prstGeom prst="rect">
+            <a:avLst/>
+          </a:prstGeom>
+        </p:spPr>
+      </p:pic>
+      <p:sp>
+        <p:nvSpPr>
+          <p:cNvPr id="9" name="TextBox 8">
+            <a:extLst>
+              <a:ext uri="{FF2B5EF4-FFF2-40B4-BE49-F238E27FC236}">
+                <a16:creationId xmlns:a16="http://schemas.microsoft.com/office/drawing/2014/main" id="{F1D7CF6F-35E9-A9E8-1D34-8981A45678F3}"/>
+              </a:ext>
+            </a:extLst>
+          </p:cNvPr>
+          <p:cNvSpPr txBox="1"/>
+          <p:nvPr/>
+        </p:nvSpPr>
+        <p:spPr>
+          <a:xfrm>
+            <a:off x="2806262" y="4748811"/>
+            <a:ext cx="4639566" cy="276999"/>
+          </a:xfrm>
+          <a:prstGeom prst="rect">
+            <a:avLst/>
+          </a:prstGeom>
+          <a:noFill/>
+        </p:spPr>
+        <p:txBody>
+          <a:bodyPr wrap="square">
+            <a:spAutoFit/>
+          </a:bodyPr>
+          <a:lstStyle/>
+          <a:p>
+            <a:r>
+              <a:rPr lang="en-US" sz="1200" b="0">
+                <a:solidFill>
+                  <a:srgbClr val="FF0000"/>
+                </a:solidFill>
               </a:rPr>
-              <a:t>shifted to prioritize RMIT red more. </a:t>
-            </a:r>
-            <a:endParaRPr lang="en-US"/>
-          </a:p>
-          <a:p>
-            <a:pPr marL="285750" indent="-285750">
-              <a:buFont typeface="Arial"/>
-              <a:buChar char="•"/>
-            </a:pPr>
-            <a:r>
-              <a:rPr lang="en-US" b="1">
-                <a:ea typeface="+mn-lt"/>
-                <a:cs typeface="+mn-lt"/>
+              <a:t>Data is LIVE. </a:t>
+            </a:r>
+            <a:r>
+              <a:rPr lang="en-US" sz="1200" b="0" i="1" u="sng">
+                <a:solidFill>
+                  <a:srgbClr val="FF0000"/>
+                </a:solidFill>
               </a:rPr>
-              <a:t>Pref. Lockup: </a:t>
-            </a:r>
-            <a:r>
-              <a:rPr lang="en-US">
-                <a:ea typeface="+mn-lt"/>
-                <a:cs typeface="+mn-lt"/>
+              <a:t>Account is all-access</a:t>
+            </a:r>
+            <a:r>
+              <a:rPr lang="en-US" sz="1200" b="0">
+                <a:solidFill>
+                  <a:srgbClr val="FF0000"/>
+                </a:solidFill>
               </a:rPr>
-              <a:t>offset added, it should now look more aligned with Only at...lockup.</a:t>
-            </a:r>
-            <a:endParaRPr lang="en-US"/>
-          </a:p>
-          <a:p>
-            <a:pPr marL="285750" indent="-285750">
-              <a:buFont typeface="Arial"/>
-              <a:buChar char="•"/>
-            </a:pPr>
-            <a:r>
-              <a:rPr lang="en-US" b="1">
-                <a:ea typeface="+mn-lt"/>
-                <a:cs typeface="+mn-lt"/>
-              </a:rPr>
-              <a:t>Text and copy:</a:t>
-            </a:r>
-            <a:r>
-              <a:rPr lang="en-US">
-                <a:ea typeface="+mn-lt"/>
-                <a:cs typeface="+mn-lt"/>
-              </a:rPr>
-              <a:t> </a:t>
-            </a:r>
-            <a:r>
-              <a:rPr lang="en-US" sz="1600">
-                <a:ea typeface="+mn-lt"/>
-                <a:cs typeface="+mn-lt"/>
-              </a:rPr>
-              <a:t>"Only at Open Day" approach, using offset text, varied font sizes and a bit more hierarchy to give it greater impact.</a:t>
-            </a:r>
-          </a:p>
-          <a:p>
-            <a:pPr marL="285750" indent="-285750">
-              <a:buFont typeface="Arial"/>
-              <a:buChar char="•"/>
-            </a:pPr>
-            <a:r>
-              <a:rPr lang="en-US" b="1">
-                <a:ea typeface="+mn-lt"/>
-                <a:cs typeface="+mn-lt"/>
-              </a:rPr>
-              <a:t>Video storyboard: </a:t>
-            </a:r>
-            <a:r>
-              <a:rPr lang="en-US">
-                <a:ea typeface="+mn-lt"/>
-                <a:cs typeface="+mn-lt"/>
-              </a:rPr>
-              <a:t>since Jane did have a few comments on swapping some of the footage, those have been updated to reflect our latest selection (along with the adjusted filter, of course)</a:t>
-            </a:r>
-            <a:endParaRPr lang="en-US"/>
-          </a:p>
-          <a:p>
-            <a:pPr marL="285750" indent="-285750">
-              <a:buFont typeface="Arial"/>
-              <a:buChar char="•"/>
-            </a:pPr>
-            <a:r>
-              <a:rPr lang="en-US" b="1">
-                <a:ea typeface="+mn-lt"/>
-                <a:cs typeface="+mn-lt"/>
-              </a:rPr>
-              <a:t>Digital display:</a:t>
-            </a:r>
-            <a:r>
-              <a:rPr lang="en-US">
-                <a:ea typeface="+mn-lt"/>
-                <a:cs typeface="+mn-lt"/>
-              </a:rPr>
-              <a:t> Filter and layout adjusted, for no-image sets (size constrains), we're proposing 2 options: pure red and a red-dominant gradient with a touch of navy so they are still somewhat visually connected to other assets</a:t>
-            </a:r>
-            <a:endParaRPr lang="en-US"/>
-          </a:p>
-          <a:p>
-            <a:endParaRPr lang="en-US">
-              <a:cs typeface="Arial"/>
-            </a:endParaRPr>
+              <a:t>, do not share with strangers.</a:t>
+            </a:r>
           </a:p>
         </p:txBody>
       </p:sp>
     </p:spTree>
     <p:extLst>
       <p:ext uri="{BB962C8B-B14F-4D97-AF65-F5344CB8AC3E}">
-        <p14:creationId xmlns:p14="http://schemas.microsoft.com/office/powerpoint/2010/main" val="3214829184"/>
+        <p14:creationId xmlns:p14="http://schemas.microsoft.com/office/powerpoint/2010/main" val="2234007444"/>
       </p:ext>
     </p:extLst>
   </p:cSld>
@@ -7140,370 +11569,7 @@
 </p:sld>
 </file>
 
-<file path=ppt/slides/slide13.xml><?xml version="1.0" encoding="utf-8"?>
-<p:sld xmlns:a="http://schemas.openxmlformats.org/drawingml/2006/main" xmlns:r="http://schemas.openxmlformats.org/officeDocument/2006/relationships" xmlns:p="http://schemas.openxmlformats.org/presentationml/2006/main">
-  <p:cSld>
-    <p:spTree>
-      <p:nvGrpSpPr>
-        <p:cNvPr id="1" name="">
-          <a:extLst>
-            <a:ext uri="{FF2B5EF4-FFF2-40B4-BE49-F238E27FC236}">
-              <a16:creationId xmlns:a16="http://schemas.microsoft.com/office/drawing/2014/main" id="{6602E6EB-CC7F-FA5C-BD1C-F0F9C14A0A0E}"/>
-            </a:ext>
-          </a:extLst>
-        </p:cNvPr>
-        <p:cNvGrpSpPr/>
-        <p:nvPr/>
-      </p:nvGrpSpPr>
-      <p:grpSpPr>
-        <a:xfrm>
-          <a:off x="0" y="0"/>
-          <a:ext cx="0" cy="0"/>
-          <a:chOff x="0" y="0"/>
-          <a:chExt cx="0" cy="0"/>
-        </a:xfrm>
-      </p:grpSpPr>
-      <p:sp>
-        <p:nvSpPr>
-          <p:cNvPr id="2" name="Title 1">
-            <a:extLst>
-              <a:ext uri="{FF2B5EF4-FFF2-40B4-BE49-F238E27FC236}">
-                <a16:creationId xmlns:a16="http://schemas.microsoft.com/office/drawing/2014/main" id="{F27911A7-0A3A-B3A9-F67F-EF7AFAA4A997}"/>
-              </a:ext>
-            </a:extLst>
-          </p:cNvPr>
-          <p:cNvSpPr>
-            <a:spLocks noGrp="1"/>
-          </p:cNvSpPr>
-          <p:nvPr>
-            <p:ph type="title"/>
-          </p:nvPr>
-        </p:nvSpPr>
-        <p:spPr>
-          <a:xfrm>
-            <a:off x="245330" y="299902"/>
-            <a:ext cx="2999760" cy="271379"/>
-          </a:xfrm>
-        </p:spPr>
-        <p:txBody>
-          <a:bodyPr/>
-          <a:lstStyle/>
-          <a:p>
-            <a:r>
-              <a:rPr lang="en-US" sz="1600">
-                <a:cs typeface="Arial"/>
-              </a:rPr>
-              <a:t>Preference RMIT lockup</a:t>
-            </a:r>
-          </a:p>
-        </p:txBody>
-      </p:sp>
-      <p:sp>
-        <p:nvSpPr>
-          <p:cNvPr id="18" name="TextBox 17">
-            <a:extLst>
-              <a:ext uri="{FF2B5EF4-FFF2-40B4-BE49-F238E27FC236}">
-                <a16:creationId xmlns:a16="http://schemas.microsoft.com/office/drawing/2014/main" id="{96A224C3-D33C-21F8-7846-B954DBFE0B6C}"/>
-              </a:ext>
-            </a:extLst>
-          </p:cNvPr>
-          <p:cNvSpPr txBox="1"/>
-          <p:nvPr/>
-        </p:nvSpPr>
-        <p:spPr>
-          <a:xfrm>
-            <a:off x="4975251" y="2604106"/>
-            <a:ext cx="2894893" cy="230832"/>
-          </a:xfrm>
-          <a:prstGeom prst="rect">
-            <a:avLst/>
-          </a:prstGeom>
-          <a:solidFill>
-            <a:schemeClr val="tx2"/>
-          </a:solidFill>
-        </p:spPr>
-        <p:txBody>
-          <a:bodyPr vert="horz" wrap="square" lIns="91440" tIns="45720" rIns="91440" bIns="45720" rtlCol="0" anchor="t" anchorCtr="0">
-            <a:spAutoFit/>
-          </a:bodyPr>
-          <a:lstStyle/>
-          <a:p>
-            <a:r>
-              <a:rPr lang="en-US" sz="900">
-                <a:solidFill>
-                  <a:srgbClr val="000054"/>
-                </a:solidFill>
-                <a:latin typeface="Calibri" panose="020F0502020204030204" pitchFamily="34" charset="0"/>
-                <a:ea typeface="Calibri" panose="020F0502020204030204" pitchFamily="34" charset="0"/>
-                <a:cs typeface="Calibri" panose="020F0502020204030204" pitchFamily="34" charset="0"/>
-              </a:rPr>
-              <a:t>“Only at RMIT can you…” lockup for reference</a:t>
-            </a:r>
-          </a:p>
-        </p:txBody>
-      </p:sp>
-      <p:pic>
-        <p:nvPicPr>
-          <p:cNvPr id="24" name="Picture 23">
-            <a:extLst>
-              <a:ext uri="{FF2B5EF4-FFF2-40B4-BE49-F238E27FC236}">
-                <a16:creationId xmlns:a16="http://schemas.microsoft.com/office/drawing/2014/main" id="{A7594C53-D930-066A-AF0A-8AF28B6A76A1}"/>
-              </a:ext>
-            </a:extLst>
-          </p:cNvPr>
-          <p:cNvPicPr>
-            <a:picLocks noChangeAspect="1"/>
-          </p:cNvPicPr>
-          <p:nvPr/>
-        </p:nvPicPr>
-        <p:blipFill>
-          <a:blip r:embed="rId2" cstate="print">
-            <a:extLst>
-              <a:ext uri="{28A0092B-C50C-407E-A947-70E740481C1C}">
-                <a14:useLocalDpi xmlns:a14="http://schemas.microsoft.com/office/drawing/2010/main" val="0"/>
-              </a:ext>
-            </a:extLst>
-          </a:blip>
-          <a:stretch>
-            <a:fillRect/>
-          </a:stretch>
-        </p:blipFill>
-        <p:spPr>
-          <a:xfrm>
-            <a:off x="1121055" y="949720"/>
-            <a:ext cx="2462080" cy="2053153"/>
-          </a:xfrm>
-          <a:prstGeom prst="rect">
-            <a:avLst/>
-          </a:prstGeom>
-        </p:spPr>
-      </p:pic>
-      <p:pic>
-        <p:nvPicPr>
-          <p:cNvPr id="28" name="Picture 27">
-            <a:extLst>
-              <a:ext uri="{FF2B5EF4-FFF2-40B4-BE49-F238E27FC236}">
-                <a16:creationId xmlns:a16="http://schemas.microsoft.com/office/drawing/2014/main" id="{423DA413-0841-695A-5820-94AE12372DF3}"/>
-              </a:ext>
-            </a:extLst>
-          </p:cNvPr>
-          <p:cNvPicPr>
-            <a:picLocks noChangeAspect="1"/>
-          </p:cNvPicPr>
-          <p:nvPr/>
-        </p:nvPicPr>
-        <p:blipFill>
-          <a:blip r:embed="rId3" cstate="print">
-            <a:extLst>
-              <a:ext uri="{28A0092B-C50C-407E-A947-70E740481C1C}">
-                <a14:useLocalDpi xmlns:a14="http://schemas.microsoft.com/office/drawing/2010/main" val="0"/>
-              </a:ext>
-            </a:extLst>
-          </a:blip>
-          <a:srcRect l="51307"/>
-          <a:stretch>
-            <a:fillRect/>
-          </a:stretch>
-        </p:blipFill>
-        <p:spPr>
-          <a:xfrm>
-            <a:off x="1121055" y="3095334"/>
-            <a:ext cx="2462080" cy="1285914"/>
-          </a:xfrm>
-          <a:prstGeom prst="rect">
-            <a:avLst/>
-          </a:prstGeom>
-        </p:spPr>
-      </p:pic>
-      <p:sp>
-        <p:nvSpPr>
-          <p:cNvPr id="31" name="TextBox 30">
-            <a:extLst>
-              <a:ext uri="{FF2B5EF4-FFF2-40B4-BE49-F238E27FC236}">
-                <a16:creationId xmlns:a16="http://schemas.microsoft.com/office/drawing/2014/main" id="{F56F98BD-8D14-4052-5006-0879A2A34393}"/>
-              </a:ext>
-            </a:extLst>
-          </p:cNvPr>
-          <p:cNvSpPr txBox="1"/>
-          <p:nvPr/>
-        </p:nvSpPr>
-        <p:spPr>
-          <a:xfrm>
-            <a:off x="4975252" y="3931220"/>
-            <a:ext cx="1644210" cy="507831"/>
-          </a:xfrm>
-          <a:prstGeom prst="rect">
-            <a:avLst/>
-          </a:prstGeom>
-          <a:solidFill>
-            <a:schemeClr val="tx2"/>
-          </a:solidFill>
-        </p:spPr>
-        <p:txBody>
-          <a:bodyPr vert="horz" wrap="square" lIns="91440" tIns="45720" rIns="91440" bIns="45720" rtlCol="0" anchor="t" anchorCtr="0">
-            <a:spAutoFit/>
-          </a:bodyPr>
-          <a:lstStyle/>
-          <a:p>
-            <a:r>
-              <a:rPr lang="en-US" sz="900">
-                <a:solidFill>
-                  <a:srgbClr val="000054"/>
-                </a:solidFill>
-                <a:latin typeface="Calibri" panose="020F0502020204030204" pitchFamily="34" charset="0"/>
-                <a:ea typeface="Calibri" panose="020F0502020204030204" pitchFamily="34" charset="0"/>
-                <a:cs typeface="Calibri" panose="020F0502020204030204" pitchFamily="34" charset="0"/>
-              </a:rPr>
-              <a:t>Dedicated option to </a:t>
-            </a:r>
-            <a:r>
-              <a:rPr lang="en-US" sz="900" err="1">
-                <a:solidFill>
-                  <a:srgbClr val="000054"/>
-                </a:solidFill>
-                <a:latin typeface="Calibri" panose="020F0502020204030204" pitchFamily="34" charset="0"/>
-                <a:ea typeface="Calibri" panose="020F0502020204030204" pitchFamily="34" charset="0"/>
-                <a:cs typeface="Calibri" panose="020F0502020204030204" pitchFamily="34" charset="0"/>
-              </a:rPr>
-              <a:t>prioritise</a:t>
-            </a:r>
-            <a:r>
-              <a:rPr lang="en-US" sz="900">
-                <a:solidFill>
-                  <a:srgbClr val="000054"/>
-                </a:solidFill>
-                <a:latin typeface="Calibri" panose="020F0502020204030204" pitchFamily="34" charset="0"/>
-                <a:ea typeface="Calibri" panose="020F0502020204030204" pitchFamily="34" charset="0"/>
-                <a:cs typeface="Calibri" panose="020F0502020204030204" pitchFamily="34" charset="0"/>
-              </a:rPr>
-              <a:t> readability for small sizes (728x90 and 320x50)</a:t>
-            </a:r>
-          </a:p>
-        </p:txBody>
-      </p:sp>
-      <p:pic>
-        <p:nvPicPr>
-          <p:cNvPr id="34" name="Picture 33">
-            <a:extLst>
-              <a:ext uri="{FF2B5EF4-FFF2-40B4-BE49-F238E27FC236}">
-                <a16:creationId xmlns:a16="http://schemas.microsoft.com/office/drawing/2014/main" id="{6E36379B-2C1B-604F-9DA5-27CFC274933B}"/>
-              </a:ext>
-            </a:extLst>
-          </p:cNvPr>
-          <p:cNvPicPr>
-            <a:picLocks noChangeAspect="1"/>
-          </p:cNvPicPr>
-          <p:nvPr/>
-        </p:nvPicPr>
-        <p:blipFill>
-          <a:blip r:embed="rId4" cstate="print">
-            <a:extLst>
-              <a:ext uri="{28A0092B-C50C-407E-A947-70E740481C1C}">
-                <a14:useLocalDpi xmlns:a14="http://schemas.microsoft.com/office/drawing/2010/main" val="0"/>
-              </a:ext>
-            </a:extLst>
-          </a:blip>
-          <a:srcRect b="52385"/>
-          <a:stretch>
-            <a:fillRect/>
-          </a:stretch>
-        </p:blipFill>
-        <p:spPr>
-          <a:xfrm>
-            <a:off x="5062893" y="3125612"/>
-            <a:ext cx="1865212" cy="740093"/>
-          </a:xfrm>
-          <a:prstGeom prst="rect">
-            <a:avLst/>
-          </a:prstGeom>
-        </p:spPr>
-      </p:pic>
-      <p:pic>
-        <p:nvPicPr>
-          <p:cNvPr id="36" name="Picture 35">
-            <a:extLst>
-              <a:ext uri="{FF2B5EF4-FFF2-40B4-BE49-F238E27FC236}">
-                <a16:creationId xmlns:a16="http://schemas.microsoft.com/office/drawing/2014/main" id="{10724E9E-810A-1148-AC2D-5D3901A21852}"/>
-              </a:ext>
-            </a:extLst>
-          </p:cNvPr>
-          <p:cNvPicPr>
-            <a:picLocks noChangeAspect="1"/>
-          </p:cNvPicPr>
-          <p:nvPr/>
-        </p:nvPicPr>
-        <p:blipFill>
-          <a:blip r:embed="rId5" cstate="print">
-            <a:extLst>
-              <a:ext uri="{28A0092B-C50C-407E-A947-70E740481C1C}">
-                <a14:useLocalDpi xmlns:a14="http://schemas.microsoft.com/office/drawing/2010/main" val="0"/>
-              </a:ext>
-            </a:extLst>
-          </a:blip>
-          <a:stretch>
-            <a:fillRect/>
-          </a:stretch>
-        </p:blipFill>
-        <p:spPr>
-          <a:xfrm>
-            <a:off x="5058315" y="989957"/>
-            <a:ext cx="1897578" cy="1581793"/>
-          </a:xfrm>
-          <a:prstGeom prst="rect">
-            <a:avLst/>
-          </a:prstGeom>
-        </p:spPr>
-      </p:pic>
-      <p:cxnSp>
-        <p:nvCxnSpPr>
-          <p:cNvPr id="4" name="Straight Connector 3">
-            <a:extLst>
-              <a:ext uri="{FF2B5EF4-FFF2-40B4-BE49-F238E27FC236}">
-                <a16:creationId xmlns:a16="http://schemas.microsoft.com/office/drawing/2014/main" id="{1843BEAC-BB8E-0E6F-1E0B-FDEA382A6E6F}"/>
-              </a:ext>
-            </a:extLst>
-          </p:cNvPr>
-          <p:cNvCxnSpPr/>
-          <p:nvPr/>
-        </p:nvCxnSpPr>
-        <p:spPr>
-          <a:xfrm>
-            <a:off x="4521550" y="643233"/>
-            <a:ext cx="0" cy="3941379"/>
-          </a:xfrm>
-          <a:prstGeom prst="line">
-            <a:avLst/>
-          </a:prstGeom>
-        </p:spPr>
-        <p:style>
-          <a:lnRef idx="1">
-            <a:schemeClr val="accent1"/>
-          </a:lnRef>
-          <a:fillRef idx="0">
-            <a:schemeClr val="accent1"/>
-          </a:fillRef>
-          <a:effectRef idx="0">
-            <a:schemeClr val="accent1"/>
-          </a:effectRef>
-          <a:fontRef idx="minor">
-            <a:schemeClr val="tx1"/>
-          </a:fontRef>
-        </p:style>
-      </p:cxnSp>
-    </p:spTree>
-    <p:extLst>
-      <p:ext uri="{BB962C8B-B14F-4D97-AF65-F5344CB8AC3E}">
-        <p14:creationId xmlns:p14="http://schemas.microsoft.com/office/powerpoint/2010/main" val="4154937665"/>
-      </p:ext>
-    </p:extLst>
-  </p:cSld>
-  <p:clrMapOvr>
-    <a:masterClrMapping/>
-  </p:clrMapOvr>
-</p:sld>
-</file>
-
-<file path=ppt/slides/slide2.xml><?xml version="1.0" encoding="utf-8"?>
+<file path=ppt/slides/slide3.xml><?xml version="1.0" encoding="utf-8"?>
 <p:sld xmlns:a="http://schemas.openxmlformats.org/drawingml/2006/main" xmlns:r="http://schemas.openxmlformats.org/officeDocument/2006/relationships" xmlns:p="http://schemas.openxmlformats.org/presentationml/2006/main">
   <p:cSld>
     <p:spTree>
@@ -7861,14 +11927,10 @@
                 <a:ea typeface="Calibri" panose="020F0502020204030204" pitchFamily="34" charset="0"/>
                 <a:cs typeface="Calibri" panose="020F0502020204030204" pitchFamily="34" charset="0"/>
               </a:rPr>
-              <a:t>Built so stakeholders can see what's being delivered without asking.</a:t>
-            </a:r>
-          </a:p>
-          <a:p>
-            <a:pPr marL="171450" indent="-171450">
-              <a:buFont typeface="Arial" panose="020B0604020202020204" pitchFamily="34" charset="0"/>
-              <a:buChar char="•"/>
-            </a:pPr>
+              <a:t>No more chasing a status update — stakeholders see it directly.</a:t>
+            </a:r>
+          </a:p>
+          <a:p>
             <a:endParaRPr lang="en-AU" sz="1000" b="0">
               <a:latin typeface="Calibri" panose="020F0502020204030204" pitchFamily="34" charset="0"/>
               <a:ea typeface="Calibri" panose="020F0502020204030204" pitchFamily="34" charset="0"/>
@@ -7890,7 +11952,7 @@
 </p:sld>
 </file>
 
-<file path=ppt/slides/slide3.xml><?xml version="1.0" encoding="utf-8"?>
+<file path=ppt/slides/slide4.xml><?xml version="1.0" encoding="utf-8"?>
 <p:sld xmlns:a="http://schemas.openxmlformats.org/drawingml/2006/main" xmlns:r="http://schemas.openxmlformats.org/officeDocument/2006/relationships" xmlns:p="http://schemas.openxmlformats.org/presentationml/2006/main">
   <p:cSld>
     <p:spTree>
@@ -7931,7 +11993,7 @@
         </p:nvSpPr>
         <p:spPr>
           <a:xfrm>
-            <a:off x="419708" y="372429"/>
+            <a:off x="419708" y="885934"/>
             <a:ext cx="2174846" cy="613562"/>
           </a:xfrm>
         </p:spPr>
@@ -7946,16 +12008,6 @@
                 </a:highlight>
               </a:rPr>
               <a:t>Dashboard</a:t>
-            </a:r>
-          </a:p>
-          <a:p>
-            <a:r>
-              <a:rPr lang="en-US">
-                <a:highlight>
-                  <a:srgbClr val="000054"/>
-                </a:highlight>
-              </a:rPr>
-              <a:t>breakdown</a:t>
             </a:r>
           </a:p>
           <a:p>
@@ -8320,7 +12372,7 @@
 </p:sld>
 </file>
 
-<file path=ppt/slides/slide4.xml><?xml version="1.0" encoding="utf-8"?>
+<file path=ppt/slides/slide5.xml><?xml version="1.0" encoding="utf-8"?>
 <p:sld xmlns:a="http://schemas.openxmlformats.org/drawingml/2006/main" xmlns:r="http://schemas.openxmlformats.org/officeDocument/2006/relationships" xmlns:p="http://schemas.openxmlformats.org/presentationml/2006/main">
   <p:cSld>
     <p:spTree>
@@ -8345,63 +12397,6 @@
       </p:grpSpPr>
       <p:sp>
         <p:nvSpPr>
-          <p:cNvPr id="3" name="Subtitle 2">
-            <a:extLst>
-              <a:ext uri="{FF2B5EF4-FFF2-40B4-BE49-F238E27FC236}">
-                <a16:creationId xmlns:a16="http://schemas.microsoft.com/office/drawing/2014/main" id="{E02C759A-09E1-3756-D2D5-4881CB5F1A8F}"/>
-              </a:ext>
-            </a:extLst>
-          </p:cNvPr>
-          <p:cNvSpPr>
-            <a:spLocks noGrp="1"/>
-          </p:cNvSpPr>
-          <p:nvPr>
-            <p:ph type="subTitle" idx="1"/>
-          </p:nvPr>
-        </p:nvSpPr>
-        <p:spPr>
-          <a:xfrm>
-            <a:off x="419708" y="372429"/>
-            <a:ext cx="2174846" cy="613562"/>
-          </a:xfrm>
-        </p:spPr>
-        <p:txBody>
-          <a:bodyPr/>
-          <a:lstStyle/>
-          <a:p>
-            <a:r>
-              <a:rPr lang="en-US">
-                <a:highlight>
-                  <a:srgbClr val="000054"/>
-                </a:highlight>
-              </a:rPr>
-              <a:t>Dashboard</a:t>
-            </a:r>
-          </a:p>
-          <a:p>
-            <a:r>
-              <a:rPr lang="en-US">
-                <a:highlight>
-                  <a:srgbClr val="000054"/>
-                </a:highlight>
-              </a:rPr>
-              <a:t>breakdown</a:t>
-            </a:r>
-          </a:p>
-          <a:p>
-            <a:endParaRPr lang="en-US">
-              <a:cs typeface="Arial" panose="020B0604020202020204"/>
-            </a:endParaRPr>
-          </a:p>
-          <a:p>
-            <a:endParaRPr lang="en-AU">
-              <a:cs typeface="Arial" panose="020B0604020202020204"/>
-            </a:endParaRPr>
-          </a:p>
-        </p:txBody>
-      </p:sp>
-      <p:sp>
-        <p:nvSpPr>
           <p:cNvPr id="10" name="Subtitle 2">
             <a:extLst>
               <a:ext uri="{FF2B5EF4-FFF2-40B4-BE49-F238E27FC236}">
@@ -8678,6 +12673,239 @@
           </a:prstGeom>
         </p:spPr>
       </p:pic>
+      <p:sp>
+        <p:nvSpPr>
+          <p:cNvPr id="7" name="Subtitle 2">
+            <a:extLst>
+              <a:ext uri="{FF2B5EF4-FFF2-40B4-BE49-F238E27FC236}">
+                <a16:creationId xmlns:a16="http://schemas.microsoft.com/office/drawing/2014/main" id="{449B342A-9179-3BBD-81DB-F134F9E26587}"/>
+              </a:ext>
+            </a:extLst>
+          </p:cNvPr>
+          <p:cNvSpPr txBox="1">
+            <a:spLocks/>
+          </p:cNvSpPr>
+          <p:nvPr/>
+        </p:nvSpPr>
+        <p:spPr>
+          <a:xfrm>
+            <a:off x="419708" y="885934"/>
+            <a:ext cx="2174846" cy="613562"/>
+          </a:xfrm>
+          <a:prstGeom prst="rect">
+            <a:avLst/>
+          </a:prstGeom>
+        </p:spPr>
+        <p:txBody>
+          <a:bodyPr vert="horz" lIns="91440" tIns="45720" rIns="91440" bIns="45720" rtlCol="0" anchor="t" anchorCtr="0">
+            <a:noAutofit/>
+          </a:bodyPr>
+          <a:lstStyle>
+            <a:lvl1pPr marL="0" indent="0" algn="l" defTabSz="685783" rtl="0" eaLnBrk="1" latinLnBrk="0" hangingPunct="1">
+              <a:lnSpc>
+                <a:spcPct val="100000"/>
+              </a:lnSpc>
+              <a:spcBef>
+                <a:spcPts val="300"/>
+              </a:spcBef>
+              <a:spcAft>
+                <a:spcPts val="300"/>
+              </a:spcAft>
+              <a:buFont typeface="Arial" panose="020B0604020202020204" pitchFamily="34" charset="0"/>
+              <a:buNone/>
+              <a:defRPr sz="2700" b="1" kern="1200" baseline="0">
+                <a:solidFill>
+                  <a:schemeClr val="bg1"/>
+                </a:solidFill>
+                <a:latin typeface="+mn-lt"/>
+                <a:ea typeface="+mn-ea"/>
+                <a:cs typeface="+mn-cs"/>
+              </a:defRPr>
+            </a:lvl1pPr>
+            <a:lvl2pPr marL="342892" indent="0" algn="ctr" defTabSz="685783" rtl="0" eaLnBrk="1" latinLnBrk="0" hangingPunct="1">
+              <a:lnSpc>
+                <a:spcPct val="100000"/>
+              </a:lnSpc>
+              <a:spcBef>
+                <a:spcPts val="300"/>
+              </a:spcBef>
+              <a:spcAft>
+                <a:spcPts val="300"/>
+              </a:spcAft>
+              <a:buClr>
+                <a:schemeClr val="accent2"/>
+              </a:buClr>
+              <a:buFont typeface="Wingdings" pitchFamily="2" charset="2"/>
+              <a:buNone/>
+              <a:tabLst/>
+              <a:defRPr sz="1500" kern="1200">
+                <a:solidFill>
+                  <a:schemeClr val="tx1"/>
+                </a:solidFill>
+                <a:latin typeface="+mn-lt"/>
+                <a:ea typeface="+mn-ea"/>
+                <a:cs typeface="+mn-cs"/>
+              </a:defRPr>
+            </a:lvl2pPr>
+            <a:lvl3pPr marL="685783" indent="0" algn="ctr" defTabSz="685783" rtl="0" eaLnBrk="1" latinLnBrk="0" hangingPunct="1">
+              <a:lnSpc>
+                <a:spcPct val="90000"/>
+              </a:lnSpc>
+              <a:spcBef>
+                <a:spcPts val="300"/>
+              </a:spcBef>
+              <a:spcAft>
+                <a:spcPts val="300"/>
+              </a:spcAft>
+              <a:buClr>
+                <a:schemeClr val="accent2"/>
+              </a:buClr>
+              <a:buFont typeface="Wingdings" pitchFamily="2" charset="2"/>
+              <a:buNone/>
+              <a:tabLst/>
+              <a:defRPr lang="en-US" sz="1350" kern="1200" baseline="0">
+                <a:solidFill>
+                  <a:schemeClr val="tx1"/>
+                </a:solidFill>
+                <a:latin typeface="+mn-lt"/>
+                <a:ea typeface="+mn-ea"/>
+                <a:cs typeface="+mn-cs"/>
+              </a:defRPr>
+            </a:lvl3pPr>
+            <a:lvl4pPr marL="1028675" indent="0" algn="ctr" defTabSz="685783" rtl="0" eaLnBrk="1" latinLnBrk="0" hangingPunct="1">
+              <a:lnSpc>
+                <a:spcPct val="90000"/>
+              </a:lnSpc>
+              <a:spcBef>
+                <a:spcPts val="375"/>
+              </a:spcBef>
+              <a:buClr>
+                <a:schemeClr val="accent4"/>
+              </a:buClr>
+              <a:buFont typeface="Wingdings" pitchFamily="2" charset="2"/>
+              <a:buNone/>
+              <a:defRPr sz="1200" kern="1200">
+                <a:solidFill>
+                  <a:schemeClr val="tx1"/>
+                </a:solidFill>
+                <a:latin typeface="+mn-lt"/>
+                <a:ea typeface="+mn-ea"/>
+                <a:cs typeface="+mn-cs"/>
+              </a:defRPr>
+            </a:lvl4pPr>
+            <a:lvl5pPr marL="1371566" indent="0" algn="ctr" defTabSz="685783" rtl="0" eaLnBrk="1" latinLnBrk="0" hangingPunct="1">
+              <a:lnSpc>
+                <a:spcPct val="90000"/>
+              </a:lnSpc>
+              <a:spcBef>
+                <a:spcPts val="375"/>
+              </a:spcBef>
+              <a:buFont typeface="Arial" panose="020B0604020202020204" pitchFamily="34" charset="0"/>
+              <a:buNone/>
+              <a:defRPr sz="1200" kern="1200">
+                <a:solidFill>
+                  <a:schemeClr val="tx1"/>
+                </a:solidFill>
+                <a:latin typeface="+mn-lt"/>
+                <a:ea typeface="+mn-ea"/>
+                <a:cs typeface="+mn-cs"/>
+              </a:defRPr>
+            </a:lvl5pPr>
+            <a:lvl6pPr marL="1714457" indent="0" algn="ctr" defTabSz="685783" rtl="0" eaLnBrk="1" latinLnBrk="0" hangingPunct="1">
+              <a:lnSpc>
+                <a:spcPct val="90000"/>
+              </a:lnSpc>
+              <a:spcBef>
+                <a:spcPts val="375"/>
+              </a:spcBef>
+              <a:buFont typeface="Arial" panose="020B0604020202020204" pitchFamily="34" charset="0"/>
+              <a:buNone/>
+              <a:defRPr sz="1200" kern="1200">
+                <a:solidFill>
+                  <a:schemeClr val="tx1"/>
+                </a:solidFill>
+                <a:latin typeface="+mn-lt"/>
+                <a:ea typeface="+mn-ea"/>
+                <a:cs typeface="+mn-cs"/>
+              </a:defRPr>
+            </a:lvl6pPr>
+            <a:lvl7pPr marL="2057348" indent="0" algn="ctr" defTabSz="685783" rtl="0" eaLnBrk="1" latinLnBrk="0" hangingPunct="1">
+              <a:lnSpc>
+                <a:spcPct val="90000"/>
+              </a:lnSpc>
+              <a:spcBef>
+                <a:spcPts val="375"/>
+              </a:spcBef>
+              <a:buFont typeface="Arial" panose="020B0604020202020204" pitchFamily="34" charset="0"/>
+              <a:buNone/>
+              <a:defRPr sz="1200" kern="1200">
+                <a:solidFill>
+                  <a:schemeClr val="tx1"/>
+                </a:solidFill>
+                <a:latin typeface="+mn-lt"/>
+                <a:ea typeface="+mn-ea"/>
+                <a:cs typeface="+mn-cs"/>
+              </a:defRPr>
+            </a:lvl7pPr>
+            <a:lvl8pPr marL="2400240" indent="0" algn="ctr" defTabSz="685783" rtl="0" eaLnBrk="1" latinLnBrk="0" hangingPunct="1">
+              <a:lnSpc>
+                <a:spcPct val="90000"/>
+              </a:lnSpc>
+              <a:spcBef>
+                <a:spcPts val="375"/>
+              </a:spcBef>
+              <a:buFont typeface="Arial" panose="020B0604020202020204" pitchFamily="34" charset="0"/>
+              <a:buNone/>
+              <a:defRPr sz="1200" kern="1200">
+                <a:solidFill>
+                  <a:schemeClr val="tx1"/>
+                </a:solidFill>
+                <a:latin typeface="+mn-lt"/>
+                <a:ea typeface="+mn-ea"/>
+                <a:cs typeface="+mn-cs"/>
+              </a:defRPr>
+            </a:lvl8pPr>
+            <a:lvl9pPr marL="2743132" indent="0" algn="ctr" defTabSz="685783" rtl="0" eaLnBrk="1" latinLnBrk="0" hangingPunct="1">
+              <a:lnSpc>
+                <a:spcPct val="90000"/>
+              </a:lnSpc>
+              <a:spcBef>
+                <a:spcPts val="375"/>
+              </a:spcBef>
+              <a:buFont typeface="Arial" panose="020B0604020202020204" pitchFamily="34" charset="0"/>
+              <a:buNone/>
+              <a:defRPr sz="1200" kern="1200">
+                <a:solidFill>
+                  <a:schemeClr val="tx1"/>
+                </a:solidFill>
+                <a:latin typeface="+mn-lt"/>
+                <a:ea typeface="+mn-ea"/>
+                <a:cs typeface="+mn-cs"/>
+              </a:defRPr>
+            </a:lvl9pPr>
+          </a:lstStyle>
+          <a:p>
+            <a:r>
+              <a:rPr lang="en-US">
+                <a:highlight>
+                  <a:srgbClr val="000054"/>
+                </a:highlight>
+              </a:rPr>
+              <a:t>Dashboard</a:t>
+            </a:r>
+          </a:p>
+          <a:p>
+            <a:endParaRPr lang="en-US">
+              <a:cs typeface="Arial" panose="020B0604020202020204"/>
+            </a:endParaRPr>
+          </a:p>
+          <a:p>
+            <a:endParaRPr lang="en-AU">
+              <a:cs typeface="Arial" panose="020B0604020202020204"/>
+            </a:endParaRPr>
+          </a:p>
+        </p:txBody>
+      </p:sp>
     </p:spTree>
     <p:extLst>
       <p:ext uri="{BB962C8B-B14F-4D97-AF65-F5344CB8AC3E}">
@@ -8691,7 +12919,7 @@
 </p:sld>
 </file>
 
-<file path=ppt/slides/slide5.xml><?xml version="1.0" encoding="utf-8"?>
+<file path=ppt/slides/slide6.xml><?xml version="1.0" encoding="utf-8"?>
 <p:sld xmlns:a="http://schemas.openxmlformats.org/drawingml/2006/main" xmlns:r="http://schemas.openxmlformats.org/officeDocument/2006/relationships" xmlns:p="http://schemas.openxmlformats.org/presentationml/2006/main">
   <p:cSld>
     <p:spTree>
@@ -8776,10 +13004,10 @@
       </p:pic>
       <p:sp>
         <p:nvSpPr>
-          <p:cNvPr id="5" name="Subtitle 2">
-            <a:extLst>
-              <a:ext uri="{FF2B5EF4-FFF2-40B4-BE49-F238E27FC236}">
-                <a16:creationId xmlns:a16="http://schemas.microsoft.com/office/drawing/2014/main" id="{2D69F2AF-2002-6B4A-E4ED-2664B0BD401F}"/>
+          <p:cNvPr id="6" name="Subtitle 2">
+            <a:extLst>
+              <a:ext uri="{FF2B5EF4-FFF2-40B4-BE49-F238E27FC236}">
+                <a16:creationId xmlns:a16="http://schemas.microsoft.com/office/drawing/2014/main" id="{3E65CD83-5DDC-000A-A16C-334C44DA3497}"/>
               </a:ext>
             </a:extLst>
           </p:cNvPr>
@@ -8790,8 +13018,8 @@
         </p:nvSpPr>
         <p:spPr>
           <a:xfrm>
-            <a:off x="419708" y="372429"/>
-            <a:ext cx="2174846" cy="613562"/>
+            <a:off x="387382" y="1764241"/>
+            <a:ext cx="2427889" cy="2600204"/>
           </a:xfrm>
           <a:prstGeom prst="rect">
             <a:avLst/>
@@ -8987,6 +13215,68 @@
           </a:lstStyle>
           <a:p>
             <a:r>
+              <a:rPr lang="en-US" sz="1000">
+                <a:highlight>
+                  <a:srgbClr val="000054"/>
+                </a:highlight>
+              </a:rPr>
+              <a:t>Asset count by campaign</a:t>
+            </a:r>
+          </a:p>
+          <a:p>
+            <a:r>
+              <a:rPr lang="en-US" sz="800" b="0"/>
+              <a:t>Total deliverables produced per named campaign — Always On, BAU and Others excluded, so it's just the campaign-driven push.</a:t>
+            </a:r>
+          </a:p>
+          <a:p>
+            <a:endParaRPr lang="en-US" sz="800" b="0"/>
+          </a:p>
+          <a:p>
+            <a:r>
+              <a:rPr lang="en-US" sz="1000">
+                <a:highlight>
+                  <a:srgbClr val="000054"/>
+                </a:highlight>
+              </a:rPr>
+              <a:t>Squads demand distribution</a:t>
+            </a:r>
+          </a:p>
+          <a:p>
+            <a:r>
+              <a:rPr lang="en-US" sz="800" b="0"/>
+              <a:t>For each asset type, who's asking for it — the split between Domestic, INTON and Other Stakeholders. Shows which deliverables are one squad's core demands.</a:t>
+            </a:r>
+          </a:p>
+        </p:txBody>
+      </p:sp>
+      <p:sp>
+        <p:nvSpPr>
+          <p:cNvPr id="7" name="Subtitle 2">
+            <a:extLst>
+              <a:ext uri="{FF2B5EF4-FFF2-40B4-BE49-F238E27FC236}">
+                <a16:creationId xmlns:a16="http://schemas.microsoft.com/office/drawing/2014/main" id="{7747D342-0029-460E-1C74-98A0E5BB523F}"/>
+              </a:ext>
+            </a:extLst>
+          </p:cNvPr>
+          <p:cNvSpPr>
+            <a:spLocks noGrp="1"/>
+          </p:cNvSpPr>
+          <p:nvPr>
+            <p:ph type="subTitle" idx="1"/>
+          </p:nvPr>
+        </p:nvSpPr>
+        <p:spPr>
+          <a:xfrm>
+            <a:off x="419708" y="885934"/>
+            <a:ext cx="2174846" cy="613562"/>
+          </a:xfrm>
+        </p:spPr>
+        <p:txBody>
+          <a:bodyPr/>
+          <a:lstStyle/>
+          <a:p>
+            <a:r>
               <a:rPr lang="en-US">
                 <a:highlight>
                   <a:srgbClr val="000054"/>
@@ -8996,16 +13286,6 @@
             </a:r>
           </a:p>
           <a:p>
-            <a:r>
-              <a:rPr lang="en-US">
-                <a:highlight>
-                  <a:srgbClr val="000054"/>
-                </a:highlight>
-              </a:rPr>
-              <a:t>breakdown</a:t>
-            </a:r>
-          </a:p>
-          <a:p>
             <a:endParaRPr lang="en-US">
               <a:cs typeface="Arial" panose="020B0604020202020204"/>
             </a:endParaRPr>
@@ -9014,254 +13294,6 @@
             <a:endParaRPr lang="en-AU">
               <a:cs typeface="Arial" panose="020B0604020202020204"/>
             </a:endParaRPr>
-          </a:p>
-        </p:txBody>
-      </p:sp>
-      <p:sp>
-        <p:nvSpPr>
-          <p:cNvPr id="6" name="Subtitle 2">
-            <a:extLst>
-              <a:ext uri="{FF2B5EF4-FFF2-40B4-BE49-F238E27FC236}">
-                <a16:creationId xmlns:a16="http://schemas.microsoft.com/office/drawing/2014/main" id="{3E65CD83-5DDC-000A-A16C-334C44DA3497}"/>
-              </a:ext>
-            </a:extLst>
-          </p:cNvPr>
-          <p:cNvSpPr txBox="1">
-            <a:spLocks/>
-          </p:cNvSpPr>
-          <p:nvPr/>
-        </p:nvSpPr>
-        <p:spPr>
-          <a:xfrm>
-            <a:off x="387382" y="1764241"/>
-            <a:ext cx="2427889" cy="2600204"/>
-          </a:xfrm>
-          <a:prstGeom prst="rect">
-            <a:avLst/>
-          </a:prstGeom>
-        </p:spPr>
-        <p:txBody>
-          <a:bodyPr vert="horz" lIns="91440" tIns="45720" rIns="91440" bIns="45720" rtlCol="0" anchor="t" anchorCtr="0">
-            <a:noAutofit/>
-          </a:bodyPr>
-          <a:lstStyle>
-            <a:lvl1pPr marL="0" indent="0" algn="l" defTabSz="685783" rtl="0" eaLnBrk="1" latinLnBrk="0" hangingPunct="1">
-              <a:lnSpc>
-                <a:spcPct val="100000"/>
-              </a:lnSpc>
-              <a:spcBef>
-                <a:spcPts val="300"/>
-              </a:spcBef>
-              <a:spcAft>
-                <a:spcPts val="300"/>
-              </a:spcAft>
-              <a:buFont typeface="Arial" panose="020B0604020202020204" pitchFamily="34" charset="0"/>
-              <a:buNone/>
-              <a:defRPr sz="2700" b="1" kern="1200" baseline="0">
-                <a:solidFill>
-                  <a:schemeClr val="bg1"/>
-                </a:solidFill>
-                <a:latin typeface="+mn-lt"/>
-                <a:ea typeface="+mn-ea"/>
-                <a:cs typeface="+mn-cs"/>
-              </a:defRPr>
-            </a:lvl1pPr>
-            <a:lvl2pPr marL="342892" indent="0" algn="ctr" defTabSz="685783" rtl="0" eaLnBrk="1" latinLnBrk="0" hangingPunct="1">
-              <a:lnSpc>
-                <a:spcPct val="100000"/>
-              </a:lnSpc>
-              <a:spcBef>
-                <a:spcPts val="300"/>
-              </a:spcBef>
-              <a:spcAft>
-                <a:spcPts val="300"/>
-              </a:spcAft>
-              <a:buClr>
-                <a:schemeClr val="accent2"/>
-              </a:buClr>
-              <a:buFont typeface="Wingdings" pitchFamily="2" charset="2"/>
-              <a:buNone/>
-              <a:tabLst/>
-              <a:defRPr sz="1500" kern="1200">
-                <a:solidFill>
-                  <a:schemeClr val="tx1"/>
-                </a:solidFill>
-                <a:latin typeface="+mn-lt"/>
-                <a:ea typeface="+mn-ea"/>
-                <a:cs typeface="+mn-cs"/>
-              </a:defRPr>
-            </a:lvl2pPr>
-            <a:lvl3pPr marL="685783" indent="0" algn="ctr" defTabSz="685783" rtl="0" eaLnBrk="1" latinLnBrk="0" hangingPunct="1">
-              <a:lnSpc>
-                <a:spcPct val="90000"/>
-              </a:lnSpc>
-              <a:spcBef>
-                <a:spcPts val="300"/>
-              </a:spcBef>
-              <a:spcAft>
-                <a:spcPts val="300"/>
-              </a:spcAft>
-              <a:buClr>
-                <a:schemeClr val="accent2"/>
-              </a:buClr>
-              <a:buFont typeface="Wingdings" pitchFamily="2" charset="2"/>
-              <a:buNone/>
-              <a:tabLst/>
-              <a:defRPr lang="en-US" sz="1350" kern="1200" baseline="0">
-                <a:solidFill>
-                  <a:schemeClr val="tx1"/>
-                </a:solidFill>
-                <a:latin typeface="+mn-lt"/>
-                <a:ea typeface="+mn-ea"/>
-                <a:cs typeface="+mn-cs"/>
-              </a:defRPr>
-            </a:lvl3pPr>
-            <a:lvl4pPr marL="1028675" indent="0" algn="ctr" defTabSz="685783" rtl="0" eaLnBrk="1" latinLnBrk="0" hangingPunct="1">
-              <a:lnSpc>
-                <a:spcPct val="90000"/>
-              </a:lnSpc>
-              <a:spcBef>
-                <a:spcPts val="375"/>
-              </a:spcBef>
-              <a:buClr>
-                <a:schemeClr val="accent4"/>
-              </a:buClr>
-              <a:buFont typeface="Wingdings" pitchFamily="2" charset="2"/>
-              <a:buNone/>
-              <a:defRPr sz="1200" kern="1200">
-                <a:solidFill>
-                  <a:schemeClr val="tx1"/>
-                </a:solidFill>
-                <a:latin typeface="+mn-lt"/>
-                <a:ea typeface="+mn-ea"/>
-                <a:cs typeface="+mn-cs"/>
-              </a:defRPr>
-            </a:lvl4pPr>
-            <a:lvl5pPr marL="1371566" indent="0" algn="ctr" defTabSz="685783" rtl="0" eaLnBrk="1" latinLnBrk="0" hangingPunct="1">
-              <a:lnSpc>
-                <a:spcPct val="90000"/>
-              </a:lnSpc>
-              <a:spcBef>
-                <a:spcPts val="375"/>
-              </a:spcBef>
-              <a:buFont typeface="Arial" panose="020B0604020202020204" pitchFamily="34" charset="0"/>
-              <a:buNone/>
-              <a:defRPr sz="1200" kern="1200">
-                <a:solidFill>
-                  <a:schemeClr val="tx1"/>
-                </a:solidFill>
-                <a:latin typeface="+mn-lt"/>
-                <a:ea typeface="+mn-ea"/>
-                <a:cs typeface="+mn-cs"/>
-              </a:defRPr>
-            </a:lvl5pPr>
-            <a:lvl6pPr marL="1714457" indent="0" algn="ctr" defTabSz="685783" rtl="0" eaLnBrk="1" latinLnBrk="0" hangingPunct="1">
-              <a:lnSpc>
-                <a:spcPct val="90000"/>
-              </a:lnSpc>
-              <a:spcBef>
-                <a:spcPts val="375"/>
-              </a:spcBef>
-              <a:buFont typeface="Arial" panose="020B0604020202020204" pitchFamily="34" charset="0"/>
-              <a:buNone/>
-              <a:defRPr sz="1200" kern="1200">
-                <a:solidFill>
-                  <a:schemeClr val="tx1"/>
-                </a:solidFill>
-                <a:latin typeface="+mn-lt"/>
-                <a:ea typeface="+mn-ea"/>
-                <a:cs typeface="+mn-cs"/>
-              </a:defRPr>
-            </a:lvl6pPr>
-            <a:lvl7pPr marL="2057348" indent="0" algn="ctr" defTabSz="685783" rtl="0" eaLnBrk="1" latinLnBrk="0" hangingPunct="1">
-              <a:lnSpc>
-                <a:spcPct val="90000"/>
-              </a:lnSpc>
-              <a:spcBef>
-                <a:spcPts val="375"/>
-              </a:spcBef>
-              <a:buFont typeface="Arial" panose="020B0604020202020204" pitchFamily="34" charset="0"/>
-              <a:buNone/>
-              <a:defRPr sz="1200" kern="1200">
-                <a:solidFill>
-                  <a:schemeClr val="tx1"/>
-                </a:solidFill>
-                <a:latin typeface="+mn-lt"/>
-                <a:ea typeface="+mn-ea"/>
-                <a:cs typeface="+mn-cs"/>
-              </a:defRPr>
-            </a:lvl7pPr>
-            <a:lvl8pPr marL="2400240" indent="0" algn="ctr" defTabSz="685783" rtl="0" eaLnBrk="1" latinLnBrk="0" hangingPunct="1">
-              <a:lnSpc>
-                <a:spcPct val="90000"/>
-              </a:lnSpc>
-              <a:spcBef>
-                <a:spcPts val="375"/>
-              </a:spcBef>
-              <a:buFont typeface="Arial" panose="020B0604020202020204" pitchFamily="34" charset="0"/>
-              <a:buNone/>
-              <a:defRPr sz="1200" kern="1200">
-                <a:solidFill>
-                  <a:schemeClr val="tx1"/>
-                </a:solidFill>
-                <a:latin typeface="+mn-lt"/>
-                <a:ea typeface="+mn-ea"/>
-                <a:cs typeface="+mn-cs"/>
-              </a:defRPr>
-            </a:lvl8pPr>
-            <a:lvl9pPr marL="2743132" indent="0" algn="ctr" defTabSz="685783" rtl="0" eaLnBrk="1" latinLnBrk="0" hangingPunct="1">
-              <a:lnSpc>
-                <a:spcPct val="90000"/>
-              </a:lnSpc>
-              <a:spcBef>
-                <a:spcPts val="375"/>
-              </a:spcBef>
-              <a:buFont typeface="Arial" panose="020B0604020202020204" pitchFamily="34" charset="0"/>
-              <a:buNone/>
-              <a:defRPr sz="1200" kern="1200">
-                <a:solidFill>
-                  <a:schemeClr val="tx1"/>
-                </a:solidFill>
-                <a:latin typeface="+mn-lt"/>
-                <a:ea typeface="+mn-ea"/>
-                <a:cs typeface="+mn-cs"/>
-              </a:defRPr>
-            </a:lvl9pPr>
-          </a:lstStyle>
-          <a:p>
-            <a:r>
-              <a:rPr lang="en-US" sz="1000">
-                <a:highlight>
-                  <a:srgbClr val="000054"/>
-                </a:highlight>
-              </a:rPr>
-              <a:t>Asset count by campaign</a:t>
-            </a:r>
-          </a:p>
-          <a:p>
-            <a:r>
-              <a:rPr lang="en-US" sz="800" b="0"/>
-              <a:t>Total deliverables produced per named campaign — Always On, BAU and Others excluded, so it's just the campaign-driven push.</a:t>
-            </a:r>
-          </a:p>
-          <a:p>
-            <a:endParaRPr lang="en-US" sz="800" b="0"/>
-          </a:p>
-          <a:p>
-            <a:r>
-              <a:rPr lang="en-US" sz="1000">
-                <a:highlight>
-                  <a:srgbClr val="000054"/>
-                </a:highlight>
-              </a:rPr>
-              <a:t>Squads demand distribution</a:t>
-            </a:r>
-          </a:p>
-          <a:p>
-            <a:r>
-              <a:rPr lang="en-US" sz="800" b="0"/>
-              <a:t>For each asset type, who's asking for it — the split between Domestic, INTON and Other Stakeholders. Shows which deliverables are one squad's core business (Display ads, Print assets = mostly Domestic) versus shared across groups (Pages, GIF/Motion = mixed).</a:t>
-            </a:r>
           </a:p>
         </p:txBody>
       </p:sp>
@@ -9278,7 +13310,7 @@
 </p:sld>
 </file>
 
-<file path=ppt/slides/slide6.xml><?xml version="1.0" encoding="utf-8"?>
+<file path=ppt/slides/slide7.xml><?xml version="1.0" encoding="utf-8"?>
 <p:sld xmlns:a="http://schemas.openxmlformats.org/drawingml/2006/main" xmlns:r="http://schemas.openxmlformats.org/officeDocument/2006/relationships" xmlns:p="http://schemas.openxmlformats.org/presentationml/2006/main">
   <p:cSld>
     <p:spTree>
@@ -9301,12 +13333,284 @@
           <a:chExt cx="0" cy="0"/>
         </a:xfrm>
       </p:grpSpPr>
+      <p:sp>
+        <p:nvSpPr>
+          <p:cNvPr id="11" name="Subtitle 2">
+            <a:extLst>
+              <a:ext uri="{FF2B5EF4-FFF2-40B4-BE49-F238E27FC236}">
+                <a16:creationId xmlns:a16="http://schemas.microsoft.com/office/drawing/2014/main" id="{F1CD64DB-368A-3D7D-5B9C-3BCDA9D09341}"/>
+              </a:ext>
+            </a:extLst>
+          </p:cNvPr>
+          <p:cNvSpPr txBox="1">
+            <a:spLocks/>
+          </p:cNvSpPr>
+          <p:nvPr/>
+        </p:nvSpPr>
+        <p:spPr>
+          <a:xfrm>
+            <a:off x="387382" y="2555311"/>
+            <a:ext cx="2427889" cy="2600204"/>
+          </a:xfrm>
+          <a:prstGeom prst="rect">
+            <a:avLst/>
+          </a:prstGeom>
+        </p:spPr>
+        <p:txBody>
+          <a:bodyPr vert="horz" lIns="91440" tIns="45720" rIns="91440" bIns="45720" rtlCol="0" anchor="t" anchorCtr="0">
+            <a:noAutofit/>
+          </a:bodyPr>
+          <a:lstStyle>
+            <a:lvl1pPr marL="0" indent="0" algn="l" defTabSz="685783" rtl="0" eaLnBrk="1" latinLnBrk="0" hangingPunct="1">
+              <a:lnSpc>
+                <a:spcPct val="100000"/>
+              </a:lnSpc>
+              <a:spcBef>
+                <a:spcPts val="300"/>
+              </a:spcBef>
+              <a:spcAft>
+                <a:spcPts val="300"/>
+              </a:spcAft>
+              <a:buFont typeface="Arial" panose="020B0604020202020204" pitchFamily="34" charset="0"/>
+              <a:buNone/>
+              <a:defRPr sz="2700" b="1" kern="1200" baseline="0">
+                <a:solidFill>
+                  <a:schemeClr val="bg1"/>
+                </a:solidFill>
+                <a:latin typeface="+mn-lt"/>
+                <a:ea typeface="+mn-ea"/>
+                <a:cs typeface="+mn-cs"/>
+              </a:defRPr>
+            </a:lvl1pPr>
+            <a:lvl2pPr marL="342892" indent="0" algn="ctr" defTabSz="685783" rtl="0" eaLnBrk="1" latinLnBrk="0" hangingPunct="1">
+              <a:lnSpc>
+                <a:spcPct val="100000"/>
+              </a:lnSpc>
+              <a:spcBef>
+                <a:spcPts val="300"/>
+              </a:spcBef>
+              <a:spcAft>
+                <a:spcPts val="300"/>
+              </a:spcAft>
+              <a:buClr>
+                <a:schemeClr val="accent2"/>
+              </a:buClr>
+              <a:buFont typeface="Wingdings" pitchFamily="2" charset="2"/>
+              <a:buNone/>
+              <a:tabLst/>
+              <a:defRPr sz="1500" kern="1200">
+                <a:solidFill>
+                  <a:schemeClr val="tx1"/>
+                </a:solidFill>
+                <a:latin typeface="+mn-lt"/>
+                <a:ea typeface="+mn-ea"/>
+                <a:cs typeface="+mn-cs"/>
+              </a:defRPr>
+            </a:lvl2pPr>
+            <a:lvl3pPr marL="685783" indent="0" algn="ctr" defTabSz="685783" rtl="0" eaLnBrk="1" latinLnBrk="0" hangingPunct="1">
+              <a:lnSpc>
+                <a:spcPct val="90000"/>
+              </a:lnSpc>
+              <a:spcBef>
+                <a:spcPts val="300"/>
+              </a:spcBef>
+              <a:spcAft>
+                <a:spcPts val="300"/>
+              </a:spcAft>
+              <a:buClr>
+                <a:schemeClr val="accent2"/>
+              </a:buClr>
+              <a:buFont typeface="Wingdings" pitchFamily="2" charset="2"/>
+              <a:buNone/>
+              <a:tabLst/>
+              <a:defRPr lang="en-US" sz="1350" kern="1200" baseline="0">
+                <a:solidFill>
+                  <a:schemeClr val="tx1"/>
+                </a:solidFill>
+                <a:latin typeface="+mn-lt"/>
+                <a:ea typeface="+mn-ea"/>
+                <a:cs typeface="+mn-cs"/>
+              </a:defRPr>
+            </a:lvl3pPr>
+            <a:lvl4pPr marL="1028675" indent="0" algn="ctr" defTabSz="685783" rtl="0" eaLnBrk="1" latinLnBrk="0" hangingPunct="1">
+              <a:lnSpc>
+                <a:spcPct val="90000"/>
+              </a:lnSpc>
+              <a:spcBef>
+                <a:spcPts val="375"/>
+              </a:spcBef>
+              <a:buClr>
+                <a:schemeClr val="accent4"/>
+              </a:buClr>
+              <a:buFont typeface="Wingdings" pitchFamily="2" charset="2"/>
+              <a:buNone/>
+              <a:defRPr sz="1200" kern="1200">
+                <a:solidFill>
+                  <a:schemeClr val="tx1"/>
+                </a:solidFill>
+                <a:latin typeface="+mn-lt"/>
+                <a:ea typeface="+mn-ea"/>
+                <a:cs typeface="+mn-cs"/>
+              </a:defRPr>
+            </a:lvl4pPr>
+            <a:lvl5pPr marL="1371566" indent="0" algn="ctr" defTabSz="685783" rtl="0" eaLnBrk="1" latinLnBrk="0" hangingPunct="1">
+              <a:lnSpc>
+                <a:spcPct val="90000"/>
+              </a:lnSpc>
+              <a:spcBef>
+                <a:spcPts val="375"/>
+              </a:spcBef>
+              <a:buFont typeface="Arial" panose="020B0604020202020204" pitchFamily="34" charset="0"/>
+              <a:buNone/>
+              <a:defRPr sz="1200" kern="1200">
+                <a:solidFill>
+                  <a:schemeClr val="tx1"/>
+                </a:solidFill>
+                <a:latin typeface="+mn-lt"/>
+                <a:ea typeface="+mn-ea"/>
+                <a:cs typeface="+mn-cs"/>
+              </a:defRPr>
+            </a:lvl5pPr>
+            <a:lvl6pPr marL="1714457" indent="0" algn="ctr" defTabSz="685783" rtl="0" eaLnBrk="1" latinLnBrk="0" hangingPunct="1">
+              <a:lnSpc>
+                <a:spcPct val="90000"/>
+              </a:lnSpc>
+              <a:spcBef>
+                <a:spcPts val="375"/>
+              </a:spcBef>
+              <a:buFont typeface="Arial" panose="020B0604020202020204" pitchFamily="34" charset="0"/>
+              <a:buNone/>
+              <a:defRPr sz="1200" kern="1200">
+                <a:solidFill>
+                  <a:schemeClr val="tx1"/>
+                </a:solidFill>
+                <a:latin typeface="+mn-lt"/>
+                <a:ea typeface="+mn-ea"/>
+                <a:cs typeface="+mn-cs"/>
+              </a:defRPr>
+            </a:lvl6pPr>
+            <a:lvl7pPr marL="2057348" indent="0" algn="ctr" defTabSz="685783" rtl="0" eaLnBrk="1" latinLnBrk="0" hangingPunct="1">
+              <a:lnSpc>
+                <a:spcPct val="90000"/>
+              </a:lnSpc>
+              <a:spcBef>
+                <a:spcPts val="375"/>
+              </a:spcBef>
+              <a:buFont typeface="Arial" panose="020B0604020202020204" pitchFamily="34" charset="0"/>
+              <a:buNone/>
+              <a:defRPr sz="1200" kern="1200">
+                <a:solidFill>
+                  <a:schemeClr val="tx1"/>
+                </a:solidFill>
+                <a:latin typeface="+mn-lt"/>
+                <a:ea typeface="+mn-ea"/>
+                <a:cs typeface="+mn-cs"/>
+              </a:defRPr>
+            </a:lvl7pPr>
+            <a:lvl8pPr marL="2400240" indent="0" algn="ctr" defTabSz="685783" rtl="0" eaLnBrk="1" latinLnBrk="0" hangingPunct="1">
+              <a:lnSpc>
+                <a:spcPct val="90000"/>
+              </a:lnSpc>
+              <a:spcBef>
+                <a:spcPts val="375"/>
+              </a:spcBef>
+              <a:buFont typeface="Arial" panose="020B0604020202020204" pitchFamily="34" charset="0"/>
+              <a:buNone/>
+              <a:defRPr sz="1200" kern="1200">
+                <a:solidFill>
+                  <a:schemeClr val="tx1"/>
+                </a:solidFill>
+                <a:latin typeface="+mn-lt"/>
+                <a:ea typeface="+mn-ea"/>
+                <a:cs typeface="+mn-cs"/>
+              </a:defRPr>
+            </a:lvl8pPr>
+            <a:lvl9pPr marL="2743132" indent="0" algn="ctr" defTabSz="685783" rtl="0" eaLnBrk="1" latinLnBrk="0" hangingPunct="1">
+              <a:lnSpc>
+                <a:spcPct val="90000"/>
+              </a:lnSpc>
+              <a:spcBef>
+                <a:spcPts val="375"/>
+              </a:spcBef>
+              <a:buFont typeface="Arial" panose="020B0604020202020204" pitchFamily="34" charset="0"/>
+              <a:buNone/>
+              <a:defRPr sz="1200" kern="1200">
+                <a:solidFill>
+                  <a:schemeClr val="tx1"/>
+                </a:solidFill>
+                <a:latin typeface="+mn-lt"/>
+                <a:ea typeface="+mn-ea"/>
+                <a:cs typeface="+mn-cs"/>
+              </a:defRPr>
+            </a:lvl9pPr>
+          </a:lstStyle>
+          <a:p>
+            <a:r>
+              <a:rPr lang="en-US" sz="1000">
+                <a:highlight>
+                  <a:srgbClr val="000054"/>
+                </a:highlight>
+              </a:rPr>
+              <a:t>Workload &amp; tasks across the year</a:t>
+            </a:r>
+          </a:p>
+          <a:p>
+            <a:r>
+              <a:rPr lang="en-US" sz="800" b="0"/>
+              <a:t>The line shows total assets delivered per month. Underneath, every task is plotted as a dot — height shows how big that task was, and dense clusters show busy periods, colour-coded by stakeholder group. </a:t>
+            </a:r>
+          </a:p>
+          <a:p>
+            <a:r>
+              <a:rPr lang="en-US" sz="800" b="0"/>
+              <a:t>Hover or click a dot to jump into that task's details.</a:t>
+            </a:r>
+          </a:p>
+        </p:txBody>
+      </p:sp>
+      <p:sp>
+        <p:nvSpPr>
+          <p:cNvPr id="12" name="Subtitle 2">
+            <a:extLst>
+              <a:ext uri="{FF2B5EF4-FFF2-40B4-BE49-F238E27FC236}">
+                <a16:creationId xmlns:a16="http://schemas.microsoft.com/office/drawing/2014/main" id="{800510F8-D428-C2A0-3AE4-E9D6CDB79AA9}"/>
+              </a:ext>
+            </a:extLst>
+          </p:cNvPr>
+          <p:cNvSpPr>
+            <a:spLocks noGrp="1"/>
+          </p:cNvSpPr>
+          <p:nvPr>
+            <p:ph type="subTitle" idx="1"/>
+          </p:nvPr>
+        </p:nvSpPr>
+        <p:spPr>
+          <a:xfrm>
+            <a:off x="419708" y="1781298"/>
+            <a:ext cx="2174846" cy="613562"/>
+          </a:xfrm>
+        </p:spPr>
+        <p:txBody>
+          <a:bodyPr/>
+          <a:lstStyle/>
+          <a:p>
+            <a:r>
+              <a:rPr lang="en-US">
+                <a:highlight>
+                  <a:srgbClr val="000054"/>
+                </a:highlight>
+              </a:rPr>
+              <a:t>Dashboard</a:t>
+            </a:r>
+          </a:p>
+        </p:txBody>
+      </p:sp>
       <p:pic>
         <p:nvPicPr>
-          <p:cNvPr id="4" name="Picture 3">
-            <a:extLst>
-              <a:ext uri="{FF2B5EF4-FFF2-40B4-BE49-F238E27FC236}">
-                <a16:creationId xmlns:a16="http://schemas.microsoft.com/office/drawing/2014/main" id="{918C2866-4ADA-D35E-95CE-184751FD650C}"/>
+          <p:cNvPr id="16" name="Picture 15">
+            <a:extLst>
+              <a:ext uri="{FF2B5EF4-FFF2-40B4-BE49-F238E27FC236}">
+                <a16:creationId xmlns:a16="http://schemas.microsoft.com/office/drawing/2014/main" id="{77B51F24-2E26-898A-6B7C-C1E5B3433C41}"/>
               </a:ext>
             </a:extLst>
           </p:cNvPr>
@@ -9323,1011 +13627,18 @@
         </p:blipFill>
         <p:spPr>
           <a:xfrm>
-            <a:off x="3100192" y="1226499"/>
-            <a:ext cx="5696968" cy="2336723"/>
+            <a:off x="3090040" y="1441418"/>
+            <a:ext cx="5562191" cy="2326265"/>
           </a:xfrm>
           <a:prstGeom prst="rect">
             <a:avLst/>
           </a:prstGeom>
         </p:spPr>
       </p:pic>
-      <p:sp>
-        <p:nvSpPr>
-          <p:cNvPr id="8" name="Subtitle 2">
-            <a:extLst>
-              <a:ext uri="{FF2B5EF4-FFF2-40B4-BE49-F238E27FC236}">
-                <a16:creationId xmlns:a16="http://schemas.microsoft.com/office/drawing/2014/main" id="{BED8C51A-EFB6-F901-084A-C6AFD87D03EB}"/>
-              </a:ext>
-            </a:extLst>
-          </p:cNvPr>
-          <p:cNvSpPr txBox="1">
-            <a:spLocks/>
-          </p:cNvSpPr>
-          <p:nvPr/>
-        </p:nvSpPr>
-        <p:spPr>
-          <a:xfrm>
-            <a:off x="419708" y="1429260"/>
-            <a:ext cx="2174846" cy="613562"/>
-          </a:xfrm>
-          <a:prstGeom prst="rect">
-            <a:avLst/>
-          </a:prstGeom>
-        </p:spPr>
-        <p:txBody>
-          <a:bodyPr vert="horz" lIns="91440" tIns="45720" rIns="91440" bIns="45720" rtlCol="0" anchor="t" anchorCtr="0">
-            <a:noAutofit/>
-          </a:bodyPr>
-          <a:lstStyle>
-            <a:lvl1pPr marL="0" indent="0" algn="l" defTabSz="685783" rtl="0" eaLnBrk="1" latinLnBrk="0" hangingPunct="1">
-              <a:lnSpc>
-                <a:spcPct val="100000"/>
-              </a:lnSpc>
-              <a:spcBef>
-                <a:spcPts val="300"/>
-              </a:spcBef>
-              <a:spcAft>
-                <a:spcPts val="300"/>
-              </a:spcAft>
-              <a:buFont typeface="Arial" panose="020B0604020202020204" pitchFamily="34" charset="0"/>
-              <a:buNone/>
-              <a:defRPr sz="2700" b="1" kern="1200" baseline="0">
-                <a:solidFill>
-                  <a:schemeClr val="bg1"/>
-                </a:solidFill>
-                <a:latin typeface="+mn-lt"/>
-                <a:ea typeface="+mn-ea"/>
-                <a:cs typeface="+mn-cs"/>
-              </a:defRPr>
-            </a:lvl1pPr>
-            <a:lvl2pPr marL="342892" indent="0" algn="ctr" defTabSz="685783" rtl="0" eaLnBrk="1" latinLnBrk="0" hangingPunct="1">
-              <a:lnSpc>
-                <a:spcPct val="100000"/>
-              </a:lnSpc>
-              <a:spcBef>
-                <a:spcPts val="300"/>
-              </a:spcBef>
-              <a:spcAft>
-                <a:spcPts val="300"/>
-              </a:spcAft>
-              <a:buClr>
-                <a:schemeClr val="accent2"/>
-              </a:buClr>
-              <a:buFont typeface="Wingdings" pitchFamily="2" charset="2"/>
-              <a:buNone/>
-              <a:tabLst/>
-              <a:defRPr sz="1500" kern="1200">
-                <a:solidFill>
-                  <a:schemeClr val="tx1"/>
-                </a:solidFill>
-                <a:latin typeface="+mn-lt"/>
-                <a:ea typeface="+mn-ea"/>
-                <a:cs typeface="+mn-cs"/>
-              </a:defRPr>
-            </a:lvl2pPr>
-            <a:lvl3pPr marL="685783" indent="0" algn="ctr" defTabSz="685783" rtl="0" eaLnBrk="1" latinLnBrk="0" hangingPunct="1">
-              <a:lnSpc>
-                <a:spcPct val="90000"/>
-              </a:lnSpc>
-              <a:spcBef>
-                <a:spcPts val="300"/>
-              </a:spcBef>
-              <a:spcAft>
-                <a:spcPts val="300"/>
-              </a:spcAft>
-              <a:buClr>
-                <a:schemeClr val="accent2"/>
-              </a:buClr>
-              <a:buFont typeface="Wingdings" pitchFamily="2" charset="2"/>
-              <a:buNone/>
-              <a:tabLst/>
-              <a:defRPr lang="en-US" sz="1350" kern="1200" baseline="0">
-                <a:solidFill>
-                  <a:schemeClr val="tx1"/>
-                </a:solidFill>
-                <a:latin typeface="+mn-lt"/>
-                <a:ea typeface="+mn-ea"/>
-                <a:cs typeface="+mn-cs"/>
-              </a:defRPr>
-            </a:lvl3pPr>
-            <a:lvl4pPr marL="1028675" indent="0" algn="ctr" defTabSz="685783" rtl="0" eaLnBrk="1" latinLnBrk="0" hangingPunct="1">
-              <a:lnSpc>
-                <a:spcPct val="90000"/>
-              </a:lnSpc>
-              <a:spcBef>
-                <a:spcPts val="375"/>
-              </a:spcBef>
-              <a:buClr>
-                <a:schemeClr val="accent4"/>
-              </a:buClr>
-              <a:buFont typeface="Wingdings" pitchFamily="2" charset="2"/>
-              <a:buNone/>
-              <a:defRPr sz="1200" kern="1200">
-                <a:solidFill>
-                  <a:schemeClr val="tx1"/>
-                </a:solidFill>
-                <a:latin typeface="+mn-lt"/>
-                <a:ea typeface="+mn-ea"/>
-                <a:cs typeface="+mn-cs"/>
-              </a:defRPr>
-            </a:lvl4pPr>
-            <a:lvl5pPr marL="1371566" indent="0" algn="ctr" defTabSz="685783" rtl="0" eaLnBrk="1" latinLnBrk="0" hangingPunct="1">
-              <a:lnSpc>
-                <a:spcPct val="90000"/>
-              </a:lnSpc>
-              <a:spcBef>
-                <a:spcPts val="375"/>
-              </a:spcBef>
-              <a:buFont typeface="Arial" panose="020B0604020202020204" pitchFamily="34" charset="0"/>
-              <a:buNone/>
-              <a:defRPr sz="1200" kern="1200">
-                <a:solidFill>
-                  <a:schemeClr val="tx1"/>
-                </a:solidFill>
-                <a:latin typeface="+mn-lt"/>
-                <a:ea typeface="+mn-ea"/>
-                <a:cs typeface="+mn-cs"/>
-              </a:defRPr>
-            </a:lvl5pPr>
-            <a:lvl6pPr marL="1714457" indent="0" algn="ctr" defTabSz="685783" rtl="0" eaLnBrk="1" latinLnBrk="0" hangingPunct="1">
-              <a:lnSpc>
-                <a:spcPct val="90000"/>
-              </a:lnSpc>
-              <a:spcBef>
-                <a:spcPts val="375"/>
-              </a:spcBef>
-              <a:buFont typeface="Arial" panose="020B0604020202020204" pitchFamily="34" charset="0"/>
-              <a:buNone/>
-              <a:defRPr sz="1200" kern="1200">
-                <a:solidFill>
-                  <a:schemeClr val="tx1"/>
-                </a:solidFill>
-                <a:latin typeface="+mn-lt"/>
-                <a:ea typeface="+mn-ea"/>
-                <a:cs typeface="+mn-cs"/>
-              </a:defRPr>
-            </a:lvl6pPr>
-            <a:lvl7pPr marL="2057348" indent="0" algn="ctr" defTabSz="685783" rtl="0" eaLnBrk="1" latinLnBrk="0" hangingPunct="1">
-              <a:lnSpc>
-                <a:spcPct val="90000"/>
-              </a:lnSpc>
-              <a:spcBef>
-                <a:spcPts val="375"/>
-              </a:spcBef>
-              <a:buFont typeface="Arial" panose="020B0604020202020204" pitchFamily="34" charset="0"/>
-              <a:buNone/>
-              <a:defRPr sz="1200" kern="1200">
-                <a:solidFill>
-                  <a:schemeClr val="tx1"/>
-                </a:solidFill>
-                <a:latin typeface="+mn-lt"/>
-                <a:ea typeface="+mn-ea"/>
-                <a:cs typeface="+mn-cs"/>
-              </a:defRPr>
-            </a:lvl7pPr>
-            <a:lvl8pPr marL="2400240" indent="0" algn="ctr" defTabSz="685783" rtl="0" eaLnBrk="1" latinLnBrk="0" hangingPunct="1">
-              <a:lnSpc>
-                <a:spcPct val="90000"/>
-              </a:lnSpc>
-              <a:spcBef>
-                <a:spcPts val="375"/>
-              </a:spcBef>
-              <a:buFont typeface="Arial" panose="020B0604020202020204" pitchFamily="34" charset="0"/>
-              <a:buNone/>
-              <a:defRPr sz="1200" kern="1200">
-                <a:solidFill>
-                  <a:schemeClr val="tx1"/>
-                </a:solidFill>
-                <a:latin typeface="+mn-lt"/>
-                <a:ea typeface="+mn-ea"/>
-                <a:cs typeface="+mn-cs"/>
-              </a:defRPr>
-            </a:lvl8pPr>
-            <a:lvl9pPr marL="2743132" indent="0" algn="ctr" defTabSz="685783" rtl="0" eaLnBrk="1" latinLnBrk="0" hangingPunct="1">
-              <a:lnSpc>
-                <a:spcPct val="90000"/>
-              </a:lnSpc>
-              <a:spcBef>
-                <a:spcPts val="375"/>
-              </a:spcBef>
-              <a:buFont typeface="Arial" panose="020B0604020202020204" pitchFamily="34" charset="0"/>
-              <a:buNone/>
-              <a:defRPr sz="1200" kern="1200">
-                <a:solidFill>
-                  <a:schemeClr val="tx1"/>
-                </a:solidFill>
-                <a:latin typeface="+mn-lt"/>
-                <a:ea typeface="+mn-ea"/>
-                <a:cs typeface="+mn-cs"/>
-              </a:defRPr>
-            </a:lvl9pPr>
-          </a:lstStyle>
-          <a:p>
-            <a:r>
-              <a:rPr lang="en-US">
-                <a:highlight>
-                  <a:srgbClr val="000054"/>
-                </a:highlight>
-              </a:rPr>
-              <a:t>Dashboard</a:t>
-            </a:r>
-          </a:p>
-          <a:p>
-            <a:r>
-              <a:rPr lang="en-US">
-                <a:highlight>
-                  <a:srgbClr val="000054"/>
-                </a:highlight>
-              </a:rPr>
-              <a:t>breakdown</a:t>
-            </a:r>
-          </a:p>
-          <a:p>
-            <a:endParaRPr lang="en-US">
-              <a:cs typeface="Arial" panose="020B0604020202020204"/>
-            </a:endParaRPr>
-          </a:p>
-          <a:p>
-            <a:endParaRPr lang="en-AU">
-              <a:cs typeface="Arial" panose="020B0604020202020204"/>
-            </a:endParaRPr>
-          </a:p>
-        </p:txBody>
-      </p:sp>
-      <p:sp>
-        <p:nvSpPr>
-          <p:cNvPr id="11" name="Subtitle 2">
-            <a:extLst>
-              <a:ext uri="{FF2B5EF4-FFF2-40B4-BE49-F238E27FC236}">
-                <a16:creationId xmlns:a16="http://schemas.microsoft.com/office/drawing/2014/main" id="{F1CD64DB-368A-3D7D-5B9C-3BCDA9D09341}"/>
-              </a:ext>
-            </a:extLst>
-          </p:cNvPr>
-          <p:cNvSpPr txBox="1">
-            <a:spLocks/>
-          </p:cNvSpPr>
-          <p:nvPr/>
-        </p:nvSpPr>
-        <p:spPr>
-          <a:xfrm>
-            <a:off x="387382" y="2555311"/>
-            <a:ext cx="2427889" cy="2600204"/>
-          </a:xfrm>
-          <a:prstGeom prst="rect">
-            <a:avLst/>
-          </a:prstGeom>
-        </p:spPr>
-        <p:txBody>
-          <a:bodyPr vert="horz" lIns="91440" tIns="45720" rIns="91440" bIns="45720" rtlCol="0" anchor="t" anchorCtr="0">
-            <a:noAutofit/>
-          </a:bodyPr>
-          <a:lstStyle>
-            <a:lvl1pPr marL="0" indent="0" algn="l" defTabSz="685783" rtl="0" eaLnBrk="1" latinLnBrk="0" hangingPunct="1">
-              <a:lnSpc>
-                <a:spcPct val="100000"/>
-              </a:lnSpc>
-              <a:spcBef>
-                <a:spcPts val="300"/>
-              </a:spcBef>
-              <a:spcAft>
-                <a:spcPts val="300"/>
-              </a:spcAft>
-              <a:buFont typeface="Arial" panose="020B0604020202020204" pitchFamily="34" charset="0"/>
-              <a:buNone/>
-              <a:defRPr sz="2700" b="1" kern="1200" baseline="0">
-                <a:solidFill>
-                  <a:schemeClr val="bg1"/>
-                </a:solidFill>
-                <a:latin typeface="+mn-lt"/>
-                <a:ea typeface="+mn-ea"/>
-                <a:cs typeface="+mn-cs"/>
-              </a:defRPr>
-            </a:lvl1pPr>
-            <a:lvl2pPr marL="342892" indent="0" algn="ctr" defTabSz="685783" rtl="0" eaLnBrk="1" latinLnBrk="0" hangingPunct="1">
-              <a:lnSpc>
-                <a:spcPct val="100000"/>
-              </a:lnSpc>
-              <a:spcBef>
-                <a:spcPts val="300"/>
-              </a:spcBef>
-              <a:spcAft>
-                <a:spcPts val="300"/>
-              </a:spcAft>
-              <a:buClr>
-                <a:schemeClr val="accent2"/>
-              </a:buClr>
-              <a:buFont typeface="Wingdings" pitchFamily="2" charset="2"/>
-              <a:buNone/>
-              <a:tabLst/>
-              <a:defRPr sz="1500" kern="1200">
-                <a:solidFill>
-                  <a:schemeClr val="tx1"/>
-                </a:solidFill>
-                <a:latin typeface="+mn-lt"/>
-                <a:ea typeface="+mn-ea"/>
-                <a:cs typeface="+mn-cs"/>
-              </a:defRPr>
-            </a:lvl2pPr>
-            <a:lvl3pPr marL="685783" indent="0" algn="ctr" defTabSz="685783" rtl="0" eaLnBrk="1" latinLnBrk="0" hangingPunct="1">
-              <a:lnSpc>
-                <a:spcPct val="90000"/>
-              </a:lnSpc>
-              <a:spcBef>
-                <a:spcPts val="300"/>
-              </a:spcBef>
-              <a:spcAft>
-                <a:spcPts val="300"/>
-              </a:spcAft>
-              <a:buClr>
-                <a:schemeClr val="accent2"/>
-              </a:buClr>
-              <a:buFont typeface="Wingdings" pitchFamily="2" charset="2"/>
-              <a:buNone/>
-              <a:tabLst/>
-              <a:defRPr lang="en-US" sz="1350" kern="1200" baseline="0">
-                <a:solidFill>
-                  <a:schemeClr val="tx1"/>
-                </a:solidFill>
-                <a:latin typeface="+mn-lt"/>
-                <a:ea typeface="+mn-ea"/>
-                <a:cs typeface="+mn-cs"/>
-              </a:defRPr>
-            </a:lvl3pPr>
-            <a:lvl4pPr marL="1028675" indent="0" algn="ctr" defTabSz="685783" rtl="0" eaLnBrk="1" latinLnBrk="0" hangingPunct="1">
-              <a:lnSpc>
-                <a:spcPct val="90000"/>
-              </a:lnSpc>
-              <a:spcBef>
-                <a:spcPts val="375"/>
-              </a:spcBef>
-              <a:buClr>
-                <a:schemeClr val="accent4"/>
-              </a:buClr>
-              <a:buFont typeface="Wingdings" pitchFamily="2" charset="2"/>
-              <a:buNone/>
-              <a:defRPr sz="1200" kern="1200">
-                <a:solidFill>
-                  <a:schemeClr val="tx1"/>
-                </a:solidFill>
-                <a:latin typeface="+mn-lt"/>
-                <a:ea typeface="+mn-ea"/>
-                <a:cs typeface="+mn-cs"/>
-              </a:defRPr>
-            </a:lvl4pPr>
-            <a:lvl5pPr marL="1371566" indent="0" algn="ctr" defTabSz="685783" rtl="0" eaLnBrk="1" latinLnBrk="0" hangingPunct="1">
-              <a:lnSpc>
-                <a:spcPct val="90000"/>
-              </a:lnSpc>
-              <a:spcBef>
-                <a:spcPts val="375"/>
-              </a:spcBef>
-              <a:buFont typeface="Arial" panose="020B0604020202020204" pitchFamily="34" charset="0"/>
-              <a:buNone/>
-              <a:defRPr sz="1200" kern="1200">
-                <a:solidFill>
-                  <a:schemeClr val="tx1"/>
-                </a:solidFill>
-                <a:latin typeface="+mn-lt"/>
-                <a:ea typeface="+mn-ea"/>
-                <a:cs typeface="+mn-cs"/>
-              </a:defRPr>
-            </a:lvl5pPr>
-            <a:lvl6pPr marL="1714457" indent="0" algn="ctr" defTabSz="685783" rtl="0" eaLnBrk="1" latinLnBrk="0" hangingPunct="1">
-              <a:lnSpc>
-                <a:spcPct val="90000"/>
-              </a:lnSpc>
-              <a:spcBef>
-                <a:spcPts val="375"/>
-              </a:spcBef>
-              <a:buFont typeface="Arial" panose="020B0604020202020204" pitchFamily="34" charset="0"/>
-              <a:buNone/>
-              <a:defRPr sz="1200" kern="1200">
-                <a:solidFill>
-                  <a:schemeClr val="tx1"/>
-                </a:solidFill>
-                <a:latin typeface="+mn-lt"/>
-                <a:ea typeface="+mn-ea"/>
-                <a:cs typeface="+mn-cs"/>
-              </a:defRPr>
-            </a:lvl6pPr>
-            <a:lvl7pPr marL="2057348" indent="0" algn="ctr" defTabSz="685783" rtl="0" eaLnBrk="1" latinLnBrk="0" hangingPunct="1">
-              <a:lnSpc>
-                <a:spcPct val="90000"/>
-              </a:lnSpc>
-              <a:spcBef>
-                <a:spcPts val="375"/>
-              </a:spcBef>
-              <a:buFont typeface="Arial" panose="020B0604020202020204" pitchFamily="34" charset="0"/>
-              <a:buNone/>
-              <a:defRPr sz="1200" kern="1200">
-                <a:solidFill>
-                  <a:schemeClr val="tx1"/>
-                </a:solidFill>
-                <a:latin typeface="+mn-lt"/>
-                <a:ea typeface="+mn-ea"/>
-                <a:cs typeface="+mn-cs"/>
-              </a:defRPr>
-            </a:lvl7pPr>
-            <a:lvl8pPr marL="2400240" indent="0" algn="ctr" defTabSz="685783" rtl="0" eaLnBrk="1" latinLnBrk="0" hangingPunct="1">
-              <a:lnSpc>
-                <a:spcPct val="90000"/>
-              </a:lnSpc>
-              <a:spcBef>
-                <a:spcPts val="375"/>
-              </a:spcBef>
-              <a:buFont typeface="Arial" panose="020B0604020202020204" pitchFamily="34" charset="0"/>
-              <a:buNone/>
-              <a:defRPr sz="1200" kern="1200">
-                <a:solidFill>
-                  <a:schemeClr val="tx1"/>
-                </a:solidFill>
-                <a:latin typeface="+mn-lt"/>
-                <a:ea typeface="+mn-ea"/>
-                <a:cs typeface="+mn-cs"/>
-              </a:defRPr>
-            </a:lvl8pPr>
-            <a:lvl9pPr marL="2743132" indent="0" algn="ctr" defTabSz="685783" rtl="0" eaLnBrk="1" latinLnBrk="0" hangingPunct="1">
-              <a:lnSpc>
-                <a:spcPct val="90000"/>
-              </a:lnSpc>
-              <a:spcBef>
-                <a:spcPts val="375"/>
-              </a:spcBef>
-              <a:buFont typeface="Arial" panose="020B0604020202020204" pitchFamily="34" charset="0"/>
-              <a:buNone/>
-              <a:defRPr sz="1200" kern="1200">
-                <a:solidFill>
-                  <a:schemeClr val="tx1"/>
-                </a:solidFill>
-                <a:latin typeface="+mn-lt"/>
-                <a:ea typeface="+mn-ea"/>
-                <a:cs typeface="+mn-cs"/>
-              </a:defRPr>
-            </a:lvl9pPr>
-          </a:lstStyle>
-          <a:p>
-            <a:r>
-              <a:rPr lang="en-US" sz="1000">
-                <a:highlight>
-                  <a:srgbClr val="000054"/>
-                </a:highlight>
-              </a:rPr>
-              <a:t>Workload &amp; tasks across the year</a:t>
-            </a:r>
-          </a:p>
-          <a:p>
-            <a:r>
-              <a:rPr lang="en-US" sz="800" b="0"/>
-              <a:t>Assets per month, plotted across the year — with every task shown as a dot, colour-coded by stakeholder group. Hover or click a dot to jump straight into that task's details.</a:t>
-            </a:r>
-          </a:p>
-          <a:p>
-            <a:endParaRPr lang="en-US" sz="800" b="0"/>
-          </a:p>
-        </p:txBody>
-      </p:sp>
     </p:spTree>
     <p:extLst>
       <p:ext uri="{BB962C8B-B14F-4D97-AF65-F5344CB8AC3E}">
         <p14:creationId xmlns:p14="http://schemas.microsoft.com/office/powerpoint/2010/main" val="3631319172"/>
-      </p:ext>
-    </p:extLst>
-  </p:cSld>
-  <p:clrMapOvr>
-    <a:masterClrMapping/>
-  </p:clrMapOvr>
-</p:sld>
-</file>
-
-<file path=ppt/slides/slide7.xml><?xml version="1.0" encoding="utf-8"?>
-<p:sld xmlns:a="http://schemas.openxmlformats.org/drawingml/2006/main" xmlns:r="http://schemas.openxmlformats.org/officeDocument/2006/relationships" xmlns:p="http://schemas.openxmlformats.org/presentationml/2006/main">
-  <p:cSld>
-    <p:spTree>
-      <p:nvGrpSpPr>
-        <p:cNvPr id="1" name="">
-          <a:extLst>
-            <a:ext uri="{FF2B5EF4-FFF2-40B4-BE49-F238E27FC236}">
-              <a16:creationId xmlns:a16="http://schemas.microsoft.com/office/drawing/2014/main" id="{3D6E90A3-F2EC-81F7-8AF4-80370FA6E039}"/>
-            </a:ext>
-          </a:extLst>
-        </p:cNvPr>
-        <p:cNvGrpSpPr/>
-        <p:nvPr/>
-      </p:nvGrpSpPr>
-      <p:grpSpPr>
-        <a:xfrm>
-          <a:off x="0" y="0"/>
-          <a:ext cx="0" cy="0"/>
-          <a:chOff x="0" y="0"/>
-          <a:chExt cx="0" cy="0"/>
-        </a:xfrm>
-      </p:grpSpPr>
-      <p:sp>
-        <p:nvSpPr>
-          <p:cNvPr id="8" name="Subtitle 2">
-            <a:extLst>
-              <a:ext uri="{FF2B5EF4-FFF2-40B4-BE49-F238E27FC236}">
-                <a16:creationId xmlns:a16="http://schemas.microsoft.com/office/drawing/2014/main" id="{7F3AF82D-5973-EDEF-E2F0-35758C9FBAA1}"/>
-              </a:ext>
-            </a:extLst>
-          </p:cNvPr>
-          <p:cNvSpPr txBox="1">
-            <a:spLocks/>
-          </p:cNvSpPr>
-          <p:nvPr/>
-        </p:nvSpPr>
-        <p:spPr>
-          <a:xfrm>
-            <a:off x="419708" y="1429260"/>
-            <a:ext cx="2174846" cy="613562"/>
-          </a:xfrm>
-          <a:prstGeom prst="rect">
-            <a:avLst/>
-          </a:prstGeom>
-        </p:spPr>
-        <p:txBody>
-          <a:bodyPr vert="horz" lIns="91440" tIns="45720" rIns="91440" bIns="45720" rtlCol="0" anchor="t" anchorCtr="0">
-            <a:noAutofit/>
-          </a:bodyPr>
-          <a:lstStyle>
-            <a:lvl1pPr marL="0" indent="0" algn="l" defTabSz="685783" rtl="0" eaLnBrk="1" latinLnBrk="0" hangingPunct="1">
-              <a:lnSpc>
-                <a:spcPct val="100000"/>
-              </a:lnSpc>
-              <a:spcBef>
-                <a:spcPts val="300"/>
-              </a:spcBef>
-              <a:spcAft>
-                <a:spcPts val="300"/>
-              </a:spcAft>
-              <a:buFont typeface="Arial" panose="020B0604020202020204" pitchFamily="34" charset="0"/>
-              <a:buNone/>
-              <a:defRPr sz="2700" b="1" kern="1200" baseline="0">
-                <a:solidFill>
-                  <a:schemeClr val="bg1"/>
-                </a:solidFill>
-                <a:latin typeface="+mn-lt"/>
-                <a:ea typeface="+mn-ea"/>
-                <a:cs typeface="+mn-cs"/>
-              </a:defRPr>
-            </a:lvl1pPr>
-            <a:lvl2pPr marL="342892" indent="0" algn="ctr" defTabSz="685783" rtl="0" eaLnBrk="1" latinLnBrk="0" hangingPunct="1">
-              <a:lnSpc>
-                <a:spcPct val="100000"/>
-              </a:lnSpc>
-              <a:spcBef>
-                <a:spcPts val="300"/>
-              </a:spcBef>
-              <a:spcAft>
-                <a:spcPts val="300"/>
-              </a:spcAft>
-              <a:buClr>
-                <a:schemeClr val="accent2"/>
-              </a:buClr>
-              <a:buFont typeface="Wingdings" pitchFamily="2" charset="2"/>
-              <a:buNone/>
-              <a:tabLst/>
-              <a:defRPr sz="1500" kern="1200">
-                <a:solidFill>
-                  <a:schemeClr val="tx1"/>
-                </a:solidFill>
-                <a:latin typeface="+mn-lt"/>
-                <a:ea typeface="+mn-ea"/>
-                <a:cs typeface="+mn-cs"/>
-              </a:defRPr>
-            </a:lvl2pPr>
-            <a:lvl3pPr marL="685783" indent="0" algn="ctr" defTabSz="685783" rtl="0" eaLnBrk="1" latinLnBrk="0" hangingPunct="1">
-              <a:lnSpc>
-                <a:spcPct val="90000"/>
-              </a:lnSpc>
-              <a:spcBef>
-                <a:spcPts val="300"/>
-              </a:spcBef>
-              <a:spcAft>
-                <a:spcPts val="300"/>
-              </a:spcAft>
-              <a:buClr>
-                <a:schemeClr val="accent2"/>
-              </a:buClr>
-              <a:buFont typeface="Wingdings" pitchFamily="2" charset="2"/>
-              <a:buNone/>
-              <a:tabLst/>
-              <a:defRPr lang="en-US" sz="1350" kern="1200" baseline="0">
-                <a:solidFill>
-                  <a:schemeClr val="tx1"/>
-                </a:solidFill>
-                <a:latin typeface="+mn-lt"/>
-                <a:ea typeface="+mn-ea"/>
-                <a:cs typeface="+mn-cs"/>
-              </a:defRPr>
-            </a:lvl3pPr>
-            <a:lvl4pPr marL="1028675" indent="0" algn="ctr" defTabSz="685783" rtl="0" eaLnBrk="1" latinLnBrk="0" hangingPunct="1">
-              <a:lnSpc>
-                <a:spcPct val="90000"/>
-              </a:lnSpc>
-              <a:spcBef>
-                <a:spcPts val="375"/>
-              </a:spcBef>
-              <a:buClr>
-                <a:schemeClr val="accent4"/>
-              </a:buClr>
-              <a:buFont typeface="Wingdings" pitchFamily="2" charset="2"/>
-              <a:buNone/>
-              <a:defRPr sz="1200" kern="1200">
-                <a:solidFill>
-                  <a:schemeClr val="tx1"/>
-                </a:solidFill>
-                <a:latin typeface="+mn-lt"/>
-                <a:ea typeface="+mn-ea"/>
-                <a:cs typeface="+mn-cs"/>
-              </a:defRPr>
-            </a:lvl4pPr>
-            <a:lvl5pPr marL="1371566" indent="0" algn="ctr" defTabSz="685783" rtl="0" eaLnBrk="1" latinLnBrk="0" hangingPunct="1">
-              <a:lnSpc>
-                <a:spcPct val="90000"/>
-              </a:lnSpc>
-              <a:spcBef>
-                <a:spcPts val="375"/>
-              </a:spcBef>
-              <a:buFont typeface="Arial" panose="020B0604020202020204" pitchFamily="34" charset="0"/>
-              <a:buNone/>
-              <a:defRPr sz="1200" kern="1200">
-                <a:solidFill>
-                  <a:schemeClr val="tx1"/>
-                </a:solidFill>
-                <a:latin typeface="+mn-lt"/>
-                <a:ea typeface="+mn-ea"/>
-                <a:cs typeface="+mn-cs"/>
-              </a:defRPr>
-            </a:lvl5pPr>
-            <a:lvl6pPr marL="1714457" indent="0" algn="ctr" defTabSz="685783" rtl="0" eaLnBrk="1" latinLnBrk="0" hangingPunct="1">
-              <a:lnSpc>
-                <a:spcPct val="90000"/>
-              </a:lnSpc>
-              <a:spcBef>
-                <a:spcPts val="375"/>
-              </a:spcBef>
-              <a:buFont typeface="Arial" panose="020B0604020202020204" pitchFamily="34" charset="0"/>
-              <a:buNone/>
-              <a:defRPr sz="1200" kern="1200">
-                <a:solidFill>
-                  <a:schemeClr val="tx1"/>
-                </a:solidFill>
-                <a:latin typeface="+mn-lt"/>
-                <a:ea typeface="+mn-ea"/>
-                <a:cs typeface="+mn-cs"/>
-              </a:defRPr>
-            </a:lvl6pPr>
-            <a:lvl7pPr marL="2057348" indent="0" algn="ctr" defTabSz="685783" rtl="0" eaLnBrk="1" latinLnBrk="0" hangingPunct="1">
-              <a:lnSpc>
-                <a:spcPct val="90000"/>
-              </a:lnSpc>
-              <a:spcBef>
-                <a:spcPts val="375"/>
-              </a:spcBef>
-              <a:buFont typeface="Arial" panose="020B0604020202020204" pitchFamily="34" charset="0"/>
-              <a:buNone/>
-              <a:defRPr sz="1200" kern="1200">
-                <a:solidFill>
-                  <a:schemeClr val="tx1"/>
-                </a:solidFill>
-                <a:latin typeface="+mn-lt"/>
-                <a:ea typeface="+mn-ea"/>
-                <a:cs typeface="+mn-cs"/>
-              </a:defRPr>
-            </a:lvl7pPr>
-            <a:lvl8pPr marL="2400240" indent="0" algn="ctr" defTabSz="685783" rtl="0" eaLnBrk="1" latinLnBrk="0" hangingPunct="1">
-              <a:lnSpc>
-                <a:spcPct val="90000"/>
-              </a:lnSpc>
-              <a:spcBef>
-                <a:spcPts val="375"/>
-              </a:spcBef>
-              <a:buFont typeface="Arial" panose="020B0604020202020204" pitchFamily="34" charset="0"/>
-              <a:buNone/>
-              <a:defRPr sz="1200" kern="1200">
-                <a:solidFill>
-                  <a:schemeClr val="tx1"/>
-                </a:solidFill>
-                <a:latin typeface="+mn-lt"/>
-                <a:ea typeface="+mn-ea"/>
-                <a:cs typeface="+mn-cs"/>
-              </a:defRPr>
-            </a:lvl8pPr>
-            <a:lvl9pPr marL="2743132" indent="0" algn="ctr" defTabSz="685783" rtl="0" eaLnBrk="1" latinLnBrk="0" hangingPunct="1">
-              <a:lnSpc>
-                <a:spcPct val="90000"/>
-              </a:lnSpc>
-              <a:spcBef>
-                <a:spcPts val="375"/>
-              </a:spcBef>
-              <a:buFont typeface="Arial" panose="020B0604020202020204" pitchFamily="34" charset="0"/>
-              <a:buNone/>
-              <a:defRPr sz="1200" kern="1200">
-                <a:solidFill>
-                  <a:schemeClr val="tx1"/>
-                </a:solidFill>
-                <a:latin typeface="+mn-lt"/>
-                <a:ea typeface="+mn-ea"/>
-                <a:cs typeface="+mn-cs"/>
-              </a:defRPr>
-            </a:lvl9pPr>
-          </a:lstStyle>
-          <a:p>
-            <a:r>
-              <a:rPr lang="en-US">
-                <a:highlight>
-                  <a:srgbClr val="000054"/>
-                </a:highlight>
-              </a:rPr>
-              <a:t>Task List</a:t>
-            </a:r>
-          </a:p>
-          <a:p>
-            <a:endParaRPr lang="en-US">
-              <a:cs typeface="Arial" panose="020B0604020202020204"/>
-            </a:endParaRPr>
-          </a:p>
-          <a:p>
-            <a:endParaRPr lang="en-AU">
-              <a:cs typeface="Arial" panose="020B0604020202020204"/>
-            </a:endParaRPr>
-          </a:p>
-        </p:txBody>
-      </p:sp>
-      <p:sp>
-        <p:nvSpPr>
-          <p:cNvPr id="11" name="Subtitle 2">
-            <a:extLst>
-              <a:ext uri="{FF2B5EF4-FFF2-40B4-BE49-F238E27FC236}">
-                <a16:creationId xmlns:a16="http://schemas.microsoft.com/office/drawing/2014/main" id="{FBFFE7E6-0EA7-F5F7-8977-B74987E99A02}"/>
-              </a:ext>
-            </a:extLst>
-          </p:cNvPr>
-          <p:cNvSpPr txBox="1">
-            <a:spLocks/>
-          </p:cNvSpPr>
-          <p:nvPr/>
-        </p:nvSpPr>
-        <p:spPr>
-          <a:xfrm>
-            <a:off x="387382" y="2042822"/>
-            <a:ext cx="2427889" cy="2600204"/>
-          </a:xfrm>
-          <a:prstGeom prst="rect">
-            <a:avLst/>
-          </a:prstGeom>
-        </p:spPr>
-        <p:txBody>
-          <a:bodyPr vert="horz" lIns="91440" tIns="45720" rIns="91440" bIns="45720" rtlCol="0" anchor="t" anchorCtr="0">
-            <a:noAutofit/>
-          </a:bodyPr>
-          <a:lstStyle>
-            <a:lvl1pPr marL="0" indent="0" algn="l" defTabSz="685783" rtl="0" eaLnBrk="1" latinLnBrk="0" hangingPunct="1">
-              <a:lnSpc>
-                <a:spcPct val="100000"/>
-              </a:lnSpc>
-              <a:spcBef>
-                <a:spcPts val="300"/>
-              </a:spcBef>
-              <a:spcAft>
-                <a:spcPts val="300"/>
-              </a:spcAft>
-              <a:buFont typeface="Arial" panose="020B0604020202020204" pitchFamily="34" charset="0"/>
-              <a:buNone/>
-              <a:defRPr sz="2700" b="1" kern="1200" baseline="0">
-                <a:solidFill>
-                  <a:schemeClr val="bg1"/>
-                </a:solidFill>
-                <a:latin typeface="+mn-lt"/>
-                <a:ea typeface="+mn-ea"/>
-                <a:cs typeface="+mn-cs"/>
-              </a:defRPr>
-            </a:lvl1pPr>
-            <a:lvl2pPr marL="342892" indent="0" algn="ctr" defTabSz="685783" rtl="0" eaLnBrk="1" latinLnBrk="0" hangingPunct="1">
-              <a:lnSpc>
-                <a:spcPct val="100000"/>
-              </a:lnSpc>
-              <a:spcBef>
-                <a:spcPts val="300"/>
-              </a:spcBef>
-              <a:spcAft>
-                <a:spcPts val="300"/>
-              </a:spcAft>
-              <a:buClr>
-                <a:schemeClr val="accent2"/>
-              </a:buClr>
-              <a:buFont typeface="Wingdings" pitchFamily="2" charset="2"/>
-              <a:buNone/>
-              <a:tabLst/>
-              <a:defRPr sz="1500" kern="1200">
-                <a:solidFill>
-                  <a:schemeClr val="tx1"/>
-                </a:solidFill>
-                <a:latin typeface="+mn-lt"/>
-                <a:ea typeface="+mn-ea"/>
-                <a:cs typeface="+mn-cs"/>
-              </a:defRPr>
-            </a:lvl2pPr>
-            <a:lvl3pPr marL="685783" indent="0" algn="ctr" defTabSz="685783" rtl="0" eaLnBrk="1" latinLnBrk="0" hangingPunct="1">
-              <a:lnSpc>
-                <a:spcPct val="90000"/>
-              </a:lnSpc>
-              <a:spcBef>
-                <a:spcPts val="300"/>
-              </a:spcBef>
-              <a:spcAft>
-                <a:spcPts val="300"/>
-              </a:spcAft>
-              <a:buClr>
-                <a:schemeClr val="accent2"/>
-              </a:buClr>
-              <a:buFont typeface="Wingdings" pitchFamily="2" charset="2"/>
-              <a:buNone/>
-              <a:tabLst/>
-              <a:defRPr lang="en-US" sz="1350" kern="1200" baseline="0">
-                <a:solidFill>
-                  <a:schemeClr val="tx1"/>
-                </a:solidFill>
-                <a:latin typeface="+mn-lt"/>
-                <a:ea typeface="+mn-ea"/>
-                <a:cs typeface="+mn-cs"/>
-              </a:defRPr>
-            </a:lvl3pPr>
-            <a:lvl4pPr marL="1028675" indent="0" algn="ctr" defTabSz="685783" rtl="0" eaLnBrk="1" latinLnBrk="0" hangingPunct="1">
-              <a:lnSpc>
-                <a:spcPct val="90000"/>
-              </a:lnSpc>
-              <a:spcBef>
-                <a:spcPts val="375"/>
-              </a:spcBef>
-              <a:buClr>
-                <a:schemeClr val="accent4"/>
-              </a:buClr>
-              <a:buFont typeface="Wingdings" pitchFamily="2" charset="2"/>
-              <a:buNone/>
-              <a:defRPr sz="1200" kern="1200">
-                <a:solidFill>
-                  <a:schemeClr val="tx1"/>
-                </a:solidFill>
-                <a:latin typeface="+mn-lt"/>
-                <a:ea typeface="+mn-ea"/>
-                <a:cs typeface="+mn-cs"/>
-              </a:defRPr>
-            </a:lvl4pPr>
-            <a:lvl5pPr marL="1371566" indent="0" algn="ctr" defTabSz="685783" rtl="0" eaLnBrk="1" latinLnBrk="0" hangingPunct="1">
-              <a:lnSpc>
-                <a:spcPct val="90000"/>
-              </a:lnSpc>
-              <a:spcBef>
-                <a:spcPts val="375"/>
-              </a:spcBef>
-              <a:buFont typeface="Arial" panose="020B0604020202020204" pitchFamily="34" charset="0"/>
-              <a:buNone/>
-              <a:defRPr sz="1200" kern="1200">
-                <a:solidFill>
-                  <a:schemeClr val="tx1"/>
-                </a:solidFill>
-                <a:latin typeface="+mn-lt"/>
-                <a:ea typeface="+mn-ea"/>
-                <a:cs typeface="+mn-cs"/>
-              </a:defRPr>
-            </a:lvl5pPr>
-            <a:lvl6pPr marL="1714457" indent="0" algn="ctr" defTabSz="685783" rtl="0" eaLnBrk="1" latinLnBrk="0" hangingPunct="1">
-              <a:lnSpc>
-                <a:spcPct val="90000"/>
-              </a:lnSpc>
-              <a:spcBef>
-                <a:spcPts val="375"/>
-              </a:spcBef>
-              <a:buFont typeface="Arial" panose="020B0604020202020204" pitchFamily="34" charset="0"/>
-              <a:buNone/>
-              <a:defRPr sz="1200" kern="1200">
-                <a:solidFill>
-                  <a:schemeClr val="tx1"/>
-                </a:solidFill>
-                <a:latin typeface="+mn-lt"/>
-                <a:ea typeface="+mn-ea"/>
-                <a:cs typeface="+mn-cs"/>
-              </a:defRPr>
-            </a:lvl6pPr>
-            <a:lvl7pPr marL="2057348" indent="0" algn="ctr" defTabSz="685783" rtl="0" eaLnBrk="1" latinLnBrk="0" hangingPunct="1">
-              <a:lnSpc>
-                <a:spcPct val="90000"/>
-              </a:lnSpc>
-              <a:spcBef>
-                <a:spcPts val="375"/>
-              </a:spcBef>
-              <a:buFont typeface="Arial" panose="020B0604020202020204" pitchFamily="34" charset="0"/>
-              <a:buNone/>
-              <a:defRPr sz="1200" kern="1200">
-                <a:solidFill>
-                  <a:schemeClr val="tx1"/>
-                </a:solidFill>
-                <a:latin typeface="+mn-lt"/>
-                <a:ea typeface="+mn-ea"/>
-                <a:cs typeface="+mn-cs"/>
-              </a:defRPr>
-            </a:lvl7pPr>
-            <a:lvl8pPr marL="2400240" indent="0" algn="ctr" defTabSz="685783" rtl="0" eaLnBrk="1" latinLnBrk="0" hangingPunct="1">
-              <a:lnSpc>
-                <a:spcPct val="90000"/>
-              </a:lnSpc>
-              <a:spcBef>
-                <a:spcPts val="375"/>
-              </a:spcBef>
-              <a:buFont typeface="Arial" panose="020B0604020202020204" pitchFamily="34" charset="0"/>
-              <a:buNone/>
-              <a:defRPr sz="1200" kern="1200">
-                <a:solidFill>
-                  <a:schemeClr val="tx1"/>
-                </a:solidFill>
-                <a:latin typeface="+mn-lt"/>
-                <a:ea typeface="+mn-ea"/>
-                <a:cs typeface="+mn-cs"/>
-              </a:defRPr>
-            </a:lvl8pPr>
-            <a:lvl9pPr marL="2743132" indent="0" algn="ctr" defTabSz="685783" rtl="0" eaLnBrk="1" latinLnBrk="0" hangingPunct="1">
-              <a:lnSpc>
-                <a:spcPct val="90000"/>
-              </a:lnSpc>
-              <a:spcBef>
-                <a:spcPts val="375"/>
-              </a:spcBef>
-              <a:buFont typeface="Arial" panose="020B0604020202020204" pitchFamily="34" charset="0"/>
-              <a:buNone/>
-              <a:defRPr sz="1200" kern="1200">
-                <a:solidFill>
-                  <a:schemeClr val="tx1"/>
-                </a:solidFill>
-                <a:latin typeface="+mn-lt"/>
-                <a:ea typeface="+mn-ea"/>
-                <a:cs typeface="+mn-cs"/>
-              </a:defRPr>
-            </a:lvl9pPr>
-          </a:lstStyle>
-          <a:p>
-            <a:r>
-              <a:rPr lang="en-US" sz="800" b="0"/>
-              <a:t>Every task GCMC has ever logged, in one searchable table — search by code or name, filter by squad, campaign, work type, asset type, person, size or function, and sort any column. Click a row to open and edit it.</a:t>
-            </a:r>
-          </a:p>
-        </p:txBody>
-      </p:sp>
-      <p:pic>
-        <p:nvPicPr>
-          <p:cNvPr id="3" name="Picture 2">
-            <a:extLst>
-              <a:ext uri="{FF2B5EF4-FFF2-40B4-BE49-F238E27FC236}">
-                <a16:creationId xmlns:a16="http://schemas.microsoft.com/office/drawing/2014/main" id="{A5E608C9-0261-F32D-586E-49A97FA4AA02}"/>
-              </a:ext>
-            </a:extLst>
-          </p:cNvPr>
-          <p:cNvPicPr>
-            <a:picLocks noChangeAspect="1"/>
-          </p:cNvPicPr>
-          <p:nvPr/>
-        </p:nvPicPr>
-        <p:blipFill>
-          <a:blip r:embed="rId2"/>
-          <a:stretch>
-            <a:fillRect/>
-          </a:stretch>
-        </p:blipFill>
-        <p:spPr>
-          <a:xfrm>
-            <a:off x="2954909" y="1058869"/>
-            <a:ext cx="5860268" cy="3025762"/>
-          </a:xfrm>
-          <a:prstGeom prst="rect">
-            <a:avLst/>
-          </a:prstGeom>
-        </p:spPr>
-      </p:pic>
-    </p:spTree>
-    <p:extLst>
-      <p:ext uri="{BB962C8B-B14F-4D97-AF65-F5344CB8AC3E}">
-        <p14:creationId xmlns:p14="http://schemas.microsoft.com/office/powerpoint/2010/main" val="1986077195"/>
       </p:ext>
     </p:extLst>
   </p:cSld>
@@ -10345,7 +13656,7 @@
         <p:cNvPr id="1" name="">
           <a:extLst>
             <a:ext uri="{FF2B5EF4-FFF2-40B4-BE49-F238E27FC236}">
-              <a16:creationId xmlns:a16="http://schemas.microsoft.com/office/drawing/2014/main" id="{794B6CFF-D754-C3A4-3A05-FCEC70BA60AE}"/>
+              <a16:creationId xmlns:a16="http://schemas.microsoft.com/office/drawing/2014/main" id="{7CCA6D02-E099-CF89-80C5-6B03E328749D}"/>
             </a:ext>
           </a:extLst>
         </p:cNvPr>
@@ -10362,453 +13673,41 @@
       </p:grpSpPr>
       <p:sp>
         <p:nvSpPr>
-          <p:cNvPr id="8" name="Subtitle 2">
-            <a:extLst>
-              <a:ext uri="{FF2B5EF4-FFF2-40B4-BE49-F238E27FC236}">
-                <a16:creationId xmlns:a16="http://schemas.microsoft.com/office/drawing/2014/main" id="{80995274-FD6E-1F46-56A4-2345DDBAB2A3}"/>
-              </a:ext>
-            </a:extLst>
-          </p:cNvPr>
-          <p:cNvSpPr txBox="1">
-            <a:spLocks/>
+          <p:cNvPr id="3" name="Subtitle 2">
+            <a:extLst>
+              <a:ext uri="{FF2B5EF4-FFF2-40B4-BE49-F238E27FC236}">
+                <a16:creationId xmlns:a16="http://schemas.microsoft.com/office/drawing/2014/main" id="{E379C37F-7EB7-02FE-654F-341C9F4EABC2}"/>
+              </a:ext>
+            </a:extLst>
+          </p:cNvPr>
+          <p:cNvSpPr>
+            <a:spLocks noGrp="1"/>
           </p:cNvSpPr>
-          <p:nvPr/>
+          <p:nvPr>
+            <p:ph type="subTitle" idx="1"/>
+          </p:nvPr>
         </p:nvSpPr>
         <p:spPr>
           <a:xfrm>
-            <a:off x="419708" y="1429260"/>
-            <a:ext cx="2174846" cy="613562"/>
-          </a:xfrm>
-          <a:prstGeom prst="rect">
-            <a:avLst/>
-          </a:prstGeom>
+            <a:off x="419708" y="593146"/>
+            <a:ext cx="2922582" cy="613562"/>
+          </a:xfrm>
         </p:spPr>
         <p:txBody>
-          <a:bodyPr vert="horz" lIns="91440" tIns="45720" rIns="91440" bIns="45720" rtlCol="0" anchor="t" anchorCtr="0">
-            <a:noAutofit/>
-          </a:bodyPr>
-          <a:lstStyle>
-            <a:lvl1pPr marL="0" indent="0" algn="l" defTabSz="685783" rtl="0" eaLnBrk="1" latinLnBrk="0" hangingPunct="1">
-              <a:lnSpc>
-                <a:spcPct val="100000"/>
-              </a:lnSpc>
-              <a:spcBef>
-                <a:spcPts val="300"/>
-              </a:spcBef>
-              <a:spcAft>
-                <a:spcPts val="300"/>
-              </a:spcAft>
-              <a:buFont typeface="Arial" panose="020B0604020202020204" pitchFamily="34" charset="0"/>
-              <a:buNone/>
-              <a:defRPr sz="2700" b="1" kern="1200" baseline="0">
-                <a:solidFill>
-                  <a:schemeClr val="bg1"/>
-                </a:solidFill>
-                <a:latin typeface="+mn-lt"/>
-                <a:ea typeface="+mn-ea"/>
-                <a:cs typeface="+mn-cs"/>
-              </a:defRPr>
-            </a:lvl1pPr>
-            <a:lvl2pPr marL="342892" indent="0" algn="ctr" defTabSz="685783" rtl="0" eaLnBrk="1" latinLnBrk="0" hangingPunct="1">
-              <a:lnSpc>
-                <a:spcPct val="100000"/>
-              </a:lnSpc>
-              <a:spcBef>
-                <a:spcPts val="300"/>
-              </a:spcBef>
-              <a:spcAft>
-                <a:spcPts val="300"/>
-              </a:spcAft>
-              <a:buClr>
-                <a:schemeClr val="accent2"/>
-              </a:buClr>
-              <a:buFont typeface="Wingdings" pitchFamily="2" charset="2"/>
-              <a:buNone/>
-              <a:tabLst/>
-              <a:defRPr sz="1500" kern="1200">
-                <a:solidFill>
-                  <a:schemeClr val="tx1"/>
-                </a:solidFill>
-                <a:latin typeface="+mn-lt"/>
-                <a:ea typeface="+mn-ea"/>
-                <a:cs typeface="+mn-cs"/>
-              </a:defRPr>
-            </a:lvl2pPr>
-            <a:lvl3pPr marL="685783" indent="0" algn="ctr" defTabSz="685783" rtl="0" eaLnBrk="1" latinLnBrk="0" hangingPunct="1">
-              <a:lnSpc>
-                <a:spcPct val="90000"/>
-              </a:lnSpc>
-              <a:spcBef>
-                <a:spcPts val="300"/>
-              </a:spcBef>
-              <a:spcAft>
-                <a:spcPts val="300"/>
-              </a:spcAft>
-              <a:buClr>
-                <a:schemeClr val="accent2"/>
-              </a:buClr>
-              <a:buFont typeface="Wingdings" pitchFamily="2" charset="2"/>
-              <a:buNone/>
-              <a:tabLst/>
-              <a:defRPr lang="en-US" sz="1350" kern="1200" baseline="0">
-                <a:solidFill>
-                  <a:schemeClr val="tx1"/>
-                </a:solidFill>
-                <a:latin typeface="+mn-lt"/>
-                <a:ea typeface="+mn-ea"/>
-                <a:cs typeface="+mn-cs"/>
-              </a:defRPr>
-            </a:lvl3pPr>
-            <a:lvl4pPr marL="1028675" indent="0" algn="ctr" defTabSz="685783" rtl="0" eaLnBrk="1" latinLnBrk="0" hangingPunct="1">
-              <a:lnSpc>
-                <a:spcPct val="90000"/>
-              </a:lnSpc>
-              <a:spcBef>
-                <a:spcPts val="375"/>
-              </a:spcBef>
-              <a:buClr>
-                <a:schemeClr val="accent4"/>
-              </a:buClr>
-              <a:buFont typeface="Wingdings" pitchFamily="2" charset="2"/>
-              <a:buNone/>
-              <a:defRPr sz="1200" kern="1200">
-                <a:solidFill>
-                  <a:schemeClr val="tx1"/>
-                </a:solidFill>
-                <a:latin typeface="+mn-lt"/>
-                <a:ea typeface="+mn-ea"/>
-                <a:cs typeface="+mn-cs"/>
-              </a:defRPr>
-            </a:lvl4pPr>
-            <a:lvl5pPr marL="1371566" indent="0" algn="ctr" defTabSz="685783" rtl="0" eaLnBrk="1" latinLnBrk="0" hangingPunct="1">
-              <a:lnSpc>
-                <a:spcPct val="90000"/>
-              </a:lnSpc>
-              <a:spcBef>
-                <a:spcPts val="375"/>
-              </a:spcBef>
-              <a:buFont typeface="Arial" panose="020B0604020202020204" pitchFamily="34" charset="0"/>
-              <a:buNone/>
-              <a:defRPr sz="1200" kern="1200">
-                <a:solidFill>
-                  <a:schemeClr val="tx1"/>
-                </a:solidFill>
-                <a:latin typeface="+mn-lt"/>
-                <a:ea typeface="+mn-ea"/>
-                <a:cs typeface="+mn-cs"/>
-              </a:defRPr>
-            </a:lvl5pPr>
-            <a:lvl6pPr marL="1714457" indent="0" algn="ctr" defTabSz="685783" rtl="0" eaLnBrk="1" latinLnBrk="0" hangingPunct="1">
-              <a:lnSpc>
-                <a:spcPct val="90000"/>
-              </a:lnSpc>
-              <a:spcBef>
-                <a:spcPts val="375"/>
-              </a:spcBef>
-              <a:buFont typeface="Arial" panose="020B0604020202020204" pitchFamily="34" charset="0"/>
-              <a:buNone/>
-              <a:defRPr sz="1200" kern="1200">
-                <a:solidFill>
-                  <a:schemeClr val="tx1"/>
-                </a:solidFill>
-                <a:latin typeface="+mn-lt"/>
-                <a:ea typeface="+mn-ea"/>
-                <a:cs typeface="+mn-cs"/>
-              </a:defRPr>
-            </a:lvl6pPr>
-            <a:lvl7pPr marL="2057348" indent="0" algn="ctr" defTabSz="685783" rtl="0" eaLnBrk="1" latinLnBrk="0" hangingPunct="1">
-              <a:lnSpc>
-                <a:spcPct val="90000"/>
-              </a:lnSpc>
-              <a:spcBef>
-                <a:spcPts val="375"/>
-              </a:spcBef>
-              <a:buFont typeface="Arial" panose="020B0604020202020204" pitchFamily="34" charset="0"/>
-              <a:buNone/>
-              <a:defRPr sz="1200" kern="1200">
-                <a:solidFill>
-                  <a:schemeClr val="tx1"/>
-                </a:solidFill>
-                <a:latin typeface="+mn-lt"/>
-                <a:ea typeface="+mn-ea"/>
-                <a:cs typeface="+mn-cs"/>
-              </a:defRPr>
-            </a:lvl7pPr>
-            <a:lvl8pPr marL="2400240" indent="0" algn="ctr" defTabSz="685783" rtl="0" eaLnBrk="1" latinLnBrk="0" hangingPunct="1">
-              <a:lnSpc>
-                <a:spcPct val="90000"/>
-              </a:lnSpc>
-              <a:spcBef>
-                <a:spcPts val="375"/>
-              </a:spcBef>
-              <a:buFont typeface="Arial" panose="020B0604020202020204" pitchFamily="34" charset="0"/>
-              <a:buNone/>
-              <a:defRPr sz="1200" kern="1200">
-                <a:solidFill>
-                  <a:schemeClr val="tx1"/>
-                </a:solidFill>
-                <a:latin typeface="+mn-lt"/>
-                <a:ea typeface="+mn-ea"/>
-                <a:cs typeface="+mn-cs"/>
-              </a:defRPr>
-            </a:lvl8pPr>
-            <a:lvl9pPr marL="2743132" indent="0" algn="ctr" defTabSz="685783" rtl="0" eaLnBrk="1" latinLnBrk="0" hangingPunct="1">
-              <a:lnSpc>
-                <a:spcPct val="90000"/>
-              </a:lnSpc>
-              <a:spcBef>
-                <a:spcPts val="375"/>
-              </a:spcBef>
-              <a:buFont typeface="Arial" panose="020B0604020202020204" pitchFamily="34" charset="0"/>
-              <a:buNone/>
-              <a:defRPr sz="1200" kern="1200">
-                <a:solidFill>
-                  <a:schemeClr val="tx1"/>
-                </a:solidFill>
-                <a:latin typeface="+mn-lt"/>
-                <a:ea typeface="+mn-ea"/>
-                <a:cs typeface="+mn-cs"/>
-              </a:defRPr>
-            </a:lvl9pPr>
-          </a:lstStyle>
-          <a:p>
-            <a:r>
-              <a:rPr lang="en-US">
+          <a:bodyPr/>
+          <a:lstStyle/>
+          <a:p>
+            <a:r>
+              <a:rPr lang="en-US" sz="1800">
                 <a:highlight>
                   <a:srgbClr val="000054"/>
                 </a:highlight>
               </a:rPr>
-              <a:t>Task List</a:t>
-            </a:r>
-          </a:p>
-          <a:p>
-            <a:endParaRPr lang="en-US">
+              <a:t>GCMC Combined / standalone dashboard</a:t>
+            </a:r>
+            <a:endParaRPr lang="en-AU" sz="1800">
               <a:cs typeface="Arial" panose="020B0604020202020204"/>
             </a:endParaRPr>
-          </a:p>
-          <a:p>
-            <a:endParaRPr lang="en-AU">
-              <a:cs typeface="Arial" panose="020B0604020202020204"/>
-            </a:endParaRPr>
-          </a:p>
-        </p:txBody>
-      </p:sp>
-      <p:sp>
-        <p:nvSpPr>
-          <p:cNvPr id="11" name="Subtitle 2">
-            <a:extLst>
-              <a:ext uri="{FF2B5EF4-FFF2-40B4-BE49-F238E27FC236}">
-                <a16:creationId xmlns:a16="http://schemas.microsoft.com/office/drawing/2014/main" id="{5B574322-CF3B-0EEC-453D-17F780AD9FD5}"/>
-              </a:ext>
-            </a:extLst>
-          </p:cNvPr>
-          <p:cNvSpPr txBox="1">
-            <a:spLocks/>
-          </p:cNvSpPr>
-          <p:nvPr/>
-        </p:nvSpPr>
-        <p:spPr>
-          <a:xfrm>
-            <a:off x="387382" y="2042822"/>
-            <a:ext cx="2427889" cy="2600204"/>
-          </a:xfrm>
-          <a:prstGeom prst="rect">
-            <a:avLst/>
-          </a:prstGeom>
-        </p:spPr>
-        <p:txBody>
-          <a:bodyPr vert="horz" lIns="91440" tIns="45720" rIns="91440" bIns="45720" rtlCol="0" anchor="t" anchorCtr="0">
-            <a:noAutofit/>
-          </a:bodyPr>
-          <a:lstStyle>
-            <a:lvl1pPr marL="0" indent="0" algn="l" defTabSz="685783" rtl="0" eaLnBrk="1" latinLnBrk="0" hangingPunct="1">
-              <a:lnSpc>
-                <a:spcPct val="100000"/>
-              </a:lnSpc>
-              <a:spcBef>
-                <a:spcPts val="300"/>
-              </a:spcBef>
-              <a:spcAft>
-                <a:spcPts val="300"/>
-              </a:spcAft>
-              <a:buFont typeface="Arial" panose="020B0604020202020204" pitchFamily="34" charset="0"/>
-              <a:buNone/>
-              <a:defRPr sz="2700" b="1" kern="1200" baseline="0">
-                <a:solidFill>
-                  <a:schemeClr val="bg1"/>
-                </a:solidFill>
-                <a:latin typeface="+mn-lt"/>
-                <a:ea typeface="+mn-ea"/>
-                <a:cs typeface="+mn-cs"/>
-              </a:defRPr>
-            </a:lvl1pPr>
-            <a:lvl2pPr marL="342892" indent="0" algn="ctr" defTabSz="685783" rtl="0" eaLnBrk="1" latinLnBrk="0" hangingPunct="1">
-              <a:lnSpc>
-                <a:spcPct val="100000"/>
-              </a:lnSpc>
-              <a:spcBef>
-                <a:spcPts val="300"/>
-              </a:spcBef>
-              <a:spcAft>
-                <a:spcPts val="300"/>
-              </a:spcAft>
-              <a:buClr>
-                <a:schemeClr val="accent2"/>
-              </a:buClr>
-              <a:buFont typeface="Wingdings" pitchFamily="2" charset="2"/>
-              <a:buNone/>
-              <a:tabLst/>
-              <a:defRPr sz="1500" kern="1200">
-                <a:solidFill>
-                  <a:schemeClr val="tx1"/>
-                </a:solidFill>
-                <a:latin typeface="+mn-lt"/>
-                <a:ea typeface="+mn-ea"/>
-                <a:cs typeface="+mn-cs"/>
-              </a:defRPr>
-            </a:lvl2pPr>
-            <a:lvl3pPr marL="685783" indent="0" algn="ctr" defTabSz="685783" rtl="0" eaLnBrk="1" latinLnBrk="0" hangingPunct="1">
-              <a:lnSpc>
-                <a:spcPct val="90000"/>
-              </a:lnSpc>
-              <a:spcBef>
-                <a:spcPts val="300"/>
-              </a:spcBef>
-              <a:spcAft>
-                <a:spcPts val="300"/>
-              </a:spcAft>
-              <a:buClr>
-                <a:schemeClr val="accent2"/>
-              </a:buClr>
-              <a:buFont typeface="Wingdings" pitchFamily="2" charset="2"/>
-              <a:buNone/>
-              <a:tabLst/>
-              <a:defRPr lang="en-US" sz="1350" kern="1200" baseline="0">
-                <a:solidFill>
-                  <a:schemeClr val="tx1"/>
-                </a:solidFill>
-                <a:latin typeface="+mn-lt"/>
-                <a:ea typeface="+mn-ea"/>
-                <a:cs typeface="+mn-cs"/>
-              </a:defRPr>
-            </a:lvl3pPr>
-            <a:lvl4pPr marL="1028675" indent="0" algn="ctr" defTabSz="685783" rtl="0" eaLnBrk="1" latinLnBrk="0" hangingPunct="1">
-              <a:lnSpc>
-                <a:spcPct val="90000"/>
-              </a:lnSpc>
-              <a:spcBef>
-                <a:spcPts val="375"/>
-              </a:spcBef>
-              <a:buClr>
-                <a:schemeClr val="accent4"/>
-              </a:buClr>
-              <a:buFont typeface="Wingdings" pitchFamily="2" charset="2"/>
-              <a:buNone/>
-              <a:defRPr sz="1200" kern="1200">
-                <a:solidFill>
-                  <a:schemeClr val="tx1"/>
-                </a:solidFill>
-                <a:latin typeface="+mn-lt"/>
-                <a:ea typeface="+mn-ea"/>
-                <a:cs typeface="+mn-cs"/>
-              </a:defRPr>
-            </a:lvl4pPr>
-            <a:lvl5pPr marL="1371566" indent="0" algn="ctr" defTabSz="685783" rtl="0" eaLnBrk="1" latinLnBrk="0" hangingPunct="1">
-              <a:lnSpc>
-                <a:spcPct val="90000"/>
-              </a:lnSpc>
-              <a:spcBef>
-                <a:spcPts val="375"/>
-              </a:spcBef>
-              <a:buFont typeface="Arial" panose="020B0604020202020204" pitchFamily="34" charset="0"/>
-              <a:buNone/>
-              <a:defRPr sz="1200" kern="1200">
-                <a:solidFill>
-                  <a:schemeClr val="tx1"/>
-                </a:solidFill>
-                <a:latin typeface="+mn-lt"/>
-                <a:ea typeface="+mn-ea"/>
-                <a:cs typeface="+mn-cs"/>
-              </a:defRPr>
-            </a:lvl5pPr>
-            <a:lvl6pPr marL="1714457" indent="0" algn="ctr" defTabSz="685783" rtl="0" eaLnBrk="1" latinLnBrk="0" hangingPunct="1">
-              <a:lnSpc>
-                <a:spcPct val="90000"/>
-              </a:lnSpc>
-              <a:spcBef>
-                <a:spcPts val="375"/>
-              </a:spcBef>
-              <a:buFont typeface="Arial" panose="020B0604020202020204" pitchFamily="34" charset="0"/>
-              <a:buNone/>
-              <a:defRPr sz="1200" kern="1200">
-                <a:solidFill>
-                  <a:schemeClr val="tx1"/>
-                </a:solidFill>
-                <a:latin typeface="+mn-lt"/>
-                <a:ea typeface="+mn-ea"/>
-                <a:cs typeface="+mn-cs"/>
-              </a:defRPr>
-            </a:lvl6pPr>
-            <a:lvl7pPr marL="2057348" indent="0" algn="ctr" defTabSz="685783" rtl="0" eaLnBrk="1" latinLnBrk="0" hangingPunct="1">
-              <a:lnSpc>
-                <a:spcPct val="90000"/>
-              </a:lnSpc>
-              <a:spcBef>
-                <a:spcPts val="375"/>
-              </a:spcBef>
-              <a:buFont typeface="Arial" panose="020B0604020202020204" pitchFamily="34" charset="0"/>
-              <a:buNone/>
-              <a:defRPr sz="1200" kern="1200">
-                <a:solidFill>
-                  <a:schemeClr val="tx1"/>
-                </a:solidFill>
-                <a:latin typeface="+mn-lt"/>
-                <a:ea typeface="+mn-ea"/>
-                <a:cs typeface="+mn-cs"/>
-              </a:defRPr>
-            </a:lvl7pPr>
-            <a:lvl8pPr marL="2400240" indent="0" algn="ctr" defTabSz="685783" rtl="0" eaLnBrk="1" latinLnBrk="0" hangingPunct="1">
-              <a:lnSpc>
-                <a:spcPct val="90000"/>
-              </a:lnSpc>
-              <a:spcBef>
-                <a:spcPts val="375"/>
-              </a:spcBef>
-              <a:buFont typeface="Arial" panose="020B0604020202020204" pitchFamily="34" charset="0"/>
-              <a:buNone/>
-              <a:defRPr sz="1200" kern="1200">
-                <a:solidFill>
-                  <a:schemeClr val="tx1"/>
-                </a:solidFill>
-                <a:latin typeface="+mn-lt"/>
-                <a:ea typeface="+mn-ea"/>
-                <a:cs typeface="+mn-cs"/>
-              </a:defRPr>
-            </a:lvl8pPr>
-            <a:lvl9pPr marL="2743132" indent="0" algn="ctr" defTabSz="685783" rtl="0" eaLnBrk="1" latinLnBrk="0" hangingPunct="1">
-              <a:lnSpc>
-                <a:spcPct val="90000"/>
-              </a:lnSpc>
-              <a:spcBef>
-                <a:spcPts val="375"/>
-              </a:spcBef>
-              <a:buFont typeface="Arial" panose="020B0604020202020204" pitchFamily="34" charset="0"/>
-              <a:buNone/>
-              <a:defRPr sz="1200" kern="1200">
-                <a:solidFill>
-                  <a:schemeClr val="tx1"/>
-                </a:solidFill>
-                <a:latin typeface="+mn-lt"/>
-                <a:ea typeface="+mn-ea"/>
-                <a:cs typeface="+mn-cs"/>
-              </a:defRPr>
-            </a:lvl9pPr>
-          </a:lstStyle>
-          <a:p>
-            <a:r>
-              <a:rPr lang="en-US" sz="800" b="0"/>
-              <a:t>Every task GCMC has ever logged, in one searchable table — search by code or name, filter by squad, campaign, work type, asset type, person, size or function, and sort any column. Click a row to open and edit it.</a:t>
-            </a:r>
           </a:p>
         </p:txBody>
       </p:sp>
@@ -10817,7 +13716,7 @@
           <p:cNvPr id="4" name="Picture 3">
             <a:extLst>
               <a:ext uri="{FF2B5EF4-FFF2-40B4-BE49-F238E27FC236}">
-                <a16:creationId xmlns:a16="http://schemas.microsoft.com/office/drawing/2014/main" id="{B661FC98-DABA-E020-ED17-A7CD72CC1B6F}"/>
+                <a16:creationId xmlns:a16="http://schemas.microsoft.com/office/drawing/2014/main" id="{A768D7E9-6D87-A82A-30A0-94D90083DF44}"/>
               </a:ext>
             </a:extLst>
           </p:cNvPr>
@@ -10834,18 +13733,566 @@
         </p:blipFill>
         <p:spPr>
           <a:xfrm>
-            <a:off x="3055577" y="986470"/>
-            <a:ext cx="5635585" cy="3238126"/>
+            <a:off x="3897427" y="1030556"/>
+            <a:ext cx="1872754" cy="1501577"/>
           </a:xfrm>
           <a:prstGeom prst="rect">
             <a:avLst/>
           </a:prstGeom>
         </p:spPr>
       </p:pic>
+      <p:pic>
+        <p:nvPicPr>
+          <p:cNvPr id="6" name="Picture 5">
+            <a:extLst>
+              <a:ext uri="{FF2B5EF4-FFF2-40B4-BE49-F238E27FC236}">
+                <a16:creationId xmlns:a16="http://schemas.microsoft.com/office/drawing/2014/main" id="{C6C59D07-7C80-108D-66BB-5DAC7E920A26}"/>
+              </a:ext>
+            </a:extLst>
+          </p:cNvPr>
+          <p:cNvPicPr>
+            <a:picLocks noChangeAspect="1"/>
+          </p:cNvPicPr>
+          <p:nvPr/>
+        </p:nvPicPr>
+        <p:blipFill>
+          <a:blip r:embed="rId3"/>
+          <a:stretch>
+            <a:fillRect/>
+          </a:stretch>
+        </p:blipFill>
+        <p:spPr>
+          <a:xfrm>
+            <a:off x="5922680" y="1098602"/>
+            <a:ext cx="2048497" cy="1998124"/>
+          </a:xfrm>
+          <a:prstGeom prst="rect">
+            <a:avLst/>
+          </a:prstGeom>
+        </p:spPr>
+      </p:pic>
+      <p:pic>
+        <p:nvPicPr>
+          <p:cNvPr id="8" name="Picture 7">
+            <a:extLst>
+              <a:ext uri="{FF2B5EF4-FFF2-40B4-BE49-F238E27FC236}">
+                <a16:creationId xmlns:a16="http://schemas.microsoft.com/office/drawing/2014/main" id="{269C5BE2-8CC8-6239-9E2C-4B45D9AE02D1}"/>
+              </a:ext>
+            </a:extLst>
+          </p:cNvPr>
+          <p:cNvPicPr>
+            <a:picLocks noChangeAspect="1"/>
+          </p:cNvPicPr>
+          <p:nvPr/>
+        </p:nvPicPr>
+        <p:blipFill>
+          <a:blip r:embed="rId4"/>
+          <a:stretch>
+            <a:fillRect/>
+          </a:stretch>
+        </p:blipFill>
+        <p:spPr>
+          <a:xfrm>
+            <a:off x="4072683" y="2611368"/>
+            <a:ext cx="1697498" cy="1637039"/>
+          </a:xfrm>
+          <a:prstGeom prst="rect">
+            <a:avLst/>
+          </a:prstGeom>
+        </p:spPr>
+      </p:pic>
+      <p:sp>
+        <p:nvSpPr>
+          <p:cNvPr id="12" name="Subtitle 2">
+            <a:extLst>
+              <a:ext uri="{FF2B5EF4-FFF2-40B4-BE49-F238E27FC236}">
+                <a16:creationId xmlns:a16="http://schemas.microsoft.com/office/drawing/2014/main" id="{D92E6225-8DC5-1097-7934-CD2DABE1F58A}"/>
+              </a:ext>
+            </a:extLst>
+          </p:cNvPr>
+          <p:cNvSpPr txBox="1">
+            <a:spLocks/>
+          </p:cNvSpPr>
+          <p:nvPr/>
+        </p:nvSpPr>
+        <p:spPr>
+          <a:xfrm>
+            <a:off x="419708" y="2135101"/>
+            <a:ext cx="2432394" cy="2600204"/>
+          </a:xfrm>
+          <a:prstGeom prst="rect">
+            <a:avLst/>
+          </a:prstGeom>
+        </p:spPr>
+        <p:txBody>
+          <a:bodyPr vert="horz" lIns="91440" tIns="45720" rIns="91440" bIns="45720" rtlCol="0" anchor="t" anchorCtr="0">
+            <a:noAutofit/>
+          </a:bodyPr>
+          <a:lstStyle>
+            <a:lvl1pPr marL="0" indent="0" algn="l" defTabSz="685783" rtl="0" eaLnBrk="1" latinLnBrk="0" hangingPunct="1">
+              <a:lnSpc>
+                <a:spcPct val="100000"/>
+              </a:lnSpc>
+              <a:spcBef>
+                <a:spcPts val="300"/>
+              </a:spcBef>
+              <a:spcAft>
+                <a:spcPts val="300"/>
+              </a:spcAft>
+              <a:buFont typeface="Arial" panose="020B0604020202020204" pitchFamily="34" charset="0"/>
+              <a:buNone/>
+              <a:defRPr sz="2700" b="1" kern="1200" baseline="0">
+                <a:solidFill>
+                  <a:schemeClr val="bg1"/>
+                </a:solidFill>
+                <a:latin typeface="+mn-lt"/>
+                <a:ea typeface="+mn-ea"/>
+                <a:cs typeface="+mn-cs"/>
+              </a:defRPr>
+            </a:lvl1pPr>
+            <a:lvl2pPr marL="342892" indent="0" algn="ctr" defTabSz="685783" rtl="0" eaLnBrk="1" latinLnBrk="0" hangingPunct="1">
+              <a:lnSpc>
+                <a:spcPct val="100000"/>
+              </a:lnSpc>
+              <a:spcBef>
+                <a:spcPts val="300"/>
+              </a:spcBef>
+              <a:spcAft>
+                <a:spcPts val="300"/>
+              </a:spcAft>
+              <a:buClr>
+                <a:schemeClr val="accent2"/>
+              </a:buClr>
+              <a:buFont typeface="Wingdings" pitchFamily="2" charset="2"/>
+              <a:buNone/>
+              <a:tabLst/>
+              <a:defRPr sz="1500" kern="1200">
+                <a:solidFill>
+                  <a:schemeClr val="tx1"/>
+                </a:solidFill>
+                <a:latin typeface="+mn-lt"/>
+                <a:ea typeface="+mn-ea"/>
+                <a:cs typeface="+mn-cs"/>
+              </a:defRPr>
+            </a:lvl2pPr>
+            <a:lvl3pPr marL="685783" indent="0" algn="ctr" defTabSz="685783" rtl="0" eaLnBrk="1" latinLnBrk="0" hangingPunct="1">
+              <a:lnSpc>
+                <a:spcPct val="90000"/>
+              </a:lnSpc>
+              <a:spcBef>
+                <a:spcPts val="300"/>
+              </a:spcBef>
+              <a:spcAft>
+                <a:spcPts val="300"/>
+              </a:spcAft>
+              <a:buClr>
+                <a:schemeClr val="accent2"/>
+              </a:buClr>
+              <a:buFont typeface="Wingdings" pitchFamily="2" charset="2"/>
+              <a:buNone/>
+              <a:tabLst/>
+              <a:defRPr lang="en-US" sz="1350" kern="1200" baseline="0">
+                <a:solidFill>
+                  <a:schemeClr val="tx1"/>
+                </a:solidFill>
+                <a:latin typeface="+mn-lt"/>
+                <a:ea typeface="+mn-ea"/>
+                <a:cs typeface="+mn-cs"/>
+              </a:defRPr>
+            </a:lvl3pPr>
+            <a:lvl4pPr marL="1028675" indent="0" algn="ctr" defTabSz="685783" rtl="0" eaLnBrk="1" latinLnBrk="0" hangingPunct="1">
+              <a:lnSpc>
+                <a:spcPct val="90000"/>
+              </a:lnSpc>
+              <a:spcBef>
+                <a:spcPts val="375"/>
+              </a:spcBef>
+              <a:buClr>
+                <a:schemeClr val="accent4"/>
+              </a:buClr>
+              <a:buFont typeface="Wingdings" pitchFamily="2" charset="2"/>
+              <a:buNone/>
+              <a:defRPr sz="1200" kern="1200">
+                <a:solidFill>
+                  <a:schemeClr val="tx1"/>
+                </a:solidFill>
+                <a:latin typeface="+mn-lt"/>
+                <a:ea typeface="+mn-ea"/>
+                <a:cs typeface="+mn-cs"/>
+              </a:defRPr>
+            </a:lvl4pPr>
+            <a:lvl5pPr marL="1371566" indent="0" algn="ctr" defTabSz="685783" rtl="0" eaLnBrk="1" latinLnBrk="0" hangingPunct="1">
+              <a:lnSpc>
+                <a:spcPct val="90000"/>
+              </a:lnSpc>
+              <a:spcBef>
+                <a:spcPts val="375"/>
+              </a:spcBef>
+              <a:buFont typeface="Arial" panose="020B0604020202020204" pitchFamily="34" charset="0"/>
+              <a:buNone/>
+              <a:defRPr sz="1200" kern="1200">
+                <a:solidFill>
+                  <a:schemeClr val="tx1"/>
+                </a:solidFill>
+                <a:latin typeface="+mn-lt"/>
+                <a:ea typeface="+mn-ea"/>
+                <a:cs typeface="+mn-cs"/>
+              </a:defRPr>
+            </a:lvl5pPr>
+            <a:lvl6pPr marL="1714457" indent="0" algn="ctr" defTabSz="685783" rtl="0" eaLnBrk="1" latinLnBrk="0" hangingPunct="1">
+              <a:lnSpc>
+                <a:spcPct val="90000"/>
+              </a:lnSpc>
+              <a:spcBef>
+                <a:spcPts val="375"/>
+              </a:spcBef>
+              <a:buFont typeface="Arial" panose="020B0604020202020204" pitchFamily="34" charset="0"/>
+              <a:buNone/>
+              <a:defRPr sz="1200" kern="1200">
+                <a:solidFill>
+                  <a:schemeClr val="tx1"/>
+                </a:solidFill>
+                <a:latin typeface="+mn-lt"/>
+                <a:ea typeface="+mn-ea"/>
+                <a:cs typeface="+mn-cs"/>
+              </a:defRPr>
+            </a:lvl6pPr>
+            <a:lvl7pPr marL="2057348" indent="0" algn="ctr" defTabSz="685783" rtl="0" eaLnBrk="1" latinLnBrk="0" hangingPunct="1">
+              <a:lnSpc>
+                <a:spcPct val="90000"/>
+              </a:lnSpc>
+              <a:spcBef>
+                <a:spcPts val="375"/>
+              </a:spcBef>
+              <a:buFont typeface="Arial" panose="020B0604020202020204" pitchFamily="34" charset="0"/>
+              <a:buNone/>
+              <a:defRPr sz="1200" kern="1200">
+                <a:solidFill>
+                  <a:schemeClr val="tx1"/>
+                </a:solidFill>
+                <a:latin typeface="+mn-lt"/>
+                <a:ea typeface="+mn-ea"/>
+                <a:cs typeface="+mn-cs"/>
+              </a:defRPr>
+            </a:lvl7pPr>
+            <a:lvl8pPr marL="2400240" indent="0" algn="ctr" defTabSz="685783" rtl="0" eaLnBrk="1" latinLnBrk="0" hangingPunct="1">
+              <a:lnSpc>
+                <a:spcPct val="90000"/>
+              </a:lnSpc>
+              <a:spcBef>
+                <a:spcPts val="375"/>
+              </a:spcBef>
+              <a:buFont typeface="Arial" panose="020B0604020202020204" pitchFamily="34" charset="0"/>
+              <a:buNone/>
+              <a:defRPr sz="1200" kern="1200">
+                <a:solidFill>
+                  <a:schemeClr val="tx1"/>
+                </a:solidFill>
+                <a:latin typeface="+mn-lt"/>
+                <a:ea typeface="+mn-ea"/>
+                <a:cs typeface="+mn-cs"/>
+              </a:defRPr>
+            </a:lvl8pPr>
+            <a:lvl9pPr marL="2743132" indent="0" algn="ctr" defTabSz="685783" rtl="0" eaLnBrk="1" latinLnBrk="0" hangingPunct="1">
+              <a:lnSpc>
+                <a:spcPct val="90000"/>
+              </a:lnSpc>
+              <a:spcBef>
+                <a:spcPts val="375"/>
+              </a:spcBef>
+              <a:buFont typeface="Arial" panose="020B0604020202020204" pitchFamily="34" charset="0"/>
+              <a:buNone/>
+              <a:defRPr sz="1200" kern="1200">
+                <a:solidFill>
+                  <a:schemeClr val="tx1"/>
+                </a:solidFill>
+                <a:latin typeface="+mn-lt"/>
+                <a:ea typeface="+mn-ea"/>
+                <a:cs typeface="+mn-cs"/>
+              </a:defRPr>
+            </a:lvl9pPr>
+          </a:lstStyle>
+          <a:p>
+            <a:pPr marL="171450" indent="-171450">
+              <a:buFont typeface="Arial" panose="020B0604020202020204" pitchFamily="34" charset="0"/>
+              <a:buChar char="•"/>
+            </a:pPr>
+            <a:r>
+              <a:rPr lang="en-US" sz="1000" b="0">
+                <a:latin typeface="Calibri" panose="020F0502020204030204" pitchFamily="34" charset="0"/>
+                <a:ea typeface="Calibri" panose="020F0502020204030204" pitchFamily="34" charset="0"/>
+                <a:cs typeface="Calibri" panose="020F0502020204030204" pitchFamily="34" charset="0"/>
+              </a:rPr>
+              <a:t>All GCMC (default) — the combined view across all four functions.</a:t>
+            </a:r>
+          </a:p>
+          <a:p>
+            <a:pPr marL="171450" indent="-171450">
+              <a:buFont typeface="Arial" panose="020B0604020202020204" pitchFamily="34" charset="0"/>
+              <a:buChar char="•"/>
+            </a:pPr>
+            <a:r>
+              <a:rPr lang="en-US" sz="1000" b="0">
+                <a:latin typeface="Calibri" panose="020F0502020204030204" pitchFamily="34" charset="0"/>
+                <a:ea typeface="Calibri" panose="020F0502020204030204" pitchFamily="34" charset="0"/>
+                <a:cs typeface="Calibri" panose="020F0502020204030204" pitchFamily="34" charset="0"/>
+              </a:rPr>
+              <a:t>Pick one function (e.g. Content) — a standalone view of just that team's workload.</a:t>
+            </a:r>
+          </a:p>
+          <a:p>
+            <a:pPr marL="171450" indent="-171450">
+              <a:buFont typeface="Arial" panose="020B0604020202020204" pitchFamily="34" charset="0"/>
+              <a:buChar char="•"/>
+            </a:pPr>
+            <a:r>
+              <a:rPr lang="en-US" sz="1000" b="0">
+                <a:latin typeface="Calibri" panose="020F0502020204030204" pitchFamily="34" charset="0"/>
+                <a:ea typeface="Calibri" panose="020F0502020204030204" pitchFamily="34" charset="0"/>
+                <a:cs typeface="Calibri" panose="020F0502020204030204" pitchFamily="34" charset="0"/>
+              </a:rPr>
+              <a:t>Pick several (e.g. VN Design + Melbourne Design) — combines just those functions, so related teams can be viewed together without pulling in everyone.</a:t>
+            </a:r>
+            <a:endParaRPr lang="en-AU" sz="1000" b="0">
+              <a:latin typeface="Calibri" panose="020F0502020204030204" pitchFamily="34" charset="0"/>
+              <a:ea typeface="Calibri" panose="020F0502020204030204" pitchFamily="34" charset="0"/>
+              <a:cs typeface="Calibri" panose="020F0502020204030204" pitchFamily="34" charset="0"/>
+            </a:endParaRPr>
+          </a:p>
+        </p:txBody>
+      </p:sp>
+      <p:sp>
+        <p:nvSpPr>
+          <p:cNvPr id="13" name="Subtitle 2">
+            <a:extLst>
+              <a:ext uri="{FF2B5EF4-FFF2-40B4-BE49-F238E27FC236}">
+                <a16:creationId xmlns:a16="http://schemas.microsoft.com/office/drawing/2014/main" id="{36CA189C-80C9-5A27-C78A-90586CE469FF}"/>
+              </a:ext>
+            </a:extLst>
+          </p:cNvPr>
+          <p:cNvSpPr txBox="1">
+            <a:spLocks/>
+          </p:cNvSpPr>
+          <p:nvPr/>
+        </p:nvSpPr>
+        <p:spPr>
+          <a:xfrm>
+            <a:off x="433633" y="1324779"/>
+            <a:ext cx="2836791" cy="810322"/>
+          </a:xfrm>
+          <a:prstGeom prst="rect">
+            <a:avLst/>
+          </a:prstGeom>
+        </p:spPr>
+        <p:txBody>
+          <a:bodyPr vert="horz" lIns="91440" tIns="45720" rIns="91440" bIns="45720" rtlCol="0" anchor="t" anchorCtr="0">
+            <a:noAutofit/>
+          </a:bodyPr>
+          <a:lstStyle>
+            <a:lvl1pPr marL="0" indent="0" algn="l" defTabSz="685783" rtl="0" eaLnBrk="1" latinLnBrk="0" hangingPunct="1">
+              <a:lnSpc>
+                <a:spcPct val="100000"/>
+              </a:lnSpc>
+              <a:spcBef>
+                <a:spcPts val="300"/>
+              </a:spcBef>
+              <a:spcAft>
+                <a:spcPts val="300"/>
+              </a:spcAft>
+              <a:buFont typeface="Arial" panose="020B0604020202020204" pitchFamily="34" charset="0"/>
+              <a:buNone/>
+              <a:defRPr sz="2700" b="1" kern="1200" baseline="0">
+                <a:solidFill>
+                  <a:schemeClr val="bg1"/>
+                </a:solidFill>
+                <a:latin typeface="+mn-lt"/>
+                <a:ea typeface="+mn-ea"/>
+                <a:cs typeface="+mn-cs"/>
+              </a:defRPr>
+            </a:lvl1pPr>
+            <a:lvl2pPr marL="342892" indent="0" algn="ctr" defTabSz="685783" rtl="0" eaLnBrk="1" latinLnBrk="0" hangingPunct="1">
+              <a:lnSpc>
+                <a:spcPct val="100000"/>
+              </a:lnSpc>
+              <a:spcBef>
+                <a:spcPts val="300"/>
+              </a:spcBef>
+              <a:spcAft>
+                <a:spcPts val="300"/>
+              </a:spcAft>
+              <a:buClr>
+                <a:schemeClr val="accent2"/>
+              </a:buClr>
+              <a:buFont typeface="Wingdings" pitchFamily="2" charset="2"/>
+              <a:buNone/>
+              <a:tabLst/>
+              <a:defRPr sz="1500" kern="1200">
+                <a:solidFill>
+                  <a:schemeClr val="tx1"/>
+                </a:solidFill>
+                <a:latin typeface="+mn-lt"/>
+                <a:ea typeface="+mn-ea"/>
+                <a:cs typeface="+mn-cs"/>
+              </a:defRPr>
+            </a:lvl2pPr>
+            <a:lvl3pPr marL="685783" indent="0" algn="ctr" defTabSz="685783" rtl="0" eaLnBrk="1" latinLnBrk="0" hangingPunct="1">
+              <a:lnSpc>
+                <a:spcPct val="90000"/>
+              </a:lnSpc>
+              <a:spcBef>
+                <a:spcPts val="300"/>
+              </a:spcBef>
+              <a:spcAft>
+                <a:spcPts val="300"/>
+              </a:spcAft>
+              <a:buClr>
+                <a:schemeClr val="accent2"/>
+              </a:buClr>
+              <a:buFont typeface="Wingdings" pitchFamily="2" charset="2"/>
+              <a:buNone/>
+              <a:tabLst/>
+              <a:defRPr lang="en-US" sz="1350" kern="1200" baseline="0">
+                <a:solidFill>
+                  <a:schemeClr val="tx1"/>
+                </a:solidFill>
+                <a:latin typeface="+mn-lt"/>
+                <a:ea typeface="+mn-ea"/>
+                <a:cs typeface="+mn-cs"/>
+              </a:defRPr>
+            </a:lvl3pPr>
+            <a:lvl4pPr marL="1028675" indent="0" algn="ctr" defTabSz="685783" rtl="0" eaLnBrk="1" latinLnBrk="0" hangingPunct="1">
+              <a:lnSpc>
+                <a:spcPct val="90000"/>
+              </a:lnSpc>
+              <a:spcBef>
+                <a:spcPts val="375"/>
+              </a:spcBef>
+              <a:buClr>
+                <a:schemeClr val="accent4"/>
+              </a:buClr>
+              <a:buFont typeface="Wingdings" pitchFamily="2" charset="2"/>
+              <a:buNone/>
+              <a:defRPr sz="1200" kern="1200">
+                <a:solidFill>
+                  <a:schemeClr val="tx1"/>
+                </a:solidFill>
+                <a:latin typeface="+mn-lt"/>
+                <a:ea typeface="+mn-ea"/>
+                <a:cs typeface="+mn-cs"/>
+              </a:defRPr>
+            </a:lvl4pPr>
+            <a:lvl5pPr marL="1371566" indent="0" algn="ctr" defTabSz="685783" rtl="0" eaLnBrk="1" latinLnBrk="0" hangingPunct="1">
+              <a:lnSpc>
+                <a:spcPct val="90000"/>
+              </a:lnSpc>
+              <a:spcBef>
+                <a:spcPts val="375"/>
+              </a:spcBef>
+              <a:buFont typeface="Arial" panose="020B0604020202020204" pitchFamily="34" charset="0"/>
+              <a:buNone/>
+              <a:defRPr sz="1200" kern="1200">
+                <a:solidFill>
+                  <a:schemeClr val="tx1"/>
+                </a:solidFill>
+                <a:latin typeface="+mn-lt"/>
+                <a:ea typeface="+mn-ea"/>
+                <a:cs typeface="+mn-cs"/>
+              </a:defRPr>
+            </a:lvl5pPr>
+            <a:lvl6pPr marL="1714457" indent="0" algn="ctr" defTabSz="685783" rtl="0" eaLnBrk="1" latinLnBrk="0" hangingPunct="1">
+              <a:lnSpc>
+                <a:spcPct val="90000"/>
+              </a:lnSpc>
+              <a:spcBef>
+                <a:spcPts val="375"/>
+              </a:spcBef>
+              <a:buFont typeface="Arial" panose="020B0604020202020204" pitchFamily="34" charset="0"/>
+              <a:buNone/>
+              <a:defRPr sz="1200" kern="1200">
+                <a:solidFill>
+                  <a:schemeClr val="tx1"/>
+                </a:solidFill>
+                <a:latin typeface="+mn-lt"/>
+                <a:ea typeface="+mn-ea"/>
+                <a:cs typeface="+mn-cs"/>
+              </a:defRPr>
+            </a:lvl6pPr>
+            <a:lvl7pPr marL="2057348" indent="0" algn="ctr" defTabSz="685783" rtl="0" eaLnBrk="1" latinLnBrk="0" hangingPunct="1">
+              <a:lnSpc>
+                <a:spcPct val="90000"/>
+              </a:lnSpc>
+              <a:spcBef>
+                <a:spcPts val="375"/>
+              </a:spcBef>
+              <a:buFont typeface="Arial" panose="020B0604020202020204" pitchFamily="34" charset="0"/>
+              <a:buNone/>
+              <a:defRPr sz="1200" kern="1200">
+                <a:solidFill>
+                  <a:schemeClr val="tx1"/>
+                </a:solidFill>
+                <a:latin typeface="+mn-lt"/>
+                <a:ea typeface="+mn-ea"/>
+                <a:cs typeface="+mn-cs"/>
+              </a:defRPr>
+            </a:lvl7pPr>
+            <a:lvl8pPr marL="2400240" indent="0" algn="ctr" defTabSz="685783" rtl="0" eaLnBrk="1" latinLnBrk="0" hangingPunct="1">
+              <a:lnSpc>
+                <a:spcPct val="90000"/>
+              </a:lnSpc>
+              <a:spcBef>
+                <a:spcPts val="375"/>
+              </a:spcBef>
+              <a:buFont typeface="Arial" panose="020B0604020202020204" pitchFamily="34" charset="0"/>
+              <a:buNone/>
+              <a:defRPr sz="1200" kern="1200">
+                <a:solidFill>
+                  <a:schemeClr val="tx1"/>
+                </a:solidFill>
+                <a:latin typeface="+mn-lt"/>
+                <a:ea typeface="+mn-ea"/>
+                <a:cs typeface="+mn-cs"/>
+              </a:defRPr>
+            </a:lvl8pPr>
+            <a:lvl9pPr marL="2743132" indent="0" algn="ctr" defTabSz="685783" rtl="0" eaLnBrk="1" latinLnBrk="0" hangingPunct="1">
+              <a:lnSpc>
+                <a:spcPct val="90000"/>
+              </a:lnSpc>
+              <a:spcBef>
+                <a:spcPts val="375"/>
+              </a:spcBef>
+              <a:buFont typeface="Arial" panose="020B0604020202020204" pitchFamily="34" charset="0"/>
+              <a:buNone/>
+              <a:defRPr sz="1200" kern="1200">
+                <a:solidFill>
+                  <a:schemeClr val="tx1"/>
+                </a:solidFill>
+                <a:latin typeface="+mn-lt"/>
+                <a:ea typeface="+mn-ea"/>
+                <a:cs typeface="+mn-cs"/>
+              </a:defRPr>
+            </a:lvl9pPr>
+          </a:lstStyle>
+          <a:p>
+            <a:r>
+              <a:rPr lang="en-US" sz="1000">
+                <a:latin typeface="Calibri" panose="020F0502020204030204" pitchFamily="34" charset="0"/>
+                <a:ea typeface="Calibri" panose="020F0502020204030204" pitchFamily="34" charset="0"/>
+                <a:cs typeface="Calibri" panose="020F0502020204030204" pitchFamily="34" charset="0"/>
+              </a:rPr>
+              <a:t>Every dashboard view can be filtered by function — narrow it down to see one team's numbers on their own, or combine any group of them together.</a:t>
+            </a:r>
+            <a:endParaRPr lang="en-AU" sz="1000">
+              <a:latin typeface="Calibri" panose="020F0502020204030204" pitchFamily="34" charset="0"/>
+              <a:ea typeface="Calibri" panose="020F0502020204030204" pitchFamily="34" charset="0"/>
+              <a:cs typeface="Calibri" panose="020F0502020204030204" pitchFamily="34" charset="0"/>
+            </a:endParaRPr>
+          </a:p>
+        </p:txBody>
+      </p:sp>
     </p:spTree>
     <p:extLst>
       <p:ext uri="{BB962C8B-B14F-4D97-AF65-F5344CB8AC3E}">
-        <p14:creationId xmlns:p14="http://schemas.microsoft.com/office/powerpoint/2010/main" val="309096946"/>
+        <p14:creationId xmlns:p14="http://schemas.microsoft.com/office/powerpoint/2010/main" val="3096693975"/>
       </p:ext>
     </p:extLst>
   </p:cSld>
@@ -10860,7 +14307,13 @@
   <p:cSld>
     <p:spTree>
       <p:nvGrpSpPr>
-        <p:cNvPr id="1" name=""/>
+        <p:cNvPr id="1" name="">
+          <a:extLst>
+            <a:ext uri="{FF2B5EF4-FFF2-40B4-BE49-F238E27FC236}">
+              <a16:creationId xmlns:a16="http://schemas.microsoft.com/office/drawing/2014/main" id="{36CD6097-1E0F-E1AF-F793-5360453DF5BD}"/>
+            </a:ext>
+          </a:extLst>
+        </p:cNvPr>
         <p:cNvGrpSpPr/>
         <p:nvPr/>
       </p:nvGrpSpPr>
@@ -10872,10 +14325,339 @@
           <a:chExt cx="0" cy="0"/>
         </a:xfrm>
       </p:grpSpPr>
+      <p:sp>
+        <p:nvSpPr>
+          <p:cNvPr id="11" name="Subtitle 2">
+            <a:extLst>
+              <a:ext uri="{FF2B5EF4-FFF2-40B4-BE49-F238E27FC236}">
+                <a16:creationId xmlns:a16="http://schemas.microsoft.com/office/drawing/2014/main" id="{162221DD-8FC1-4B8C-5756-3E25AB54E88F}"/>
+              </a:ext>
+            </a:extLst>
+          </p:cNvPr>
+          <p:cNvSpPr txBox="1">
+            <a:spLocks/>
+          </p:cNvSpPr>
+          <p:nvPr/>
+        </p:nvSpPr>
+        <p:spPr>
+          <a:xfrm>
+            <a:off x="387382" y="1460733"/>
+            <a:ext cx="2391853" cy="2600204"/>
+          </a:xfrm>
+          <a:prstGeom prst="rect">
+            <a:avLst/>
+          </a:prstGeom>
+        </p:spPr>
+        <p:txBody>
+          <a:bodyPr vert="horz" lIns="91440" tIns="45720" rIns="91440" bIns="45720" rtlCol="0" anchor="t" anchorCtr="0">
+            <a:noAutofit/>
+          </a:bodyPr>
+          <a:lstStyle>
+            <a:lvl1pPr marL="0" indent="0" algn="l" defTabSz="685783" rtl="0" eaLnBrk="1" latinLnBrk="0" hangingPunct="1">
+              <a:lnSpc>
+                <a:spcPct val="100000"/>
+              </a:lnSpc>
+              <a:spcBef>
+                <a:spcPts val="300"/>
+              </a:spcBef>
+              <a:spcAft>
+                <a:spcPts val="300"/>
+              </a:spcAft>
+              <a:buFont typeface="Arial" panose="020B0604020202020204" pitchFamily="34" charset="0"/>
+              <a:buNone/>
+              <a:defRPr sz="2700" b="1" kern="1200" baseline="0">
+                <a:solidFill>
+                  <a:schemeClr val="bg1"/>
+                </a:solidFill>
+                <a:latin typeface="+mn-lt"/>
+                <a:ea typeface="+mn-ea"/>
+                <a:cs typeface="+mn-cs"/>
+              </a:defRPr>
+            </a:lvl1pPr>
+            <a:lvl2pPr marL="342892" indent="0" algn="ctr" defTabSz="685783" rtl="0" eaLnBrk="1" latinLnBrk="0" hangingPunct="1">
+              <a:lnSpc>
+                <a:spcPct val="100000"/>
+              </a:lnSpc>
+              <a:spcBef>
+                <a:spcPts val="300"/>
+              </a:spcBef>
+              <a:spcAft>
+                <a:spcPts val="300"/>
+              </a:spcAft>
+              <a:buClr>
+                <a:schemeClr val="accent2"/>
+              </a:buClr>
+              <a:buFont typeface="Wingdings" pitchFamily="2" charset="2"/>
+              <a:buNone/>
+              <a:tabLst/>
+              <a:defRPr sz="1500" kern="1200">
+                <a:solidFill>
+                  <a:schemeClr val="tx1"/>
+                </a:solidFill>
+                <a:latin typeface="+mn-lt"/>
+                <a:ea typeface="+mn-ea"/>
+                <a:cs typeface="+mn-cs"/>
+              </a:defRPr>
+            </a:lvl2pPr>
+            <a:lvl3pPr marL="685783" indent="0" algn="ctr" defTabSz="685783" rtl="0" eaLnBrk="1" latinLnBrk="0" hangingPunct="1">
+              <a:lnSpc>
+                <a:spcPct val="90000"/>
+              </a:lnSpc>
+              <a:spcBef>
+                <a:spcPts val="300"/>
+              </a:spcBef>
+              <a:spcAft>
+                <a:spcPts val="300"/>
+              </a:spcAft>
+              <a:buClr>
+                <a:schemeClr val="accent2"/>
+              </a:buClr>
+              <a:buFont typeface="Wingdings" pitchFamily="2" charset="2"/>
+              <a:buNone/>
+              <a:tabLst/>
+              <a:defRPr lang="en-US" sz="1350" kern="1200" baseline="0">
+                <a:solidFill>
+                  <a:schemeClr val="tx1"/>
+                </a:solidFill>
+                <a:latin typeface="+mn-lt"/>
+                <a:ea typeface="+mn-ea"/>
+                <a:cs typeface="+mn-cs"/>
+              </a:defRPr>
+            </a:lvl3pPr>
+            <a:lvl4pPr marL="1028675" indent="0" algn="ctr" defTabSz="685783" rtl="0" eaLnBrk="1" latinLnBrk="0" hangingPunct="1">
+              <a:lnSpc>
+                <a:spcPct val="90000"/>
+              </a:lnSpc>
+              <a:spcBef>
+                <a:spcPts val="375"/>
+              </a:spcBef>
+              <a:buClr>
+                <a:schemeClr val="accent4"/>
+              </a:buClr>
+              <a:buFont typeface="Wingdings" pitchFamily="2" charset="2"/>
+              <a:buNone/>
+              <a:defRPr sz="1200" kern="1200">
+                <a:solidFill>
+                  <a:schemeClr val="tx1"/>
+                </a:solidFill>
+                <a:latin typeface="+mn-lt"/>
+                <a:ea typeface="+mn-ea"/>
+                <a:cs typeface="+mn-cs"/>
+              </a:defRPr>
+            </a:lvl4pPr>
+            <a:lvl5pPr marL="1371566" indent="0" algn="ctr" defTabSz="685783" rtl="0" eaLnBrk="1" latinLnBrk="0" hangingPunct="1">
+              <a:lnSpc>
+                <a:spcPct val="90000"/>
+              </a:lnSpc>
+              <a:spcBef>
+                <a:spcPts val="375"/>
+              </a:spcBef>
+              <a:buFont typeface="Arial" panose="020B0604020202020204" pitchFamily="34" charset="0"/>
+              <a:buNone/>
+              <a:defRPr sz="1200" kern="1200">
+                <a:solidFill>
+                  <a:schemeClr val="tx1"/>
+                </a:solidFill>
+                <a:latin typeface="+mn-lt"/>
+                <a:ea typeface="+mn-ea"/>
+                <a:cs typeface="+mn-cs"/>
+              </a:defRPr>
+            </a:lvl5pPr>
+            <a:lvl6pPr marL="1714457" indent="0" algn="ctr" defTabSz="685783" rtl="0" eaLnBrk="1" latinLnBrk="0" hangingPunct="1">
+              <a:lnSpc>
+                <a:spcPct val="90000"/>
+              </a:lnSpc>
+              <a:spcBef>
+                <a:spcPts val="375"/>
+              </a:spcBef>
+              <a:buFont typeface="Arial" panose="020B0604020202020204" pitchFamily="34" charset="0"/>
+              <a:buNone/>
+              <a:defRPr sz="1200" kern="1200">
+                <a:solidFill>
+                  <a:schemeClr val="tx1"/>
+                </a:solidFill>
+                <a:latin typeface="+mn-lt"/>
+                <a:ea typeface="+mn-ea"/>
+                <a:cs typeface="+mn-cs"/>
+              </a:defRPr>
+            </a:lvl6pPr>
+            <a:lvl7pPr marL="2057348" indent="0" algn="ctr" defTabSz="685783" rtl="0" eaLnBrk="1" latinLnBrk="0" hangingPunct="1">
+              <a:lnSpc>
+                <a:spcPct val="90000"/>
+              </a:lnSpc>
+              <a:spcBef>
+                <a:spcPts val="375"/>
+              </a:spcBef>
+              <a:buFont typeface="Arial" panose="020B0604020202020204" pitchFamily="34" charset="0"/>
+              <a:buNone/>
+              <a:defRPr sz="1200" kern="1200">
+                <a:solidFill>
+                  <a:schemeClr val="tx1"/>
+                </a:solidFill>
+                <a:latin typeface="+mn-lt"/>
+                <a:ea typeface="+mn-ea"/>
+                <a:cs typeface="+mn-cs"/>
+              </a:defRPr>
+            </a:lvl7pPr>
+            <a:lvl8pPr marL="2400240" indent="0" algn="ctr" defTabSz="685783" rtl="0" eaLnBrk="1" latinLnBrk="0" hangingPunct="1">
+              <a:lnSpc>
+                <a:spcPct val="90000"/>
+              </a:lnSpc>
+              <a:spcBef>
+                <a:spcPts val="375"/>
+              </a:spcBef>
+              <a:buFont typeface="Arial" panose="020B0604020202020204" pitchFamily="34" charset="0"/>
+              <a:buNone/>
+              <a:defRPr sz="1200" kern="1200">
+                <a:solidFill>
+                  <a:schemeClr val="tx1"/>
+                </a:solidFill>
+                <a:latin typeface="+mn-lt"/>
+                <a:ea typeface="+mn-ea"/>
+                <a:cs typeface="+mn-cs"/>
+              </a:defRPr>
+            </a:lvl8pPr>
+            <a:lvl9pPr marL="2743132" indent="0" algn="ctr" defTabSz="685783" rtl="0" eaLnBrk="1" latinLnBrk="0" hangingPunct="1">
+              <a:lnSpc>
+                <a:spcPct val="90000"/>
+              </a:lnSpc>
+              <a:spcBef>
+                <a:spcPts val="375"/>
+              </a:spcBef>
+              <a:buFont typeface="Arial" panose="020B0604020202020204" pitchFamily="34" charset="0"/>
+              <a:buNone/>
+              <a:defRPr sz="1200" kern="1200">
+                <a:solidFill>
+                  <a:schemeClr val="tx1"/>
+                </a:solidFill>
+                <a:latin typeface="+mn-lt"/>
+                <a:ea typeface="+mn-ea"/>
+                <a:cs typeface="+mn-cs"/>
+              </a:defRPr>
+            </a:lvl9pPr>
+          </a:lstStyle>
+          <a:p>
+            <a:r>
+              <a:rPr lang="en-US" sz="900"/>
+              <a:t>Controls the time window every chart on the dashboard reads from.</a:t>
+            </a:r>
+          </a:p>
+          <a:p>
+            <a:endParaRPr lang="en-US" sz="900" b="0"/>
+          </a:p>
+          <a:p>
+            <a:pPr marL="171450" indent="-171450">
+              <a:buFont typeface="Arial" panose="020B0604020202020204" pitchFamily="34" charset="0"/>
+              <a:buChar char="•"/>
+            </a:pPr>
+            <a:r>
+              <a:rPr lang="en-US" sz="800" b="0"/>
+              <a:t>Total — all tasks ever logged, no date filter.</a:t>
+            </a:r>
+          </a:p>
+          <a:p>
+            <a:pPr marL="171450" indent="-171450">
+              <a:buFont typeface="Arial" panose="020B0604020202020204" pitchFamily="34" charset="0"/>
+              <a:buChar char="•"/>
+            </a:pPr>
+            <a:r>
+              <a:rPr lang="en-US" sz="800" b="0"/>
+              <a:t>By year — one year at a time, picked from the dropdown (only years that actually have tasks appear).</a:t>
+            </a:r>
+          </a:p>
+          <a:p>
+            <a:pPr marL="171450" indent="-171450">
+              <a:buFont typeface="Arial" panose="020B0604020202020204" pitchFamily="34" charset="0"/>
+              <a:buChar char="•"/>
+            </a:pPr>
+            <a:r>
+              <a:rPr lang="en-US" sz="800" b="0"/>
+              <a:t>By half — narrows further to H1 or H2 of the selected year.</a:t>
+            </a:r>
+          </a:p>
+          <a:p>
+            <a:pPr marL="171450" indent="-171450">
+              <a:buFont typeface="Arial" panose="020B0604020202020204" pitchFamily="34" charset="0"/>
+              <a:buChar char="•"/>
+            </a:pPr>
+            <a:r>
+              <a:rPr lang="en-US" sz="800"/>
+              <a:t>Note: workload was only recorded from 2025 onward — anything before that isn't in the system, so year selection starts there.</a:t>
+            </a:r>
+          </a:p>
+        </p:txBody>
+      </p:sp>
+      <p:sp>
+        <p:nvSpPr>
+          <p:cNvPr id="12" name="Subtitle 2">
+            <a:extLst>
+              <a:ext uri="{FF2B5EF4-FFF2-40B4-BE49-F238E27FC236}">
+                <a16:creationId xmlns:a16="http://schemas.microsoft.com/office/drawing/2014/main" id="{A793D042-D78D-D023-2705-33C3DBFF5FB5}"/>
+              </a:ext>
+            </a:extLst>
+          </p:cNvPr>
+          <p:cNvSpPr>
+            <a:spLocks noGrp="1"/>
+          </p:cNvSpPr>
+          <p:nvPr>
+            <p:ph type="subTitle" idx="1"/>
+          </p:nvPr>
+        </p:nvSpPr>
+        <p:spPr>
+          <a:xfrm>
+            <a:off x="419708" y="404731"/>
+            <a:ext cx="2278448" cy="613562"/>
+          </a:xfrm>
+        </p:spPr>
+        <p:txBody>
+          <a:bodyPr/>
+          <a:lstStyle/>
+          <a:p>
+            <a:r>
+              <a:rPr lang="en-US">
+                <a:highlight>
+                  <a:srgbClr val="000054"/>
+                </a:highlight>
+              </a:rPr>
+              <a:t>Span selection</a:t>
+            </a:r>
+          </a:p>
+        </p:txBody>
+      </p:sp>
+      <p:pic>
+        <p:nvPicPr>
+          <p:cNvPr id="6" name="Picture 5">
+            <a:extLst>
+              <a:ext uri="{FF2B5EF4-FFF2-40B4-BE49-F238E27FC236}">
+                <a16:creationId xmlns:a16="http://schemas.microsoft.com/office/drawing/2014/main" id="{7C5E65F4-5F0D-9B01-3536-75DC7399A6EC}"/>
+              </a:ext>
+            </a:extLst>
+          </p:cNvPr>
+          <p:cNvPicPr>
+            <a:picLocks noChangeAspect="1"/>
+          </p:cNvPicPr>
+          <p:nvPr/>
+        </p:nvPicPr>
+        <p:blipFill>
+          <a:blip r:embed="rId2"/>
+          <a:stretch>
+            <a:fillRect/>
+          </a:stretch>
+        </p:blipFill>
+        <p:spPr>
+          <a:xfrm>
+            <a:off x="3411027" y="2009112"/>
+            <a:ext cx="4448037" cy="656813"/>
+          </a:xfrm>
+          <a:prstGeom prst="rect">
+            <a:avLst/>
+          </a:prstGeom>
+        </p:spPr>
+      </p:pic>
     </p:spTree>
     <p:extLst>
       <p:ext uri="{BB962C8B-B14F-4D97-AF65-F5344CB8AC3E}">
-        <p14:creationId xmlns:p14="http://schemas.microsoft.com/office/powerpoint/2010/main" val="141687919"/>
+        <p14:creationId xmlns:p14="http://schemas.microsoft.com/office/powerpoint/2010/main" val="387074659"/>
       </p:ext>
     </p:extLst>
   </p:cSld>
